--- a/downloads/presentations/modules/lesson-04-predictive-analytics-and-risk-stratification.pptx
+++ b/downloads/presentations/modules/lesson-04-predictive-analytics-and-risk-stratification.pptx
@@ -25,9 +25,11 @@
     <p:sldId id="273" r:id="rId19"/>
     <p:sldId id="274" r:id="rId20"/>
     <p:sldId id="275" r:id="rId21"/>
+    <p:sldId id="276" r:id="rId22"/>
+    <p:sldId id="277" r:id="rId23"/>
   </p:sldIdLst>
   <p:notesMasterIdLst>
-    <p:notesMasterId r:id="rId22"/>
+    <p:notesMasterId r:id="rId24"/>
   </p:notesMasterIdLst>
   <p:sldSz cx="12192000" cy="6858000"/>
   <p:notesSz cx="6858000" cy="12192000"/>
@@ -610,10 +612,10 @@
           <a:p>
             <a:r>
               <a:rPr lang="en-US" dirty="0"/>
-              <a:t>Risks, Failure Modes, and Guardrails
-Prediction used as decision. A risk score may be treated as a final decision rather than decision support. Guardrails include role-based guidance, human review, and documentation of final decisions.
-Equity distortion. Risk models may reflect unequal data availability or historical inequities. Guardrails include subgroup analysis, community review, and restrictions on punitive uses.
-Threshold harm. Poorly selected thresholds can create alert fatigue or missed risk. Guardrails include threshold review, scenario testing, and monitoring of false positives and false negatives.</a:t>
+              <a:t>Technical Deep Dive
+A predictive workflow begins with the outcome. The outcome must be specific, measurable, and aligned with a public health action. Predicting “risk” is not enough. Staff must define risk of what, during what time period, for which population, and for what purpose. A model predicting hospitalization within 30 days is different from one predicting delayed case investigation or low service uptake.
+Feature selection should be reviewed for both technical and ethical implications. Some features may improve prediction but create fairness, privacy, or interpretability concerns. Geography, insurance status, prior utilization, language, disability, housing instability, or justice involvement may reflect structural inequities. These features require careful review because they may be useful for supportive outreach but inappropriate for restrictive decisions.
+Calibration and discrimination answer different questions. Discrimination describes whether a model can separate higher-risk from lower-risk cases. Calibration describes whether predicted probabilities correspond to observed outcomes. A model can rank cases reasonably well while still overstating or understating absolute risk, which matters when decisions depend on risk categories or thresholds.</a:t>
             </a:r>
             <a:endParaRPr lang="en-US" dirty="0"/>
           </a:p>
@@ -701,8 +703,9 @@
           <a:p>
             <a:r>
               <a:rPr lang="en-US" dirty="0"/>
-              <a:t>Risks, Failure Modes, and Guardrails
-Model drift. Performance may change over time. Guardrails include periodic recalibration, drift monitoring, and authority to pause or modify use.</a:t>
+              <a:t>Technical Deep Dive
+Thresholds are policy and workflow decisions as much as technical decisions. A lower threshold may catch more true high-risk cases but create more false positives and burden staff. A higher threshold may conserve resources but miss people or places needing support. Threshold selection should consider staffing capacity, consequence severity, equity, and the availability of human review.
+Post-deployment monitoring is essential. A model that worked during development may degrade as disease patterns, reporting systems, access to care, community behavior, or program operations change. Monitoring should include performance, calibration, subgroup effects, workflow impact, user overrides, and community feedback.</a:t>
             </a:r>
             <a:endParaRPr lang="en-US" dirty="0"/>
           </a:p>
@@ -790,9 +793,10 @@
           <a:p>
             <a:r>
               <a:rPr lang="en-US" dirty="0"/>
-              <a:t>Application to AI-Supported Workflows
-Predictive analytics may be embedded in dashboards, case management systems, early warning tools, outreach lists, or agentic workflows. Generative AI may explain or summarize predictive outputs, but those explanations must not imply certainty that the model does not provide. RAG systems may combine risk results with policy guidance, while agentic workflows may trigger tasks or notifications based on thresholds.
-When prediction supports public health action, the workflow should make the score, its limitations, and the source data visible to users. Staff should know when a score is advisory, when it requires review, and when it cannot be used as the sole basis for action.</a:t>
+              <a:t>Risks, Failure Modes, and Guardrails
+Prediction used as decision. A risk score may be treated as a final decision rather than decision support. Guardrails include role-based guidance, human review, and documentation of final decisions.
+Equity distortion. Risk models may reflect unequal data availability or historical inequities. Guardrails include subgroup analysis, community review, and restrictions on punitive uses.
+Threshold harm. Poorly selected thresholds can create alert fatigue or missed risk. Guardrails include threshold review, scenario testing, and monitoring of false positives and false negatives.</a:t>
             </a:r>
             <a:endParaRPr lang="en-US" dirty="0"/>
           </a:p>
@@ -880,10 +884,8 @@
           <a:p>
             <a:r>
               <a:rPr lang="en-US" dirty="0"/>
-              <a:t>Reflection Questions
-What outcome is being predicted, and over what time period?
-What public health action will follow a high-risk score?
-Which data sources may underrepresent some populations?</a:t>
+              <a:t>Risks, Failure Modes, and Guardrails
+Model drift. Performance may change over time. Guardrails include periodic recalibration, drift monitoring, and authority to pause or modify use.</a:t>
             </a:r>
             <a:endParaRPr lang="en-US" dirty="0"/>
           </a:p>
@@ -971,9 +973,9 @@
           <a:p>
             <a:r>
               <a:rPr lang="en-US" dirty="0"/>
-              <a:t>Reflection Questions
-What are the consequences of false positives and false negatives?
-How will thresholds, calibration, and subgroup performance be monitored?</a:t>
+              <a:t>Application to AI-Supported Workflows
+Predictive analytics may be embedded in dashboards, case management systems, early warning tools, outreach lists, or agentic workflows. Generative AI may explain or summarize predictive outputs, but those explanations must not imply certainty that the model does not provide. RAG systems may combine risk results with policy guidance, while agentic workflows may trigger tasks or notifications based on thresholds.
+When prediction supports public health action, the workflow should make the score, its limitations, and the source data visible to users. Staff should know when a score is advisory, when it requires review, and when it cannot be used as the sole basis for action.</a:t>
             </a:r>
             <a:endParaRPr lang="en-US" dirty="0"/>
           </a:p>
@@ -1061,9 +1063,10 @@
           <a:p>
             <a:r>
               <a:rPr lang="en-US" dirty="0"/>
-              <a:t>Practical Exercise
-Create a predictive model review plan for one public health use case. Include the outcome, population, time horizon, data sources, candidate features, risk categories, thresholds, performance measures, subgroup evaluation plan, human review process, and monitoring indicators.
-The plan should also identify whether the use is supportive, restrictive, or consequential. Predictive tools used to allocate supportive resources have different risk profiles than tools used to deny, delay, or reduce services.</a:t>
+              <a:t>Reflection Questions
+What outcome is being predicted, and over what time period?
+What public health action will follow a high-risk score?
+Which data sources may underrepresent some populations?</a:t>
             </a:r>
             <a:endParaRPr lang="en-US" dirty="0"/>
           </a:p>
@@ -1151,10 +1154,9 @@
           <a:p>
             <a:r>
               <a:rPr lang="en-US" dirty="0"/>
-              <a:t>Expected Artifact or Evidence
-Predictive model review plan
-Risk score interpretation guide
-Threshold and error tradeoff memo</a:t>
+              <a:t>Reflection Questions
+What are the consequences of false positives and false negatives?
+How will thresholds, calibration, and subgroup performance be monitored?</a:t>
             </a:r>
             <a:endParaRPr lang="en-US" dirty="0"/>
           </a:p>
@@ -1242,8 +1244,9 @@
           <a:p>
             <a:r>
               <a:rPr lang="en-US" dirty="0"/>
-              <a:t>Expected Artifact or Evidence
-Subgroup monitoring plan</a:t>
+              <a:t>Practical Exercise
+Create a predictive model review plan for one public health use case. Include the outcome, population, time horizon, data sources, candidate features, risk categories, thresholds, performance measures, subgroup evaluation plan, human review process, and monitoring indicators.
+The plan should also identify whether the use is supportive, restrictive, or consequential. Predictive tools used to allocate supportive resources have different risk profiles than tools used to deny, delay, or reduce services.</a:t>
             </a:r>
             <a:endParaRPr lang="en-US" dirty="0"/>
           </a:p>
@@ -1331,11 +1334,10 @@
           <a:p>
             <a:r>
               <a:rPr lang="en-US" dirty="0"/>
-              <a:t>Expected Assignment
+              <a:t>Expected Artifact or Evidence
 Predictive model review plan
 Risk score interpretation guide
-Threshold and error tradeoff memo
-Subgroup monitoring plan</a:t>
+Threshold and error tradeoff memo</a:t>
             </a:r>
             <a:endParaRPr lang="en-US" dirty="0"/>
           </a:p>
@@ -1423,12 +1425,8 @@
           <a:p>
             <a:r>
               <a:rPr lang="en-US" dirty="0"/>
-              <a:t>Knowledge Check
-1. What is calibration?
-2. Why should thresholds be reviewed by public health staff?
-3. Which use of a risk score is most concerning without additional safeguards?
-4. What is a false negative in a predictive workflow?
-5. What should a predictive model review plan include?</a:t>
+              <a:t>Expected Artifact or Evidence
+Subgroup monitoring plan</a:t>
             </a:r>
             <a:endParaRPr lang="en-US" dirty="0"/>
           </a:p>
@@ -1608,11 +1606,11 @@
           <a:p>
             <a:r>
               <a:rPr lang="en-US" dirty="0"/>
-              <a:t>References and Resources
-NIST Artificial Intelligence Risk Management Framework: https://www.nist.gov/itl/ai-risk-management-framework
-NIST AI RMF Generative AI Profile: https://www.nist.gov/publications/artificial-intelligence-risk-management-framework-generative-artificial-intelligence
-CDC Evaluation Framework: https://www.cdc.gov/evaluation/
-CDC Public Health Data Strategy: https://www.cdc.gov/public-health-data-strategy/php/about/index.html</a:t>
+              <a:t>Expected Assignment
+Predictive model review plan
+Risk score interpretation guide
+Threshold and error tradeoff memo
+Subgroup monitoring plan</a:t>
             </a:r>
             <a:endParaRPr lang="en-US" dirty="0"/>
           </a:p>
@@ -1636,6 +1634,191 @@
             <a:fld id="{F7021451-1387-4CA6-816F-3879F97B5CBC}" type="slidenum">
               <a:rPr lang="en-US"/>
               <a:t>20</a:t>
+            </a:fld>
+            <a:endParaRPr lang="en-US"/>
+          </a:p>
+        </p:txBody>
+      </p:sp>
+    </p:spTree>
+    <p:extLst>
+      <p:ext uri="{BB962C8B-B14F-4D97-AF65-F5344CB8AC3E}">
+        <p14:creationId xmlns:p14="http://schemas.microsoft.com/office/powerpoint/2010/main" val="1024086991"/>
+      </p:ext>
+    </p:extLst>
+  </p:cSld>
+  <p:clrMapOvr>
+    <a:masterClrMapping/>
+  </p:clrMapOvr>
+</p:notes>
+</file>
+
+<file path=ppt/notesSlides/notesSlide21.xml><?xml version="1.0" encoding="utf-8"?>
+<p:notes xmlns:a="http://schemas.openxmlformats.org/drawingml/2006/main" xmlns:r="http://schemas.openxmlformats.org/officeDocument/2006/relationships" xmlns:p="http://schemas.openxmlformats.org/presentationml/2006/main">
+  <p:cSld>
+    <p:spTree>
+      <p:nvGrpSpPr>
+        <p:cNvPr id="1" name=""/>
+        <p:cNvGrpSpPr/>
+        <p:nvPr/>
+      </p:nvGrpSpPr>
+      <p:grpSpPr>
+        <a:xfrm>
+          <a:off x="0" y="0"/>
+          <a:ext cx="0" cy="0"/>
+          <a:chOff x="0" y="0"/>
+          <a:chExt cx="0" cy="0"/>
+        </a:xfrm>
+      </p:grpSpPr>
+      <p:sp>
+        <p:nvSpPr>
+          <p:cNvPr id="2" name="Slide Image Placeholder 1"/>
+          <p:cNvSpPr>
+            <a:spLocks noGrp="1" noRot="1" noChangeAspect="1"/>
+          </p:cNvSpPr>
+          <p:nvPr>
+            <p:ph type="sldImg"/>
+          </p:nvPr>
+        </p:nvSpPr>
+        <p:spPr/>
+      </p:sp>
+      <p:sp>
+        <p:nvSpPr>
+          <p:cNvPr id="3" name="Notes Placeholder 2"/>
+          <p:cNvSpPr>
+            <a:spLocks noGrp="1"/>
+          </p:cNvSpPr>
+          <p:nvPr>
+            <p:ph type="body" idx="1"/>
+          </p:nvPr>
+        </p:nvSpPr>
+        <p:spPr/>
+        <p:txBody>
+          <a:bodyPr/>
+          <a:lstStyle/>
+          <a:p>
+            <a:r>
+              <a:rPr lang="en-US" dirty="0"/>
+              <a:t>Knowledge Check
+1. What is calibration?
+2. Why should thresholds be reviewed by public health staff?
+3. Which use of a risk score is most concerning without additional safeguards?
+4. What is a false negative in a predictive workflow?
+5. What should a predictive model review plan include?</a:t>
+            </a:r>
+            <a:endParaRPr lang="en-US" dirty="0"/>
+          </a:p>
+        </p:txBody>
+      </p:sp>
+      <p:sp>
+        <p:nvSpPr>
+          <p:cNvPr id="4" name="Slide Number Placeholder 3"/>
+          <p:cNvSpPr>
+            <a:spLocks noGrp="1"/>
+          </p:cNvSpPr>
+          <p:nvPr>
+            <p:ph type="sldNum" sz="quarter" idx="10"/>
+          </p:nvPr>
+        </p:nvSpPr>
+        <p:spPr/>
+        <p:txBody>
+          <a:bodyPr/>
+          <a:lstStyle/>
+          <a:p>
+            <a:fld id="{F7021451-1387-4CA6-816F-3879F97B5CBC}" type="slidenum">
+              <a:rPr lang="en-US"/>
+              <a:t>21</a:t>
+            </a:fld>
+            <a:endParaRPr lang="en-US"/>
+          </a:p>
+        </p:txBody>
+      </p:sp>
+    </p:spTree>
+    <p:extLst>
+      <p:ext uri="{BB962C8B-B14F-4D97-AF65-F5344CB8AC3E}">
+        <p14:creationId xmlns:p14="http://schemas.microsoft.com/office/powerpoint/2010/main" val="1024086991"/>
+      </p:ext>
+    </p:extLst>
+  </p:cSld>
+  <p:clrMapOvr>
+    <a:masterClrMapping/>
+  </p:clrMapOvr>
+</p:notes>
+</file>
+
+<file path=ppt/notesSlides/notesSlide22.xml><?xml version="1.0" encoding="utf-8"?>
+<p:notes xmlns:a="http://schemas.openxmlformats.org/drawingml/2006/main" xmlns:r="http://schemas.openxmlformats.org/officeDocument/2006/relationships" xmlns:p="http://schemas.openxmlformats.org/presentationml/2006/main">
+  <p:cSld>
+    <p:spTree>
+      <p:nvGrpSpPr>
+        <p:cNvPr id="1" name=""/>
+        <p:cNvGrpSpPr/>
+        <p:nvPr/>
+      </p:nvGrpSpPr>
+      <p:grpSpPr>
+        <a:xfrm>
+          <a:off x="0" y="0"/>
+          <a:ext cx="0" cy="0"/>
+          <a:chOff x="0" y="0"/>
+          <a:chExt cx="0" cy="0"/>
+        </a:xfrm>
+      </p:grpSpPr>
+      <p:sp>
+        <p:nvSpPr>
+          <p:cNvPr id="2" name="Slide Image Placeholder 1"/>
+          <p:cNvSpPr>
+            <a:spLocks noGrp="1" noRot="1" noChangeAspect="1"/>
+          </p:cNvSpPr>
+          <p:nvPr>
+            <p:ph type="sldImg"/>
+          </p:nvPr>
+        </p:nvSpPr>
+        <p:spPr/>
+      </p:sp>
+      <p:sp>
+        <p:nvSpPr>
+          <p:cNvPr id="3" name="Notes Placeholder 2"/>
+          <p:cNvSpPr>
+            <a:spLocks noGrp="1"/>
+          </p:cNvSpPr>
+          <p:nvPr>
+            <p:ph type="body" idx="1"/>
+          </p:nvPr>
+        </p:nvSpPr>
+        <p:spPr/>
+        <p:txBody>
+          <a:bodyPr/>
+          <a:lstStyle/>
+          <a:p>
+            <a:r>
+              <a:rPr lang="en-US" dirty="0"/>
+              <a:t>References and Resources
+NIST Artificial Intelligence Risk Management Framework: https://www.nist.gov/itl/ai-risk-management-framework
+NIST AI RMF Generative AI Profile: https://www.nist.gov/publications/artificial-intelligence-risk-management-framework-generative-artificial-intelligence
+CDC Evaluation Framework: https://www.cdc.gov/evaluation/
+CDC Public Health Data Strategy: https://www.cdc.gov/public-health-data-strategy/php/about/index.html</a:t>
+            </a:r>
+            <a:endParaRPr lang="en-US" dirty="0"/>
+          </a:p>
+        </p:txBody>
+      </p:sp>
+      <p:sp>
+        <p:nvSpPr>
+          <p:cNvPr id="4" name="Slide Number Placeholder 3"/>
+          <p:cNvSpPr>
+            <a:spLocks noGrp="1"/>
+          </p:cNvSpPr>
+          <p:nvPr>
+            <p:ph type="sldNum" sz="quarter" idx="10"/>
+          </p:nvPr>
+        </p:nvSpPr>
+        <p:spPr/>
+        <p:txBody>
+          <a:bodyPr/>
+          <a:lstStyle/>
+          <a:p>
+            <a:fld id="{F7021451-1387-4CA6-816F-3879F97B5CBC}" type="slidenum">
+              <a:rPr lang="en-US"/>
+              <a:t>22</a:t>
             </a:fld>
             <a:endParaRPr lang="en-US"/>
           </a:p>
@@ -1700,12 +1883,11 @@
           <a:p>
             <a:r>
               <a:rPr lang="en-US" dirty="0"/>
-              <a:t>Learning Objectives
-Define predictive analytics and risk stratification in public health terms.
-Distinguish prediction from causation, diagnosis, and eligibility determination.
-Interpret basic risk categories, thresholds, calibration, and error tradeoffs.
-Identify equity and operational risks associated with risk scores.
-Design safeguards for use of predictive outputs in resource allocation, outreach, surveillance, or triage.</a:t>
+              <a:t>Related Playbook Plays
+Play 13: Monitor and Evaluate AI Systems - This lesson informs Play 13 by helping learners connect the lesson topic to monitor and evaluate ai systems work in the AI Playbook.
+Play 1: Vision &amp; Guardrails - This lesson informs Play 1 by helping learners connect the lesson topic to vision &amp; guardrails work in the AI Playbook sequence.
+Play 11: Build and Deploy AI Solutions - This lesson informs Play 11 by helping learners connect the lesson topic to build and deploy ai solutions work in the AI Playbook.
+Play 3: Establish AI Governance - This lesson informs Play 3 by helping learners connect the lesson topic to establish ai governance work in the AI Playbook sequence.</a:t>
             </a:r>
             <a:endParaRPr lang="en-US" dirty="0"/>
           </a:p>
@@ -1793,8 +1975,13 @@
           <a:p>
             <a:r>
               <a:rPr lang="en-US" dirty="0"/>
-              <a:t>Learning Objectives
-Produce a predictive model review plan for a public health workflow.</a:t>
+              <a:t>Related Toolkit Resources
+Tool 44: Performance Monitoring Dashboard (Dashboard) - Use this tool to complete or strengthen the practical exercise for the module using fictional, de-identified, or generalized.
+Tool 45: Continuous Improvement Log (Log) - Use Continuous Improvement Log to translate this lesson into a documented public health AI planning, governance, implementation,.
+Tool 48: AI Evaluation &amp; Outcomes Reporting (Template) - Use this tool to complete or strengthen the practical exercise for the module using fictional, de-identified, or generalized.
+Tool 1: AI Vision &amp; Principles Workshop (Workshop) - Use AI Vision &amp; Principles Workshop to translate this lesson into a documented public health AI planning, governance,.
+Tool 3: Equity Impact Assessment Checklist (Checklist) - Use this tool to complete or strengthen the practical exercise for the module using fictional, de-identified, or generalized.
+Tool 4: AI Policy Landscape Scan (Worksheet) - Use AI Policy Landscape Scan to translate this lesson into a documented public health AI planning, governance, implementation,.</a:t>
             </a:r>
             <a:endParaRPr lang="en-US" dirty="0"/>
           </a:p>
@@ -1882,10 +2069,12 @@
           <a:p>
             <a:r>
               <a:rPr lang="en-US" dirty="0"/>
-              <a:t>Module Overview
-Predictive analytics uses data to estimate the likelihood of future events or outcomes. In public health, predictive models may be used to anticipate disease burden, identify populations at higher risk, prioritize outreach, allocate limited resources, or support early intervention. Risk stratification is the practice of grouping individuals, facilities, areas, events, or populations into categories based on estimated risk.
-This module helps learners distinguish prediction from diagnosis, causation, eligibility determination, and public health judgment. A risk score can support planning or triage, but it should not automatically become a decision without validation, review, and governance. Public health staff need to know how predictive models are created, what performance measures mean, and how errors affect equity, trust, and operations.
-By the end of this module, learners should be able to review a predictive AI proposal, identify the data and outcome being predicted, assess the consequences of false positives and false negatives, and design appropriate human review and monitoring processes.</a:t>
+              <a:t>Learning Objectives
+Define predictive analytics and risk stratification in public health terms.
+Distinguish prediction from causation, diagnosis, and eligibility determination.
+Interpret basic risk categories, thresholds, calibration, and error tradeoffs.
+Identify equity and operational risks associated with risk scores.
+Design safeguards for use of predictive outputs in resource allocation, outreach, surveillance, or triage.</a:t>
             </a:r>
             <a:endParaRPr lang="en-US" dirty="0"/>
           </a:p>
@@ -1973,10 +2162,8 @@
           <a:p>
             <a:r>
               <a:rPr lang="en-US" dirty="0"/>
-              <a:t>Why This Topic Matters for Public Health AI
-Predictive analytics matters because public health agencies often must act before all information is available. During outbreaks, emergencies, or resource-constrained programs, agencies may need to decide where to send staff, which facilities need follow-up, which communities may need outreach, or which reports require expedited review. Prediction can help organize uncertainty, but it cannot remove uncertainty.
-Risk stratification can also create harm if used carelessly. A model may assign lower risk to groups with incomplete data, limited healthcare access, or fewer documented encounters. It may assign higher risk based on factors that reflect social vulnerability without ensuring supportive intervention. If a score is used to deny services, delay review, or reduce attention, the tool may worsen inequities.
-The responsible use of prediction requires a clear purpose, well-defined outcome, appropriate data, subgroup evaluation, calibrated scores, human review, and transparency about limitations. Public health staff should ask who benefits from the prediction, who could be harmed, and whether the intended action is supportive, punitive, or resource-constraining.</a:t>
+              <a:t>Learning Objectives
+Produce a predictive model review plan for a public health workflow.</a:t>
             </a:r>
             <a:endParaRPr lang="en-US" dirty="0"/>
           </a:p>
@@ -2064,9 +2251,10 @@
           <a:p>
             <a:r>
               <a:rPr lang="en-US" dirty="0"/>
-              <a:t>Public Health Example
-A local health department may want to predict which neighborhoods are at increased risk of low vaccination coverage before school entry. The model could use prior immunization data, school enrollment patterns, appointment availability, language access indicators, transportation barriers, and historical outreach response. The output might help prioritize community outreach and mobile clinics.
-This use can support equity if it directs resources toward communities facing access barriers. It can create harm if the score stigmatizes neighborhoods, ignores missing data, or shifts responsibility away from system-level barriers. The model should be evaluated for calibration, data completeness, community context, and whether the intervention is supportive and accessible.</a:t>
+              <a:t>Module Overview
+Predictive analytics uses data to estimate the likelihood of future events or outcomes. In public health, predictive models may be used to anticipate disease burden, identify populations at higher risk, prioritize outreach, allocate limited resources, or support early intervention. Risk stratification is the practice of grouping individuals, facilities, areas, events, or populations into categories based on estimated risk.
+This module helps learners distinguish prediction from diagnosis, causation, eligibility determination, and public health judgment. A risk score can support planning or triage, but it should not automatically become a decision without validation, review, and governance. Public health staff need to know how predictive models are created, what performance measures mean, and how errors affect equity, trust, and operations.
+By the end of this module, learners should be able to review a predictive AI proposal, identify the data and outcome being predicted, assess the consequences of false positives and false negatives, and design appropriate human review and monitoring processes.</a:t>
             </a:r>
             <a:endParaRPr lang="en-US" dirty="0"/>
           </a:p>
@@ -2154,10 +2342,10 @@
           <a:p>
             <a:r>
               <a:rPr lang="en-US" dirty="0"/>
-              <a:t>Technical Deep Dive
-A predictive workflow begins with the outcome. The outcome must be specific, measurable, and aligned with a public health action. Predicting “risk” is not enough. Staff must define risk of what, during what time period, for which population, and for what purpose. A model predicting hospitalization within 30 days is different from one predicting delayed case investigation or low service uptake.
-Feature selection should be reviewed for both technical and ethical implications. Some features may improve prediction but create fairness, privacy, or interpretability concerns. Geography, insurance status, prior utilization, language, disability, housing instability, or justice involvement may reflect structural inequities. These features require careful review because they may be useful for supportive outreach but inappropriate for restrictive decisions.
-Calibration and discrimination answer different questions. Discrimination describes whether a model can separate higher-risk from lower-risk cases. Calibration describes whether predicted probabilities correspond to observed outcomes. A model can rank cases reasonably well while still overstating or understating absolute risk, which matters when decisions depend on risk categories or thresholds.</a:t>
+              <a:t>Why This Topic Matters for Public Health AI
+Predictive analytics matters because public health agencies often must act before all information is available. During outbreaks, emergencies, or resource-constrained programs, agencies may need to decide where to send staff, which facilities need follow-up, which communities may need outreach, or which reports require expedited review. Prediction can help organize uncertainty, but it cannot remove uncertainty.
+Risk stratification can also create harm if used carelessly. A model may assign lower risk to groups with incomplete data, limited healthcare access, or fewer documented encounters. It may assign higher risk based on factors that reflect social vulnerability without ensuring supportive intervention. If a score is used to deny services, delay review, or reduce attention, the tool may worsen inequities.
+The responsible use of prediction requires a clear purpose, well-defined outcome, appropriate data, subgroup evaluation, calibrated scores, human review, and transparency about limitations. Public health staff should ask who benefits from the prediction, who could be harmed, and whether the intended action is supportive, punitive, or resource-constraining.</a:t>
             </a:r>
             <a:endParaRPr lang="en-US" dirty="0"/>
           </a:p>
@@ -2245,9 +2433,9 @@
           <a:p>
             <a:r>
               <a:rPr lang="en-US" dirty="0"/>
-              <a:t>Technical Deep Dive
-Thresholds are policy and workflow decisions as much as technical decisions. A lower threshold may catch more true high-risk cases but create more false positives and burden staff. A higher threshold may conserve resources but miss people or places needing support. Threshold selection should consider staffing capacity, consequence severity, equity, and the availability of human review.
-Post-deployment monitoring is essential. A model that worked during development may degrade as disease patterns, reporting systems, access to care, community behavior, or program operations change. Monitoring should include performance, calibration, subgroup effects, workflow impact, user overrides, and community feedback.</a:t>
+              <a:t>Public Health Example
+A local health department may want to predict which neighborhoods are at increased risk of low vaccination coverage before school entry. The model could use prior immunization data, school enrollment patterns, appointment availability, language access indicators, transportation barriers, and historical outreach response. The output might help prioritize community outreach and mobile clinics.
+This use can support equity if it directs resources toward communities facing access barriers. It can create harm if the score stigmatizes neighborhoods, ignores missing data, or shifts responsibility away from system-level barriers. The model should be evaluated for calibration, data completeness, community context, and whether the intervention is supportive and accessible.</a:t>
             </a:r>
             <a:endParaRPr lang="en-US" dirty="0"/>
           </a:p>
@@ -2870,7 +3058,32 @@
       </p:sp>
       <p:sp>
         <p:nvSpPr>
-          <p:cNvPr id="3" name="Text 1"/>
+          <p:cNvPr id="3" name="Shape 1"/>
+          <p:cNvSpPr/>
+          <p:nvPr/>
+        </p:nvSpPr>
+        <p:spPr>
+          <a:xfrm>
+            <a:off x="0" y="164592"/>
+            <a:ext cx="146304" cy="6693408"/>
+          </a:xfrm>
+          <a:prstGeom prst="rect">
+            <a:avLst/>
+          </a:prstGeom>
+          <a:solidFill>
+            <a:srgbClr val="2F8A28"/>
+          </a:solidFill>
+          <a:ln w="12700">
+            <a:solidFill>
+              <a:srgbClr val="2F8A28"/>
+            </a:solidFill>
+            <a:prstDash val="solid"/>
+          </a:ln>
+        </p:spPr>
+      </p:sp>
+      <p:sp>
+        <p:nvSpPr>
+          <p:cNvPr id="4" name="Text 2"/>
           <p:cNvSpPr/>
           <p:nvPr/>
         </p:nvSpPr>
@@ -2909,7 +3122,7 @@
       </p:sp>
       <p:sp>
         <p:nvSpPr>
-          <p:cNvPr id="4" name="Text 2"/>
+          <p:cNvPr id="5" name="Text 3"/>
           <p:cNvSpPr/>
           <p:nvPr/>
         </p:nvSpPr>
@@ -2948,7 +3161,7 @@
       </p:sp>
       <p:sp>
         <p:nvSpPr>
-          <p:cNvPr id="5" name="Text 3"/>
+          <p:cNvPr id="6" name="Text 4"/>
           <p:cNvSpPr/>
           <p:nvPr/>
         </p:nvSpPr>
@@ -2987,13 +3200,77 @@
       </p:sp>
       <p:sp>
         <p:nvSpPr>
-          <p:cNvPr id="6" name="Text 4"/>
+          <p:cNvPr id="7" name="Shape 5"/>
           <p:cNvSpPr/>
           <p:nvPr/>
         </p:nvSpPr>
         <p:spPr>
           <a:xfrm>
             <a:off x="640080" y="658368"/>
+            <a:ext cx="420624" cy="420624"/>
+          </a:xfrm>
+          <a:prstGeom prst="ellipse">
+            <a:avLst/>
+          </a:prstGeom>
+          <a:solidFill>
+            <a:srgbClr val="0068B7"/>
+          </a:solidFill>
+          <a:ln w="12700">
+            <a:solidFill>
+              <a:srgbClr val="0068B7"/>
+            </a:solidFill>
+            <a:prstDash val="solid"/>
+          </a:ln>
+        </p:spPr>
+      </p:sp>
+      <p:sp>
+        <p:nvSpPr>
+          <p:cNvPr id="8" name="Text 6"/>
+          <p:cNvSpPr/>
+          <p:nvPr/>
+        </p:nvSpPr>
+        <p:spPr>
+          <a:xfrm>
+            <a:off x="640080" y="731520"/>
+            <a:ext cx="420624" cy="164592"/>
+          </a:xfrm>
+          <a:prstGeom prst="rect">
+            <a:avLst/>
+          </a:prstGeom>
+          <a:noFill/>
+          <a:ln/>
+        </p:spPr>
+        <p:txBody>
+          <a:bodyPr wrap="square" lIns="0" tIns="0" rIns="0" bIns="0" rtlCol="0" anchor="ctr"/>
+          <a:lstStyle/>
+          <a:p>
+            <a:pPr algn="ctr" indent="0" marL="0">
+              <a:buNone/>
+            </a:pPr>
+            <a:r>
+              <a:rPr lang="en-US" sz="1100" b="1" dirty="0">
+                <a:solidFill>
+                  <a:srgbClr val="FFFFFF"/>
+                </a:solidFill>
+                <a:latin typeface="Aptos" pitchFamily="34" charset="0"/>
+                <a:ea typeface="Aptos" pitchFamily="34" charset="-122"/>
+                <a:cs typeface="Aptos" pitchFamily="34" charset="-120"/>
+              </a:rPr>
+              <a:t>5</a:t>
+            </a:r>
+            <a:endParaRPr lang="en-US" sz="1100" dirty="0"/>
+          </a:p>
+        </p:txBody>
+      </p:sp>
+      <p:sp>
+        <p:nvSpPr>
+          <p:cNvPr id="9" name="Text 7"/>
+          <p:cNvSpPr/>
+          <p:nvPr/>
+        </p:nvSpPr>
+        <p:spPr>
+          <a:xfrm>
+            <a:off x="640080" y="621792"/>
             <a:ext cx="10881360" cy="566928"/>
           </a:xfrm>
           <a:prstGeom prst="rect">
@@ -3020,7 +3297,7 @@
                 <a:ea typeface="Aptos Display" pitchFamily="34" charset="-122"/>
                 <a:cs typeface="Aptos Display" pitchFamily="34" charset="-120"/>
               </a:rPr>
-              <a:t>Risks, Failure Modes, and Guardrails</a:t>
+              <a:t>Technical Deep Dive</a:t>
             </a:r>
             <a:endParaRPr lang="en-US" sz="2700" dirty="0"/>
           </a:p>
@@ -3028,32 +3305,178 @@
       </p:sp>
       <p:sp>
         <p:nvSpPr>
-          <p:cNvPr id="7" name="Text 5"/>
-          <p:cNvSpPr/>
-          <p:nvPr/>
-        </p:nvSpPr>
-        <p:spPr>
-          <a:xfrm>
-            <a:off x="822960" y="1325880"/>
-            <a:ext cx="10378440" cy="4800600"/>
-          </a:xfrm>
-          <a:prstGeom prst="rect">
-            <a:avLst/>
-          </a:prstGeom>
-          <a:noFill/>
-          <a:ln/>
-        </p:spPr>
-        <p:txBody>
-          <a:bodyPr wrap="square" lIns="1016" tIns="1016" rIns="1016" bIns="1016" rtlCol="0" anchor="t">
+          <p:cNvPr id="10" name="Text 8"/>
+          <p:cNvSpPr/>
+          <p:nvPr/>
+        </p:nvSpPr>
+        <p:spPr>
+          <a:xfrm>
+            <a:off x="868680" y="1417320"/>
+            <a:ext cx="6675120" cy="4434840"/>
+          </a:xfrm>
+          <a:prstGeom prst="rect">
+            <a:avLst/>
+          </a:prstGeom>
+          <a:noFill/>
+          <a:ln/>
+        </p:spPr>
+        <p:txBody>
+          <a:bodyPr wrap="square" lIns="635" tIns="635" rIns="635" bIns="635" rtlCol="0" anchor="t">
             <a:normAutofit/>
           </a:bodyPr>
           <a:lstStyle/>
           <a:p>
+            <a:r>
+              <a:rPr lang="en-US" sz="1700" dirty="0">
+                <a:solidFill>
+                  <a:srgbClr val="17364A"/>
+                </a:solidFill>
+                <a:latin typeface="Aptos" pitchFamily="34" charset="0"/>
+                <a:ea typeface="Aptos" pitchFamily="34" charset="-122"/>
+                <a:cs typeface="Aptos" pitchFamily="34" charset="-120"/>
+              </a:rPr>
+              <a:t>A predictive workflow begins with the outcome.</a:t>
+            </a:r>
+            <a:endParaRPr lang="en-US" sz="1700" dirty="0"/>
+          </a:p>
+          <a:p>
+            <a:r>
+              <a:rPr lang="en-US" sz="1700" dirty="0">
+                <a:solidFill>
+                  <a:srgbClr val="17364A"/>
+                </a:solidFill>
+                <a:latin typeface="Aptos" pitchFamily="34" charset="0"/>
+                <a:ea typeface="Aptos" pitchFamily="34" charset="-122"/>
+                <a:cs typeface="Aptos" pitchFamily="34" charset="-120"/>
+              </a:rPr>
+              <a:t>The outcome must be specific, measurable, and aligned with a public health action.</a:t>
+            </a:r>
+            <a:endParaRPr lang="en-US" sz="1700" dirty="0"/>
+          </a:p>
+          <a:p>
+            <a:r>
+              <a:rPr lang="en-US" sz="1700" dirty="0">
+                <a:solidFill>
+                  <a:srgbClr val="17364A"/>
+                </a:solidFill>
+                <a:latin typeface="Aptos" pitchFamily="34" charset="0"/>
+                <a:ea typeface="Aptos" pitchFamily="34" charset="-122"/>
+                <a:cs typeface="Aptos" pitchFamily="34" charset="-120"/>
+              </a:rPr>
+              <a:t>Predicting “risk” is not enough.</a:t>
+            </a:r>
+            <a:endParaRPr lang="en-US" sz="1700" dirty="0"/>
+          </a:p>
+          <a:p>
+            <a:r>
+              <a:rPr lang="en-US" sz="1700" dirty="0">
+                <a:solidFill>
+                  <a:srgbClr val="17364A"/>
+                </a:solidFill>
+                <a:latin typeface="Aptos" pitchFamily="34" charset="0"/>
+                <a:ea typeface="Aptos" pitchFamily="34" charset="-122"/>
+                <a:cs typeface="Aptos" pitchFamily="34" charset="-120"/>
+              </a:rPr>
+              <a:t>Staff must define risk of what, during what time period, for which population, and for what purpose.</a:t>
+            </a:r>
+            <a:endParaRPr lang="en-US" sz="1700" dirty="0"/>
+          </a:p>
+        </p:txBody>
+      </p:sp>
+      <p:sp>
+        <p:nvSpPr>
+          <p:cNvPr id="11" name="Shape 9"/>
+          <p:cNvSpPr/>
+          <p:nvPr/>
+        </p:nvSpPr>
+        <p:spPr>
+          <a:xfrm>
+            <a:off x="7909560" y="1417320"/>
+            <a:ext cx="3154680" cy="1828800"/>
+          </a:xfrm>
+          <a:prstGeom prst="roundRect">
+            <a:avLst>
+              <a:gd name="adj" fmla="val 6000"/>
+            </a:avLst>
+          </a:prstGeom>
+          <a:solidFill>
+            <a:srgbClr val="EEF8ED"/>
+          </a:solidFill>
+          <a:ln w="12700">
+            <a:solidFill>
+              <a:srgbClr val="B9D7E6"/>
+            </a:solidFill>
+            <a:prstDash val="solid"/>
+          </a:ln>
+        </p:spPr>
+      </p:sp>
+      <p:sp>
+        <p:nvSpPr>
+          <p:cNvPr id="12" name="Text 10"/>
+          <p:cNvSpPr/>
+          <p:nvPr/>
+        </p:nvSpPr>
+        <p:spPr>
+          <a:xfrm>
+            <a:off x="8074152" y="1563624"/>
+            <a:ext cx="2825496" cy="201168"/>
+          </a:xfrm>
+          <a:prstGeom prst="rect">
+            <a:avLst/>
+          </a:prstGeom>
+          <a:noFill/>
+          <a:ln/>
+        </p:spPr>
+        <p:txBody>
+          <a:bodyPr wrap="square" lIns="0" tIns="0" rIns="0" bIns="0" rtlCol="0" anchor="ctr"/>
+          <a:lstStyle/>
+          <a:p>
             <a:pPr indent="0" marL="0">
               <a:buNone/>
             </a:pPr>
             <a:r>
-              <a:rPr lang="en-US" sz="1420" dirty="0">
+              <a:rPr lang="en-US" sz="950" b="1" dirty="0">
+                <a:solidFill>
+                  <a:srgbClr val="0068B7"/>
+                </a:solidFill>
+                <a:latin typeface="Aptos" pitchFamily="34" charset="0"/>
+                <a:ea typeface="Aptos" pitchFamily="34" charset="-122"/>
+                <a:cs typeface="Aptos" pitchFamily="34" charset="-120"/>
+              </a:rPr>
+              <a:t>Key idea</a:t>
+            </a:r>
+            <a:endParaRPr lang="en-US" sz="950" dirty="0"/>
+          </a:p>
+        </p:txBody>
+      </p:sp>
+      <p:sp>
+        <p:nvSpPr>
+          <p:cNvPr id="13" name="Text 11"/>
+          <p:cNvSpPr/>
+          <p:nvPr/>
+        </p:nvSpPr>
+        <p:spPr>
+          <a:xfrm>
+            <a:off x="8074152" y="1856232"/>
+            <a:ext cx="2825496" cy="1261872"/>
+          </a:xfrm>
+          <a:prstGeom prst="rect">
+            <a:avLst/>
+          </a:prstGeom>
+          <a:noFill/>
+          <a:ln/>
+        </p:spPr>
+        <p:txBody>
+          <a:bodyPr wrap="square" lIns="0" tIns="0" rIns="0" bIns="0" rtlCol="0" anchor="t">
+            <a:normAutofit/>
+          </a:bodyPr>
+          <a:lstStyle/>
+          <a:p>
+            <a:pPr indent="0" marL="0">
+              <a:buNone/>
+            </a:pPr>
+            <a:r>
+              <a:rPr lang="en-US" sz="1250" dirty="0">
                 <a:solidFill>
                   <a:srgbClr val="17364A"/>
                 </a:solidFill>
@@ -3061,9 +3484,116 @@
                 <a:ea typeface="Aptos" pitchFamily="34" charset="-122"/>
                 <a:cs typeface="Aptos" pitchFamily="34" charset="-120"/>
               </a:rPr>
-              <a:t>Prediction used as decision. A risk score may be treated as a final decision rather than decision support. Guardrails include role-based guidance, human review, and documentation of final decisions. Equity distortion. Risk models may reflect unequal data availability or historical inequities. Guardrails include subgroup analysis, community review, and restrictions on punitive uses. Threshold harm. Poorly selected thresholds can create alert fatigue or missed risk. Guardrails include threshold review, scenario testing, and monitoring of false positives and false negatives.</a:t>
-            </a:r>
-            <a:endParaRPr lang="en-US" sz="1420" dirty="0"/>
+              <a:t>A predictive workflow begins with the outcome.</a:t>
+            </a:r>
+            <a:endParaRPr lang="en-US" sz="1250" dirty="0"/>
+          </a:p>
+        </p:txBody>
+      </p:sp>
+      <p:sp>
+        <p:nvSpPr>
+          <p:cNvPr id="14" name="Shape 12"/>
+          <p:cNvSpPr/>
+          <p:nvPr/>
+        </p:nvSpPr>
+        <p:spPr>
+          <a:xfrm>
+            <a:off x="7909560" y="3520440"/>
+            <a:ext cx="3154680" cy="1737360"/>
+          </a:xfrm>
+          <a:prstGeom prst="roundRect">
+            <a:avLst>
+              <a:gd name="adj" fmla="val 6316"/>
+            </a:avLst>
+          </a:prstGeom>
+          <a:solidFill>
+            <a:srgbClr val="EAF6F8"/>
+          </a:solidFill>
+          <a:ln w="12700">
+            <a:solidFill>
+              <a:srgbClr val="B9D7E6"/>
+            </a:solidFill>
+            <a:prstDash val="solid"/>
+          </a:ln>
+        </p:spPr>
+      </p:sp>
+      <p:sp>
+        <p:nvSpPr>
+          <p:cNvPr id="15" name="Text 13"/>
+          <p:cNvSpPr/>
+          <p:nvPr/>
+        </p:nvSpPr>
+        <p:spPr>
+          <a:xfrm>
+            <a:off x="8074152" y="3666744"/>
+            <a:ext cx="2825496" cy="201168"/>
+          </a:xfrm>
+          <a:prstGeom prst="rect">
+            <a:avLst/>
+          </a:prstGeom>
+          <a:noFill/>
+          <a:ln/>
+        </p:spPr>
+        <p:txBody>
+          <a:bodyPr wrap="square" lIns="0" tIns="0" rIns="0" bIns="0" rtlCol="0" anchor="ctr"/>
+          <a:lstStyle/>
+          <a:p>
+            <a:pPr indent="0" marL="0">
+              <a:buNone/>
+            </a:pPr>
+            <a:r>
+              <a:rPr lang="en-US" sz="950" b="1" dirty="0">
+                <a:solidFill>
+                  <a:srgbClr val="0068B7"/>
+                </a:solidFill>
+                <a:latin typeface="Aptos" pitchFamily="34" charset="0"/>
+                <a:ea typeface="Aptos" pitchFamily="34" charset="-122"/>
+                <a:cs typeface="Aptos" pitchFamily="34" charset="-120"/>
+              </a:rPr>
+              <a:t>Use this for</a:t>
+            </a:r>
+            <a:endParaRPr lang="en-US" sz="950" dirty="0"/>
+          </a:p>
+        </p:txBody>
+      </p:sp>
+      <p:sp>
+        <p:nvSpPr>
+          <p:cNvPr id="16" name="Text 14"/>
+          <p:cNvSpPr/>
+          <p:nvPr/>
+        </p:nvSpPr>
+        <p:spPr>
+          <a:xfrm>
+            <a:off x="8074152" y="3959352"/>
+            <a:ext cx="2825496" cy="1170432"/>
+          </a:xfrm>
+          <a:prstGeom prst="rect">
+            <a:avLst/>
+          </a:prstGeom>
+          <a:noFill/>
+          <a:ln/>
+        </p:spPr>
+        <p:txBody>
+          <a:bodyPr wrap="square" lIns="0" tIns="0" rIns="0" bIns="0" rtlCol="0" anchor="t">
+            <a:normAutofit/>
+          </a:bodyPr>
+          <a:lstStyle/>
+          <a:p>
+            <a:pPr indent="0" marL="0">
+              <a:buNone/>
+            </a:pPr>
+            <a:r>
+              <a:rPr lang="en-US" sz="1250" dirty="0">
+                <a:solidFill>
+                  <a:srgbClr val="17364A"/>
+                </a:solidFill>
+                <a:latin typeface="Aptos" pitchFamily="34" charset="0"/>
+                <a:ea typeface="Aptos" pitchFamily="34" charset="-122"/>
+                <a:cs typeface="Aptos" pitchFamily="34" charset="-120"/>
+              </a:rPr>
+              <a:t>Connect the concept to public health decisions, safeguards, documentation, or implementation work.</a:t>
+            </a:r>
+            <a:endParaRPr lang="en-US" sz="1250" dirty="0"/>
           </a:p>
         </p:txBody>
       </p:sp>
@@ -3126,7 +3656,32 @@
       </p:sp>
       <p:sp>
         <p:nvSpPr>
-          <p:cNvPr id="3" name="Text 1"/>
+          <p:cNvPr id="3" name="Shape 1"/>
+          <p:cNvSpPr/>
+          <p:nvPr/>
+        </p:nvSpPr>
+        <p:spPr>
+          <a:xfrm>
+            <a:off x="0" y="164592"/>
+            <a:ext cx="146304" cy="6693408"/>
+          </a:xfrm>
+          <a:prstGeom prst="rect">
+            <a:avLst/>
+          </a:prstGeom>
+          <a:solidFill>
+            <a:srgbClr val="2F8A28"/>
+          </a:solidFill>
+          <a:ln w="12700">
+            <a:solidFill>
+              <a:srgbClr val="2F8A28"/>
+            </a:solidFill>
+            <a:prstDash val="solid"/>
+          </a:ln>
+        </p:spPr>
+      </p:sp>
+      <p:sp>
+        <p:nvSpPr>
+          <p:cNvPr id="4" name="Text 2"/>
           <p:cNvSpPr/>
           <p:nvPr/>
         </p:nvSpPr>
@@ -3165,7 +3720,7 @@
       </p:sp>
       <p:sp>
         <p:nvSpPr>
-          <p:cNvPr id="4" name="Text 2"/>
+          <p:cNvPr id="5" name="Text 3"/>
           <p:cNvSpPr/>
           <p:nvPr/>
         </p:nvSpPr>
@@ -3204,7 +3759,7 @@
       </p:sp>
       <p:sp>
         <p:nvSpPr>
-          <p:cNvPr id="5" name="Text 3"/>
+          <p:cNvPr id="6" name="Text 4"/>
           <p:cNvSpPr/>
           <p:nvPr/>
         </p:nvSpPr>
@@ -3243,7 +3798,7 @@
       </p:sp>
       <p:sp>
         <p:nvSpPr>
-          <p:cNvPr id="6" name="Text 4"/>
+          <p:cNvPr id="7" name="Text 5"/>
           <p:cNvSpPr/>
           <p:nvPr/>
         </p:nvSpPr>
@@ -3276,7 +3831,7 @@
                 <a:ea typeface="Aptos Display" pitchFamily="34" charset="-122"/>
                 <a:cs typeface="Aptos Display" pitchFamily="34" charset="-120"/>
               </a:rPr>
-              <a:t>Risks, Failure Modes, and Guardrails Continued</a:t>
+              <a:t>Technical Deep Dive Continued</a:t>
             </a:r>
             <a:endParaRPr lang="en-US" sz="2700" dirty="0"/>
           </a:p>
@@ -3284,32 +3839,178 @@
       </p:sp>
       <p:sp>
         <p:nvSpPr>
-          <p:cNvPr id="7" name="Text 5"/>
-          <p:cNvSpPr/>
-          <p:nvPr/>
-        </p:nvSpPr>
-        <p:spPr>
-          <a:xfrm>
-            <a:off x="822960" y="1325880"/>
-            <a:ext cx="10378440" cy="4800600"/>
-          </a:xfrm>
-          <a:prstGeom prst="rect">
-            <a:avLst/>
-          </a:prstGeom>
-          <a:noFill/>
-          <a:ln/>
-        </p:spPr>
-        <p:txBody>
-          <a:bodyPr wrap="square" lIns="1016" tIns="1016" rIns="1016" bIns="1016" rtlCol="0" anchor="t">
+          <p:cNvPr id="8" name="Text 6"/>
+          <p:cNvSpPr/>
+          <p:nvPr/>
+        </p:nvSpPr>
+        <p:spPr>
+          <a:xfrm>
+            <a:off x="868680" y="1417320"/>
+            <a:ext cx="6675120" cy="4434840"/>
+          </a:xfrm>
+          <a:prstGeom prst="rect">
+            <a:avLst/>
+          </a:prstGeom>
+          <a:noFill/>
+          <a:ln/>
+        </p:spPr>
+        <p:txBody>
+          <a:bodyPr wrap="square" lIns="635" tIns="635" rIns="635" bIns="635" rtlCol="0" anchor="t">
             <a:normAutofit/>
           </a:bodyPr>
           <a:lstStyle/>
           <a:p>
+            <a:r>
+              <a:rPr lang="en-US" sz="1700" dirty="0">
+                <a:solidFill>
+                  <a:srgbClr val="17364A"/>
+                </a:solidFill>
+                <a:latin typeface="Aptos" pitchFamily="34" charset="0"/>
+                <a:ea typeface="Aptos" pitchFamily="34" charset="-122"/>
+                <a:cs typeface="Aptos" pitchFamily="34" charset="-120"/>
+              </a:rPr>
+              <a:t>Thresholds are policy and workflow decisions as much as technical decisions.</a:t>
+            </a:r>
+            <a:endParaRPr lang="en-US" sz="1700" dirty="0"/>
+          </a:p>
+          <a:p>
+            <a:r>
+              <a:rPr lang="en-US" sz="1700" dirty="0">
+                <a:solidFill>
+                  <a:srgbClr val="17364A"/>
+                </a:solidFill>
+                <a:latin typeface="Aptos" pitchFamily="34" charset="0"/>
+                <a:ea typeface="Aptos" pitchFamily="34" charset="-122"/>
+                <a:cs typeface="Aptos" pitchFamily="34" charset="-120"/>
+              </a:rPr>
+              <a:t>A lower threshold may catch more true high-risk cases but create more false positives and burden staff.</a:t>
+            </a:r>
+            <a:endParaRPr lang="en-US" sz="1700" dirty="0"/>
+          </a:p>
+          <a:p>
+            <a:r>
+              <a:rPr lang="en-US" sz="1700" dirty="0">
+                <a:solidFill>
+                  <a:srgbClr val="17364A"/>
+                </a:solidFill>
+                <a:latin typeface="Aptos" pitchFamily="34" charset="0"/>
+                <a:ea typeface="Aptos" pitchFamily="34" charset="-122"/>
+                <a:cs typeface="Aptos" pitchFamily="34" charset="-120"/>
+              </a:rPr>
+              <a:t>A higher threshold may conserve resources but miss people or places needing support.</a:t>
+            </a:r>
+            <a:endParaRPr lang="en-US" sz="1700" dirty="0"/>
+          </a:p>
+          <a:p>
+            <a:r>
+              <a:rPr lang="en-US" sz="1700" dirty="0">
+                <a:solidFill>
+                  <a:srgbClr val="17364A"/>
+                </a:solidFill>
+                <a:latin typeface="Aptos" pitchFamily="34" charset="0"/>
+                <a:ea typeface="Aptos" pitchFamily="34" charset="-122"/>
+                <a:cs typeface="Aptos" pitchFamily="34" charset="-120"/>
+              </a:rPr>
+              <a:t>Threshold selection should consider staffing capacity, consequence severity, equity, and the availability of human review.</a:t>
+            </a:r>
+            <a:endParaRPr lang="en-US" sz="1700" dirty="0"/>
+          </a:p>
+        </p:txBody>
+      </p:sp>
+      <p:sp>
+        <p:nvSpPr>
+          <p:cNvPr id="9" name="Shape 7"/>
+          <p:cNvSpPr/>
+          <p:nvPr/>
+        </p:nvSpPr>
+        <p:spPr>
+          <a:xfrm>
+            <a:off x="7909560" y="1417320"/>
+            <a:ext cx="3154680" cy="1828800"/>
+          </a:xfrm>
+          <a:prstGeom prst="roundRect">
+            <a:avLst>
+              <a:gd name="adj" fmla="val 6000"/>
+            </a:avLst>
+          </a:prstGeom>
+          <a:solidFill>
+            <a:srgbClr val="EEF8ED"/>
+          </a:solidFill>
+          <a:ln w="12700">
+            <a:solidFill>
+              <a:srgbClr val="B9D7E6"/>
+            </a:solidFill>
+            <a:prstDash val="solid"/>
+          </a:ln>
+        </p:spPr>
+      </p:sp>
+      <p:sp>
+        <p:nvSpPr>
+          <p:cNvPr id="10" name="Text 8"/>
+          <p:cNvSpPr/>
+          <p:nvPr/>
+        </p:nvSpPr>
+        <p:spPr>
+          <a:xfrm>
+            <a:off x="8074152" y="1563624"/>
+            <a:ext cx="2825496" cy="201168"/>
+          </a:xfrm>
+          <a:prstGeom prst="rect">
+            <a:avLst/>
+          </a:prstGeom>
+          <a:noFill/>
+          <a:ln/>
+        </p:spPr>
+        <p:txBody>
+          <a:bodyPr wrap="square" lIns="0" tIns="0" rIns="0" bIns="0" rtlCol="0" anchor="ctr"/>
+          <a:lstStyle/>
+          <a:p>
             <a:pPr indent="0" marL="0">
               <a:buNone/>
             </a:pPr>
             <a:r>
-              <a:rPr lang="en-US" sz="1420" dirty="0">
+              <a:rPr lang="en-US" sz="950" b="1" dirty="0">
+                <a:solidFill>
+                  <a:srgbClr val="0068B7"/>
+                </a:solidFill>
+                <a:latin typeface="Aptos" pitchFamily="34" charset="0"/>
+                <a:ea typeface="Aptos" pitchFamily="34" charset="-122"/>
+                <a:cs typeface="Aptos" pitchFamily="34" charset="-120"/>
+              </a:rPr>
+              <a:t>Key idea</a:t>
+            </a:r>
+            <a:endParaRPr lang="en-US" sz="950" dirty="0"/>
+          </a:p>
+        </p:txBody>
+      </p:sp>
+      <p:sp>
+        <p:nvSpPr>
+          <p:cNvPr id="11" name="Text 9"/>
+          <p:cNvSpPr/>
+          <p:nvPr/>
+        </p:nvSpPr>
+        <p:spPr>
+          <a:xfrm>
+            <a:off x="8074152" y="1856232"/>
+            <a:ext cx="2825496" cy="1261872"/>
+          </a:xfrm>
+          <a:prstGeom prst="rect">
+            <a:avLst/>
+          </a:prstGeom>
+          <a:noFill/>
+          <a:ln/>
+        </p:spPr>
+        <p:txBody>
+          <a:bodyPr wrap="square" lIns="0" tIns="0" rIns="0" bIns="0" rtlCol="0" anchor="t">
+            <a:normAutofit/>
+          </a:bodyPr>
+          <a:lstStyle/>
+          <a:p>
+            <a:pPr indent="0" marL="0">
+              <a:buNone/>
+            </a:pPr>
+            <a:r>
+              <a:rPr lang="en-US" sz="1250" dirty="0">
                 <a:solidFill>
                   <a:srgbClr val="17364A"/>
                 </a:solidFill>
@@ -3317,9 +4018,116 @@
                 <a:ea typeface="Aptos" pitchFamily="34" charset="-122"/>
                 <a:cs typeface="Aptos" pitchFamily="34" charset="-120"/>
               </a:rPr>
-              <a:t>Model drift. Performance may change over time. Guardrails include periodic recalibration, drift monitoring, and authority to pause or modify use.</a:t>
-            </a:r>
-            <a:endParaRPr lang="en-US" sz="1420" dirty="0"/>
+              <a:t>Thresholds are policy and workflow decisions as much as technical decisions.</a:t>
+            </a:r>
+            <a:endParaRPr lang="en-US" sz="1250" dirty="0"/>
+          </a:p>
+        </p:txBody>
+      </p:sp>
+      <p:sp>
+        <p:nvSpPr>
+          <p:cNvPr id="12" name="Shape 10"/>
+          <p:cNvSpPr/>
+          <p:nvPr/>
+        </p:nvSpPr>
+        <p:spPr>
+          <a:xfrm>
+            <a:off x="7909560" y="3520440"/>
+            <a:ext cx="3154680" cy="1737360"/>
+          </a:xfrm>
+          <a:prstGeom prst="roundRect">
+            <a:avLst>
+              <a:gd name="adj" fmla="val 6316"/>
+            </a:avLst>
+          </a:prstGeom>
+          <a:solidFill>
+            <a:srgbClr val="EAF6F8"/>
+          </a:solidFill>
+          <a:ln w="12700">
+            <a:solidFill>
+              <a:srgbClr val="B9D7E6"/>
+            </a:solidFill>
+            <a:prstDash val="solid"/>
+          </a:ln>
+        </p:spPr>
+      </p:sp>
+      <p:sp>
+        <p:nvSpPr>
+          <p:cNvPr id="13" name="Text 11"/>
+          <p:cNvSpPr/>
+          <p:nvPr/>
+        </p:nvSpPr>
+        <p:spPr>
+          <a:xfrm>
+            <a:off x="8074152" y="3666744"/>
+            <a:ext cx="2825496" cy="201168"/>
+          </a:xfrm>
+          <a:prstGeom prst="rect">
+            <a:avLst/>
+          </a:prstGeom>
+          <a:noFill/>
+          <a:ln/>
+        </p:spPr>
+        <p:txBody>
+          <a:bodyPr wrap="square" lIns="0" tIns="0" rIns="0" bIns="0" rtlCol="0" anchor="ctr"/>
+          <a:lstStyle/>
+          <a:p>
+            <a:pPr indent="0" marL="0">
+              <a:buNone/>
+            </a:pPr>
+            <a:r>
+              <a:rPr lang="en-US" sz="950" b="1" dirty="0">
+                <a:solidFill>
+                  <a:srgbClr val="0068B7"/>
+                </a:solidFill>
+                <a:latin typeface="Aptos" pitchFamily="34" charset="0"/>
+                <a:ea typeface="Aptos" pitchFamily="34" charset="-122"/>
+                <a:cs typeface="Aptos" pitchFamily="34" charset="-120"/>
+              </a:rPr>
+              <a:t>Use this for</a:t>
+            </a:r>
+            <a:endParaRPr lang="en-US" sz="950" dirty="0"/>
+          </a:p>
+        </p:txBody>
+      </p:sp>
+      <p:sp>
+        <p:nvSpPr>
+          <p:cNvPr id="14" name="Text 12"/>
+          <p:cNvSpPr/>
+          <p:nvPr/>
+        </p:nvSpPr>
+        <p:spPr>
+          <a:xfrm>
+            <a:off x="8074152" y="3959352"/>
+            <a:ext cx="2825496" cy="1170432"/>
+          </a:xfrm>
+          <a:prstGeom prst="rect">
+            <a:avLst/>
+          </a:prstGeom>
+          <a:noFill/>
+          <a:ln/>
+        </p:spPr>
+        <p:txBody>
+          <a:bodyPr wrap="square" lIns="0" tIns="0" rIns="0" bIns="0" rtlCol="0" anchor="t">
+            <a:normAutofit/>
+          </a:bodyPr>
+          <a:lstStyle/>
+          <a:p>
+            <a:pPr indent="0" marL="0">
+              <a:buNone/>
+            </a:pPr>
+            <a:r>
+              <a:rPr lang="en-US" sz="1250" dirty="0">
+                <a:solidFill>
+                  <a:srgbClr val="17364A"/>
+                </a:solidFill>
+                <a:latin typeface="Aptos" pitchFamily="34" charset="0"/>
+                <a:ea typeface="Aptos" pitchFamily="34" charset="-122"/>
+                <a:cs typeface="Aptos" pitchFamily="34" charset="-120"/>
+              </a:rPr>
+              <a:t>Connect the concept to public health decisions, safeguards, documentation, or implementation work.</a:t>
+            </a:r>
+            <a:endParaRPr lang="en-US" sz="1250" dirty="0"/>
           </a:p>
         </p:txBody>
       </p:sp>
@@ -3382,7 +4190,32 @@
       </p:sp>
       <p:sp>
         <p:nvSpPr>
-          <p:cNvPr id="3" name="Text 1"/>
+          <p:cNvPr id="3" name="Shape 1"/>
+          <p:cNvSpPr/>
+          <p:nvPr/>
+        </p:nvSpPr>
+        <p:spPr>
+          <a:xfrm>
+            <a:off x="0" y="164592"/>
+            <a:ext cx="146304" cy="6693408"/>
+          </a:xfrm>
+          <a:prstGeom prst="rect">
+            <a:avLst/>
+          </a:prstGeom>
+          <a:solidFill>
+            <a:srgbClr val="2F8A28"/>
+          </a:solidFill>
+          <a:ln w="12700">
+            <a:solidFill>
+              <a:srgbClr val="2F8A28"/>
+            </a:solidFill>
+            <a:prstDash val="solid"/>
+          </a:ln>
+        </p:spPr>
+      </p:sp>
+      <p:sp>
+        <p:nvSpPr>
+          <p:cNvPr id="4" name="Text 2"/>
           <p:cNvSpPr/>
           <p:nvPr/>
         </p:nvSpPr>
@@ -3421,7 +4254,7 @@
       </p:sp>
       <p:sp>
         <p:nvSpPr>
-          <p:cNvPr id="4" name="Text 2"/>
+          <p:cNvPr id="5" name="Text 3"/>
           <p:cNvSpPr/>
           <p:nvPr/>
         </p:nvSpPr>
@@ -3460,7 +4293,7 @@
       </p:sp>
       <p:sp>
         <p:nvSpPr>
-          <p:cNvPr id="5" name="Text 3"/>
+          <p:cNvPr id="6" name="Text 4"/>
           <p:cNvSpPr/>
           <p:nvPr/>
         </p:nvSpPr>
@@ -3499,13 +4332,77 @@
       </p:sp>
       <p:sp>
         <p:nvSpPr>
-          <p:cNvPr id="6" name="Text 4"/>
+          <p:cNvPr id="7" name="Shape 5"/>
           <p:cNvSpPr/>
           <p:nvPr/>
         </p:nvSpPr>
         <p:spPr>
           <a:xfrm>
             <a:off x="640080" y="658368"/>
+            <a:ext cx="420624" cy="420624"/>
+          </a:xfrm>
+          <a:prstGeom prst="ellipse">
+            <a:avLst/>
+          </a:prstGeom>
+          <a:solidFill>
+            <a:srgbClr val="0068B7"/>
+          </a:solidFill>
+          <a:ln w="12700">
+            <a:solidFill>
+              <a:srgbClr val="0068B7"/>
+            </a:solidFill>
+            <a:prstDash val="solid"/>
+          </a:ln>
+        </p:spPr>
+      </p:sp>
+      <p:sp>
+        <p:nvSpPr>
+          <p:cNvPr id="8" name="Text 6"/>
+          <p:cNvSpPr/>
+          <p:nvPr/>
+        </p:nvSpPr>
+        <p:spPr>
+          <a:xfrm>
+            <a:off x="640080" y="731520"/>
+            <a:ext cx="420624" cy="164592"/>
+          </a:xfrm>
+          <a:prstGeom prst="rect">
+            <a:avLst/>
+          </a:prstGeom>
+          <a:noFill/>
+          <a:ln/>
+        </p:spPr>
+        <p:txBody>
+          <a:bodyPr wrap="square" lIns="0" tIns="0" rIns="0" bIns="0" rtlCol="0" anchor="ctr"/>
+          <a:lstStyle/>
+          <a:p>
+            <a:pPr algn="ctr" indent="0" marL="0">
+              <a:buNone/>
+            </a:pPr>
+            <a:r>
+              <a:rPr lang="en-US" sz="1100" b="1" dirty="0">
+                <a:solidFill>
+                  <a:srgbClr val="FFFFFF"/>
+                </a:solidFill>
+                <a:latin typeface="Aptos" pitchFamily="34" charset="0"/>
+                <a:ea typeface="Aptos" pitchFamily="34" charset="-122"/>
+                <a:cs typeface="Aptos" pitchFamily="34" charset="-120"/>
+              </a:rPr>
+              <a:t>6</a:t>
+            </a:r>
+            <a:endParaRPr lang="en-US" sz="1100" dirty="0"/>
+          </a:p>
+        </p:txBody>
+      </p:sp>
+      <p:sp>
+        <p:nvSpPr>
+          <p:cNvPr id="9" name="Text 7"/>
+          <p:cNvSpPr/>
+          <p:nvPr/>
+        </p:nvSpPr>
+        <p:spPr>
+          <a:xfrm>
+            <a:off x="640080" y="621792"/>
             <a:ext cx="10881360" cy="566928"/>
           </a:xfrm>
           <a:prstGeom prst="rect">
@@ -3532,7 +4429,7 @@
                 <a:ea typeface="Aptos Display" pitchFamily="34" charset="-122"/>
                 <a:cs typeface="Aptos Display" pitchFamily="34" charset="-120"/>
               </a:rPr>
-              <a:t>Application to AI-Supported Workflows</a:t>
+              <a:t>Risks, Failure Modes, and Guardrails</a:t>
             </a:r>
             <a:endParaRPr lang="en-US" sz="2700" dirty="0"/>
           </a:p>
@@ -3540,32 +4437,178 @@
       </p:sp>
       <p:sp>
         <p:nvSpPr>
-          <p:cNvPr id="7" name="Text 5"/>
-          <p:cNvSpPr/>
-          <p:nvPr/>
-        </p:nvSpPr>
-        <p:spPr>
-          <a:xfrm>
-            <a:off x="822960" y="1325880"/>
-            <a:ext cx="10378440" cy="4800600"/>
-          </a:xfrm>
-          <a:prstGeom prst="rect">
-            <a:avLst/>
-          </a:prstGeom>
-          <a:noFill/>
-          <a:ln/>
-        </p:spPr>
-        <p:txBody>
-          <a:bodyPr wrap="square" lIns="1016" tIns="1016" rIns="1016" bIns="1016" rtlCol="0" anchor="t">
+          <p:cNvPr id="10" name="Text 8"/>
+          <p:cNvSpPr/>
+          <p:nvPr/>
+        </p:nvSpPr>
+        <p:spPr>
+          <a:xfrm>
+            <a:off x="868680" y="1417320"/>
+            <a:ext cx="6675120" cy="4434840"/>
+          </a:xfrm>
+          <a:prstGeom prst="rect">
+            <a:avLst/>
+          </a:prstGeom>
+          <a:noFill/>
+          <a:ln/>
+        </p:spPr>
+        <p:txBody>
+          <a:bodyPr wrap="square" lIns="635" tIns="635" rIns="635" bIns="635" rtlCol="0" anchor="t">
             <a:normAutofit/>
           </a:bodyPr>
           <a:lstStyle/>
           <a:p>
+            <a:r>
+              <a:rPr lang="en-US" sz="1700" dirty="0">
+                <a:solidFill>
+                  <a:srgbClr val="17364A"/>
+                </a:solidFill>
+                <a:latin typeface="Aptos" pitchFamily="34" charset="0"/>
+                <a:ea typeface="Aptos" pitchFamily="34" charset="-122"/>
+                <a:cs typeface="Aptos" pitchFamily="34" charset="-120"/>
+              </a:rPr>
+              <a:t>Prediction used as decision.</a:t>
+            </a:r>
+            <a:endParaRPr lang="en-US" sz="1700" dirty="0"/>
+          </a:p>
+          <a:p>
+            <a:r>
+              <a:rPr lang="en-US" sz="1700" dirty="0">
+                <a:solidFill>
+                  <a:srgbClr val="17364A"/>
+                </a:solidFill>
+                <a:latin typeface="Aptos" pitchFamily="34" charset="0"/>
+                <a:ea typeface="Aptos" pitchFamily="34" charset="-122"/>
+                <a:cs typeface="Aptos" pitchFamily="34" charset="-120"/>
+              </a:rPr>
+              <a:t>A risk score may be treated as a final decision rather than decision support.</a:t>
+            </a:r>
+            <a:endParaRPr lang="en-US" sz="1700" dirty="0"/>
+          </a:p>
+          <a:p>
+            <a:r>
+              <a:rPr lang="en-US" sz="1700" dirty="0">
+                <a:solidFill>
+                  <a:srgbClr val="17364A"/>
+                </a:solidFill>
+                <a:latin typeface="Aptos" pitchFamily="34" charset="0"/>
+                <a:ea typeface="Aptos" pitchFamily="34" charset="-122"/>
+                <a:cs typeface="Aptos" pitchFamily="34" charset="-120"/>
+              </a:rPr>
+              <a:t>Guardrails include role-based guidance, human review, and documentation of final decisions.</a:t>
+            </a:r>
+            <a:endParaRPr lang="en-US" sz="1700" dirty="0"/>
+          </a:p>
+          <a:p>
+            <a:r>
+              <a:rPr lang="en-US" sz="1700" dirty="0">
+                <a:solidFill>
+                  <a:srgbClr val="17364A"/>
+                </a:solidFill>
+                <a:latin typeface="Aptos" pitchFamily="34" charset="0"/>
+                <a:ea typeface="Aptos" pitchFamily="34" charset="-122"/>
+                <a:cs typeface="Aptos" pitchFamily="34" charset="-120"/>
+              </a:rPr>
+              <a:t>Equity distortion.</a:t>
+            </a:r>
+            <a:endParaRPr lang="en-US" sz="1700" dirty="0"/>
+          </a:p>
+        </p:txBody>
+      </p:sp>
+      <p:sp>
+        <p:nvSpPr>
+          <p:cNvPr id="11" name="Shape 9"/>
+          <p:cNvSpPr/>
+          <p:nvPr/>
+        </p:nvSpPr>
+        <p:spPr>
+          <a:xfrm>
+            <a:off x="7909560" y="1417320"/>
+            <a:ext cx="3154680" cy="1828800"/>
+          </a:xfrm>
+          <a:prstGeom prst="roundRect">
+            <a:avLst>
+              <a:gd name="adj" fmla="val 6000"/>
+            </a:avLst>
+          </a:prstGeom>
+          <a:solidFill>
+            <a:srgbClr val="EEF8ED"/>
+          </a:solidFill>
+          <a:ln w="12700">
+            <a:solidFill>
+              <a:srgbClr val="B9D7E6"/>
+            </a:solidFill>
+            <a:prstDash val="solid"/>
+          </a:ln>
+        </p:spPr>
+      </p:sp>
+      <p:sp>
+        <p:nvSpPr>
+          <p:cNvPr id="12" name="Text 10"/>
+          <p:cNvSpPr/>
+          <p:nvPr/>
+        </p:nvSpPr>
+        <p:spPr>
+          <a:xfrm>
+            <a:off x="8074152" y="1563624"/>
+            <a:ext cx="2825496" cy="201168"/>
+          </a:xfrm>
+          <a:prstGeom prst="rect">
+            <a:avLst/>
+          </a:prstGeom>
+          <a:noFill/>
+          <a:ln/>
+        </p:spPr>
+        <p:txBody>
+          <a:bodyPr wrap="square" lIns="0" tIns="0" rIns="0" bIns="0" rtlCol="0" anchor="ctr"/>
+          <a:lstStyle/>
+          <a:p>
             <a:pPr indent="0" marL="0">
               <a:buNone/>
             </a:pPr>
             <a:r>
-              <a:rPr lang="en-US" sz="1420" dirty="0">
+              <a:rPr lang="en-US" sz="950" b="1" dirty="0">
+                <a:solidFill>
+                  <a:srgbClr val="0068B7"/>
+                </a:solidFill>
+                <a:latin typeface="Aptos" pitchFamily="34" charset="0"/>
+                <a:ea typeface="Aptos" pitchFamily="34" charset="-122"/>
+                <a:cs typeface="Aptos" pitchFamily="34" charset="-120"/>
+              </a:rPr>
+              <a:t>Key idea</a:t>
+            </a:r>
+            <a:endParaRPr lang="en-US" sz="950" dirty="0"/>
+          </a:p>
+        </p:txBody>
+      </p:sp>
+      <p:sp>
+        <p:nvSpPr>
+          <p:cNvPr id="13" name="Text 11"/>
+          <p:cNvSpPr/>
+          <p:nvPr/>
+        </p:nvSpPr>
+        <p:spPr>
+          <a:xfrm>
+            <a:off x="8074152" y="1856232"/>
+            <a:ext cx="2825496" cy="1261872"/>
+          </a:xfrm>
+          <a:prstGeom prst="rect">
+            <a:avLst/>
+          </a:prstGeom>
+          <a:noFill/>
+          <a:ln/>
+        </p:spPr>
+        <p:txBody>
+          <a:bodyPr wrap="square" lIns="0" tIns="0" rIns="0" bIns="0" rtlCol="0" anchor="t">
+            <a:normAutofit/>
+          </a:bodyPr>
+          <a:lstStyle/>
+          <a:p>
+            <a:pPr indent="0" marL="0">
+              <a:buNone/>
+            </a:pPr>
+            <a:r>
+              <a:rPr lang="en-US" sz="1250" dirty="0">
                 <a:solidFill>
                   <a:srgbClr val="17364A"/>
                 </a:solidFill>
@@ -3573,9 +4616,116 @@
                 <a:ea typeface="Aptos" pitchFamily="34" charset="-122"/>
                 <a:cs typeface="Aptos" pitchFamily="34" charset="-120"/>
               </a:rPr>
-              <a:t>Predictive analytics may be embedded in dashboards, case management systems, early warning tools, outreach lists, or agentic workflows. Generative AI may explain or summarize predictive outputs, but those explanations must not imply certainty that the model does not provide. RAG systems may combine risk results with policy guidance, while agentic workflows may trigger tasks or notifications based on thresholds. When prediction supports public health action, the workflow should make the score, its limitations, and the source data visible to users. Staff should know when a score is advisory, when it requires review, and when it cannot be used as the sole basis for action.</a:t>
-            </a:r>
-            <a:endParaRPr lang="en-US" sz="1420" dirty="0"/>
+              <a:t>Prediction used as decision.</a:t>
+            </a:r>
+            <a:endParaRPr lang="en-US" sz="1250" dirty="0"/>
+          </a:p>
+        </p:txBody>
+      </p:sp>
+      <p:sp>
+        <p:nvSpPr>
+          <p:cNvPr id="14" name="Shape 12"/>
+          <p:cNvSpPr/>
+          <p:nvPr/>
+        </p:nvSpPr>
+        <p:spPr>
+          <a:xfrm>
+            <a:off x="7909560" y="3520440"/>
+            <a:ext cx="3154680" cy="1737360"/>
+          </a:xfrm>
+          <a:prstGeom prst="roundRect">
+            <a:avLst>
+              <a:gd name="adj" fmla="val 6316"/>
+            </a:avLst>
+          </a:prstGeom>
+          <a:solidFill>
+            <a:srgbClr val="EAF6F8"/>
+          </a:solidFill>
+          <a:ln w="12700">
+            <a:solidFill>
+              <a:srgbClr val="B9D7E6"/>
+            </a:solidFill>
+            <a:prstDash val="solid"/>
+          </a:ln>
+        </p:spPr>
+      </p:sp>
+      <p:sp>
+        <p:nvSpPr>
+          <p:cNvPr id="15" name="Text 13"/>
+          <p:cNvSpPr/>
+          <p:nvPr/>
+        </p:nvSpPr>
+        <p:spPr>
+          <a:xfrm>
+            <a:off x="8074152" y="3666744"/>
+            <a:ext cx="2825496" cy="201168"/>
+          </a:xfrm>
+          <a:prstGeom prst="rect">
+            <a:avLst/>
+          </a:prstGeom>
+          <a:noFill/>
+          <a:ln/>
+        </p:spPr>
+        <p:txBody>
+          <a:bodyPr wrap="square" lIns="0" tIns="0" rIns="0" bIns="0" rtlCol="0" anchor="ctr"/>
+          <a:lstStyle/>
+          <a:p>
+            <a:pPr indent="0" marL="0">
+              <a:buNone/>
+            </a:pPr>
+            <a:r>
+              <a:rPr lang="en-US" sz="950" b="1" dirty="0">
+                <a:solidFill>
+                  <a:srgbClr val="0068B7"/>
+                </a:solidFill>
+                <a:latin typeface="Aptos" pitchFamily="34" charset="0"/>
+                <a:ea typeface="Aptos" pitchFamily="34" charset="-122"/>
+                <a:cs typeface="Aptos" pitchFamily="34" charset="-120"/>
+              </a:rPr>
+              <a:t>Use this for</a:t>
+            </a:r>
+            <a:endParaRPr lang="en-US" sz="950" dirty="0"/>
+          </a:p>
+        </p:txBody>
+      </p:sp>
+      <p:sp>
+        <p:nvSpPr>
+          <p:cNvPr id="16" name="Text 14"/>
+          <p:cNvSpPr/>
+          <p:nvPr/>
+        </p:nvSpPr>
+        <p:spPr>
+          <a:xfrm>
+            <a:off x="8074152" y="3959352"/>
+            <a:ext cx="2825496" cy="1170432"/>
+          </a:xfrm>
+          <a:prstGeom prst="rect">
+            <a:avLst/>
+          </a:prstGeom>
+          <a:noFill/>
+          <a:ln/>
+        </p:spPr>
+        <p:txBody>
+          <a:bodyPr wrap="square" lIns="0" tIns="0" rIns="0" bIns="0" rtlCol="0" anchor="t">
+            <a:normAutofit/>
+          </a:bodyPr>
+          <a:lstStyle/>
+          <a:p>
+            <a:pPr indent="0" marL="0">
+              <a:buNone/>
+            </a:pPr>
+            <a:r>
+              <a:rPr lang="en-US" sz="1250" dirty="0">
+                <a:solidFill>
+                  <a:srgbClr val="17364A"/>
+                </a:solidFill>
+                <a:latin typeface="Aptos" pitchFamily="34" charset="0"/>
+                <a:ea typeface="Aptos" pitchFamily="34" charset="-122"/>
+                <a:cs typeface="Aptos" pitchFamily="34" charset="-120"/>
+              </a:rPr>
+              <a:t>Connect the concept to public health decisions, safeguards, documentation, or implementation work.</a:t>
+            </a:r>
+            <a:endParaRPr lang="en-US" sz="1250" dirty="0"/>
           </a:p>
         </p:txBody>
       </p:sp>
@@ -3638,7 +4788,32 @@
       </p:sp>
       <p:sp>
         <p:nvSpPr>
-          <p:cNvPr id="3" name="Text 1"/>
+          <p:cNvPr id="3" name="Shape 1"/>
+          <p:cNvSpPr/>
+          <p:nvPr/>
+        </p:nvSpPr>
+        <p:spPr>
+          <a:xfrm>
+            <a:off x="0" y="164592"/>
+            <a:ext cx="146304" cy="6693408"/>
+          </a:xfrm>
+          <a:prstGeom prst="rect">
+            <a:avLst/>
+          </a:prstGeom>
+          <a:solidFill>
+            <a:srgbClr val="2F8A28"/>
+          </a:solidFill>
+          <a:ln w="12700">
+            <a:solidFill>
+              <a:srgbClr val="2F8A28"/>
+            </a:solidFill>
+            <a:prstDash val="solid"/>
+          </a:ln>
+        </p:spPr>
+      </p:sp>
+      <p:sp>
+        <p:nvSpPr>
+          <p:cNvPr id="4" name="Text 2"/>
           <p:cNvSpPr/>
           <p:nvPr/>
         </p:nvSpPr>
@@ -3677,7 +4852,7 @@
       </p:sp>
       <p:sp>
         <p:nvSpPr>
-          <p:cNvPr id="4" name="Text 2"/>
+          <p:cNvPr id="5" name="Text 3"/>
           <p:cNvSpPr/>
           <p:nvPr/>
         </p:nvSpPr>
@@ -3716,7 +4891,7 @@
       </p:sp>
       <p:sp>
         <p:nvSpPr>
-          <p:cNvPr id="5" name="Text 3"/>
+          <p:cNvPr id="6" name="Text 4"/>
           <p:cNvSpPr/>
           <p:nvPr/>
         </p:nvSpPr>
@@ -3755,7 +4930,7 @@
       </p:sp>
       <p:sp>
         <p:nvSpPr>
-          <p:cNvPr id="6" name="Text 4"/>
+          <p:cNvPr id="7" name="Text 5"/>
           <p:cNvSpPr/>
           <p:nvPr/>
         </p:nvSpPr>
@@ -3788,7 +4963,7 @@
                 <a:ea typeface="Aptos Display" pitchFamily="34" charset="-122"/>
                 <a:cs typeface="Aptos Display" pitchFamily="34" charset="-120"/>
               </a:rPr>
-              <a:t>Reflection Questions</a:t>
+              <a:t>Risks, Failure Modes, and Guardrails Continued</a:t>
             </a:r>
             <a:endParaRPr lang="en-US" sz="2700" dirty="0"/>
           </a:p>
@@ -3796,32 +4971,164 @@
       </p:sp>
       <p:sp>
         <p:nvSpPr>
-          <p:cNvPr id="7" name="Text 5"/>
-          <p:cNvSpPr/>
-          <p:nvPr/>
-        </p:nvSpPr>
-        <p:spPr>
-          <a:xfrm>
-            <a:off x="822960" y="1325880"/>
-            <a:ext cx="10378440" cy="4800600"/>
-          </a:xfrm>
-          <a:prstGeom prst="rect">
-            <a:avLst/>
-          </a:prstGeom>
-          <a:noFill/>
-          <a:ln/>
-        </p:spPr>
-        <p:txBody>
-          <a:bodyPr wrap="square" lIns="1016" tIns="1016" rIns="1016" bIns="1016" rtlCol="0" anchor="t">
+          <p:cNvPr id="8" name="Text 6"/>
+          <p:cNvSpPr/>
+          <p:nvPr/>
+        </p:nvSpPr>
+        <p:spPr>
+          <a:xfrm>
+            <a:off x="868680" y="1417320"/>
+            <a:ext cx="6675120" cy="4434840"/>
+          </a:xfrm>
+          <a:prstGeom prst="rect">
+            <a:avLst/>
+          </a:prstGeom>
+          <a:noFill/>
+          <a:ln/>
+        </p:spPr>
+        <p:txBody>
+          <a:bodyPr wrap="square" lIns="635" tIns="635" rIns="635" bIns="635" rtlCol="0" anchor="t">
             <a:normAutofit/>
           </a:bodyPr>
           <a:lstStyle/>
           <a:p>
+            <a:r>
+              <a:rPr lang="en-US" sz="1700" dirty="0">
+                <a:solidFill>
+                  <a:srgbClr val="17364A"/>
+                </a:solidFill>
+                <a:latin typeface="Aptos" pitchFamily="34" charset="0"/>
+                <a:ea typeface="Aptos" pitchFamily="34" charset="-122"/>
+                <a:cs typeface="Aptos" pitchFamily="34" charset="-120"/>
+              </a:rPr>
+              <a:t>Model drift.</a:t>
+            </a:r>
+            <a:endParaRPr lang="en-US" sz="1700" dirty="0"/>
+          </a:p>
+          <a:p>
+            <a:r>
+              <a:rPr lang="en-US" sz="1700" dirty="0">
+                <a:solidFill>
+                  <a:srgbClr val="17364A"/>
+                </a:solidFill>
+                <a:latin typeface="Aptos" pitchFamily="34" charset="0"/>
+                <a:ea typeface="Aptos" pitchFamily="34" charset="-122"/>
+                <a:cs typeface="Aptos" pitchFamily="34" charset="-120"/>
+              </a:rPr>
+              <a:t>Performance may change over time.</a:t>
+            </a:r>
+            <a:endParaRPr lang="en-US" sz="1700" dirty="0"/>
+          </a:p>
+          <a:p>
+            <a:r>
+              <a:rPr lang="en-US" sz="1700" dirty="0">
+                <a:solidFill>
+                  <a:srgbClr val="17364A"/>
+                </a:solidFill>
+                <a:latin typeface="Aptos" pitchFamily="34" charset="0"/>
+                <a:ea typeface="Aptos" pitchFamily="34" charset="-122"/>
+                <a:cs typeface="Aptos" pitchFamily="34" charset="-120"/>
+              </a:rPr>
+              <a:t>Guardrails include periodic recalibration, drift monitoring, and authority to pause or modify use.</a:t>
+            </a:r>
+            <a:endParaRPr lang="en-US" sz="1700" dirty="0"/>
+          </a:p>
+        </p:txBody>
+      </p:sp>
+      <p:sp>
+        <p:nvSpPr>
+          <p:cNvPr id="9" name="Shape 7"/>
+          <p:cNvSpPr/>
+          <p:nvPr/>
+        </p:nvSpPr>
+        <p:spPr>
+          <a:xfrm>
+            <a:off x="7909560" y="1417320"/>
+            <a:ext cx="3154680" cy="1828800"/>
+          </a:xfrm>
+          <a:prstGeom prst="roundRect">
+            <a:avLst>
+              <a:gd name="adj" fmla="val 6000"/>
+            </a:avLst>
+          </a:prstGeom>
+          <a:solidFill>
+            <a:srgbClr val="EEF8ED"/>
+          </a:solidFill>
+          <a:ln w="12700">
+            <a:solidFill>
+              <a:srgbClr val="B9D7E6"/>
+            </a:solidFill>
+            <a:prstDash val="solid"/>
+          </a:ln>
+        </p:spPr>
+      </p:sp>
+      <p:sp>
+        <p:nvSpPr>
+          <p:cNvPr id="10" name="Text 8"/>
+          <p:cNvSpPr/>
+          <p:nvPr/>
+        </p:nvSpPr>
+        <p:spPr>
+          <a:xfrm>
+            <a:off x="8074152" y="1563624"/>
+            <a:ext cx="2825496" cy="201168"/>
+          </a:xfrm>
+          <a:prstGeom prst="rect">
+            <a:avLst/>
+          </a:prstGeom>
+          <a:noFill/>
+          <a:ln/>
+        </p:spPr>
+        <p:txBody>
+          <a:bodyPr wrap="square" lIns="0" tIns="0" rIns="0" bIns="0" rtlCol="0" anchor="ctr"/>
+          <a:lstStyle/>
+          <a:p>
             <a:pPr indent="0" marL="0">
               <a:buNone/>
             </a:pPr>
             <a:r>
-              <a:rPr lang="en-US" sz="1420" dirty="0">
+              <a:rPr lang="en-US" sz="950" b="1" dirty="0">
+                <a:solidFill>
+                  <a:srgbClr val="0068B7"/>
+                </a:solidFill>
+                <a:latin typeface="Aptos" pitchFamily="34" charset="0"/>
+                <a:ea typeface="Aptos" pitchFamily="34" charset="-122"/>
+                <a:cs typeface="Aptos" pitchFamily="34" charset="-120"/>
+              </a:rPr>
+              <a:t>Key idea</a:t>
+            </a:r>
+            <a:endParaRPr lang="en-US" sz="950" dirty="0"/>
+          </a:p>
+        </p:txBody>
+      </p:sp>
+      <p:sp>
+        <p:nvSpPr>
+          <p:cNvPr id="11" name="Text 9"/>
+          <p:cNvSpPr/>
+          <p:nvPr/>
+        </p:nvSpPr>
+        <p:spPr>
+          <a:xfrm>
+            <a:off x="8074152" y="1856232"/>
+            <a:ext cx="2825496" cy="1261872"/>
+          </a:xfrm>
+          <a:prstGeom prst="rect">
+            <a:avLst/>
+          </a:prstGeom>
+          <a:noFill/>
+          <a:ln/>
+        </p:spPr>
+        <p:txBody>
+          <a:bodyPr wrap="square" lIns="0" tIns="0" rIns="0" bIns="0" rtlCol="0" anchor="t">
+            <a:normAutofit/>
+          </a:bodyPr>
+          <a:lstStyle/>
+          <a:p>
+            <a:pPr indent="0" marL="0">
+              <a:buNone/>
+            </a:pPr>
+            <a:r>
+              <a:rPr lang="en-US" sz="1250" dirty="0">
                 <a:solidFill>
                   <a:srgbClr val="17364A"/>
                 </a:solidFill>
@@ -3829,9 +5136,116 @@
                 <a:ea typeface="Aptos" pitchFamily="34" charset="-122"/>
                 <a:cs typeface="Aptos" pitchFamily="34" charset="-120"/>
               </a:rPr>
-              <a:t>What outcome is being predicted, and over what time period? What public health action will follow a high-risk score? Which data sources may underrepresent some populations?</a:t>
-            </a:r>
-            <a:endParaRPr lang="en-US" sz="1420" dirty="0"/>
+              <a:t>Model drift.</a:t>
+            </a:r>
+            <a:endParaRPr lang="en-US" sz="1250" dirty="0"/>
+          </a:p>
+        </p:txBody>
+      </p:sp>
+      <p:sp>
+        <p:nvSpPr>
+          <p:cNvPr id="12" name="Shape 10"/>
+          <p:cNvSpPr/>
+          <p:nvPr/>
+        </p:nvSpPr>
+        <p:spPr>
+          <a:xfrm>
+            <a:off x="7909560" y="3520440"/>
+            <a:ext cx="3154680" cy="1737360"/>
+          </a:xfrm>
+          <a:prstGeom prst="roundRect">
+            <a:avLst>
+              <a:gd name="adj" fmla="val 6316"/>
+            </a:avLst>
+          </a:prstGeom>
+          <a:solidFill>
+            <a:srgbClr val="EAF6F8"/>
+          </a:solidFill>
+          <a:ln w="12700">
+            <a:solidFill>
+              <a:srgbClr val="B9D7E6"/>
+            </a:solidFill>
+            <a:prstDash val="solid"/>
+          </a:ln>
+        </p:spPr>
+      </p:sp>
+      <p:sp>
+        <p:nvSpPr>
+          <p:cNvPr id="13" name="Text 11"/>
+          <p:cNvSpPr/>
+          <p:nvPr/>
+        </p:nvSpPr>
+        <p:spPr>
+          <a:xfrm>
+            <a:off x="8074152" y="3666744"/>
+            <a:ext cx="2825496" cy="201168"/>
+          </a:xfrm>
+          <a:prstGeom prst="rect">
+            <a:avLst/>
+          </a:prstGeom>
+          <a:noFill/>
+          <a:ln/>
+        </p:spPr>
+        <p:txBody>
+          <a:bodyPr wrap="square" lIns="0" tIns="0" rIns="0" bIns="0" rtlCol="0" anchor="ctr"/>
+          <a:lstStyle/>
+          <a:p>
+            <a:pPr indent="0" marL="0">
+              <a:buNone/>
+            </a:pPr>
+            <a:r>
+              <a:rPr lang="en-US" sz="950" b="1" dirty="0">
+                <a:solidFill>
+                  <a:srgbClr val="0068B7"/>
+                </a:solidFill>
+                <a:latin typeface="Aptos" pitchFamily="34" charset="0"/>
+                <a:ea typeface="Aptos" pitchFamily="34" charset="-122"/>
+                <a:cs typeface="Aptos" pitchFamily="34" charset="-120"/>
+              </a:rPr>
+              <a:t>Use this for</a:t>
+            </a:r>
+            <a:endParaRPr lang="en-US" sz="950" dirty="0"/>
+          </a:p>
+        </p:txBody>
+      </p:sp>
+      <p:sp>
+        <p:nvSpPr>
+          <p:cNvPr id="14" name="Text 12"/>
+          <p:cNvSpPr/>
+          <p:nvPr/>
+        </p:nvSpPr>
+        <p:spPr>
+          <a:xfrm>
+            <a:off x="8074152" y="3959352"/>
+            <a:ext cx="2825496" cy="1170432"/>
+          </a:xfrm>
+          <a:prstGeom prst="rect">
+            <a:avLst/>
+          </a:prstGeom>
+          <a:noFill/>
+          <a:ln/>
+        </p:spPr>
+        <p:txBody>
+          <a:bodyPr wrap="square" lIns="0" tIns="0" rIns="0" bIns="0" rtlCol="0" anchor="t">
+            <a:normAutofit/>
+          </a:bodyPr>
+          <a:lstStyle/>
+          <a:p>
+            <a:pPr indent="0" marL="0">
+              <a:buNone/>
+            </a:pPr>
+            <a:r>
+              <a:rPr lang="en-US" sz="1250" dirty="0">
+                <a:solidFill>
+                  <a:srgbClr val="17364A"/>
+                </a:solidFill>
+                <a:latin typeface="Aptos" pitchFamily="34" charset="0"/>
+                <a:ea typeface="Aptos" pitchFamily="34" charset="-122"/>
+                <a:cs typeface="Aptos" pitchFamily="34" charset="-120"/>
+              </a:rPr>
+              <a:t>Connect the concept to public health decisions, safeguards, documentation, or implementation work.</a:t>
+            </a:r>
+            <a:endParaRPr lang="en-US" sz="1250" dirty="0"/>
           </a:p>
         </p:txBody>
       </p:sp>
@@ -3894,7 +5308,32 @@
       </p:sp>
       <p:sp>
         <p:nvSpPr>
-          <p:cNvPr id="3" name="Text 1"/>
+          <p:cNvPr id="3" name="Shape 1"/>
+          <p:cNvSpPr/>
+          <p:nvPr/>
+        </p:nvSpPr>
+        <p:spPr>
+          <a:xfrm>
+            <a:off x="0" y="164592"/>
+            <a:ext cx="146304" cy="6693408"/>
+          </a:xfrm>
+          <a:prstGeom prst="rect">
+            <a:avLst/>
+          </a:prstGeom>
+          <a:solidFill>
+            <a:srgbClr val="2F8A28"/>
+          </a:solidFill>
+          <a:ln w="12700">
+            <a:solidFill>
+              <a:srgbClr val="2F8A28"/>
+            </a:solidFill>
+            <a:prstDash val="solid"/>
+          </a:ln>
+        </p:spPr>
+      </p:sp>
+      <p:sp>
+        <p:nvSpPr>
+          <p:cNvPr id="4" name="Text 2"/>
           <p:cNvSpPr/>
           <p:nvPr/>
         </p:nvSpPr>
@@ -3933,7 +5372,7 @@
       </p:sp>
       <p:sp>
         <p:nvSpPr>
-          <p:cNvPr id="4" name="Text 2"/>
+          <p:cNvPr id="5" name="Text 3"/>
           <p:cNvSpPr/>
           <p:nvPr/>
         </p:nvSpPr>
@@ -3972,7 +5411,7 @@
       </p:sp>
       <p:sp>
         <p:nvSpPr>
-          <p:cNvPr id="5" name="Text 3"/>
+          <p:cNvPr id="6" name="Text 4"/>
           <p:cNvSpPr/>
           <p:nvPr/>
         </p:nvSpPr>
@@ -4011,13 +5450,77 @@
       </p:sp>
       <p:sp>
         <p:nvSpPr>
-          <p:cNvPr id="6" name="Text 4"/>
+          <p:cNvPr id="7" name="Shape 5"/>
           <p:cNvSpPr/>
           <p:nvPr/>
         </p:nvSpPr>
         <p:spPr>
           <a:xfrm>
             <a:off x="640080" y="658368"/>
+            <a:ext cx="420624" cy="420624"/>
+          </a:xfrm>
+          <a:prstGeom prst="ellipse">
+            <a:avLst/>
+          </a:prstGeom>
+          <a:solidFill>
+            <a:srgbClr val="0068B7"/>
+          </a:solidFill>
+          <a:ln w="12700">
+            <a:solidFill>
+              <a:srgbClr val="0068B7"/>
+            </a:solidFill>
+            <a:prstDash val="solid"/>
+          </a:ln>
+        </p:spPr>
+      </p:sp>
+      <p:sp>
+        <p:nvSpPr>
+          <p:cNvPr id="8" name="Text 6"/>
+          <p:cNvSpPr/>
+          <p:nvPr/>
+        </p:nvSpPr>
+        <p:spPr>
+          <a:xfrm>
+            <a:off x="640080" y="731520"/>
+            <a:ext cx="420624" cy="164592"/>
+          </a:xfrm>
+          <a:prstGeom prst="rect">
+            <a:avLst/>
+          </a:prstGeom>
+          <a:noFill/>
+          <a:ln/>
+        </p:spPr>
+        <p:txBody>
+          <a:bodyPr wrap="square" lIns="0" tIns="0" rIns="0" bIns="0" rtlCol="0" anchor="ctr"/>
+          <a:lstStyle/>
+          <a:p>
+            <a:pPr algn="ctr" indent="0" marL="0">
+              <a:buNone/>
+            </a:pPr>
+            <a:r>
+              <a:rPr lang="en-US" sz="1100" b="1" dirty="0">
+                <a:solidFill>
+                  <a:srgbClr val="FFFFFF"/>
+                </a:solidFill>
+                <a:latin typeface="Aptos" pitchFamily="34" charset="0"/>
+                <a:ea typeface="Aptos" pitchFamily="34" charset="-122"/>
+                <a:cs typeface="Aptos" pitchFamily="34" charset="-120"/>
+              </a:rPr>
+              <a:t>7</a:t>
+            </a:r>
+            <a:endParaRPr lang="en-US" sz="1100" dirty="0"/>
+          </a:p>
+        </p:txBody>
+      </p:sp>
+      <p:sp>
+        <p:nvSpPr>
+          <p:cNvPr id="9" name="Text 7"/>
+          <p:cNvSpPr/>
+          <p:nvPr/>
+        </p:nvSpPr>
+        <p:spPr>
+          <a:xfrm>
+            <a:off x="640080" y="621792"/>
             <a:ext cx="10881360" cy="566928"/>
           </a:xfrm>
           <a:prstGeom prst="rect">
@@ -4044,7 +5547,7 @@
                 <a:ea typeface="Aptos Display" pitchFamily="34" charset="-122"/>
                 <a:cs typeface="Aptos Display" pitchFamily="34" charset="-120"/>
               </a:rPr>
-              <a:t>Reflection Questions Continued</a:t>
+              <a:t>Application to AI-Supported Workflows</a:t>
             </a:r>
             <a:endParaRPr lang="en-US" sz="2700" dirty="0"/>
           </a:p>
@@ -4052,32 +5555,178 @@
       </p:sp>
       <p:sp>
         <p:nvSpPr>
-          <p:cNvPr id="7" name="Text 5"/>
-          <p:cNvSpPr/>
-          <p:nvPr/>
-        </p:nvSpPr>
-        <p:spPr>
-          <a:xfrm>
-            <a:off x="822960" y="1325880"/>
-            <a:ext cx="10378440" cy="4800600"/>
-          </a:xfrm>
-          <a:prstGeom prst="rect">
-            <a:avLst/>
-          </a:prstGeom>
-          <a:noFill/>
-          <a:ln/>
-        </p:spPr>
-        <p:txBody>
-          <a:bodyPr wrap="square" lIns="1016" tIns="1016" rIns="1016" bIns="1016" rtlCol="0" anchor="t">
+          <p:cNvPr id="10" name="Text 8"/>
+          <p:cNvSpPr/>
+          <p:nvPr/>
+        </p:nvSpPr>
+        <p:spPr>
+          <a:xfrm>
+            <a:off x="868680" y="1417320"/>
+            <a:ext cx="6675120" cy="4434840"/>
+          </a:xfrm>
+          <a:prstGeom prst="rect">
+            <a:avLst/>
+          </a:prstGeom>
+          <a:noFill/>
+          <a:ln/>
+        </p:spPr>
+        <p:txBody>
+          <a:bodyPr wrap="square" lIns="635" tIns="635" rIns="635" bIns="635" rtlCol="0" anchor="t">
             <a:normAutofit/>
           </a:bodyPr>
           <a:lstStyle/>
           <a:p>
+            <a:r>
+              <a:rPr lang="en-US" sz="1700" dirty="0">
+                <a:solidFill>
+                  <a:srgbClr val="17364A"/>
+                </a:solidFill>
+                <a:latin typeface="Aptos" pitchFamily="34" charset="0"/>
+                <a:ea typeface="Aptos" pitchFamily="34" charset="-122"/>
+                <a:cs typeface="Aptos" pitchFamily="34" charset="-120"/>
+              </a:rPr>
+              <a:t>Predictive analytics may be embedded in dashboards, case management systems, early warning tools, outreach lists, or.</a:t>
+            </a:r>
+            <a:endParaRPr lang="en-US" sz="1700" dirty="0"/>
+          </a:p>
+          <a:p>
+            <a:r>
+              <a:rPr lang="en-US" sz="1700" dirty="0">
+                <a:solidFill>
+                  <a:srgbClr val="17364A"/>
+                </a:solidFill>
+                <a:latin typeface="Aptos" pitchFamily="34" charset="0"/>
+                <a:ea typeface="Aptos" pitchFamily="34" charset="-122"/>
+                <a:cs typeface="Aptos" pitchFamily="34" charset="-120"/>
+              </a:rPr>
+              <a:t>Generative AI may explain or summarize predictive outputs, but those explanations must not imply certainty that the model.</a:t>
+            </a:r>
+            <a:endParaRPr lang="en-US" sz="1700" dirty="0"/>
+          </a:p>
+          <a:p>
+            <a:r>
+              <a:rPr lang="en-US" sz="1700" dirty="0">
+                <a:solidFill>
+                  <a:srgbClr val="17364A"/>
+                </a:solidFill>
+                <a:latin typeface="Aptos" pitchFamily="34" charset="0"/>
+                <a:ea typeface="Aptos" pitchFamily="34" charset="-122"/>
+                <a:cs typeface="Aptos" pitchFamily="34" charset="-120"/>
+              </a:rPr>
+              <a:t>RAG systems may combine risk results with policy guidance, while agentic workflows may trigger tasks or notifications based.</a:t>
+            </a:r>
+            <a:endParaRPr lang="en-US" sz="1700" dirty="0"/>
+          </a:p>
+          <a:p>
+            <a:r>
+              <a:rPr lang="en-US" sz="1700" dirty="0">
+                <a:solidFill>
+                  <a:srgbClr val="17364A"/>
+                </a:solidFill>
+                <a:latin typeface="Aptos" pitchFamily="34" charset="0"/>
+                <a:ea typeface="Aptos" pitchFamily="34" charset="-122"/>
+                <a:cs typeface="Aptos" pitchFamily="34" charset="-120"/>
+              </a:rPr>
+              <a:t>When prediction supports public health action, the workflow should make the score, its limitations, and the source data.</a:t>
+            </a:r>
+            <a:endParaRPr lang="en-US" sz="1700" dirty="0"/>
+          </a:p>
+        </p:txBody>
+      </p:sp>
+      <p:sp>
+        <p:nvSpPr>
+          <p:cNvPr id="11" name="Shape 9"/>
+          <p:cNvSpPr/>
+          <p:nvPr/>
+        </p:nvSpPr>
+        <p:spPr>
+          <a:xfrm>
+            <a:off x="7909560" y="1417320"/>
+            <a:ext cx="3154680" cy="1828800"/>
+          </a:xfrm>
+          <a:prstGeom prst="roundRect">
+            <a:avLst>
+              <a:gd name="adj" fmla="val 6000"/>
+            </a:avLst>
+          </a:prstGeom>
+          <a:solidFill>
+            <a:srgbClr val="EEF8ED"/>
+          </a:solidFill>
+          <a:ln w="12700">
+            <a:solidFill>
+              <a:srgbClr val="B9D7E6"/>
+            </a:solidFill>
+            <a:prstDash val="solid"/>
+          </a:ln>
+        </p:spPr>
+      </p:sp>
+      <p:sp>
+        <p:nvSpPr>
+          <p:cNvPr id="12" name="Text 10"/>
+          <p:cNvSpPr/>
+          <p:nvPr/>
+        </p:nvSpPr>
+        <p:spPr>
+          <a:xfrm>
+            <a:off x="8074152" y="1563624"/>
+            <a:ext cx="2825496" cy="201168"/>
+          </a:xfrm>
+          <a:prstGeom prst="rect">
+            <a:avLst/>
+          </a:prstGeom>
+          <a:noFill/>
+          <a:ln/>
+        </p:spPr>
+        <p:txBody>
+          <a:bodyPr wrap="square" lIns="0" tIns="0" rIns="0" bIns="0" rtlCol="0" anchor="ctr"/>
+          <a:lstStyle/>
+          <a:p>
             <a:pPr indent="0" marL="0">
               <a:buNone/>
             </a:pPr>
             <a:r>
-              <a:rPr lang="en-US" sz="1420" dirty="0">
+              <a:rPr lang="en-US" sz="950" b="1" dirty="0">
+                <a:solidFill>
+                  <a:srgbClr val="0068B7"/>
+                </a:solidFill>
+                <a:latin typeface="Aptos" pitchFamily="34" charset="0"/>
+                <a:ea typeface="Aptos" pitchFamily="34" charset="-122"/>
+                <a:cs typeface="Aptos" pitchFamily="34" charset="-120"/>
+              </a:rPr>
+              <a:t>Key idea</a:t>
+            </a:r>
+            <a:endParaRPr lang="en-US" sz="950" dirty="0"/>
+          </a:p>
+        </p:txBody>
+      </p:sp>
+      <p:sp>
+        <p:nvSpPr>
+          <p:cNvPr id="13" name="Text 11"/>
+          <p:cNvSpPr/>
+          <p:nvPr/>
+        </p:nvSpPr>
+        <p:spPr>
+          <a:xfrm>
+            <a:off x="8074152" y="1856232"/>
+            <a:ext cx="2825496" cy="1261872"/>
+          </a:xfrm>
+          <a:prstGeom prst="rect">
+            <a:avLst/>
+          </a:prstGeom>
+          <a:noFill/>
+          <a:ln/>
+        </p:spPr>
+        <p:txBody>
+          <a:bodyPr wrap="square" lIns="0" tIns="0" rIns="0" bIns="0" rtlCol="0" anchor="t">
+            <a:normAutofit/>
+          </a:bodyPr>
+          <a:lstStyle/>
+          <a:p>
+            <a:pPr indent="0" marL="0">
+              <a:buNone/>
+            </a:pPr>
+            <a:r>
+              <a:rPr lang="en-US" sz="1250" dirty="0">
                 <a:solidFill>
                   <a:srgbClr val="17364A"/>
                 </a:solidFill>
@@ -4085,9 +5734,116 @@
                 <a:ea typeface="Aptos" pitchFamily="34" charset="-122"/>
                 <a:cs typeface="Aptos" pitchFamily="34" charset="-120"/>
               </a:rPr>
-              <a:t>What are the consequences of false positives and false negatives? How will thresholds, calibration, and subgroup performance be monitored?</a:t>
-            </a:r>
-            <a:endParaRPr lang="en-US" sz="1420" dirty="0"/>
+              <a:t>Predictive analytics may be embedded in dashboards, case management systems, early warning tools, outreach lists, or.</a:t>
+            </a:r>
+            <a:endParaRPr lang="en-US" sz="1250" dirty="0"/>
+          </a:p>
+        </p:txBody>
+      </p:sp>
+      <p:sp>
+        <p:nvSpPr>
+          <p:cNvPr id="14" name="Shape 12"/>
+          <p:cNvSpPr/>
+          <p:nvPr/>
+        </p:nvSpPr>
+        <p:spPr>
+          <a:xfrm>
+            <a:off x="7909560" y="3520440"/>
+            <a:ext cx="3154680" cy="1737360"/>
+          </a:xfrm>
+          <a:prstGeom prst="roundRect">
+            <a:avLst>
+              <a:gd name="adj" fmla="val 6316"/>
+            </a:avLst>
+          </a:prstGeom>
+          <a:solidFill>
+            <a:srgbClr val="EAF6F8"/>
+          </a:solidFill>
+          <a:ln w="12700">
+            <a:solidFill>
+              <a:srgbClr val="B9D7E6"/>
+            </a:solidFill>
+            <a:prstDash val="solid"/>
+          </a:ln>
+        </p:spPr>
+      </p:sp>
+      <p:sp>
+        <p:nvSpPr>
+          <p:cNvPr id="15" name="Text 13"/>
+          <p:cNvSpPr/>
+          <p:nvPr/>
+        </p:nvSpPr>
+        <p:spPr>
+          <a:xfrm>
+            <a:off x="8074152" y="3666744"/>
+            <a:ext cx="2825496" cy="201168"/>
+          </a:xfrm>
+          <a:prstGeom prst="rect">
+            <a:avLst/>
+          </a:prstGeom>
+          <a:noFill/>
+          <a:ln/>
+        </p:spPr>
+        <p:txBody>
+          <a:bodyPr wrap="square" lIns="0" tIns="0" rIns="0" bIns="0" rtlCol="0" anchor="ctr"/>
+          <a:lstStyle/>
+          <a:p>
+            <a:pPr indent="0" marL="0">
+              <a:buNone/>
+            </a:pPr>
+            <a:r>
+              <a:rPr lang="en-US" sz="950" b="1" dirty="0">
+                <a:solidFill>
+                  <a:srgbClr val="0068B7"/>
+                </a:solidFill>
+                <a:latin typeface="Aptos" pitchFamily="34" charset="0"/>
+                <a:ea typeface="Aptos" pitchFamily="34" charset="-122"/>
+                <a:cs typeface="Aptos" pitchFamily="34" charset="-120"/>
+              </a:rPr>
+              <a:t>Use this for</a:t>
+            </a:r>
+            <a:endParaRPr lang="en-US" sz="950" dirty="0"/>
+          </a:p>
+        </p:txBody>
+      </p:sp>
+      <p:sp>
+        <p:nvSpPr>
+          <p:cNvPr id="16" name="Text 14"/>
+          <p:cNvSpPr/>
+          <p:nvPr/>
+        </p:nvSpPr>
+        <p:spPr>
+          <a:xfrm>
+            <a:off x="8074152" y="3959352"/>
+            <a:ext cx="2825496" cy="1170432"/>
+          </a:xfrm>
+          <a:prstGeom prst="rect">
+            <a:avLst/>
+          </a:prstGeom>
+          <a:noFill/>
+          <a:ln/>
+        </p:spPr>
+        <p:txBody>
+          <a:bodyPr wrap="square" lIns="0" tIns="0" rIns="0" bIns="0" rtlCol="0" anchor="t">
+            <a:normAutofit/>
+          </a:bodyPr>
+          <a:lstStyle/>
+          <a:p>
+            <a:pPr indent="0" marL="0">
+              <a:buNone/>
+            </a:pPr>
+            <a:r>
+              <a:rPr lang="en-US" sz="1250" dirty="0">
+                <a:solidFill>
+                  <a:srgbClr val="17364A"/>
+                </a:solidFill>
+                <a:latin typeface="Aptos" pitchFamily="34" charset="0"/>
+                <a:ea typeface="Aptos" pitchFamily="34" charset="-122"/>
+                <a:cs typeface="Aptos" pitchFamily="34" charset="-120"/>
+              </a:rPr>
+              <a:t>Connect the concept to public health decisions, safeguards, documentation, or implementation work.</a:t>
+            </a:r>
+            <a:endParaRPr lang="en-US" sz="1250" dirty="0"/>
           </a:p>
         </p:txBody>
       </p:sp>
@@ -4150,7 +5906,32 @@
       </p:sp>
       <p:sp>
         <p:nvSpPr>
-          <p:cNvPr id="3" name="Text 1"/>
+          <p:cNvPr id="3" name="Shape 1"/>
+          <p:cNvSpPr/>
+          <p:nvPr/>
+        </p:nvSpPr>
+        <p:spPr>
+          <a:xfrm>
+            <a:off x="0" y="164592"/>
+            <a:ext cx="146304" cy="6693408"/>
+          </a:xfrm>
+          <a:prstGeom prst="rect">
+            <a:avLst/>
+          </a:prstGeom>
+          <a:solidFill>
+            <a:srgbClr val="2F8A28"/>
+          </a:solidFill>
+          <a:ln w="12700">
+            <a:solidFill>
+              <a:srgbClr val="2F8A28"/>
+            </a:solidFill>
+            <a:prstDash val="solid"/>
+          </a:ln>
+        </p:spPr>
+      </p:sp>
+      <p:sp>
+        <p:nvSpPr>
+          <p:cNvPr id="4" name="Text 2"/>
           <p:cNvSpPr/>
           <p:nvPr/>
         </p:nvSpPr>
@@ -4189,7 +5970,7 @@
       </p:sp>
       <p:sp>
         <p:nvSpPr>
-          <p:cNvPr id="4" name="Text 2"/>
+          <p:cNvPr id="5" name="Text 3"/>
           <p:cNvSpPr/>
           <p:nvPr/>
         </p:nvSpPr>
@@ -4228,7 +6009,7 @@
       </p:sp>
       <p:sp>
         <p:nvSpPr>
-          <p:cNvPr id="5" name="Text 3"/>
+          <p:cNvPr id="6" name="Text 4"/>
           <p:cNvSpPr/>
           <p:nvPr/>
         </p:nvSpPr>
@@ -4267,13 +6048,77 @@
       </p:sp>
       <p:sp>
         <p:nvSpPr>
-          <p:cNvPr id="6" name="Text 4"/>
+          <p:cNvPr id="7" name="Shape 5"/>
           <p:cNvSpPr/>
           <p:nvPr/>
         </p:nvSpPr>
         <p:spPr>
           <a:xfrm>
             <a:off x="640080" y="658368"/>
+            <a:ext cx="420624" cy="420624"/>
+          </a:xfrm>
+          <a:prstGeom prst="ellipse">
+            <a:avLst/>
+          </a:prstGeom>
+          <a:solidFill>
+            <a:srgbClr val="0068B7"/>
+          </a:solidFill>
+          <a:ln w="12700">
+            <a:solidFill>
+              <a:srgbClr val="0068B7"/>
+            </a:solidFill>
+            <a:prstDash val="solid"/>
+          </a:ln>
+        </p:spPr>
+      </p:sp>
+      <p:sp>
+        <p:nvSpPr>
+          <p:cNvPr id="8" name="Text 6"/>
+          <p:cNvSpPr/>
+          <p:nvPr/>
+        </p:nvSpPr>
+        <p:spPr>
+          <a:xfrm>
+            <a:off x="640080" y="731520"/>
+            <a:ext cx="420624" cy="164592"/>
+          </a:xfrm>
+          <a:prstGeom prst="rect">
+            <a:avLst/>
+          </a:prstGeom>
+          <a:noFill/>
+          <a:ln/>
+        </p:spPr>
+        <p:txBody>
+          <a:bodyPr wrap="square" lIns="0" tIns="0" rIns="0" bIns="0" rtlCol="0" anchor="ctr"/>
+          <a:lstStyle/>
+          <a:p>
+            <a:pPr algn="ctr" indent="0" marL="0">
+              <a:buNone/>
+            </a:pPr>
+            <a:r>
+              <a:rPr lang="en-US" sz="1100" b="1" dirty="0">
+                <a:solidFill>
+                  <a:srgbClr val="FFFFFF"/>
+                </a:solidFill>
+                <a:latin typeface="Aptos" pitchFamily="34" charset="0"/>
+                <a:ea typeface="Aptos" pitchFamily="34" charset="-122"/>
+                <a:cs typeface="Aptos" pitchFamily="34" charset="-120"/>
+              </a:rPr>
+              <a:t>8</a:t>
+            </a:r>
+            <a:endParaRPr lang="en-US" sz="1100" dirty="0"/>
+          </a:p>
+        </p:txBody>
+      </p:sp>
+      <p:sp>
+        <p:nvSpPr>
+          <p:cNvPr id="9" name="Text 7"/>
+          <p:cNvSpPr/>
+          <p:nvPr/>
+        </p:nvSpPr>
+        <p:spPr>
+          <a:xfrm>
+            <a:off x="640080" y="621792"/>
             <a:ext cx="10881360" cy="566928"/>
           </a:xfrm>
           <a:prstGeom prst="rect">
@@ -4300,7 +6145,7 @@
                 <a:ea typeface="Aptos Display" pitchFamily="34" charset="-122"/>
                 <a:cs typeface="Aptos Display" pitchFamily="34" charset="-120"/>
               </a:rPr>
-              <a:t>Practical Exercise</a:t>
+              <a:t>Reflection Questions</a:t>
             </a:r>
             <a:endParaRPr lang="en-US" sz="2700" dirty="0"/>
           </a:p>
@@ -4308,32 +6153,164 @@
       </p:sp>
       <p:sp>
         <p:nvSpPr>
-          <p:cNvPr id="7" name="Text 5"/>
-          <p:cNvSpPr/>
-          <p:nvPr/>
-        </p:nvSpPr>
-        <p:spPr>
-          <a:xfrm>
-            <a:off x="822960" y="1325880"/>
-            <a:ext cx="10378440" cy="4800600"/>
-          </a:xfrm>
-          <a:prstGeom prst="rect">
-            <a:avLst/>
-          </a:prstGeom>
-          <a:noFill/>
-          <a:ln/>
-        </p:spPr>
-        <p:txBody>
-          <a:bodyPr wrap="square" lIns="1016" tIns="1016" rIns="1016" bIns="1016" rtlCol="0" anchor="t">
+          <p:cNvPr id="10" name="Text 8"/>
+          <p:cNvSpPr/>
+          <p:nvPr/>
+        </p:nvSpPr>
+        <p:spPr>
+          <a:xfrm>
+            <a:off x="868680" y="1417320"/>
+            <a:ext cx="6675120" cy="4434840"/>
+          </a:xfrm>
+          <a:prstGeom prst="rect">
+            <a:avLst/>
+          </a:prstGeom>
+          <a:noFill/>
+          <a:ln/>
+        </p:spPr>
+        <p:txBody>
+          <a:bodyPr wrap="square" lIns="635" tIns="635" rIns="635" bIns="635" rtlCol="0" anchor="t">
             <a:normAutofit/>
           </a:bodyPr>
           <a:lstStyle/>
           <a:p>
+            <a:r>
+              <a:rPr lang="en-US" sz="1700" dirty="0">
+                <a:solidFill>
+                  <a:srgbClr val="17364A"/>
+                </a:solidFill>
+                <a:latin typeface="Aptos" pitchFamily="34" charset="0"/>
+                <a:ea typeface="Aptos" pitchFamily="34" charset="-122"/>
+                <a:cs typeface="Aptos" pitchFamily="34" charset="-120"/>
+              </a:rPr>
+              <a:t>What outcome is being predicted, and over what time period?</a:t>
+            </a:r>
+            <a:endParaRPr lang="en-US" sz="1700" dirty="0"/>
+          </a:p>
+          <a:p>
+            <a:r>
+              <a:rPr lang="en-US" sz="1700" dirty="0">
+                <a:solidFill>
+                  <a:srgbClr val="17364A"/>
+                </a:solidFill>
+                <a:latin typeface="Aptos" pitchFamily="34" charset="0"/>
+                <a:ea typeface="Aptos" pitchFamily="34" charset="-122"/>
+                <a:cs typeface="Aptos" pitchFamily="34" charset="-120"/>
+              </a:rPr>
+              <a:t>What public health action will follow a high-risk score?</a:t>
+            </a:r>
+            <a:endParaRPr lang="en-US" sz="1700" dirty="0"/>
+          </a:p>
+          <a:p>
+            <a:r>
+              <a:rPr lang="en-US" sz="1700" dirty="0">
+                <a:solidFill>
+                  <a:srgbClr val="17364A"/>
+                </a:solidFill>
+                <a:latin typeface="Aptos" pitchFamily="34" charset="0"/>
+                <a:ea typeface="Aptos" pitchFamily="34" charset="-122"/>
+                <a:cs typeface="Aptos" pitchFamily="34" charset="-120"/>
+              </a:rPr>
+              <a:t>Which data sources may underrepresent some populations?</a:t>
+            </a:r>
+            <a:endParaRPr lang="en-US" sz="1700" dirty="0"/>
+          </a:p>
+        </p:txBody>
+      </p:sp>
+      <p:sp>
+        <p:nvSpPr>
+          <p:cNvPr id="11" name="Shape 9"/>
+          <p:cNvSpPr/>
+          <p:nvPr/>
+        </p:nvSpPr>
+        <p:spPr>
+          <a:xfrm>
+            <a:off x="7909560" y="1417320"/>
+            <a:ext cx="3154680" cy="1828800"/>
+          </a:xfrm>
+          <a:prstGeom prst="roundRect">
+            <a:avLst>
+              <a:gd name="adj" fmla="val 6000"/>
+            </a:avLst>
+          </a:prstGeom>
+          <a:solidFill>
+            <a:srgbClr val="EEF8ED"/>
+          </a:solidFill>
+          <a:ln w="12700">
+            <a:solidFill>
+              <a:srgbClr val="B9D7E6"/>
+            </a:solidFill>
+            <a:prstDash val="solid"/>
+          </a:ln>
+        </p:spPr>
+      </p:sp>
+      <p:sp>
+        <p:nvSpPr>
+          <p:cNvPr id="12" name="Text 10"/>
+          <p:cNvSpPr/>
+          <p:nvPr/>
+        </p:nvSpPr>
+        <p:spPr>
+          <a:xfrm>
+            <a:off x="8074152" y="1563624"/>
+            <a:ext cx="2825496" cy="201168"/>
+          </a:xfrm>
+          <a:prstGeom prst="rect">
+            <a:avLst/>
+          </a:prstGeom>
+          <a:noFill/>
+          <a:ln/>
+        </p:spPr>
+        <p:txBody>
+          <a:bodyPr wrap="square" lIns="0" tIns="0" rIns="0" bIns="0" rtlCol="0" anchor="ctr"/>
+          <a:lstStyle/>
+          <a:p>
             <a:pPr indent="0" marL="0">
               <a:buNone/>
             </a:pPr>
             <a:r>
-              <a:rPr lang="en-US" sz="1420" dirty="0">
+              <a:rPr lang="en-US" sz="950" b="1" dirty="0">
+                <a:solidFill>
+                  <a:srgbClr val="0068B7"/>
+                </a:solidFill>
+                <a:latin typeface="Aptos" pitchFamily="34" charset="0"/>
+                <a:ea typeface="Aptos" pitchFamily="34" charset="-122"/>
+                <a:cs typeface="Aptos" pitchFamily="34" charset="-120"/>
+              </a:rPr>
+              <a:t>Key idea</a:t>
+            </a:r>
+            <a:endParaRPr lang="en-US" sz="950" dirty="0"/>
+          </a:p>
+        </p:txBody>
+      </p:sp>
+      <p:sp>
+        <p:nvSpPr>
+          <p:cNvPr id="13" name="Text 11"/>
+          <p:cNvSpPr/>
+          <p:nvPr/>
+        </p:nvSpPr>
+        <p:spPr>
+          <a:xfrm>
+            <a:off x="8074152" y="1856232"/>
+            <a:ext cx="2825496" cy="1261872"/>
+          </a:xfrm>
+          <a:prstGeom prst="rect">
+            <a:avLst/>
+          </a:prstGeom>
+          <a:noFill/>
+          <a:ln/>
+        </p:spPr>
+        <p:txBody>
+          <a:bodyPr wrap="square" lIns="0" tIns="0" rIns="0" bIns="0" rtlCol="0" anchor="t">
+            <a:normAutofit/>
+          </a:bodyPr>
+          <a:lstStyle/>
+          <a:p>
+            <a:pPr indent="0" marL="0">
+              <a:buNone/>
+            </a:pPr>
+            <a:r>
+              <a:rPr lang="en-US" sz="1250" dirty="0">
                 <a:solidFill>
                   <a:srgbClr val="17364A"/>
                 </a:solidFill>
@@ -4341,9 +6318,116 @@
                 <a:ea typeface="Aptos" pitchFamily="34" charset="-122"/>
                 <a:cs typeface="Aptos" pitchFamily="34" charset="-120"/>
               </a:rPr>
-              <a:t>Create a predictive model review plan for one public health use case. Include the outcome, population, time horizon, data sources, candidate features, risk categories, thresholds, performance measures, subgroup evaluation plan, human review process, and monitoring indicators. The plan should also identify whether the use is supportive, restrictive, or consequential. Predictive tools used to allocate supportive resources have different risk profiles than tools used to deny, delay, or reduce services.</a:t>
-            </a:r>
-            <a:endParaRPr lang="en-US" sz="1420" dirty="0"/>
+              <a:t>What outcome is being predicted, and over what time period?</a:t>
+            </a:r>
+            <a:endParaRPr lang="en-US" sz="1250" dirty="0"/>
+          </a:p>
+        </p:txBody>
+      </p:sp>
+      <p:sp>
+        <p:nvSpPr>
+          <p:cNvPr id="14" name="Shape 12"/>
+          <p:cNvSpPr/>
+          <p:nvPr/>
+        </p:nvSpPr>
+        <p:spPr>
+          <a:xfrm>
+            <a:off x="7909560" y="3520440"/>
+            <a:ext cx="3154680" cy="1737360"/>
+          </a:xfrm>
+          <a:prstGeom prst="roundRect">
+            <a:avLst>
+              <a:gd name="adj" fmla="val 6316"/>
+            </a:avLst>
+          </a:prstGeom>
+          <a:solidFill>
+            <a:srgbClr val="EAF6F8"/>
+          </a:solidFill>
+          <a:ln w="12700">
+            <a:solidFill>
+              <a:srgbClr val="B9D7E6"/>
+            </a:solidFill>
+            <a:prstDash val="solid"/>
+          </a:ln>
+        </p:spPr>
+      </p:sp>
+      <p:sp>
+        <p:nvSpPr>
+          <p:cNvPr id="15" name="Text 13"/>
+          <p:cNvSpPr/>
+          <p:nvPr/>
+        </p:nvSpPr>
+        <p:spPr>
+          <a:xfrm>
+            <a:off x="8074152" y="3666744"/>
+            <a:ext cx="2825496" cy="201168"/>
+          </a:xfrm>
+          <a:prstGeom prst="rect">
+            <a:avLst/>
+          </a:prstGeom>
+          <a:noFill/>
+          <a:ln/>
+        </p:spPr>
+        <p:txBody>
+          <a:bodyPr wrap="square" lIns="0" tIns="0" rIns="0" bIns="0" rtlCol="0" anchor="ctr"/>
+          <a:lstStyle/>
+          <a:p>
+            <a:pPr indent="0" marL="0">
+              <a:buNone/>
+            </a:pPr>
+            <a:r>
+              <a:rPr lang="en-US" sz="950" b="1" dirty="0">
+                <a:solidFill>
+                  <a:srgbClr val="0068B7"/>
+                </a:solidFill>
+                <a:latin typeface="Aptos" pitchFamily="34" charset="0"/>
+                <a:ea typeface="Aptos" pitchFamily="34" charset="-122"/>
+                <a:cs typeface="Aptos" pitchFamily="34" charset="-120"/>
+              </a:rPr>
+              <a:t>Use this for</a:t>
+            </a:r>
+            <a:endParaRPr lang="en-US" sz="950" dirty="0"/>
+          </a:p>
+        </p:txBody>
+      </p:sp>
+      <p:sp>
+        <p:nvSpPr>
+          <p:cNvPr id="16" name="Text 14"/>
+          <p:cNvSpPr/>
+          <p:nvPr/>
+        </p:nvSpPr>
+        <p:spPr>
+          <a:xfrm>
+            <a:off x="8074152" y="3959352"/>
+            <a:ext cx="2825496" cy="1170432"/>
+          </a:xfrm>
+          <a:prstGeom prst="rect">
+            <a:avLst/>
+          </a:prstGeom>
+          <a:noFill/>
+          <a:ln/>
+        </p:spPr>
+        <p:txBody>
+          <a:bodyPr wrap="square" lIns="0" tIns="0" rIns="0" bIns="0" rtlCol="0" anchor="t">
+            <a:normAutofit/>
+          </a:bodyPr>
+          <a:lstStyle/>
+          <a:p>
+            <a:pPr indent="0" marL="0">
+              <a:buNone/>
+            </a:pPr>
+            <a:r>
+              <a:rPr lang="en-US" sz="1250" dirty="0">
+                <a:solidFill>
+                  <a:srgbClr val="17364A"/>
+                </a:solidFill>
+                <a:latin typeface="Aptos" pitchFamily="34" charset="0"/>
+                <a:ea typeface="Aptos" pitchFamily="34" charset="-122"/>
+                <a:cs typeface="Aptos" pitchFamily="34" charset="-120"/>
+              </a:rPr>
+              <a:t>Connect the concept to public health decisions, safeguards, documentation, or implementation work.</a:t>
+            </a:r>
+            <a:endParaRPr lang="en-US" sz="1250" dirty="0"/>
           </a:p>
         </p:txBody>
       </p:sp>
@@ -4406,7 +6490,32 @@
       </p:sp>
       <p:sp>
         <p:nvSpPr>
-          <p:cNvPr id="3" name="Text 1"/>
+          <p:cNvPr id="3" name="Shape 1"/>
+          <p:cNvSpPr/>
+          <p:nvPr/>
+        </p:nvSpPr>
+        <p:spPr>
+          <a:xfrm>
+            <a:off x="0" y="164592"/>
+            <a:ext cx="146304" cy="6693408"/>
+          </a:xfrm>
+          <a:prstGeom prst="rect">
+            <a:avLst/>
+          </a:prstGeom>
+          <a:solidFill>
+            <a:srgbClr val="2F8A28"/>
+          </a:solidFill>
+          <a:ln w="12700">
+            <a:solidFill>
+              <a:srgbClr val="2F8A28"/>
+            </a:solidFill>
+            <a:prstDash val="solid"/>
+          </a:ln>
+        </p:spPr>
+      </p:sp>
+      <p:sp>
+        <p:nvSpPr>
+          <p:cNvPr id="4" name="Text 2"/>
           <p:cNvSpPr/>
           <p:nvPr/>
         </p:nvSpPr>
@@ -4445,7 +6554,7 @@
       </p:sp>
       <p:sp>
         <p:nvSpPr>
-          <p:cNvPr id="4" name="Text 2"/>
+          <p:cNvPr id="5" name="Text 3"/>
           <p:cNvSpPr/>
           <p:nvPr/>
         </p:nvSpPr>
@@ -4484,7 +6593,7 @@
       </p:sp>
       <p:sp>
         <p:nvSpPr>
-          <p:cNvPr id="5" name="Text 3"/>
+          <p:cNvPr id="6" name="Text 4"/>
           <p:cNvSpPr/>
           <p:nvPr/>
         </p:nvSpPr>
@@ -4523,7 +6632,7 @@
       </p:sp>
       <p:sp>
         <p:nvSpPr>
-          <p:cNvPr id="6" name="Text 4"/>
+          <p:cNvPr id="7" name="Text 5"/>
           <p:cNvSpPr/>
           <p:nvPr/>
         </p:nvSpPr>
@@ -4556,7 +6665,7 @@
                 <a:ea typeface="Aptos Display" pitchFamily="34" charset="-122"/>
                 <a:cs typeface="Aptos Display" pitchFamily="34" charset="-120"/>
               </a:rPr>
-              <a:t>Expected Artifact or Evidence</a:t>
+              <a:t>Reflection Questions Continued</a:t>
             </a:r>
             <a:endParaRPr lang="en-US" sz="2700" dirty="0"/>
           </a:p>
@@ -4564,32 +6673,150 @@
       </p:sp>
       <p:sp>
         <p:nvSpPr>
-          <p:cNvPr id="7" name="Text 5"/>
-          <p:cNvSpPr/>
-          <p:nvPr/>
-        </p:nvSpPr>
-        <p:spPr>
-          <a:xfrm>
-            <a:off x="822960" y="1325880"/>
-            <a:ext cx="10378440" cy="4800600"/>
-          </a:xfrm>
-          <a:prstGeom prst="rect">
-            <a:avLst/>
-          </a:prstGeom>
-          <a:noFill/>
-          <a:ln/>
-        </p:spPr>
-        <p:txBody>
-          <a:bodyPr wrap="square" lIns="1016" tIns="1016" rIns="1016" bIns="1016" rtlCol="0" anchor="t">
+          <p:cNvPr id="8" name="Text 6"/>
+          <p:cNvSpPr/>
+          <p:nvPr/>
+        </p:nvSpPr>
+        <p:spPr>
+          <a:xfrm>
+            <a:off x="868680" y="1417320"/>
+            <a:ext cx="6675120" cy="4434840"/>
+          </a:xfrm>
+          <a:prstGeom prst="rect">
+            <a:avLst/>
+          </a:prstGeom>
+          <a:noFill/>
+          <a:ln/>
+        </p:spPr>
+        <p:txBody>
+          <a:bodyPr wrap="square" lIns="635" tIns="635" rIns="635" bIns="635" rtlCol="0" anchor="t">
             <a:normAutofit/>
           </a:bodyPr>
           <a:lstStyle/>
           <a:p>
+            <a:r>
+              <a:rPr lang="en-US" sz="1700" dirty="0">
+                <a:solidFill>
+                  <a:srgbClr val="17364A"/>
+                </a:solidFill>
+                <a:latin typeface="Aptos" pitchFamily="34" charset="0"/>
+                <a:ea typeface="Aptos" pitchFamily="34" charset="-122"/>
+                <a:cs typeface="Aptos" pitchFamily="34" charset="-120"/>
+              </a:rPr>
+              <a:t>What are the consequences of false positives and false negatives?</a:t>
+            </a:r>
+            <a:endParaRPr lang="en-US" sz="1700" dirty="0"/>
+          </a:p>
+          <a:p>
+            <a:r>
+              <a:rPr lang="en-US" sz="1700" dirty="0">
+                <a:solidFill>
+                  <a:srgbClr val="17364A"/>
+                </a:solidFill>
+                <a:latin typeface="Aptos" pitchFamily="34" charset="0"/>
+                <a:ea typeface="Aptos" pitchFamily="34" charset="-122"/>
+                <a:cs typeface="Aptos" pitchFamily="34" charset="-120"/>
+              </a:rPr>
+              <a:t>How will thresholds, calibration, and subgroup performance be monitored?</a:t>
+            </a:r>
+            <a:endParaRPr lang="en-US" sz="1700" dirty="0"/>
+          </a:p>
+        </p:txBody>
+      </p:sp>
+      <p:sp>
+        <p:nvSpPr>
+          <p:cNvPr id="9" name="Shape 7"/>
+          <p:cNvSpPr/>
+          <p:nvPr/>
+        </p:nvSpPr>
+        <p:spPr>
+          <a:xfrm>
+            <a:off x="7909560" y="1417320"/>
+            <a:ext cx="3154680" cy="1828800"/>
+          </a:xfrm>
+          <a:prstGeom prst="roundRect">
+            <a:avLst>
+              <a:gd name="adj" fmla="val 6000"/>
+            </a:avLst>
+          </a:prstGeom>
+          <a:solidFill>
+            <a:srgbClr val="EEF8ED"/>
+          </a:solidFill>
+          <a:ln w="12700">
+            <a:solidFill>
+              <a:srgbClr val="B9D7E6"/>
+            </a:solidFill>
+            <a:prstDash val="solid"/>
+          </a:ln>
+        </p:spPr>
+      </p:sp>
+      <p:sp>
+        <p:nvSpPr>
+          <p:cNvPr id="10" name="Text 8"/>
+          <p:cNvSpPr/>
+          <p:nvPr/>
+        </p:nvSpPr>
+        <p:spPr>
+          <a:xfrm>
+            <a:off x="8074152" y="1563624"/>
+            <a:ext cx="2825496" cy="201168"/>
+          </a:xfrm>
+          <a:prstGeom prst="rect">
+            <a:avLst/>
+          </a:prstGeom>
+          <a:noFill/>
+          <a:ln/>
+        </p:spPr>
+        <p:txBody>
+          <a:bodyPr wrap="square" lIns="0" tIns="0" rIns="0" bIns="0" rtlCol="0" anchor="ctr"/>
+          <a:lstStyle/>
+          <a:p>
             <a:pPr indent="0" marL="0">
               <a:buNone/>
             </a:pPr>
             <a:r>
-              <a:rPr lang="en-US" sz="1420" dirty="0">
+              <a:rPr lang="en-US" sz="950" b="1" dirty="0">
+                <a:solidFill>
+                  <a:srgbClr val="0068B7"/>
+                </a:solidFill>
+                <a:latin typeface="Aptos" pitchFamily="34" charset="0"/>
+                <a:ea typeface="Aptos" pitchFamily="34" charset="-122"/>
+                <a:cs typeface="Aptos" pitchFamily="34" charset="-120"/>
+              </a:rPr>
+              <a:t>Key idea</a:t>
+            </a:r>
+            <a:endParaRPr lang="en-US" sz="950" dirty="0"/>
+          </a:p>
+        </p:txBody>
+      </p:sp>
+      <p:sp>
+        <p:nvSpPr>
+          <p:cNvPr id="11" name="Text 9"/>
+          <p:cNvSpPr/>
+          <p:nvPr/>
+        </p:nvSpPr>
+        <p:spPr>
+          <a:xfrm>
+            <a:off x="8074152" y="1856232"/>
+            <a:ext cx="2825496" cy="1261872"/>
+          </a:xfrm>
+          <a:prstGeom prst="rect">
+            <a:avLst/>
+          </a:prstGeom>
+          <a:noFill/>
+          <a:ln/>
+        </p:spPr>
+        <p:txBody>
+          <a:bodyPr wrap="square" lIns="0" tIns="0" rIns="0" bIns="0" rtlCol="0" anchor="t">
+            <a:normAutofit/>
+          </a:bodyPr>
+          <a:lstStyle/>
+          <a:p>
+            <a:pPr indent="0" marL="0">
+              <a:buNone/>
+            </a:pPr>
+            <a:r>
+              <a:rPr lang="en-US" sz="1250" dirty="0">
                 <a:solidFill>
                   <a:srgbClr val="17364A"/>
                 </a:solidFill>
@@ -4597,9 +6824,116 @@
                 <a:ea typeface="Aptos" pitchFamily="34" charset="-122"/>
                 <a:cs typeface="Aptos" pitchFamily="34" charset="-120"/>
               </a:rPr>
-              <a:t>Predictive model review plan Risk score interpretation guide Threshold and error tradeoff memo</a:t>
-            </a:r>
-            <a:endParaRPr lang="en-US" sz="1420" dirty="0"/>
+              <a:t>What are the consequences of false positives and false negatives?</a:t>
+            </a:r>
+            <a:endParaRPr lang="en-US" sz="1250" dirty="0"/>
+          </a:p>
+        </p:txBody>
+      </p:sp>
+      <p:sp>
+        <p:nvSpPr>
+          <p:cNvPr id="12" name="Shape 10"/>
+          <p:cNvSpPr/>
+          <p:nvPr/>
+        </p:nvSpPr>
+        <p:spPr>
+          <a:xfrm>
+            <a:off x="7909560" y="3520440"/>
+            <a:ext cx="3154680" cy="1737360"/>
+          </a:xfrm>
+          <a:prstGeom prst="roundRect">
+            <a:avLst>
+              <a:gd name="adj" fmla="val 6316"/>
+            </a:avLst>
+          </a:prstGeom>
+          <a:solidFill>
+            <a:srgbClr val="EAF6F8"/>
+          </a:solidFill>
+          <a:ln w="12700">
+            <a:solidFill>
+              <a:srgbClr val="B9D7E6"/>
+            </a:solidFill>
+            <a:prstDash val="solid"/>
+          </a:ln>
+        </p:spPr>
+      </p:sp>
+      <p:sp>
+        <p:nvSpPr>
+          <p:cNvPr id="13" name="Text 11"/>
+          <p:cNvSpPr/>
+          <p:nvPr/>
+        </p:nvSpPr>
+        <p:spPr>
+          <a:xfrm>
+            <a:off x="8074152" y="3666744"/>
+            <a:ext cx="2825496" cy="201168"/>
+          </a:xfrm>
+          <a:prstGeom prst="rect">
+            <a:avLst/>
+          </a:prstGeom>
+          <a:noFill/>
+          <a:ln/>
+        </p:spPr>
+        <p:txBody>
+          <a:bodyPr wrap="square" lIns="0" tIns="0" rIns="0" bIns="0" rtlCol="0" anchor="ctr"/>
+          <a:lstStyle/>
+          <a:p>
+            <a:pPr indent="0" marL="0">
+              <a:buNone/>
+            </a:pPr>
+            <a:r>
+              <a:rPr lang="en-US" sz="950" b="1" dirty="0">
+                <a:solidFill>
+                  <a:srgbClr val="0068B7"/>
+                </a:solidFill>
+                <a:latin typeface="Aptos" pitchFamily="34" charset="0"/>
+                <a:ea typeface="Aptos" pitchFamily="34" charset="-122"/>
+                <a:cs typeface="Aptos" pitchFamily="34" charset="-120"/>
+              </a:rPr>
+              <a:t>Use this for</a:t>
+            </a:r>
+            <a:endParaRPr lang="en-US" sz="950" dirty="0"/>
+          </a:p>
+        </p:txBody>
+      </p:sp>
+      <p:sp>
+        <p:nvSpPr>
+          <p:cNvPr id="14" name="Text 12"/>
+          <p:cNvSpPr/>
+          <p:nvPr/>
+        </p:nvSpPr>
+        <p:spPr>
+          <a:xfrm>
+            <a:off x="8074152" y="3959352"/>
+            <a:ext cx="2825496" cy="1170432"/>
+          </a:xfrm>
+          <a:prstGeom prst="rect">
+            <a:avLst/>
+          </a:prstGeom>
+          <a:noFill/>
+          <a:ln/>
+        </p:spPr>
+        <p:txBody>
+          <a:bodyPr wrap="square" lIns="0" tIns="0" rIns="0" bIns="0" rtlCol="0" anchor="t">
+            <a:normAutofit/>
+          </a:bodyPr>
+          <a:lstStyle/>
+          <a:p>
+            <a:pPr indent="0" marL="0">
+              <a:buNone/>
+            </a:pPr>
+            <a:r>
+              <a:rPr lang="en-US" sz="1250" dirty="0">
+                <a:solidFill>
+                  <a:srgbClr val="17364A"/>
+                </a:solidFill>
+                <a:latin typeface="Aptos" pitchFamily="34" charset="0"/>
+                <a:ea typeface="Aptos" pitchFamily="34" charset="-122"/>
+                <a:cs typeface="Aptos" pitchFamily="34" charset="-120"/>
+              </a:rPr>
+              <a:t>Connect the concept to public health decisions, safeguards, documentation, or implementation work.</a:t>
+            </a:r>
+            <a:endParaRPr lang="en-US" sz="1250" dirty="0"/>
           </a:p>
         </p:txBody>
       </p:sp>
@@ -4662,7 +6996,32 @@
       </p:sp>
       <p:sp>
         <p:nvSpPr>
-          <p:cNvPr id="3" name="Text 1"/>
+          <p:cNvPr id="3" name="Shape 1"/>
+          <p:cNvSpPr/>
+          <p:nvPr/>
+        </p:nvSpPr>
+        <p:spPr>
+          <a:xfrm>
+            <a:off x="0" y="164592"/>
+            <a:ext cx="146304" cy="6693408"/>
+          </a:xfrm>
+          <a:prstGeom prst="rect">
+            <a:avLst/>
+          </a:prstGeom>
+          <a:solidFill>
+            <a:srgbClr val="2F8A28"/>
+          </a:solidFill>
+          <a:ln w="12700">
+            <a:solidFill>
+              <a:srgbClr val="2F8A28"/>
+            </a:solidFill>
+            <a:prstDash val="solid"/>
+          </a:ln>
+        </p:spPr>
+      </p:sp>
+      <p:sp>
+        <p:nvSpPr>
+          <p:cNvPr id="4" name="Text 2"/>
           <p:cNvSpPr/>
           <p:nvPr/>
         </p:nvSpPr>
@@ -4701,7 +7060,7 @@
       </p:sp>
       <p:sp>
         <p:nvSpPr>
-          <p:cNvPr id="4" name="Text 2"/>
+          <p:cNvPr id="5" name="Text 3"/>
           <p:cNvSpPr/>
           <p:nvPr/>
         </p:nvSpPr>
@@ -4740,7 +7099,7 @@
       </p:sp>
       <p:sp>
         <p:nvSpPr>
-          <p:cNvPr id="5" name="Text 3"/>
+          <p:cNvPr id="6" name="Text 4"/>
           <p:cNvSpPr/>
           <p:nvPr/>
         </p:nvSpPr>
@@ -4779,13 +7138,77 @@
       </p:sp>
       <p:sp>
         <p:nvSpPr>
-          <p:cNvPr id="6" name="Text 4"/>
+          <p:cNvPr id="7" name="Shape 5"/>
           <p:cNvSpPr/>
           <p:nvPr/>
         </p:nvSpPr>
         <p:spPr>
           <a:xfrm>
             <a:off x="640080" y="658368"/>
+            <a:ext cx="420624" cy="420624"/>
+          </a:xfrm>
+          <a:prstGeom prst="ellipse">
+            <a:avLst/>
+          </a:prstGeom>
+          <a:solidFill>
+            <a:srgbClr val="0068B7"/>
+          </a:solidFill>
+          <a:ln w="12700">
+            <a:solidFill>
+              <a:srgbClr val="0068B7"/>
+            </a:solidFill>
+            <a:prstDash val="solid"/>
+          </a:ln>
+        </p:spPr>
+      </p:sp>
+      <p:sp>
+        <p:nvSpPr>
+          <p:cNvPr id="8" name="Text 6"/>
+          <p:cNvSpPr/>
+          <p:nvPr/>
+        </p:nvSpPr>
+        <p:spPr>
+          <a:xfrm>
+            <a:off x="640080" y="731520"/>
+            <a:ext cx="420624" cy="164592"/>
+          </a:xfrm>
+          <a:prstGeom prst="rect">
+            <a:avLst/>
+          </a:prstGeom>
+          <a:noFill/>
+          <a:ln/>
+        </p:spPr>
+        <p:txBody>
+          <a:bodyPr wrap="square" lIns="0" tIns="0" rIns="0" bIns="0" rtlCol="0" anchor="ctr"/>
+          <a:lstStyle/>
+          <a:p>
+            <a:pPr algn="ctr" indent="0" marL="0">
+              <a:buNone/>
+            </a:pPr>
+            <a:r>
+              <a:rPr lang="en-US" sz="1100" b="1" dirty="0">
+                <a:solidFill>
+                  <a:srgbClr val="FFFFFF"/>
+                </a:solidFill>
+                <a:latin typeface="Aptos" pitchFamily="34" charset="0"/>
+                <a:ea typeface="Aptos" pitchFamily="34" charset="-122"/>
+                <a:cs typeface="Aptos" pitchFamily="34" charset="-120"/>
+              </a:rPr>
+              <a:t>9</a:t>
+            </a:r>
+            <a:endParaRPr lang="en-US" sz="1100" dirty="0"/>
+          </a:p>
+        </p:txBody>
+      </p:sp>
+      <p:sp>
+        <p:nvSpPr>
+          <p:cNvPr id="9" name="Text 7"/>
+          <p:cNvSpPr/>
+          <p:nvPr/>
+        </p:nvSpPr>
+        <p:spPr>
+          <a:xfrm>
+            <a:off x="640080" y="621792"/>
             <a:ext cx="10881360" cy="566928"/>
           </a:xfrm>
           <a:prstGeom prst="rect">
@@ -4812,7 +7235,7 @@
                 <a:ea typeface="Aptos Display" pitchFamily="34" charset="-122"/>
                 <a:cs typeface="Aptos Display" pitchFamily="34" charset="-120"/>
               </a:rPr>
-              <a:t>Expected Artifact or Evidence Continued</a:t>
+              <a:t>Practical Exercise</a:t>
             </a:r>
             <a:endParaRPr lang="en-US" sz="2700" dirty="0"/>
           </a:p>
@@ -4820,32 +7243,178 @@
       </p:sp>
       <p:sp>
         <p:nvSpPr>
-          <p:cNvPr id="7" name="Text 5"/>
-          <p:cNvSpPr/>
-          <p:nvPr/>
-        </p:nvSpPr>
-        <p:spPr>
-          <a:xfrm>
-            <a:off x="822960" y="1325880"/>
-            <a:ext cx="10378440" cy="4800600"/>
-          </a:xfrm>
-          <a:prstGeom prst="rect">
-            <a:avLst/>
-          </a:prstGeom>
-          <a:noFill/>
-          <a:ln/>
-        </p:spPr>
-        <p:txBody>
-          <a:bodyPr wrap="square" lIns="1016" tIns="1016" rIns="1016" bIns="1016" rtlCol="0" anchor="t">
+          <p:cNvPr id="10" name="Text 8"/>
+          <p:cNvSpPr/>
+          <p:nvPr/>
+        </p:nvSpPr>
+        <p:spPr>
+          <a:xfrm>
+            <a:off x="868680" y="1417320"/>
+            <a:ext cx="6675120" cy="4434840"/>
+          </a:xfrm>
+          <a:prstGeom prst="rect">
+            <a:avLst/>
+          </a:prstGeom>
+          <a:noFill/>
+          <a:ln/>
+        </p:spPr>
+        <p:txBody>
+          <a:bodyPr wrap="square" lIns="635" tIns="635" rIns="635" bIns="635" rtlCol="0" anchor="t">
             <a:normAutofit/>
           </a:bodyPr>
           <a:lstStyle/>
           <a:p>
+            <a:r>
+              <a:rPr lang="en-US" sz="1700" dirty="0">
+                <a:solidFill>
+                  <a:srgbClr val="17364A"/>
+                </a:solidFill>
+                <a:latin typeface="Aptos" pitchFamily="34" charset="0"/>
+                <a:ea typeface="Aptos" pitchFamily="34" charset="-122"/>
+                <a:cs typeface="Aptos" pitchFamily="34" charset="-120"/>
+              </a:rPr>
+              <a:t>Create a predictive model review plan for one public health use case.</a:t>
+            </a:r>
+            <a:endParaRPr lang="en-US" sz="1700" dirty="0"/>
+          </a:p>
+          <a:p>
+            <a:r>
+              <a:rPr lang="en-US" sz="1700" dirty="0">
+                <a:solidFill>
+                  <a:srgbClr val="17364A"/>
+                </a:solidFill>
+                <a:latin typeface="Aptos" pitchFamily="34" charset="0"/>
+                <a:ea typeface="Aptos" pitchFamily="34" charset="-122"/>
+                <a:cs typeface="Aptos" pitchFamily="34" charset="-120"/>
+              </a:rPr>
+              <a:t>Include the outcome, population, time horizon, data sources, candidate features, risk categories, thresholds, performance.</a:t>
+            </a:r>
+            <a:endParaRPr lang="en-US" sz="1700" dirty="0"/>
+          </a:p>
+          <a:p>
+            <a:r>
+              <a:rPr lang="en-US" sz="1700" dirty="0">
+                <a:solidFill>
+                  <a:srgbClr val="17364A"/>
+                </a:solidFill>
+                <a:latin typeface="Aptos" pitchFamily="34" charset="0"/>
+                <a:ea typeface="Aptos" pitchFamily="34" charset="-122"/>
+                <a:cs typeface="Aptos" pitchFamily="34" charset="-120"/>
+              </a:rPr>
+              <a:t>The plan should also identify whether the use is supportive, restrictive, or consequential.</a:t>
+            </a:r>
+            <a:endParaRPr lang="en-US" sz="1700" dirty="0"/>
+          </a:p>
+          <a:p>
+            <a:r>
+              <a:rPr lang="en-US" sz="1700" dirty="0">
+                <a:solidFill>
+                  <a:srgbClr val="17364A"/>
+                </a:solidFill>
+                <a:latin typeface="Aptos" pitchFamily="34" charset="0"/>
+                <a:ea typeface="Aptos" pitchFamily="34" charset="-122"/>
+                <a:cs typeface="Aptos" pitchFamily="34" charset="-120"/>
+              </a:rPr>
+              <a:t>Predictive tools used to allocate supportive resources have different risk profiles than tools used to deny, delay, or.</a:t>
+            </a:r>
+            <a:endParaRPr lang="en-US" sz="1700" dirty="0"/>
+          </a:p>
+        </p:txBody>
+      </p:sp>
+      <p:sp>
+        <p:nvSpPr>
+          <p:cNvPr id="11" name="Shape 9"/>
+          <p:cNvSpPr/>
+          <p:nvPr/>
+        </p:nvSpPr>
+        <p:spPr>
+          <a:xfrm>
+            <a:off x="7909560" y="1417320"/>
+            <a:ext cx="3154680" cy="1828800"/>
+          </a:xfrm>
+          <a:prstGeom prst="roundRect">
+            <a:avLst>
+              <a:gd name="adj" fmla="val 6000"/>
+            </a:avLst>
+          </a:prstGeom>
+          <a:solidFill>
+            <a:srgbClr val="EEF8ED"/>
+          </a:solidFill>
+          <a:ln w="12700">
+            <a:solidFill>
+              <a:srgbClr val="B9D7E6"/>
+            </a:solidFill>
+            <a:prstDash val="solid"/>
+          </a:ln>
+        </p:spPr>
+      </p:sp>
+      <p:sp>
+        <p:nvSpPr>
+          <p:cNvPr id="12" name="Text 10"/>
+          <p:cNvSpPr/>
+          <p:nvPr/>
+        </p:nvSpPr>
+        <p:spPr>
+          <a:xfrm>
+            <a:off x="8074152" y="1563624"/>
+            <a:ext cx="2825496" cy="201168"/>
+          </a:xfrm>
+          <a:prstGeom prst="rect">
+            <a:avLst/>
+          </a:prstGeom>
+          <a:noFill/>
+          <a:ln/>
+        </p:spPr>
+        <p:txBody>
+          <a:bodyPr wrap="square" lIns="0" tIns="0" rIns="0" bIns="0" rtlCol="0" anchor="ctr"/>
+          <a:lstStyle/>
+          <a:p>
             <a:pPr indent="0" marL="0">
               <a:buNone/>
             </a:pPr>
             <a:r>
-              <a:rPr lang="en-US" sz="1420" dirty="0">
+              <a:rPr lang="en-US" sz="950" b="1" dirty="0">
+                <a:solidFill>
+                  <a:srgbClr val="0068B7"/>
+                </a:solidFill>
+                <a:latin typeface="Aptos" pitchFamily="34" charset="0"/>
+                <a:ea typeface="Aptos" pitchFamily="34" charset="-122"/>
+                <a:cs typeface="Aptos" pitchFamily="34" charset="-120"/>
+              </a:rPr>
+              <a:t>Key idea</a:t>
+            </a:r>
+            <a:endParaRPr lang="en-US" sz="950" dirty="0"/>
+          </a:p>
+        </p:txBody>
+      </p:sp>
+      <p:sp>
+        <p:nvSpPr>
+          <p:cNvPr id="13" name="Text 11"/>
+          <p:cNvSpPr/>
+          <p:nvPr/>
+        </p:nvSpPr>
+        <p:spPr>
+          <a:xfrm>
+            <a:off x="8074152" y="1856232"/>
+            <a:ext cx="2825496" cy="1261872"/>
+          </a:xfrm>
+          <a:prstGeom prst="rect">
+            <a:avLst/>
+          </a:prstGeom>
+          <a:noFill/>
+          <a:ln/>
+        </p:spPr>
+        <p:txBody>
+          <a:bodyPr wrap="square" lIns="0" tIns="0" rIns="0" bIns="0" rtlCol="0" anchor="t">
+            <a:normAutofit/>
+          </a:bodyPr>
+          <a:lstStyle/>
+          <a:p>
+            <a:pPr indent="0" marL="0">
+              <a:buNone/>
+            </a:pPr>
+            <a:r>
+              <a:rPr lang="en-US" sz="1250" dirty="0">
                 <a:solidFill>
                   <a:srgbClr val="17364A"/>
                 </a:solidFill>
@@ -4853,9 +7422,116 @@
                 <a:ea typeface="Aptos" pitchFamily="34" charset="-122"/>
                 <a:cs typeface="Aptos" pitchFamily="34" charset="-120"/>
               </a:rPr>
-              <a:t>Subgroup monitoring plan</a:t>
-            </a:r>
-            <a:endParaRPr lang="en-US" sz="1420" dirty="0"/>
+              <a:t>Create a predictive model review plan for one public health use case.</a:t>
+            </a:r>
+            <a:endParaRPr lang="en-US" sz="1250" dirty="0"/>
+          </a:p>
+        </p:txBody>
+      </p:sp>
+      <p:sp>
+        <p:nvSpPr>
+          <p:cNvPr id="14" name="Shape 12"/>
+          <p:cNvSpPr/>
+          <p:nvPr/>
+        </p:nvSpPr>
+        <p:spPr>
+          <a:xfrm>
+            <a:off x="7909560" y="3520440"/>
+            <a:ext cx="3154680" cy="1737360"/>
+          </a:xfrm>
+          <a:prstGeom prst="roundRect">
+            <a:avLst>
+              <a:gd name="adj" fmla="val 6316"/>
+            </a:avLst>
+          </a:prstGeom>
+          <a:solidFill>
+            <a:srgbClr val="EAF6F8"/>
+          </a:solidFill>
+          <a:ln w="12700">
+            <a:solidFill>
+              <a:srgbClr val="B9D7E6"/>
+            </a:solidFill>
+            <a:prstDash val="solid"/>
+          </a:ln>
+        </p:spPr>
+      </p:sp>
+      <p:sp>
+        <p:nvSpPr>
+          <p:cNvPr id="15" name="Text 13"/>
+          <p:cNvSpPr/>
+          <p:nvPr/>
+        </p:nvSpPr>
+        <p:spPr>
+          <a:xfrm>
+            <a:off x="8074152" y="3666744"/>
+            <a:ext cx="2825496" cy="201168"/>
+          </a:xfrm>
+          <a:prstGeom prst="rect">
+            <a:avLst/>
+          </a:prstGeom>
+          <a:noFill/>
+          <a:ln/>
+        </p:spPr>
+        <p:txBody>
+          <a:bodyPr wrap="square" lIns="0" tIns="0" rIns="0" bIns="0" rtlCol="0" anchor="ctr"/>
+          <a:lstStyle/>
+          <a:p>
+            <a:pPr indent="0" marL="0">
+              <a:buNone/>
+            </a:pPr>
+            <a:r>
+              <a:rPr lang="en-US" sz="950" b="1" dirty="0">
+                <a:solidFill>
+                  <a:srgbClr val="0068B7"/>
+                </a:solidFill>
+                <a:latin typeface="Aptos" pitchFamily="34" charset="0"/>
+                <a:ea typeface="Aptos" pitchFamily="34" charset="-122"/>
+                <a:cs typeface="Aptos" pitchFamily="34" charset="-120"/>
+              </a:rPr>
+              <a:t>Use this for</a:t>
+            </a:r>
+            <a:endParaRPr lang="en-US" sz="950" dirty="0"/>
+          </a:p>
+        </p:txBody>
+      </p:sp>
+      <p:sp>
+        <p:nvSpPr>
+          <p:cNvPr id="16" name="Text 14"/>
+          <p:cNvSpPr/>
+          <p:nvPr/>
+        </p:nvSpPr>
+        <p:spPr>
+          <a:xfrm>
+            <a:off x="8074152" y="3959352"/>
+            <a:ext cx="2825496" cy="1170432"/>
+          </a:xfrm>
+          <a:prstGeom prst="rect">
+            <a:avLst/>
+          </a:prstGeom>
+          <a:noFill/>
+          <a:ln/>
+        </p:spPr>
+        <p:txBody>
+          <a:bodyPr wrap="square" lIns="0" tIns="0" rIns="0" bIns="0" rtlCol="0" anchor="t">
+            <a:normAutofit/>
+          </a:bodyPr>
+          <a:lstStyle/>
+          <a:p>
+            <a:pPr indent="0" marL="0">
+              <a:buNone/>
+            </a:pPr>
+            <a:r>
+              <a:rPr lang="en-US" sz="1250" dirty="0">
+                <a:solidFill>
+                  <a:srgbClr val="17364A"/>
+                </a:solidFill>
+                <a:latin typeface="Aptos" pitchFamily="34" charset="0"/>
+                <a:ea typeface="Aptos" pitchFamily="34" charset="-122"/>
+                <a:cs typeface="Aptos" pitchFamily="34" charset="-120"/>
+              </a:rPr>
+              <a:t>Connect the concept to public health decisions, safeguards, documentation, or implementation work.</a:t>
+            </a:r>
+            <a:endParaRPr lang="en-US" sz="1250" dirty="0"/>
           </a:p>
         </p:txBody>
       </p:sp>
@@ -4918,7 +7594,32 @@
       </p:sp>
       <p:sp>
         <p:nvSpPr>
-          <p:cNvPr id="3" name="Text 1"/>
+          <p:cNvPr id="3" name="Shape 1"/>
+          <p:cNvSpPr/>
+          <p:nvPr/>
+        </p:nvSpPr>
+        <p:spPr>
+          <a:xfrm>
+            <a:off x="0" y="164592"/>
+            <a:ext cx="146304" cy="6693408"/>
+          </a:xfrm>
+          <a:prstGeom prst="rect">
+            <a:avLst/>
+          </a:prstGeom>
+          <a:solidFill>
+            <a:srgbClr val="2F8A28"/>
+          </a:solidFill>
+          <a:ln w="12700">
+            <a:solidFill>
+              <a:srgbClr val="2F8A28"/>
+            </a:solidFill>
+            <a:prstDash val="solid"/>
+          </a:ln>
+        </p:spPr>
+      </p:sp>
+      <p:sp>
+        <p:nvSpPr>
+          <p:cNvPr id="4" name="Text 2"/>
           <p:cNvSpPr/>
           <p:nvPr/>
         </p:nvSpPr>
@@ -4957,7 +7658,7 @@
       </p:sp>
       <p:sp>
         <p:nvSpPr>
-          <p:cNvPr id="4" name="Text 2"/>
+          <p:cNvPr id="5" name="Text 3"/>
           <p:cNvSpPr/>
           <p:nvPr/>
         </p:nvSpPr>
@@ -4996,7 +7697,7 @@
       </p:sp>
       <p:sp>
         <p:nvSpPr>
-          <p:cNvPr id="5" name="Text 3"/>
+          <p:cNvPr id="6" name="Text 4"/>
           <p:cNvSpPr/>
           <p:nvPr/>
         </p:nvSpPr>
@@ -5035,13 +7736,77 @@
       </p:sp>
       <p:sp>
         <p:nvSpPr>
-          <p:cNvPr id="6" name="Text 4"/>
+          <p:cNvPr id="7" name="Shape 5"/>
           <p:cNvSpPr/>
           <p:nvPr/>
         </p:nvSpPr>
         <p:spPr>
           <a:xfrm>
             <a:off x="640080" y="658368"/>
+            <a:ext cx="420624" cy="420624"/>
+          </a:xfrm>
+          <a:prstGeom prst="ellipse">
+            <a:avLst/>
+          </a:prstGeom>
+          <a:solidFill>
+            <a:srgbClr val="0068B7"/>
+          </a:solidFill>
+          <a:ln w="12700">
+            <a:solidFill>
+              <a:srgbClr val="0068B7"/>
+            </a:solidFill>
+            <a:prstDash val="solid"/>
+          </a:ln>
+        </p:spPr>
+      </p:sp>
+      <p:sp>
+        <p:nvSpPr>
+          <p:cNvPr id="8" name="Text 6"/>
+          <p:cNvSpPr/>
+          <p:nvPr/>
+        </p:nvSpPr>
+        <p:spPr>
+          <a:xfrm>
+            <a:off x="640080" y="731520"/>
+            <a:ext cx="420624" cy="164592"/>
+          </a:xfrm>
+          <a:prstGeom prst="rect">
+            <a:avLst/>
+          </a:prstGeom>
+          <a:noFill/>
+          <a:ln/>
+        </p:spPr>
+        <p:txBody>
+          <a:bodyPr wrap="square" lIns="0" tIns="0" rIns="0" bIns="0" rtlCol="0" anchor="ctr"/>
+          <a:lstStyle/>
+          <a:p>
+            <a:pPr algn="ctr" indent="0" marL="0">
+              <a:buNone/>
+            </a:pPr>
+            <a:r>
+              <a:rPr lang="en-US" sz="1100" b="1" dirty="0">
+                <a:solidFill>
+                  <a:srgbClr val="FFFFFF"/>
+                </a:solidFill>
+                <a:latin typeface="Aptos" pitchFamily="34" charset="0"/>
+                <a:ea typeface="Aptos" pitchFamily="34" charset="-122"/>
+                <a:cs typeface="Aptos" pitchFamily="34" charset="-120"/>
+              </a:rPr>
+              <a:t>10</a:t>
+            </a:r>
+            <a:endParaRPr lang="en-US" sz="1100" dirty="0"/>
+          </a:p>
+        </p:txBody>
+      </p:sp>
+      <p:sp>
+        <p:nvSpPr>
+          <p:cNvPr id="9" name="Text 7"/>
+          <p:cNvSpPr/>
+          <p:nvPr/>
+        </p:nvSpPr>
+        <p:spPr>
+          <a:xfrm>
+            <a:off x="640080" y="621792"/>
             <a:ext cx="10881360" cy="566928"/>
           </a:xfrm>
           <a:prstGeom prst="rect">
@@ -5068,7 +7833,7 @@
                 <a:ea typeface="Aptos Display" pitchFamily="34" charset="-122"/>
                 <a:cs typeface="Aptos Display" pitchFamily="34" charset="-120"/>
               </a:rPr>
-              <a:t>Expected Assignment</a:t>
+              <a:t>Expected Artifact or Evidence</a:t>
             </a:r>
             <a:endParaRPr lang="en-US" sz="2700" dirty="0"/>
           </a:p>
@@ -5076,14 +7841,14 @@
       </p:sp>
       <p:sp>
         <p:nvSpPr>
-          <p:cNvPr id="7" name="Text 5"/>
-          <p:cNvSpPr/>
-          <p:nvPr/>
-        </p:nvSpPr>
-        <p:spPr>
-          <a:xfrm>
-            <a:off x="822960" y="1325880"/>
-            <a:ext cx="10378440" cy="4800600"/>
+          <p:cNvPr id="10" name="Text 8"/>
+          <p:cNvSpPr/>
+          <p:nvPr/>
+        </p:nvSpPr>
+        <p:spPr>
+          <a:xfrm>
+            <a:off x="868680" y="1417320"/>
+            <a:ext cx="6675120" cy="4434840"/>
           </a:xfrm>
           <a:prstGeom prst="rect">
             <a:avLst/>
@@ -5098,7 +7863,7 @@
           <a:lstStyle/>
           <a:p>
             <a:r>
-              <a:rPr lang="en-US" sz="1450" dirty="0">
+              <a:rPr lang="en-US" sz="1700" dirty="0">
                 <a:solidFill>
                   <a:srgbClr val="17364A"/>
                 </a:solidFill>
@@ -5108,11 +7873,11 @@
               </a:rPr>
               <a:t>Predictive model review plan</a:t>
             </a:r>
-            <a:endParaRPr lang="en-US" sz="1450" dirty="0"/>
-          </a:p>
-          <a:p>
-            <a:r>
-              <a:rPr lang="en-US" sz="1450" dirty="0">
+            <a:endParaRPr lang="en-US" sz="1700" dirty="0"/>
+          </a:p>
+          <a:p>
+            <a:r>
+              <a:rPr lang="en-US" sz="1700" dirty="0">
                 <a:solidFill>
                   <a:srgbClr val="17364A"/>
                 </a:solidFill>
@@ -5122,11 +7887,11 @@
               </a:rPr>
               <a:t>Risk score interpretation guide</a:t>
             </a:r>
-            <a:endParaRPr lang="en-US" sz="1450" dirty="0"/>
-          </a:p>
-          <a:p>
-            <a:r>
-              <a:rPr lang="en-US" sz="1450" dirty="0">
+            <a:endParaRPr lang="en-US" sz="1700" dirty="0"/>
+          </a:p>
+          <a:p>
+            <a:r>
+              <a:rPr lang="en-US" sz="1700" dirty="0">
                 <a:solidFill>
                   <a:srgbClr val="17364A"/>
                 </a:solidFill>
@@ -5136,11 +7901,104 @@
               </a:rPr>
               <a:t>Threshold and error tradeoff memo</a:t>
             </a:r>
-            <a:endParaRPr lang="en-US" sz="1450" dirty="0"/>
-          </a:p>
-          <a:p>
-            <a:r>
-              <a:rPr lang="en-US" sz="1450" dirty="0">
+            <a:endParaRPr lang="en-US" sz="1700" dirty="0"/>
+          </a:p>
+        </p:txBody>
+      </p:sp>
+      <p:sp>
+        <p:nvSpPr>
+          <p:cNvPr id="11" name="Shape 9"/>
+          <p:cNvSpPr/>
+          <p:nvPr/>
+        </p:nvSpPr>
+        <p:spPr>
+          <a:xfrm>
+            <a:off x="7909560" y="1417320"/>
+            <a:ext cx="3154680" cy="1828800"/>
+          </a:xfrm>
+          <a:prstGeom prst="roundRect">
+            <a:avLst>
+              <a:gd name="adj" fmla="val 6000"/>
+            </a:avLst>
+          </a:prstGeom>
+          <a:solidFill>
+            <a:srgbClr val="EEF8ED"/>
+          </a:solidFill>
+          <a:ln w="12700">
+            <a:solidFill>
+              <a:srgbClr val="B9D7E6"/>
+            </a:solidFill>
+            <a:prstDash val="solid"/>
+          </a:ln>
+        </p:spPr>
+      </p:sp>
+      <p:sp>
+        <p:nvSpPr>
+          <p:cNvPr id="12" name="Text 10"/>
+          <p:cNvSpPr/>
+          <p:nvPr/>
+        </p:nvSpPr>
+        <p:spPr>
+          <a:xfrm>
+            <a:off x="8074152" y="1563624"/>
+            <a:ext cx="2825496" cy="201168"/>
+          </a:xfrm>
+          <a:prstGeom prst="rect">
+            <a:avLst/>
+          </a:prstGeom>
+          <a:noFill/>
+          <a:ln/>
+        </p:spPr>
+        <p:txBody>
+          <a:bodyPr wrap="square" lIns="0" tIns="0" rIns="0" bIns="0" rtlCol="0" anchor="ctr"/>
+          <a:lstStyle/>
+          <a:p>
+            <a:pPr indent="0" marL="0">
+              <a:buNone/>
+            </a:pPr>
+            <a:r>
+              <a:rPr lang="en-US" sz="950" b="1" dirty="0">
+                <a:solidFill>
+                  <a:srgbClr val="0068B7"/>
+                </a:solidFill>
+                <a:latin typeface="Aptos" pitchFamily="34" charset="0"/>
+                <a:ea typeface="Aptos" pitchFamily="34" charset="-122"/>
+                <a:cs typeface="Aptos" pitchFamily="34" charset="-120"/>
+              </a:rPr>
+              <a:t>Key idea</a:t>
+            </a:r>
+            <a:endParaRPr lang="en-US" sz="950" dirty="0"/>
+          </a:p>
+        </p:txBody>
+      </p:sp>
+      <p:sp>
+        <p:nvSpPr>
+          <p:cNvPr id="13" name="Text 11"/>
+          <p:cNvSpPr/>
+          <p:nvPr/>
+        </p:nvSpPr>
+        <p:spPr>
+          <a:xfrm>
+            <a:off x="8074152" y="1856232"/>
+            <a:ext cx="2825496" cy="1261872"/>
+          </a:xfrm>
+          <a:prstGeom prst="rect">
+            <a:avLst/>
+          </a:prstGeom>
+          <a:noFill/>
+          <a:ln/>
+        </p:spPr>
+        <p:txBody>
+          <a:bodyPr wrap="square" lIns="0" tIns="0" rIns="0" bIns="0" rtlCol="0" anchor="t">
+            <a:normAutofit/>
+          </a:bodyPr>
+          <a:lstStyle/>
+          <a:p>
+            <a:pPr indent="0" marL="0">
+              <a:buNone/>
+            </a:pPr>
+            <a:r>
+              <a:rPr lang="en-US" sz="1250" dirty="0">
                 <a:solidFill>
                   <a:srgbClr val="17364A"/>
                 </a:solidFill>
@@ -5148,9 +8006,116 @@
                 <a:ea typeface="Aptos" pitchFamily="34" charset="-122"/>
                 <a:cs typeface="Aptos" pitchFamily="34" charset="-120"/>
               </a:rPr>
-              <a:t>Subgroup monitoring plan</a:t>
-            </a:r>
-            <a:endParaRPr lang="en-US" sz="1450" dirty="0"/>
+              <a:t>Predictive model review plan</a:t>
+            </a:r>
+            <a:endParaRPr lang="en-US" sz="1250" dirty="0"/>
+          </a:p>
+        </p:txBody>
+      </p:sp>
+      <p:sp>
+        <p:nvSpPr>
+          <p:cNvPr id="14" name="Shape 12"/>
+          <p:cNvSpPr/>
+          <p:nvPr/>
+        </p:nvSpPr>
+        <p:spPr>
+          <a:xfrm>
+            <a:off x="7909560" y="3520440"/>
+            <a:ext cx="3154680" cy="1737360"/>
+          </a:xfrm>
+          <a:prstGeom prst="roundRect">
+            <a:avLst>
+              <a:gd name="adj" fmla="val 6316"/>
+            </a:avLst>
+          </a:prstGeom>
+          <a:solidFill>
+            <a:srgbClr val="EAF6F8"/>
+          </a:solidFill>
+          <a:ln w="12700">
+            <a:solidFill>
+              <a:srgbClr val="B9D7E6"/>
+            </a:solidFill>
+            <a:prstDash val="solid"/>
+          </a:ln>
+        </p:spPr>
+      </p:sp>
+      <p:sp>
+        <p:nvSpPr>
+          <p:cNvPr id="15" name="Text 13"/>
+          <p:cNvSpPr/>
+          <p:nvPr/>
+        </p:nvSpPr>
+        <p:spPr>
+          <a:xfrm>
+            <a:off x="8074152" y="3666744"/>
+            <a:ext cx="2825496" cy="201168"/>
+          </a:xfrm>
+          <a:prstGeom prst="rect">
+            <a:avLst/>
+          </a:prstGeom>
+          <a:noFill/>
+          <a:ln/>
+        </p:spPr>
+        <p:txBody>
+          <a:bodyPr wrap="square" lIns="0" tIns="0" rIns="0" bIns="0" rtlCol="0" anchor="ctr"/>
+          <a:lstStyle/>
+          <a:p>
+            <a:pPr indent="0" marL="0">
+              <a:buNone/>
+            </a:pPr>
+            <a:r>
+              <a:rPr lang="en-US" sz="950" b="1" dirty="0">
+                <a:solidFill>
+                  <a:srgbClr val="0068B7"/>
+                </a:solidFill>
+                <a:latin typeface="Aptos" pitchFamily="34" charset="0"/>
+                <a:ea typeface="Aptos" pitchFamily="34" charset="-122"/>
+                <a:cs typeface="Aptos" pitchFamily="34" charset="-120"/>
+              </a:rPr>
+              <a:t>Use this for</a:t>
+            </a:r>
+            <a:endParaRPr lang="en-US" sz="950" dirty="0"/>
+          </a:p>
+        </p:txBody>
+      </p:sp>
+      <p:sp>
+        <p:nvSpPr>
+          <p:cNvPr id="16" name="Text 14"/>
+          <p:cNvSpPr/>
+          <p:nvPr/>
+        </p:nvSpPr>
+        <p:spPr>
+          <a:xfrm>
+            <a:off x="8074152" y="3959352"/>
+            <a:ext cx="2825496" cy="1170432"/>
+          </a:xfrm>
+          <a:prstGeom prst="rect">
+            <a:avLst/>
+          </a:prstGeom>
+          <a:noFill/>
+          <a:ln/>
+        </p:spPr>
+        <p:txBody>
+          <a:bodyPr wrap="square" lIns="0" tIns="0" rIns="0" bIns="0" rtlCol="0" anchor="t">
+            <a:normAutofit/>
+          </a:bodyPr>
+          <a:lstStyle/>
+          <a:p>
+            <a:pPr indent="0" marL="0">
+              <a:buNone/>
+            </a:pPr>
+            <a:r>
+              <a:rPr lang="en-US" sz="1250" dirty="0">
+                <a:solidFill>
+                  <a:srgbClr val="17364A"/>
+                </a:solidFill>
+                <a:latin typeface="Aptos" pitchFamily="34" charset="0"/>
+                <a:ea typeface="Aptos" pitchFamily="34" charset="-122"/>
+                <a:cs typeface="Aptos" pitchFamily="34" charset="-120"/>
+              </a:rPr>
+              <a:t>Connect the concept to public health decisions, safeguards, documentation, or implementation work.</a:t>
+            </a:r>
+            <a:endParaRPr lang="en-US" sz="1250" dirty="0"/>
           </a:p>
         </p:txBody>
       </p:sp>
@@ -5213,7 +8178,32 @@
       </p:sp>
       <p:sp>
         <p:nvSpPr>
-          <p:cNvPr id="3" name="Text 1"/>
+          <p:cNvPr id="3" name="Shape 1"/>
+          <p:cNvSpPr/>
+          <p:nvPr/>
+        </p:nvSpPr>
+        <p:spPr>
+          <a:xfrm>
+            <a:off x="0" y="164592"/>
+            <a:ext cx="146304" cy="6693408"/>
+          </a:xfrm>
+          <a:prstGeom prst="rect">
+            <a:avLst/>
+          </a:prstGeom>
+          <a:solidFill>
+            <a:srgbClr val="2F8A28"/>
+          </a:solidFill>
+          <a:ln w="12700">
+            <a:solidFill>
+              <a:srgbClr val="2F8A28"/>
+            </a:solidFill>
+            <a:prstDash val="solid"/>
+          </a:ln>
+        </p:spPr>
+      </p:sp>
+      <p:sp>
+        <p:nvSpPr>
+          <p:cNvPr id="4" name="Text 2"/>
           <p:cNvSpPr/>
           <p:nvPr/>
         </p:nvSpPr>
@@ -5252,7 +8242,7 @@
       </p:sp>
       <p:sp>
         <p:nvSpPr>
-          <p:cNvPr id="4" name="Text 2"/>
+          <p:cNvPr id="5" name="Text 3"/>
           <p:cNvSpPr/>
           <p:nvPr/>
         </p:nvSpPr>
@@ -5291,7 +8281,7 @@
       </p:sp>
       <p:sp>
         <p:nvSpPr>
-          <p:cNvPr id="5" name="Text 3"/>
+          <p:cNvPr id="6" name="Text 4"/>
           <p:cNvSpPr/>
           <p:nvPr/>
         </p:nvSpPr>
@@ -5330,7 +8320,7 @@
       </p:sp>
       <p:sp>
         <p:nvSpPr>
-          <p:cNvPr id="6" name="Text 4"/>
+          <p:cNvPr id="7" name="Text 5"/>
           <p:cNvSpPr/>
           <p:nvPr/>
         </p:nvSpPr>
@@ -5363,7 +8353,7 @@
                 <a:ea typeface="Aptos Display" pitchFamily="34" charset="-122"/>
                 <a:cs typeface="Aptos Display" pitchFamily="34" charset="-120"/>
               </a:rPr>
-              <a:t>Knowledge Check</a:t>
+              <a:t>Expected Artifact or Evidence Continued</a:t>
             </a:r>
             <a:endParaRPr lang="en-US" sz="2700" dirty="0"/>
           </a:p>
@@ -5371,14 +8361,14 @@
       </p:sp>
       <p:sp>
         <p:nvSpPr>
-          <p:cNvPr id="7" name="Text 5"/>
-          <p:cNvSpPr/>
-          <p:nvPr/>
-        </p:nvSpPr>
-        <p:spPr>
-          <a:xfrm>
-            <a:off x="822960" y="1325880"/>
-            <a:ext cx="10378440" cy="4800600"/>
+          <p:cNvPr id="8" name="Text 6"/>
+          <p:cNvSpPr/>
+          <p:nvPr/>
+        </p:nvSpPr>
+        <p:spPr>
+          <a:xfrm>
+            <a:off x="868680" y="1417320"/>
+            <a:ext cx="6675120" cy="4434840"/>
           </a:xfrm>
           <a:prstGeom prst="rect">
             <a:avLst/>
@@ -5393,7 +8383,7 @@
           <a:lstStyle/>
           <a:p>
             <a:r>
-              <a:rPr lang="en-US" sz="1450" dirty="0">
+              <a:rPr lang="en-US" sz="1700" dirty="0">
                 <a:solidFill>
                   <a:srgbClr val="17364A"/>
                 </a:solidFill>
@@ -5401,13 +8391,106 @@
                 <a:ea typeface="Aptos" pitchFamily="34" charset="-122"/>
                 <a:cs typeface="Aptos" pitchFamily="34" charset="-120"/>
               </a:rPr>
-              <a:t>1. What is calibration?</a:t>
-            </a:r>
-            <a:endParaRPr lang="en-US" sz="1450" dirty="0"/>
-          </a:p>
-          <a:p>
-            <a:r>
-              <a:rPr lang="en-US" sz="1450" dirty="0">
+              <a:t>Subgroup monitoring plan</a:t>
+            </a:r>
+            <a:endParaRPr lang="en-US" sz="1700" dirty="0"/>
+          </a:p>
+        </p:txBody>
+      </p:sp>
+      <p:sp>
+        <p:nvSpPr>
+          <p:cNvPr id="9" name="Shape 7"/>
+          <p:cNvSpPr/>
+          <p:nvPr/>
+        </p:nvSpPr>
+        <p:spPr>
+          <a:xfrm>
+            <a:off x="7909560" y="1417320"/>
+            <a:ext cx="3154680" cy="1828800"/>
+          </a:xfrm>
+          <a:prstGeom prst="roundRect">
+            <a:avLst>
+              <a:gd name="adj" fmla="val 6000"/>
+            </a:avLst>
+          </a:prstGeom>
+          <a:solidFill>
+            <a:srgbClr val="EEF8ED"/>
+          </a:solidFill>
+          <a:ln w="12700">
+            <a:solidFill>
+              <a:srgbClr val="B9D7E6"/>
+            </a:solidFill>
+            <a:prstDash val="solid"/>
+          </a:ln>
+        </p:spPr>
+      </p:sp>
+      <p:sp>
+        <p:nvSpPr>
+          <p:cNvPr id="10" name="Text 8"/>
+          <p:cNvSpPr/>
+          <p:nvPr/>
+        </p:nvSpPr>
+        <p:spPr>
+          <a:xfrm>
+            <a:off x="8074152" y="1563624"/>
+            <a:ext cx="2825496" cy="201168"/>
+          </a:xfrm>
+          <a:prstGeom prst="rect">
+            <a:avLst/>
+          </a:prstGeom>
+          <a:noFill/>
+          <a:ln/>
+        </p:spPr>
+        <p:txBody>
+          <a:bodyPr wrap="square" lIns="0" tIns="0" rIns="0" bIns="0" rtlCol="0" anchor="ctr"/>
+          <a:lstStyle/>
+          <a:p>
+            <a:pPr indent="0" marL="0">
+              <a:buNone/>
+            </a:pPr>
+            <a:r>
+              <a:rPr lang="en-US" sz="950" b="1" dirty="0">
+                <a:solidFill>
+                  <a:srgbClr val="0068B7"/>
+                </a:solidFill>
+                <a:latin typeface="Aptos" pitchFamily="34" charset="0"/>
+                <a:ea typeface="Aptos" pitchFamily="34" charset="-122"/>
+                <a:cs typeface="Aptos" pitchFamily="34" charset="-120"/>
+              </a:rPr>
+              <a:t>Key idea</a:t>
+            </a:r>
+            <a:endParaRPr lang="en-US" sz="950" dirty="0"/>
+          </a:p>
+        </p:txBody>
+      </p:sp>
+      <p:sp>
+        <p:nvSpPr>
+          <p:cNvPr id="11" name="Text 9"/>
+          <p:cNvSpPr/>
+          <p:nvPr/>
+        </p:nvSpPr>
+        <p:spPr>
+          <a:xfrm>
+            <a:off x="8074152" y="1856232"/>
+            <a:ext cx="2825496" cy="1261872"/>
+          </a:xfrm>
+          <a:prstGeom prst="rect">
+            <a:avLst/>
+          </a:prstGeom>
+          <a:noFill/>
+          <a:ln/>
+        </p:spPr>
+        <p:txBody>
+          <a:bodyPr wrap="square" lIns="0" tIns="0" rIns="0" bIns="0" rtlCol="0" anchor="t">
+            <a:normAutofit/>
+          </a:bodyPr>
+          <a:lstStyle/>
+          <a:p>
+            <a:pPr indent="0" marL="0">
+              <a:buNone/>
+            </a:pPr>
+            <a:r>
+              <a:rPr lang="en-US" sz="1250" dirty="0">
                 <a:solidFill>
                   <a:srgbClr val="17364A"/>
                 </a:solidFill>
@@ -5415,13 +8498,106 @@
                 <a:ea typeface="Aptos" pitchFamily="34" charset="-122"/>
                 <a:cs typeface="Aptos" pitchFamily="34" charset="-120"/>
               </a:rPr>
-              <a:t>2. Why should thresholds be reviewed by public health staff?</a:t>
-            </a:r>
-            <a:endParaRPr lang="en-US" sz="1450" dirty="0"/>
-          </a:p>
-          <a:p>
-            <a:r>
-              <a:rPr lang="en-US" sz="1450" dirty="0">
+              <a:t>Subgroup monitoring plan</a:t>
+            </a:r>
+            <a:endParaRPr lang="en-US" sz="1250" dirty="0"/>
+          </a:p>
+        </p:txBody>
+      </p:sp>
+      <p:sp>
+        <p:nvSpPr>
+          <p:cNvPr id="12" name="Shape 10"/>
+          <p:cNvSpPr/>
+          <p:nvPr/>
+        </p:nvSpPr>
+        <p:spPr>
+          <a:xfrm>
+            <a:off x="7909560" y="3520440"/>
+            <a:ext cx="3154680" cy="1737360"/>
+          </a:xfrm>
+          <a:prstGeom prst="roundRect">
+            <a:avLst>
+              <a:gd name="adj" fmla="val 6316"/>
+            </a:avLst>
+          </a:prstGeom>
+          <a:solidFill>
+            <a:srgbClr val="EAF6F8"/>
+          </a:solidFill>
+          <a:ln w="12700">
+            <a:solidFill>
+              <a:srgbClr val="B9D7E6"/>
+            </a:solidFill>
+            <a:prstDash val="solid"/>
+          </a:ln>
+        </p:spPr>
+      </p:sp>
+      <p:sp>
+        <p:nvSpPr>
+          <p:cNvPr id="13" name="Text 11"/>
+          <p:cNvSpPr/>
+          <p:nvPr/>
+        </p:nvSpPr>
+        <p:spPr>
+          <a:xfrm>
+            <a:off x="8074152" y="3666744"/>
+            <a:ext cx="2825496" cy="201168"/>
+          </a:xfrm>
+          <a:prstGeom prst="rect">
+            <a:avLst/>
+          </a:prstGeom>
+          <a:noFill/>
+          <a:ln/>
+        </p:spPr>
+        <p:txBody>
+          <a:bodyPr wrap="square" lIns="0" tIns="0" rIns="0" bIns="0" rtlCol="0" anchor="ctr"/>
+          <a:lstStyle/>
+          <a:p>
+            <a:pPr indent="0" marL="0">
+              <a:buNone/>
+            </a:pPr>
+            <a:r>
+              <a:rPr lang="en-US" sz="950" b="1" dirty="0">
+                <a:solidFill>
+                  <a:srgbClr val="0068B7"/>
+                </a:solidFill>
+                <a:latin typeface="Aptos" pitchFamily="34" charset="0"/>
+                <a:ea typeface="Aptos" pitchFamily="34" charset="-122"/>
+                <a:cs typeface="Aptos" pitchFamily="34" charset="-120"/>
+              </a:rPr>
+              <a:t>Use this for</a:t>
+            </a:r>
+            <a:endParaRPr lang="en-US" sz="950" dirty="0"/>
+          </a:p>
+        </p:txBody>
+      </p:sp>
+      <p:sp>
+        <p:nvSpPr>
+          <p:cNvPr id="14" name="Text 12"/>
+          <p:cNvSpPr/>
+          <p:nvPr/>
+        </p:nvSpPr>
+        <p:spPr>
+          <a:xfrm>
+            <a:off x="8074152" y="3959352"/>
+            <a:ext cx="2825496" cy="1170432"/>
+          </a:xfrm>
+          <a:prstGeom prst="rect">
+            <a:avLst/>
+          </a:prstGeom>
+          <a:noFill/>
+          <a:ln/>
+        </p:spPr>
+        <p:txBody>
+          <a:bodyPr wrap="square" lIns="0" tIns="0" rIns="0" bIns="0" rtlCol="0" anchor="t">
+            <a:normAutofit/>
+          </a:bodyPr>
+          <a:lstStyle/>
+          <a:p>
+            <a:pPr indent="0" marL="0">
+              <a:buNone/>
+            </a:pPr>
+            <a:r>
+              <a:rPr lang="en-US" sz="1250" dirty="0">
                 <a:solidFill>
                   <a:srgbClr val="17364A"/>
                 </a:solidFill>
@@ -5429,37 +8605,9 @@
                 <a:ea typeface="Aptos" pitchFamily="34" charset="-122"/>
                 <a:cs typeface="Aptos" pitchFamily="34" charset="-120"/>
               </a:rPr>
-              <a:t>3. Which use of a risk score is most concerning without additional safeguards?</a:t>
-            </a:r>
-            <a:endParaRPr lang="en-US" sz="1450" dirty="0"/>
-          </a:p>
-          <a:p>
-            <a:r>
-              <a:rPr lang="en-US" sz="1450" dirty="0">
-                <a:solidFill>
-                  <a:srgbClr val="17364A"/>
-                </a:solidFill>
-                <a:latin typeface="Aptos" pitchFamily="34" charset="0"/>
-                <a:ea typeface="Aptos" pitchFamily="34" charset="-122"/>
-                <a:cs typeface="Aptos" pitchFamily="34" charset="-120"/>
-              </a:rPr>
-              <a:t>4. What is a false negative in a predictive workflow?</a:t>
-            </a:r>
-            <a:endParaRPr lang="en-US" sz="1450" dirty="0"/>
-          </a:p>
-          <a:p>
-            <a:r>
-              <a:rPr lang="en-US" sz="1450" dirty="0">
-                <a:solidFill>
-                  <a:srgbClr val="17364A"/>
-                </a:solidFill>
-                <a:latin typeface="Aptos" pitchFamily="34" charset="0"/>
-                <a:ea typeface="Aptos" pitchFamily="34" charset="-122"/>
-                <a:cs typeface="Aptos" pitchFamily="34" charset="-120"/>
-              </a:rPr>
-              <a:t>5. What should a predictive model review plan include?</a:t>
-            </a:r>
-            <a:endParaRPr lang="en-US" sz="1450" dirty="0"/>
+              <a:t>Connect the concept to public health decisions, safeguards, documentation, or implementation work.</a:t>
+            </a:r>
+            <a:endParaRPr lang="en-US" sz="1250" dirty="0"/>
           </a:p>
         </p:txBody>
       </p:sp>
@@ -5522,7 +8670,32 @@
       </p:sp>
       <p:sp>
         <p:nvSpPr>
-          <p:cNvPr id="3" name="Text 1"/>
+          <p:cNvPr id="3" name="Shape 1"/>
+          <p:cNvSpPr/>
+          <p:nvPr/>
+        </p:nvSpPr>
+        <p:spPr>
+          <a:xfrm>
+            <a:off x="0" y="164592"/>
+            <a:ext cx="146304" cy="6693408"/>
+          </a:xfrm>
+          <a:prstGeom prst="rect">
+            <a:avLst/>
+          </a:prstGeom>
+          <a:solidFill>
+            <a:srgbClr val="2F8A28"/>
+          </a:solidFill>
+          <a:ln w="12700">
+            <a:solidFill>
+              <a:srgbClr val="2F8A28"/>
+            </a:solidFill>
+            <a:prstDash val="solid"/>
+          </a:ln>
+        </p:spPr>
+      </p:sp>
+      <p:sp>
+        <p:nvSpPr>
+          <p:cNvPr id="4" name="Text 2"/>
           <p:cNvSpPr/>
           <p:nvPr/>
         </p:nvSpPr>
@@ -5561,7 +8734,7 @@
       </p:sp>
       <p:sp>
         <p:nvSpPr>
-          <p:cNvPr id="4" name="Text 2"/>
+          <p:cNvPr id="5" name="Text 3"/>
           <p:cNvSpPr/>
           <p:nvPr/>
         </p:nvSpPr>
@@ -5600,7 +8773,7 @@
       </p:sp>
       <p:sp>
         <p:nvSpPr>
-          <p:cNvPr id="5" name="Text 3"/>
+          <p:cNvPr id="6" name="Text 4"/>
           <p:cNvSpPr/>
           <p:nvPr/>
         </p:nvSpPr>
@@ -5639,7 +8812,7 @@
       </p:sp>
       <p:sp>
         <p:nvSpPr>
-          <p:cNvPr id="6" name="Text 4"/>
+          <p:cNvPr id="7" name="Text 5"/>
           <p:cNvSpPr/>
           <p:nvPr/>
         </p:nvSpPr>
@@ -5672,7 +8845,7 @@
                 <a:ea typeface="Aptos Display" pitchFamily="34" charset="-122"/>
                 <a:cs typeface="Aptos Display" pitchFamily="34" charset="-120"/>
               </a:rPr>
-              <a:t>Module Context</a:t>
+              <a:t>What this module helps you do</a:t>
             </a:r>
             <a:endParaRPr lang="en-US" sz="2700" dirty="0"/>
           </a:p>
@@ -5680,14 +8853,14 @@
       </p:sp>
       <p:sp>
         <p:nvSpPr>
-          <p:cNvPr id="7" name="Text 5"/>
-          <p:cNvSpPr/>
-          <p:nvPr/>
-        </p:nvSpPr>
-        <p:spPr>
-          <a:xfrm>
-            <a:off x="822960" y="1325880"/>
-            <a:ext cx="10378440" cy="1371600"/>
+          <p:cNvPr id="8" name="Text 6"/>
+          <p:cNvSpPr/>
+          <p:nvPr/>
+        </p:nvSpPr>
+        <p:spPr>
+          <a:xfrm>
+            <a:off x="868680" y="1417320"/>
+            <a:ext cx="6675120" cy="3291840"/>
           </a:xfrm>
           <a:prstGeom prst="rect">
             <a:avLst/>
@@ -5702,7 +8875,7 @@
           <a:lstStyle/>
           <a:p>
             <a:r>
-              <a:rPr lang="en-US" sz="1600" dirty="0">
+              <a:rPr lang="en-US" sz="1700" dirty="0">
                 <a:solidFill>
                   <a:srgbClr val="17364A"/>
                 </a:solidFill>
@@ -5710,13 +8883,13 @@
                 <a:ea typeface="Aptos" pitchFamily="34" charset="-122"/>
                 <a:cs typeface="Aptos" pitchFamily="34" charset="-120"/>
               </a:rPr>
-              <a:t>Level: applied/foundational</a:t>
-            </a:r>
-            <a:endParaRPr lang="en-US" sz="1600" dirty="0"/>
-          </a:p>
-          <a:p>
-            <a:r>
-              <a:rPr lang="en-US" sz="1600" dirty="0">
+              <a:t>Predictive analytics uses data to estimate the likelihood of future events or outcomes.</a:t>
+            </a:r>
+            <a:endParaRPr lang="en-US" sz="1700" dirty="0"/>
+          </a:p>
+          <a:p>
+            <a:r>
+              <a:rPr lang="en-US" sz="1700" dirty="0">
                 <a:solidFill>
                   <a:srgbClr val="17364A"/>
                 </a:solidFill>
@@ -5724,13 +8897,13 @@
                 <a:ea typeface="Aptos" pitchFamily="34" charset="-122"/>
                 <a:cs typeface="Aptos" pitchFamily="34" charset="-120"/>
               </a:rPr>
-              <a:t>Primary track: Analytics and Modeling Track</a:t>
-            </a:r>
-            <a:endParaRPr lang="en-US" sz="1600" dirty="0"/>
-          </a:p>
-          <a:p>
-            <a:r>
-              <a:rPr lang="en-US" sz="1600" dirty="0">
+              <a:t>In public health, predictive models may be used to anticipate disease burden, identify populations at higher risk, prioritize outreach, allocate.</a:t>
+            </a:r>
+            <a:endParaRPr lang="en-US" sz="1700" dirty="0"/>
+          </a:p>
+          <a:p>
+            <a:r>
+              <a:rPr lang="en-US" sz="1700" dirty="0">
                 <a:solidFill>
                   <a:srgbClr val="17364A"/>
                 </a:solidFill>
@@ -5738,31 +8911,111 @@
                 <a:ea typeface="Aptos" pitchFamily="34" charset="-122"/>
                 <a:cs typeface="Aptos" pitchFamily="34" charset="-120"/>
               </a:rPr>
-              <a:t>Appears in tracks: analytics-modeling</a:t>
-            </a:r>
-            <a:endParaRPr lang="en-US" sz="1600" dirty="0"/>
-          </a:p>
-        </p:txBody>
-      </p:sp>
-      <p:sp>
-        <p:nvSpPr>
-          <p:cNvPr id="8" name="Text 6"/>
-          <p:cNvSpPr/>
-          <p:nvPr/>
-        </p:nvSpPr>
-        <p:spPr>
-          <a:xfrm>
-            <a:off x="822960" y="2743200"/>
-            <a:ext cx="10378440" cy="2834640"/>
-          </a:xfrm>
-          <a:prstGeom prst="rect">
-            <a:avLst/>
-          </a:prstGeom>
-          <a:noFill/>
-          <a:ln/>
-        </p:spPr>
-        <p:txBody>
-          <a:bodyPr wrap="square" lIns="1016" tIns="1016" rIns="1016" bIns="1016" rtlCol="0" anchor="t">
+              <a:t>Risk stratification is the practice of grouping individuals, facilities, areas, events, or populations into categories based on estimated risk.</a:t>
+            </a:r>
+            <a:endParaRPr lang="en-US" sz="1700" dirty="0"/>
+          </a:p>
+          <a:p>
+            <a:r>
+              <a:rPr lang="en-US" sz="1700" dirty="0">
+                <a:solidFill>
+                  <a:srgbClr val="17364A"/>
+                </a:solidFill>
+                <a:latin typeface="Aptos" pitchFamily="34" charset="0"/>
+                <a:ea typeface="Aptos" pitchFamily="34" charset="-122"/>
+                <a:cs typeface="Aptos" pitchFamily="34" charset="-120"/>
+              </a:rPr>
+              <a:t>This module helps learners distinguish prediction from diagnosis, causation, eligibility determination, and public health judgment.</a:t>
+            </a:r>
+            <a:endParaRPr lang="en-US" sz="1700" dirty="0"/>
+          </a:p>
+        </p:txBody>
+      </p:sp>
+      <p:sp>
+        <p:nvSpPr>
+          <p:cNvPr id="9" name="Shape 7"/>
+          <p:cNvSpPr/>
+          <p:nvPr/>
+        </p:nvSpPr>
+        <p:spPr>
+          <a:xfrm>
+            <a:off x="7909560" y="1417320"/>
+            <a:ext cx="3154680" cy="1920240"/>
+          </a:xfrm>
+          <a:prstGeom prst="roundRect">
+            <a:avLst>
+              <a:gd name="adj" fmla="val 5714"/>
+            </a:avLst>
+          </a:prstGeom>
+          <a:solidFill>
+            <a:srgbClr val="EAF6F8"/>
+          </a:solidFill>
+          <a:ln w="12700">
+            <a:solidFill>
+              <a:srgbClr val="B9D7E6"/>
+            </a:solidFill>
+            <a:prstDash val="solid"/>
+          </a:ln>
+        </p:spPr>
+      </p:sp>
+      <p:sp>
+        <p:nvSpPr>
+          <p:cNvPr id="10" name="Text 8"/>
+          <p:cNvSpPr/>
+          <p:nvPr/>
+        </p:nvSpPr>
+        <p:spPr>
+          <a:xfrm>
+            <a:off x="8074152" y="1563624"/>
+            <a:ext cx="2825496" cy="201168"/>
+          </a:xfrm>
+          <a:prstGeom prst="rect">
+            <a:avLst/>
+          </a:prstGeom>
+          <a:noFill/>
+          <a:ln/>
+        </p:spPr>
+        <p:txBody>
+          <a:bodyPr wrap="square" lIns="0" tIns="0" rIns="0" bIns="0" rtlCol="0" anchor="ctr"/>
+          <a:lstStyle/>
+          <a:p>
+            <a:pPr indent="0" marL="0">
+              <a:buNone/>
+            </a:pPr>
+            <a:r>
+              <a:rPr lang="en-US" sz="950" b="1" dirty="0">
+                <a:solidFill>
+                  <a:srgbClr val="0068B7"/>
+                </a:solidFill>
+                <a:latin typeface="Aptos" pitchFamily="34" charset="0"/>
+                <a:ea typeface="Aptos" pitchFamily="34" charset="-122"/>
+                <a:cs typeface="Aptos" pitchFamily="34" charset="-120"/>
+              </a:rPr>
+              <a:t>Module details</a:t>
+            </a:r>
+            <a:endParaRPr lang="en-US" sz="950" dirty="0"/>
+          </a:p>
+        </p:txBody>
+      </p:sp>
+      <p:sp>
+        <p:nvSpPr>
+          <p:cNvPr id="11" name="Text 9"/>
+          <p:cNvSpPr/>
+          <p:nvPr/>
+        </p:nvSpPr>
+        <p:spPr>
+          <a:xfrm>
+            <a:off x="8074152" y="1856232"/>
+            <a:ext cx="2825496" cy="1353312"/>
+          </a:xfrm>
+          <a:prstGeom prst="rect">
+            <a:avLst/>
+          </a:prstGeom>
+          <a:noFill/>
+          <a:ln/>
+        </p:spPr>
+        <p:txBody>
+          <a:bodyPr wrap="square" lIns="0" tIns="0" rIns="0" bIns="0" rtlCol="0" anchor="t">
             <a:normAutofit/>
           </a:bodyPr>
           <a:lstStyle/>
@@ -5771,7 +9024,7 @@
               <a:buNone/>
             </a:pPr>
             <a:r>
-              <a:rPr lang="en-US" sz="1400" dirty="0">
+              <a:rPr lang="en-US" sz="1250" dirty="0">
                 <a:solidFill>
                   <a:srgbClr val="17364A"/>
                 </a:solidFill>
@@ -5779,9 +9032,150 @@
                 <a:ea typeface="Aptos" pitchFamily="34" charset="-122"/>
                 <a:cs typeface="Aptos" pitchFamily="34" charset="-120"/>
               </a:rPr>
-              <a:t>Predictive analytics uses data to estimate the likelihood of future events or outcomes. In public health, predictive models may be used to anticipate disease burden, identify populations at higher risk, prioritize outreach, allocate limited resources, or support early intervention. Risk stratification is the practice of grouping individuals, facilities, areas, events, or populations into categories based on estimated risk. This module helps learners distinguish prediction from diagnosis, causation, eligibility determination, and public health judgment. A risk score can support planning or triage, but it should not automatically become a decision without validation, review, and governance. Public health staff need to know how predictive models are created, what performance measures mean, and how errors affect equity, trust, and operations. By the end of this module, learners should be able to review a predictive AI proposal, identify the data and outcome being predicted, assess the consequences of false positives and false negatives, and design appropriate human review and monitoring processes.</a:t>
-            </a:r>
-            <a:endParaRPr lang="en-US" sz="1400" dirty="0"/>
+              <a:t>Level: applied/foundational</a:t>
+            </a:r>
+            <a:endParaRPr lang="en-US" sz="1250" dirty="0"/>
+          </a:p>
+          <a:p>
+            <a:pPr indent="0" marL="0">
+              <a:buNone/>
+            </a:pPr>
+            <a:r>
+              <a:rPr lang="en-US" sz="1250" dirty="0">
+                <a:solidFill>
+                  <a:srgbClr val="17364A"/>
+                </a:solidFill>
+                <a:latin typeface="Aptos" pitchFamily="34" charset="0"/>
+                <a:ea typeface="Aptos" pitchFamily="34" charset="-122"/>
+                <a:cs typeface="Aptos" pitchFamily="34" charset="-120"/>
+              </a:rPr>
+              <a:t>Primary track: Analytics and Modeling Track</a:t>
+            </a:r>
+            <a:endParaRPr lang="en-US" sz="1250" dirty="0"/>
+          </a:p>
+          <a:p>
+            <a:pPr indent="0" marL="0">
+              <a:buNone/>
+            </a:pPr>
+            <a:r>
+              <a:rPr lang="en-US" sz="1250" dirty="0">
+                <a:solidFill>
+                  <a:srgbClr val="17364A"/>
+                </a:solidFill>
+                <a:latin typeface="Aptos" pitchFamily="34" charset="0"/>
+                <a:ea typeface="Aptos" pitchFamily="34" charset="-122"/>
+                <a:cs typeface="Aptos" pitchFamily="34" charset="-120"/>
+              </a:rPr>
+              <a:t>Appears in tracks: analytics-modeling</a:t>
+            </a:r>
+            <a:endParaRPr lang="en-US" sz="1250" dirty="0"/>
+          </a:p>
+        </p:txBody>
+      </p:sp>
+      <p:sp>
+        <p:nvSpPr>
+          <p:cNvPr id="12" name="Shape 10"/>
+          <p:cNvSpPr/>
+          <p:nvPr/>
+        </p:nvSpPr>
+        <p:spPr>
+          <a:xfrm>
+            <a:off x="7909560" y="3611880"/>
+            <a:ext cx="3154680" cy="1783080"/>
+          </a:xfrm>
+          <a:prstGeom prst="roundRect">
+            <a:avLst>
+              <a:gd name="adj" fmla="val 6154"/>
+            </a:avLst>
+          </a:prstGeom>
+          <a:solidFill>
+            <a:srgbClr val="EEF8ED"/>
+          </a:solidFill>
+          <a:ln w="12700">
+            <a:solidFill>
+              <a:srgbClr val="B9D7E6"/>
+            </a:solidFill>
+            <a:prstDash val="solid"/>
+          </a:ln>
+        </p:spPr>
+      </p:sp>
+      <p:sp>
+        <p:nvSpPr>
+          <p:cNvPr id="13" name="Text 11"/>
+          <p:cNvSpPr/>
+          <p:nvPr/>
+        </p:nvSpPr>
+        <p:spPr>
+          <a:xfrm>
+            <a:off x="8074152" y="3758184"/>
+            <a:ext cx="2825496" cy="201168"/>
+          </a:xfrm>
+          <a:prstGeom prst="rect">
+            <a:avLst/>
+          </a:prstGeom>
+          <a:noFill/>
+          <a:ln/>
+        </p:spPr>
+        <p:txBody>
+          <a:bodyPr wrap="square" lIns="0" tIns="0" rIns="0" bIns="0" rtlCol="0" anchor="ctr"/>
+          <a:lstStyle/>
+          <a:p>
+            <a:pPr indent="0" marL="0">
+              <a:buNone/>
+            </a:pPr>
+            <a:r>
+              <a:rPr lang="en-US" sz="950" b="1" dirty="0">
+                <a:solidFill>
+                  <a:srgbClr val="0068B7"/>
+                </a:solidFill>
+                <a:latin typeface="Aptos" pitchFamily="34" charset="0"/>
+                <a:ea typeface="Aptos" pitchFamily="34" charset="-122"/>
+                <a:cs typeface="Aptos" pitchFamily="34" charset="-120"/>
+              </a:rPr>
+              <a:t>Learning approach</a:t>
+            </a:r>
+            <a:endParaRPr lang="en-US" sz="950" dirty="0"/>
+          </a:p>
+        </p:txBody>
+      </p:sp>
+      <p:sp>
+        <p:nvSpPr>
+          <p:cNvPr id="14" name="Text 12"/>
+          <p:cNvSpPr/>
+          <p:nvPr/>
+        </p:nvSpPr>
+        <p:spPr>
+          <a:xfrm>
+            <a:off x="8074152" y="4050792"/>
+            <a:ext cx="2825496" cy="1216152"/>
+          </a:xfrm>
+          <a:prstGeom prst="rect">
+            <a:avLst/>
+          </a:prstGeom>
+          <a:noFill/>
+          <a:ln/>
+        </p:spPr>
+        <p:txBody>
+          <a:bodyPr wrap="square" lIns="0" tIns="0" rIns="0" bIns="0" rtlCol="0" anchor="t">
+            <a:normAutofit/>
+          </a:bodyPr>
+          <a:lstStyle/>
+          <a:p>
+            <a:pPr indent="0" marL="0">
+              <a:buNone/>
+            </a:pPr>
+            <a:r>
+              <a:rPr lang="en-US" sz="1250" dirty="0">
+                <a:solidFill>
+                  <a:srgbClr val="17364A"/>
+                </a:solidFill>
+                <a:latin typeface="Aptos" pitchFamily="34" charset="0"/>
+                <a:ea typeface="Aptos" pitchFamily="34" charset="-122"/>
+                <a:cs typeface="Aptos" pitchFamily="34" charset="-120"/>
+              </a:rPr>
+              <a:t>Review the core ideas, complete the practical exercise, check your understanding, and use the related plays and tools to apply the lesson.</a:t>
+            </a:r>
+            <a:endParaRPr lang="en-US" sz="1250" dirty="0"/>
           </a:p>
         </p:txBody>
       </p:sp>
@@ -5844,7 +9238,32 @@
       </p:sp>
       <p:sp>
         <p:nvSpPr>
-          <p:cNvPr id="3" name="Text 1"/>
+          <p:cNvPr id="3" name="Shape 1"/>
+          <p:cNvSpPr/>
+          <p:nvPr/>
+        </p:nvSpPr>
+        <p:spPr>
+          <a:xfrm>
+            <a:off x="0" y="164592"/>
+            <a:ext cx="146304" cy="6693408"/>
+          </a:xfrm>
+          <a:prstGeom prst="rect">
+            <a:avLst/>
+          </a:prstGeom>
+          <a:solidFill>
+            <a:srgbClr val="2F8A28"/>
+          </a:solidFill>
+          <a:ln w="12700">
+            <a:solidFill>
+              <a:srgbClr val="2F8A28"/>
+            </a:solidFill>
+            <a:prstDash val="solid"/>
+          </a:ln>
+        </p:spPr>
+      </p:sp>
+      <p:sp>
+        <p:nvSpPr>
+          <p:cNvPr id="4" name="Text 2"/>
           <p:cNvSpPr/>
           <p:nvPr/>
         </p:nvSpPr>
@@ -5883,7 +9302,7 @@
       </p:sp>
       <p:sp>
         <p:nvSpPr>
-          <p:cNvPr id="4" name="Text 2"/>
+          <p:cNvPr id="5" name="Text 3"/>
           <p:cNvSpPr/>
           <p:nvPr/>
         </p:nvSpPr>
@@ -5922,7 +9341,7 @@
       </p:sp>
       <p:sp>
         <p:nvSpPr>
-          <p:cNvPr id="5" name="Text 3"/>
+          <p:cNvPr id="6" name="Text 4"/>
           <p:cNvSpPr/>
           <p:nvPr/>
         </p:nvSpPr>
@@ -5961,13 +9380,77 @@
       </p:sp>
       <p:sp>
         <p:nvSpPr>
-          <p:cNvPr id="6" name="Text 4"/>
+          <p:cNvPr id="7" name="Shape 5"/>
           <p:cNvSpPr/>
           <p:nvPr/>
         </p:nvSpPr>
         <p:spPr>
           <a:xfrm>
             <a:off x="640080" y="658368"/>
+            <a:ext cx="420624" cy="420624"/>
+          </a:xfrm>
+          <a:prstGeom prst="ellipse">
+            <a:avLst/>
+          </a:prstGeom>
+          <a:solidFill>
+            <a:srgbClr val="0068B7"/>
+          </a:solidFill>
+          <a:ln w="12700">
+            <a:solidFill>
+              <a:srgbClr val="0068B7"/>
+            </a:solidFill>
+            <a:prstDash val="solid"/>
+          </a:ln>
+        </p:spPr>
+      </p:sp>
+      <p:sp>
+        <p:nvSpPr>
+          <p:cNvPr id="8" name="Text 6"/>
+          <p:cNvSpPr/>
+          <p:nvPr/>
+        </p:nvSpPr>
+        <p:spPr>
+          <a:xfrm>
+            <a:off x="640080" y="731520"/>
+            <a:ext cx="420624" cy="164592"/>
+          </a:xfrm>
+          <a:prstGeom prst="rect">
+            <a:avLst/>
+          </a:prstGeom>
+          <a:noFill/>
+          <a:ln/>
+        </p:spPr>
+        <p:txBody>
+          <a:bodyPr wrap="square" lIns="0" tIns="0" rIns="0" bIns="0" rtlCol="0" anchor="ctr"/>
+          <a:lstStyle/>
+          <a:p>
+            <a:pPr algn="ctr" indent="0" marL="0">
+              <a:buNone/>
+            </a:pPr>
+            <a:r>
+              <a:rPr lang="en-US" sz="1100" b="1" dirty="0">
+                <a:solidFill>
+                  <a:srgbClr val="FFFFFF"/>
+                </a:solidFill>
+                <a:latin typeface="Aptos" pitchFamily="34" charset="0"/>
+                <a:ea typeface="Aptos" pitchFamily="34" charset="-122"/>
+                <a:cs typeface="Aptos" pitchFamily="34" charset="-120"/>
+              </a:rPr>
+              <a:t>11</a:t>
+            </a:r>
+            <a:endParaRPr lang="en-US" sz="1100" dirty="0"/>
+          </a:p>
+        </p:txBody>
+      </p:sp>
+      <p:sp>
+        <p:nvSpPr>
+          <p:cNvPr id="9" name="Text 7"/>
+          <p:cNvSpPr/>
+          <p:nvPr/>
+        </p:nvSpPr>
+        <p:spPr>
+          <a:xfrm>
+            <a:off x="640080" y="621792"/>
             <a:ext cx="10881360" cy="566928"/>
           </a:xfrm>
           <a:prstGeom prst="rect">
@@ -5994,7 +9477,7 @@
                 <a:ea typeface="Aptos Display" pitchFamily="34" charset="-122"/>
                 <a:cs typeface="Aptos Display" pitchFamily="34" charset="-120"/>
               </a:rPr>
-              <a:t>References and Resources</a:t>
+              <a:t>Expected Assignment</a:t>
             </a:r>
             <a:endParaRPr lang="en-US" sz="2700" dirty="0"/>
           </a:p>
@@ -6002,14 +9485,14 @@
       </p:sp>
       <p:sp>
         <p:nvSpPr>
-          <p:cNvPr id="7" name="Text 5"/>
-          <p:cNvSpPr/>
-          <p:nvPr/>
-        </p:nvSpPr>
-        <p:spPr>
-          <a:xfrm>
-            <a:off x="822960" y="1325880"/>
-            <a:ext cx="10378440" cy="4800600"/>
+          <p:cNvPr id="10" name="Text 8"/>
+          <p:cNvSpPr/>
+          <p:nvPr/>
+        </p:nvSpPr>
+        <p:spPr>
+          <a:xfrm>
+            <a:off x="868680" y="1417320"/>
+            <a:ext cx="6675120" cy="4434840"/>
           </a:xfrm>
           <a:prstGeom prst="rect">
             <a:avLst/>
@@ -6024,7 +9507,7 @@
           <a:lstStyle/>
           <a:p>
             <a:r>
-              <a:rPr lang="en-US" sz="1450" dirty="0">
+              <a:rPr lang="en-US" sz="1700" dirty="0">
                 <a:solidFill>
                   <a:srgbClr val="17364A"/>
                 </a:solidFill>
@@ -6032,13 +9515,1209 @@
                 <a:ea typeface="Aptos" pitchFamily="34" charset="-122"/>
                 <a:cs typeface="Aptos" pitchFamily="34" charset="-120"/>
               </a:rPr>
+              <a:t>Predictive model review plan</a:t>
+            </a:r>
+            <a:endParaRPr lang="en-US" sz="1700" dirty="0"/>
+          </a:p>
+          <a:p>
+            <a:r>
+              <a:rPr lang="en-US" sz="1700" dirty="0">
+                <a:solidFill>
+                  <a:srgbClr val="17364A"/>
+                </a:solidFill>
+                <a:latin typeface="Aptos" pitchFamily="34" charset="0"/>
+                <a:ea typeface="Aptos" pitchFamily="34" charset="-122"/>
+                <a:cs typeface="Aptos" pitchFamily="34" charset="-120"/>
+              </a:rPr>
+              <a:t>Risk score interpretation guide</a:t>
+            </a:r>
+            <a:endParaRPr lang="en-US" sz="1700" dirty="0"/>
+          </a:p>
+          <a:p>
+            <a:r>
+              <a:rPr lang="en-US" sz="1700" dirty="0">
+                <a:solidFill>
+                  <a:srgbClr val="17364A"/>
+                </a:solidFill>
+                <a:latin typeface="Aptos" pitchFamily="34" charset="0"/>
+                <a:ea typeface="Aptos" pitchFamily="34" charset="-122"/>
+                <a:cs typeface="Aptos" pitchFamily="34" charset="-120"/>
+              </a:rPr>
+              <a:t>Threshold and error tradeoff memo</a:t>
+            </a:r>
+            <a:endParaRPr lang="en-US" sz="1700" dirty="0"/>
+          </a:p>
+          <a:p>
+            <a:r>
+              <a:rPr lang="en-US" sz="1700" dirty="0">
+                <a:solidFill>
+                  <a:srgbClr val="17364A"/>
+                </a:solidFill>
+                <a:latin typeface="Aptos" pitchFamily="34" charset="0"/>
+                <a:ea typeface="Aptos" pitchFamily="34" charset="-122"/>
+                <a:cs typeface="Aptos" pitchFamily="34" charset="-120"/>
+              </a:rPr>
+              <a:t>Subgroup monitoring plan</a:t>
+            </a:r>
+            <a:endParaRPr lang="en-US" sz="1700" dirty="0"/>
+          </a:p>
+        </p:txBody>
+      </p:sp>
+      <p:sp>
+        <p:nvSpPr>
+          <p:cNvPr id="11" name="Shape 9"/>
+          <p:cNvSpPr/>
+          <p:nvPr/>
+        </p:nvSpPr>
+        <p:spPr>
+          <a:xfrm>
+            <a:off x="7909560" y="1417320"/>
+            <a:ext cx="3154680" cy="1828800"/>
+          </a:xfrm>
+          <a:prstGeom prst="roundRect">
+            <a:avLst>
+              <a:gd name="adj" fmla="val 6000"/>
+            </a:avLst>
+          </a:prstGeom>
+          <a:solidFill>
+            <a:srgbClr val="EEF8ED"/>
+          </a:solidFill>
+          <a:ln w="12700">
+            <a:solidFill>
+              <a:srgbClr val="B9D7E6"/>
+            </a:solidFill>
+            <a:prstDash val="solid"/>
+          </a:ln>
+        </p:spPr>
+      </p:sp>
+      <p:sp>
+        <p:nvSpPr>
+          <p:cNvPr id="12" name="Text 10"/>
+          <p:cNvSpPr/>
+          <p:nvPr/>
+        </p:nvSpPr>
+        <p:spPr>
+          <a:xfrm>
+            <a:off x="8074152" y="1563624"/>
+            <a:ext cx="2825496" cy="201168"/>
+          </a:xfrm>
+          <a:prstGeom prst="rect">
+            <a:avLst/>
+          </a:prstGeom>
+          <a:noFill/>
+          <a:ln/>
+        </p:spPr>
+        <p:txBody>
+          <a:bodyPr wrap="square" lIns="0" tIns="0" rIns="0" bIns="0" rtlCol="0" anchor="ctr"/>
+          <a:lstStyle/>
+          <a:p>
+            <a:pPr indent="0" marL="0">
+              <a:buNone/>
+            </a:pPr>
+            <a:r>
+              <a:rPr lang="en-US" sz="950" b="1" dirty="0">
+                <a:solidFill>
+                  <a:srgbClr val="0068B7"/>
+                </a:solidFill>
+                <a:latin typeface="Aptos" pitchFamily="34" charset="0"/>
+                <a:ea typeface="Aptos" pitchFamily="34" charset="-122"/>
+                <a:cs typeface="Aptos" pitchFamily="34" charset="-120"/>
+              </a:rPr>
+              <a:t>Key idea</a:t>
+            </a:r>
+            <a:endParaRPr lang="en-US" sz="950" dirty="0"/>
+          </a:p>
+        </p:txBody>
+      </p:sp>
+      <p:sp>
+        <p:nvSpPr>
+          <p:cNvPr id="13" name="Text 11"/>
+          <p:cNvSpPr/>
+          <p:nvPr/>
+        </p:nvSpPr>
+        <p:spPr>
+          <a:xfrm>
+            <a:off x="8074152" y="1856232"/>
+            <a:ext cx="2825496" cy="1261872"/>
+          </a:xfrm>
+          <a:prstGeom prst="rect">
+            <a:avLst/>
+          </a:prstGeom>
+          <a:noFill/>
+          <a:ln/>
+        </p:spPr>
+        <p:txBody>
+          <a:bodyPr wrap="square" lIns="0" tIns="0" rIns="0" bIns="0" rtlCol="0" anchor="t">
+            <a:normAutofit/>
+          </a:bodyPr>
+          <a:lstStyle/>
+          <a:p>
+            <a:pPr indent="0" marL="0">
+              <a:buNone/>
+            </a:pPr>
+            <a:r>
+              <a:rPr lang="en-US" sz="1250" dirty="0">
+                <a:solidFill>
+                  <a:srgbClr val="17364A"/>
+                </a:solidFill>
+                <a:latin typeface="Aptos" pitchFamily="34" charset="0"/>
+                <a:ea typeface="Aptos" pitchFamily="34" charset="-122"/>
+                <a:cs typeface="Aptos" pitchFamily="34" charset="-120"/>
+              </a:rPr>
+              <a:t>Predictive model review plan</a:t>
+            </a:r>
+            <a:endParaRPr lang="en-US" sz="1250" dirty="0"/>
+          </a:p>
+        </p:txBody>
+      </p:sp>
+      <p:sp>
+        <p:nvSpPr>
+          <p:cNvPr id="14" name="Shape 12"/>
+          <p:cNvSpPr/>
+          <p:nvPr/>
+        </p:nvSpPr>
+        <p:spPr>
+          <a:xfrm>
+            <a:off x="7909560" y="3520440"/>
+            <a:ext cx="3154680" cy="1737360"/>
+          </a:xfrm>
+          <a:prstGeom prst="roundRect">
+            <a:avLst>
+              <a:gd name="adj" fmla="val 6316"/>
+            </a:avLst>
+          </a:prstGeom>
+          <a:solidFill>
+            <a:srgbClr val="EAF6F8"/>
+          </a:solidFill>
+          <a:ln w="12700">
+            <a:solidFill>
+              <a:srgbClr val="B9D7E6"/>
+            </a:solidFill>
+            <a:prstDash val="solid"/>
+          </a:ln>
+        </p:spPr>
+      </p:sp>
+      <p:sp>
+        <p:nvSpPr>
+          <p:cNvPr id="15" name="Text 13"/>
+          <p:cNvSpPr/>
+          <p:nvPr/>
+        </p:nvSpPr>
+        <p:spPr>
+          <a:xfrm>
+            <a:off x="8074152" y="3666744"/>
+            <a:ext cx="2825496" cy="201168"/>
+          </a:xfrm>
+          <a:prstGeom prst="rect">
+            <a:avLst/>
+          </a:prstGeom>
+          <a:noFill/>
+          <a:ln/>
+        </p:spPr>
+        <p:txBody>
+          <a:bodyPr wrap="square" lIns="0" tIns="0" rIns="0" bIns="0" rtlCol="0" anchor="ctr"/>
+          <a:lstStyle/>
+          <a:p>
+            <a:pPr indent="0" marL="0">
+              <a:buNone/>
+            </a:pPr>
+            <a:r>
+              <a:rPr lang="en-US" sz="950" b="1" dirty="0">
+                <a:solidFill>
+                  <a:srgbClr val="0068B7"/>
+                </a:solidFill>
+                <a:latin typeface="Aptos" pitchFamily="34" charset="0"/>
+                <a:ea typeface="Aptos" pitchFamily="34" charset="-122"/>
+                <a:cs typeface="Aptos" pitchFamily="34" charset="-120"/>
+              </a:rPr>
+              <a:t>Use this for</a:t>
+            </a:r>
+            <a:endParaRPr lang="en-US" sz="950" dirty="0"/>
+          </a:p>
+        </p:txBody>
+      </p:sp>
+      <p:sp>
+        <p:nvSpPr>
+          <p:cNvPr id="16" name="Text 14"/>
+          <p:cNvSpPr/>
+          <p:nvPr/>
+        </p:nvSpPr>
+        <p:spPr>
+          <a:xfrm>
+            <a:off x="8074152" y="3959352"/>
+            <a:ext cx="2825496" cy="1170432"/>
+          </a:xfrm>
+          <a:prstGeom prst="rect">
+            <a:avLst/>
+          </a:prstGeom>
+          <a:noFill/>
+          <a:ln/>
+        </p:spPr>
+        <p:txBody>
+          <a:bodyPr wrap="square" lIns="0" tIns="0" rIns="0" bIns="0" rtlCol="0" anchor="t">
+            <a:normAutofit/>
+          </a:bodyPr>
+          <a:lstStyle/>
+          <a:p>
+            <a:pPr indent="0" marL="0">
+              <a:buNone/>
+            </a:pPr>
+            <a:r>
+              <a:rPr lang="en-US" sz="1250" dirty="0">
+                <a:solidFill>
+                  <a:srgbClr val="17364A"/>
+                </a:solidFill>
+                <a:latin typeface="Aptos" pitchFamily="34" charset="0"/>
+                <a:ea typeface="Aptos" pitchFamily="34" charset="-122"/>
+                <a:cs typeface="Aptos" pitchFamily="34" charset="-120"/>
+              </a:rPr>
+              <a:t>Connect the concept to public health decisions, safeguards, documentation, or implementation work.</a:t>
+            </a:r>
+            <a:endParaRPr lang="en-US" sz="1250" dirty="0"/>
+          </a:p>
+        </p:txBody>
+      </p:sp>
+    </p:spTree>
+  </p:cSld>
+  <p:clrMapOvr>
+    <a:masterClrMapping/>
+  </p:clrMapOvr>
+</p:sld>
+</file>
+
+<file path=ppt/slides/slide21.xml><?xml version="1.0" encoding="utf-8"?>
+<p:sld xmlns:a="http://schemas.openxmlformats.org/drawingml/2006/main" xmlns:r="http://schemas.openxmlformats.org/officeDocument/2006/relationships" xmlns:p="http://schemas.openxmlformats.org/presentationml/2006/main">
+  <p:cSld name="Slide 21">
+    <p:bg>
+      <p:bgPr>
+        <a:solidFill>
+          <a:srgbClr val="F7FBFD"/>
+        </a:solidFill>
+      </p:bgPr>
+    </p:bg>
+    <p:spTree>
+      <p:nvGrpSpPr>
+        <p:cNvPr id="1" name=""/>
+        <p:cNvGrpSpPr/>
+        <p:nvPr/>
+      </p:nvGrpSpPr>
+      <p:grpSpPr>
+        <a:xfrm>
+          <a:off x="0" y="0"/>
+          <a:ext cx="0" cy="0"/>
+          <a:chOff x="0" y="0"/>
+          <a:chExt cx="0" cy="0"/>
+        </a:xfrm>
+      </p:grpSpPr>
+      <p:sp>
+        <p:nvSpPr>
+          <p:cNvPr id="2" name="Shape 0"/>
+          <p:cNvSpPr/>
+          <p:nvPr/>
+        </p:nvSpPr>
+        <p:spPr>
+          <a:xfrm>
+            <a:off x="0" y="0"/>
+            <a:ext cx="12191695" cy="164592"/>
+          </a:xfrm>
+          <a:prstGeom prst="rect">
+            <a:avLst/>
+          </a:prstGeom>
+          <a:solidFill>
+            <a:srgbClr val="0068B7"/>
+          </a:solidFill>
+          <a:ln w="12700">
+            <a:solidFill>
+              <a:srgbClr val="0068B7"/>
+            </a:solidFill>
+            <a:prstDash val="solid"/>
+          </a:ln>
+        </p:spPr>
+      </p:sp>
+      <p:sp>
+        <p:nvSpPr>
+          <p:cNvPr id="3" name="Shape 1"/>
+          <p:cNvSpPr/>
+          <p:nvPr/>
+        </p:nvSpPr>
+        <p:spPr>
+          <a:xfrm>
+            <a:off x="0" y="164592"/>
+            <a:ext cx="146304" cy="6693408"/>
+          </a:xfrm>
+          <a:prstGeom prst="rect">
+            <a:avLst/>
+          </a:prstGeom>
+          <a:solidFill>
+            <a:srgbClr val="2F8A28"/>
+          </a:solidFill>
+          <a:ln w="12700">
+            <a:solidFill>
+              <a:srgbClr val="2F8A28"/>
+            </a:solidFill>
+            <a:prstDash val="solid"/>
+          </a:ln>
+        </p:spPr>
+      </p:sp>
+      <p:sp>
+        <p:nvSpPr>
+          <p:cNvPr id="4" name="Text 2"/>
+          <p:cNvSpPr/>
+          <p:nvPr/>
+        </p:nvSpPr>
+        <p:spPr>
+          <a:xfrm>
+            <a:off x="502920" y="292608"/>
+            <a:ext cx="10149840" cy="256032"/>
+          </a:xfrm>
+          <a:prstGeom prst="rect">
+            <a:avLst/>
+          </a:prstGeom>
+          <a:noFill/>
+          <a:ln/>
+        </p:spPr>
+        <p:txBody>
+          <a:bodyPr wrap="square" lIns="0" tIns="0" rIns="0" bIns="0" rtlCol="0" anchor="ctr"/>
+          <a:lstStyle/>
+          <a:p>
+            <a:pPr indent="0" marL="0">
+              <a:buNone/>
+            </a:pPr>
+            <a:r>
+              <a:rPr lang="en-US" sz="900" b="1" dirty="0">
+                <a:solidFill>
+                  <a:srgbClr val="5F7181"/>
+                </a:solidFill>
+                <a:latin typeface="Aptos" pitchFamily="34" charset="0"/>
+                <a:ea typeface="Aptos" pitchFamily="34" charset="-122"/>
+                <a:cs typeface="Aptos" pitchFamily="34" charset="-120"/>
+              </a:rPr>
+              <a:t>Predictive Analytics and Risk Stratification</a:t>
+            </a:r>
+            <a:endParaRPr lang="en-US" sz="900" dirty="0"/>
+          </a:p>
+        </p:txBody>
+      </p:sp>
+      <p:sp>
+        <p:nvSpPr>
+          <p:cNvPr id="5" name="Text 3"/>
+          <p:cNvSpPr/>
+          <p:nvPr/>
+        </p:nvSpPr>
+        <p:spPr>
+          <a:xfrm>
+            <a:off x="502920" y="6537960"/>
+            <a:ext cx="7772400" cy="201168"/>
+          </a:xfrm>
+          <a:prstGeom prst="rect">
+            <a:avLst/>
+          </a:prstGeom>
+          <a:noFill/>
+          <a:ln/>
+        </p:spPr>
+        <p:txBody>
+          <a:bodyPr wrap="square" lIns="0" tIns="0" rIns="0" bIns="0" rtlCol="0" anchor="ctr"/>
+          <a:lstStyle/>
+          <a:p>
+            <a:pPr indent="0" marL="0">
+              <a:buNone/>
+            </a:pPr>
+            <a:r>
+              <a:rPr lang="en-US" sz="800" dirty="0">
+                <a:solidFill>
+                  <a:srgbClr val="5F7181"/>
+                </a:solidFill>
+                <a:latin typeface="Aptos" pitchFamily="34" charset="0"/>
+                <a:ea typeface="Aptos" pitchFamily="34" charset="-122"/>
+                <a:cs typeface="Aptos" pitchFamily="34" charset="-120"/>
+              </a:rPr>
+              <a:t>AI Playbook and Toolkit for Public Health Departments</a:t>
+            </a:r>
+            <a:endParaRPr lang="en-US" sz="800" dirty="0"/>
+          </a:p>
+        </p:txBody>
+      </p:sp>
+      <p:sp>
+        <p:nvSpPr>
+          <p:cNvPr id="6" name="Text 4"/>
+          <p:cNvSpPr/>
+          <p:nvPr/>
+        </p:nvSpPr>
+        <p:spPr>
+          <a:xfrm>
+            <a:off x="9966960" y="6537960"/>
+            <a:ext cx="1645920" cy="201168"/>
+          </a:xfrm>
+          <a:prstGeom prst="rect">
+            <a:avLst/>
+          </a:prstGeom>
+          <a:noFill/>
+          <a:ln/>
+        </p:spPr>
+        <p:txBody>
+          <a:bodyPr wrap="square" lIns="0" tIns="0" rIns="0" bIns="0" rtlCol="0" anchor="ctr"/>
+          <a:lstStyle/>
+          <a:p>
+            <a:pPr algn="r" indent="0" marL="0">
+              <a:buNone/>
+            </a:pPr>
+            <a:r>
+              <a:rPr lang="en-US" sz="800" dirty="0">
+                <a:solidFill>
+                  <a:srgbClr val="5F7181"/>
+                </a:solidFill>
+                <a:latin typeface="Aptos" pitchFamily="34" charset="0"/>
+                <a:ea typeface="Aptos" pitchFamily="34" charset="-122"/>
+                <a:cs typeface="Aptos" pitchFamily="34" charset="-120"/>
+              </a:rPr>
+              <a:t>© Paula Soper</a:t>
+            </a:r>
+            <a:endParaRPr lang="en-US" sz="800" dirty="0"/>
+          </a:p>
+        </p:txBody>
+      </p:sp>
+      <p:sp>
+        <p:nvSpPr>
+          <p:cNvPr id="7" name="Shape 5"/>
+          <p:cNvSpPr/>
+          <p:nvPr/>
+        </p:nvSpPr>
+        <p:spPr>
+          <a:xfrm>
+            <a:off x="640080" y="658368"/>
+            <a:ext cx="420624" cy="420624"/>
+          </a:xfrm>
+          <a:prstGeom prst="ellipse">
+            <a:avLst/>
+          </a:prstGeom>
+          <a:solidFill>
+            <a:srgbClr val="0068B7"/>
+          </a:solidFill>
+          <a:ln w="12700">
+            <a:solidFill>
+              <a:srgbClr val="0068B7"/>
+            </a:solidFill>
+            <a:prstDash val="solid"/>
+          </a:ln>
+        </p:spPr>
+      </p:sp>
+      <p:sp>
+        <p:nvSpPr>
+          <p:cNvPr id="8" name="Text 6"/>
+          <p:cNvSpPr/>
+          <p:nvPr/>
+        </p:nvSpPr>
+        <p:spPr>
+          <a:xfrm>
+            <a:off x="640080" y="731520"/>
+            <a:ext cx="420624" cy="164592"/>
+          </a:xfrm>
+          <a:prstGeom prst="rect">
+            <a:avLst/>
+          </a:prstGeom>
+          <a:noFill/>
+          <a:ln/>
+        </p:spPr>
+        <p:txBody>
+          <a:bodyPr wrap="square" lIns="0" tIns="0" rIns="0" bIns="0" rtlCol="0" anchor="ctr"/>
+          <a:lstStyle/>
+          <a:p>
+            <a:pPr algn="ctr" indent="0" marL="0">
+              <a:buNone/>
+            </a:pPr>
+            <a:r>
+              <a:rPr lang="en-US" sz="1100" b="1" dirty="0">
+                <a:solidFill>
+                  <a:srgbClr val="FFFFFF"/>
+                </a:solidFill>
+                <a:latin typeface="Aptos" pitchFamily="34" charset="0"/>
+                <a:ea typeface="Aptos" pitchFamily="34" charset="-122"/>
+                <a:cs typeface="Aptos" pitchFamily="34" charset="-120"/>
+              </a:rPr>
+              <a:t>12</a:t>
+            </a:r>
+            <a:endParaRPr lang="en-US" sz="1100" dirty="0"/>
+          </a:p>
+        </p:txBody>
+      </p:sp>
+      <p:sp>
+        <p:nvSpPr>
+          <p:cNvPr id="9" name="Text 7"/>
+          <p:cNvSpPr/>
+          <p:nvPr/>
+        </p:nvSpPr>
+        <p:spPr>
+          <a:xfrm>
+            <a:off x="640080" y="621792"/>
+            <a:ext cx="10881360" cy="566928"/>
+          </a:xfrm>
+          <a:prstGeom prst="rect">
+            <a:avLst/>
+          </a:prstGeom>
+          <a:noFill/>
+          <a:ln/>
+        </p:spPr>
+        <p:txBody>
+          <a:bodyPr wrap="square" lIns="0" tIns="0" rIns="0" bIns="0" rtlCol="0" anchor="ctr">
+            <a:normAutofit/>
+          </a:bodyPr>
+          <a:lstStyle/>
+          <a:p>
+            <a:pPr indent="0" marL="0">
+              <a:buNone/>
+            </a:pPr>
+            <a:r>
+              <a:rPr lang="en-US" sz="2700" b="1" dirty="0">
+                <a:solidFill>
+                  <a:srgbClr val="003A63"/>
+                </a:solidFill>
+                <a:latin typeface="Aptos Display" pitchFamily="34" charset="0"/>
+                <a:ea typeface="Aptos Display" pitchFamily="34" charset="-122"/>
+                <a:cs typeface="Aptos Display" pitchFamily="34" charset="-120"/>
+              </a:rPr>
+              <a:t>Knowledge Check</a:t>
+            </a:r>
+            <a:endParaRPr lang="en-US" sz="2700" dirty="0"/>
+          </a:p>
+        </p:txBody>
+      </p:sp>
+      <p:sp>
+        <p:nvSpPr>
+          <p:cNvPr id="10" name="Text 8"/>
+          <p:cNvSpPr/>
+          <p:nvPr/>
+        </p:nvSpPr>
+        <p:spPr>
+          <a:xfrm>
+            <a:off x="868680" y="1417320"/>
+            <a:ext cx="6675120" cy="4434840"/>
+          </a:xfrm>
+          <a:prstGeom prst="rect">
+            <a:avLst/>
+          </a:prstGeom>
+          <a:noFill/>
+          <a:ln/>
+        </p:spPr>
+        <p:txBody>
+          <a:bodyPr wrap="square" lIns="635" tIns="635" rIns="635" bIns="635" rtlCol="0" anchor="t">
+            <a:normAutofit/>
+          </a:bodyPr>
+          <a:lstStyle/>
+          <a:p>
+            <a:r>
+              <a:rPr lang="en-US" sz="1700" dirty="0">
+                <a:solidFill>
+                  <a:srgbClr val="17364A"/>
+                </a:solidFill>
+                <a:latin typeface="Aptos" pitchFamily="34" charset="0"/>
+                <a:ea typeface="Aptos" pitchFamily="34" charset="-122"/>
+                <a:cs typeface="Aptos" pitchFamily="34" charset="-120"/>
+              </a:rPr>
+              <a:t>1. What is calibration?</a:t>
+            </a:r>
+            <a:endParaRPr lang="en-US" sz="1700" dirty="0"/>
+          </a:p>
+          <a:p>
+            <a:r>
+              <a:rPr lang="en-US" sz="1700" dirty="0">
+                <a:solidFill>
+                  <a:srgbClr val="17364A"/>
+                </a:solidFill>
+                <a:latin typeface="Aptos" pitchFamily="34" charset="0"/>
+                <a:ea typeface="Aptos" pitchFamily="34" charset="-122"/>
+                <a:cs typeface="Aptos" pitchFamily="34" charset="-120"/>
+              </a:rPr>
+              <a:t>2. Why should thresholds be reviewed by public health staff?</a:t>
+            </a:r>
+            <a:endParaRPr lang="en-US" sz="1700" dirty="0"/>
+          </a:p>
+          <a:p>
+            <a:r>
+              <a:rPr lang="en-US" sz="1700" dirty="0">
+                <a:solidFill>
+                  <a:srgbClr val="17364A"/>
+                </a:solidFill>
+                <a:latin typeface="Aptos" pitchFamily="34" charset="0"/>
+                <a:ea typeface="Aptos" pitchFamily="34" charset="-122"/>
+                <a:cs typeface="Aptos" pitchFamily="34" charset="-120"/>
+              </a:rPr>
+              <a:t>3. Which use of a risk score is most concerning without additional safeguards?</a:t>
+            </a:r>
+            <a:endParaRPr lang="en-US" sz="1700" dirty="0"/>
+          </a:p>
+          <a:p>
+            <a:r>
+              <a:rPr lang="en-US" sz="1700" dirty="0">
+                <a:solidFill>
+                  <a:srgbClr val="17364A"/>
+                </a:solidFill>
+                <a:latin typeface="Aptos" pitchFamily="34" charset="0"/>
+                <a:ea typeface="Aptos" pitchFamily="34" charset="-122"/>
+                <a:cs typeface="Aptos" pitchFamily="34" charset="-120"/>
+              </a:rPr>
+              <a:t>4. What is a false negative in a predictive workflow?</a:t>
+            </a:r>
+            <a:endParaRPr lang="en-US" sz="1700" dirty="0"/>
+          </a:p>
+        </p:txBody>
+      </p:sp>
+      <p:sp>
+        <p:nvSpPr>
+          <p:cNvPr id="11" name="Shape 9"/>
+          <p:cNvSpPr/>
+          <p:nvPr/>
+        </p:nvSpPr>
+        <p:spPr>
+          <a:xfrm>
+            <a:off x="7909560" y="1417320"/>
+            <a:ext cx="3154680" cy="1828800"/>
+          </a:xfrm>
+          <a:prstGeom prst="roundRect">
+            <a:avLst>
+              <a:gd name="adj" fmla="val 6000"/>
+            </a:avLst>
+          </a:prstGeom>
+          <a:solidFill>
+            <a:srgbClr val="EEF8ED"/>
+          </a:solidFill>
+          <a:ln w="12700">
+            <a:solidFill>
+              <a:srgbClr val="B9D7E6"/>
+            </a:solidFill>
+            <a:prstDash val="solid"/>
+          </a:ln>
+        </p:spPr>
+      </p:sp>
+      <p:sp>
+        <p:nvSpPr>
+          <p:cNvPr id="12" name="Text 10"/>
+          <p:cNvSpPr/>
+          <p:nvPr/>
+        </p:nvSpPr>
+        <p:spPr>
+          <a:xfrm>
+            <a:off x="8074152" y="1563624"/>
+            <a:ext cx="2825496" cy="201168"/>
+          </a:xfrm>
+          <a:prstGeom prst="rect">
+            <a:avLst/>
+          </a:prstGeom>
+          <a:noFill/>
+          <a:ln/>
+        </p:spPr>
+        <p:txBody>
+          <a:bodyPr wrap="square" lIns="0" tIns="0" rIns="0" bIns="0" rtlCol="0" anchor="ctr"/>
+          <a:lstStyle/>
+          <a:p>
+            <a:pPr indent="0" marL="0">
+              <a:buNone/>
+            </a:pPr>
+            <a:r>
+              <a:rPr lang="en-US" sz="950" b="1" dirty="0">
+                <a:solidFill>
+                  <a:srgbClr val="0068B7"/>
+                </a:solidFill>
+                <a:latin typeface="Aptos" pitchFamily="34" charset="0"/>
+                <a:ea typeface="Aptos" pitchFamily="34" charset="-122"/>
+                <a:cs typeface="Aptos" pitchFamily="34" charset="-120"/>
+              </a:rPr>
+              <a:t>Key idea</a:t>
+            </a:r>
+            <a:endParaRPr lang="en-US" sz="950" dirty="0"/>
+          </a:p>
+        </p:txBody>
+      </p:sp>
+      <p:sp>
+        <p:nvSpPr>
+          <p:cNvPr id="13" name="Text 11"/>
+          <p:cNvSpPr/>
+          <p:nvPr/>
+        </p:nvSpPr>
+        <p:spPr>
+          <a:xfrm>
+            <a:off x="8074152" y="1856232"/>
+            <a:ext cx="2825496" cy="1261872"/>
+          </a:xfrm>
+          <a:prstGeom prst="rect">
+            <a:avLst/>
+          </a:prstGeom>
+          <a:noFill/>
+          <a:ln/>
+        </p:spPr>
+        <p:txBody>
+          <a:bodyPr wrap="square" lIns="0" tIns="0" rIns="0" bIns="0" rtlCol="0" anchor="t">
+            <a:normAutofit/>
+          </a:bodyPr>
+          <a:lstStyle/>
+          <a:p>
+            <a:pPr indent="0" marL="0">
+              <a:buNone/>
+            </a:pPr>
+            <a:r>
+              <a:rPr lang="en-US" sz="1250" dirty="0">
+                <a:solidFill>
+                  <a:srgbClr val="17364A"/>
+                </a:solidFill>
+                <a:latin typeface="Aptos" pitchFamily="34" charset="0"/>
+                <a:ea typeface="Aptos" pitchFamily="34" charset="-122"/>
+                <a:cs typeface="Aptos" pitchFamily="34" charset="-120"/>
+              </a:rPr>
+              <a:t>1. What is calibration?</a:t>
+            </a:r>
+            <a:endParaRPr lang="en-US" sz="1250" dirty="0"/>
+          </a:p>
+        </p:txBody>
+      </p:sp>
+      <p:sp>
+        <p:nvSpPr>
+          <p:cNvPr id="14" name="Shape 12"/>
+          <p:cNvSpPr/>
+          <p:nvPr/>
+        </p:nvSpPr>
+        <p:spPr>
+          <a:xfrm>
+            <a:off x="7909560" y="3520440"/>
+            <a:ext cx="3154680" cy="1737360"/>
+          </a:xfrm>
+          <a:prstGeom prst="roundRect">
+            <a:avLst>
+              <a:gd name="adj" fmla="val 6316"/>
+            </a:avLst>
+          </a:prstGeom>
+          <a:solidFill>
+            <a:srgbClr val="EAF6F8"/>
+          </a:solidFill>
+          <a:ln w="12700">
+            <a:solidFill>
+              <a:srgbClr val="B9D7E6"/>
+            </a:solidFill>
+            <a:prstDash val="solid"/>
+          </a:ln>
+        </p:spPr>
+      </p:sp>
+      <p:sp>
+        <p:nvSpPr>
+          <p:cNvPr id="15" name="Text 13"/>
+          <p:cNvSpPr/>
+          <p:nvPr/>
+        </p:nvSpPr>
+        <p:spPr>
+          <a:xfrm>
+            <a:off x="8074152" y="3666744"/>
+            <a:ext cx="2825496" cy="201168"/>
+          </a:xfrm>
+          <a:prstGeom prst="rect">
+            <a:avLst/>
+          </a:prstGeom>
+          <a:noFill/>
+          <a:ln/>
+        </p:spPr>
+        <p:txBody>
+          <a:bodyPr wrap="square" lIns="0" tIns="0" rIns="0" bIns="0" rtlCol="0" anchor="ctr"/>
+          <a:lstStyle/>
+          <a:p>
+            <a:pPr indent="0" marL="0">
+              <a:buNone/>
+            </a:pPr>
+            <a:r>
+              <a:rPr lang="en-US" sz="950" b="1" dirty="0">
+                <a:solidFill>
+                  <a:srgbClr val="0068B7"/>
+                </a:solidFill>
+                <a:latin typeface="Aptos" pitchFamily="34" charset="0"/>
+                <a:ea typeface="Aptos" pitchFamily="34" charset="-122"/>
+                <a:cs typeface="Aptos" pitchFamily="34" charset="-120"/>
+              </a:rPr>
+              <a:t>Use this for</a:t>
+            </a:r>
+            <a:endParaRPr lang="en-US" sz="950" dirty="0"/>
+          </a:p>
+        </p:txBody>
+      </p:sp>
+      <p:sp>
+        <p:nvSpPr>
+          <p:cNvPr id="16" name="Text 14"/>
+          <p:cNvSpPr/>
+          <p:nvPr/>
+        </p:nvSpPr>
+        <p:spPr>
+          <a:xfrm>
+            <a:off x="8074152" y="3959352"/>
+            <a:ext cx="2825496" cy="1170432"/>
+          </a:xfrm>
+          <a:prstGeom prst="rect">
+            <a:avLst/>
+          </a:prstGeom>
+          <a:noFill/>
+          <a:ln/>
+        </p:spPr>
+        <p:txBody>
+          <a:bodyPr wrap="square" lIns="0" tIns="0" rIns="0" bIns="0" rtlCol="0" anchor="t">
+            <a:normAutofit/>
+          </a:bodyPr>
+          <a:lstStyle/>
+          <a:p>
+            <a:pPr indent="0" marL="0">
+              <a:buNone/>
+            </a:pPr>
+            <a:r>
+              <a:rPr lang="en-US" sz="1250" dirty="0">
+                <a:solidFill>
+                  <a:srgbClr val="17364A"/>
+                </a:solidFill>
+                <a:latin typeface="Aptos" pitchFamily="34" charset="0"/>
+                <a:ea typeface="Aptos" pitchFamily="34" charset="-122"/>
+                <a:cs typeface="Aptos" pitchFamily="34" charset="-120"/>
+              </a:rPr>
+              <a:t>Connect the concept to public health decisions, safeguards, documentation, or implementation work.</a:t>
+            </a:r>
+            <a:endParaRPr lang="en-US" sz="1250" dirty="0"/>
+          </a:p>
+        </p:txBody>
+      </p:sp>
+    </p:spTree>
+  </p:cSld>
+  <p:clrMapOvr>
+    <a:masterClrMapping/>
+  </p:clrMapOvr>
+</p:sld>
+</file>
+
+<file path=ppt/slides/slide22.xml><?xml version="1.0" encoding="utf-8"?>
+<p:sld xmlns:a="http://schemas.openxmlformats.org/drawingml/2006/main" xmlns:r="http://schemas.openxmlformats.org/officeDocument/2006/relationships" xmlns:p="http://schemas.openxmlformats.org/presentationml/2006/main">
+  <p:cSld name="Slide 22">
+    <p:bg>
+      <p:bgPr>
+        <a:solidFill>
+          <a:srgbClr val="F7FBFD"/>
+        </a:solidFill>
+      </p:bgPr>
+    </p:bg>
+    <p:spTree>
+      <p:nvGrpSpPr>
+        <p:cNvPr id="1" name=""/>
+        <p:cNvGrpSpPr/>
+        <p:nvPr/>
+      </p:nvGrpSpPr>
+      <p:grpSpPr>
+        <a:xfrm>
+          <a:off x="0" y="0"/>
+          <a:ext cx="0" cy="0"/>
+          <a:chOff x="0" y="0"/>
+          <a:chExt cx="0" cy="0"/>
+        </a:xfrm>
+      </p:grpSpPr>
+      <p:sp>
+        <p:nvSpPr>
+          <p:cNvPr id="2" name="Shape 0"/>
+          <p:cNvSpPr/>
+          <p:nvPr/>
+        </p:nvSpPr>
+        <p:spPr>
+          <a:xfrm>
+            <a:off x="0" y="0"/>
+            <a:ext cx="12191695" cy="164592"/>
+          </a:xfrm>
+          <a:prstGeom prst="rect">
+            <a:avLst/>
+          </a:prstGeom>
+          <a:solidFill>
+            <a:srgbClr val="0068B7"/>
+          </a:solidFill>
+          <a:ln w="12700">
+            <a:solidFill>
+              <a:srgbClr val="0068B7"/>
+            </a:solidFill>
+            <a:prstDash val="solid"/>
+          </a:ln>
+        </p:spPr>
+      </p:sp>
+      <p:sp>
+        <p:nvSpPr>
+          <p:cNvPr id="3" name="Shape 1"/>
+          <p:cNvSpPr/>
+          <p:nvPr/>
+        </p:nvSpPr>
+        <p:spPr>
+          <a:xfrm>
+            <a:off x="0" y="164592"/>
+            <a:ext cx="146304" cy="6693408"/>
+          </a:xfrm>
+          <a:prstGeom prst="rect">
+            <a:avLst/>
+          </a:prstGeom>
+          <a:solidFill>
+            <a:srgbClr val="2F8A28"/>
+          </a:solidFill>
+          <a:ln w="12700">
+            <a:solidFill>
+              <a:srgbClr val="2F8A28"/>
+            </a:solidFill>
+            <a:prstDash val="solid"/>
+          </a:ln>
+        </p:spPr>
+      </p:sp>
+      <p:sp>
+        <p:nvSpPr>
+          <p:cNvPr id="4" name="Text 2"/>
+          <p:cNvSpPr/>
+          <p:nvPr/>
+        </p:nvSpPr>
+        <p:spPr>
+          <a:xfrm>
+            <a:off x="502920" y="292608"/>
+            <a:ext cx="10149840" cy="256032"/>
+          </a:xfrm>
+          <a:prstGeom prst="rect">
+            <a:avLst/>
+          </a:prstGeom>
+          <a:noFill/>
+          <a:ln/>
+        </p:spPr>
+        <p:txBody>
+          <a:bodyPr wrap="square" lIns="0" tIns="0" rIns="0" bIns="0" rtlCol="0" anchor="ctr"/>
+          <a:lstStyle/>
+          <a:p>
+            <a:pPr indent="0" marL="0">
+              <a:buNone/>
+            </a:pPr>
+            <a:r>
+              <a:rPr lang="en-US" sz="900" b="1" dirty="0">
+                <a:solidFill>
+                  <a:srgbClr val="5F7181"/>
+                </a:solidFill>
+                <a:latin typeface="Aptos" pitchFamily="34" charset="0"/>
+                <a:ea typeface="Aptos" pitchFamily="34" charset="-122"/>
+                <a:cs typeface="Aptos" pitchFamily="34" charset="-120"/>
+              </a:rPr>
+              <a:t>Predictive Analytics and Risk Stratification</a:t>
+            </a:r>
+            <a:endParaRPr lang="en-US" sz="900" dirty="0"/>
+          </a:p>
+        </p:txBody>
+      </p:sp>
+      <p:sp>
+        <p:nvSpPr>
+          <p:cNvPr id="5" name="Text 3"/>
+          <p:cNvSpPr/>
+          <p:nvPr/>
+        </p:nvSpPr>
+        <p:spPr>
+          <a:xfrm>
+            <a:off x="502920" y="6537960"/>
+            <a:ext cx="7772400" cy="201168"/>
+          </a:xfrm>
+          <a:prstGeom prst="rect">
+            <a:avLst/>
+          </a:prstGeom>
+          <a:noFill/>
+          <a:ln/>
+        </p:spPr>
+        <p:txBody>
+          <a:bodyPr wrap="square" lIns="0" tIns="0" rIns="0" bIns="0" rtlCol="0" anchor="ctr"/>
+          <a:lstStyle/>
+          <a:p>
+            <a:pPr indent="0" marL="0">
+              <a:buNone/>
+            </a:pPr>
+            <a:r>
+              <a:rPr lang="en-US" sz="800" dirty="0">
+                <a:solidFill>
+                  <a:srgbClr val="5F7181"/>
+                </a:solidFill>
+                <a:latin typeface="Aptos" pitchFamily="34" charset="0"/>
+                <a:ea typeface="Aptos" pitchFamily="34" charset="-122"/>
+                <a:cs typeface="Aptos" pitchFamily="34" charset="-120"/>
+              </a:rPr>
+              <a:t>AI Playbook and Toolkit for Public Health Departments</a:t>
+            </a:r>
+            <a:endParaRPr lang="en-US" sz="800" dirty="0"/>
+          </a:p>
+        </p:txBody>
+      </p:sp>
+      <p:sp>
+        <p:nvSpPr>
+          <p:cNvPr id="6" name="Text 4"/>
+          <p:cNvSpPr/>
+          <p:nvPr/>
+        </p:nvSpPr>
+        <p:spPr>
+          <a:xfrm>
+            <a:off x="9966960" y="6537960"/>
+            <a:ext cx="1645920" cy="201168"/>
+          </a:xfrm>
+          <a:prstGeom prst="rect">
+            <a:avLst/>
+          </a:prstGeom>
+          <a:noFill/>
+          <a:ln/>
+        </p:spPr>
+        <p:txBody>
+          <a:bodyPr wrap="square" lIns="0" tIns="0" rIns="0" bIns="0" rtlCol="0" anchor="ctr"/>
+          <a:lstStyle/>
+          <a:p>
+            <a:pPr algn="r" indent="0" marL="0">
+              <a:buNone/>
+            </a:pPr>
+            <a:r>
+              <a:rPr lang="en-US" sz="800" dirty="0">
+                <a:solidFill>
+                  <a:srgbClr val="5F7181"/>
+                </a:solidFill>
+                <a:latin typeface="Aptos" pitchFamily="34" charset="0"/>
+                <a:ea typeface="Aptos" pitchFamily="34" charset="-122"/>
+                <a:cs typeface="Aptos" pitchFamily="34" charset="-120"/>
+              </a:rPr>
+              <a:t>© Paula Soper</a:t>
+            </a:r>
+            <a:endParaRPr lang="en-US" sz="800" dirty="0"/>
+          </a:p>
+        </p:txBody>
+      </p:sp>
+      <p:sp>
+        <p:nvSpPr>
+          <p:cNvPr id="7" name="Shape 5"/>
+          <p:cNvSpPr/>
+          <p:nvPr/>
+        </p:nvSpPr>
+        <p:spPr>
+          <a:xfrm>
+            <a:off x="640080" y="658368"/>
+            <a:ext cx="420624" cy="420624"/>
+          </a:xfrm>
+          <a:prstGeom prst="ellipse">
+            <a:avLst/>
+          </a:prstGeom>
+          <a:solidFill>
+            <a:srgbClr val="0068B7"/>
+          </a:solidFill>
+          <a:ln w="12700">
+            <a:solidFill>
+              <a:srgbClr val="0068B7"/>
+            </a:solidFill>
+            <a:prstDash val="solid"/>
+          </a:ln>
+        </p:spPr>
+      </p:sp>
+      <p:sp>
+        <p:nvSpPr>
+          <p:cNvPr id="8" name="Text 6"/>
+          <p:cNvSpPr/>
+          <p:nvPr/>
+        </p:nvSpPr>
+        <p:spPr>
+          <a:xfrm>
+            <a:off x="640080" y="731520"/>
+            <a:ext cx="420624" cy="164592"/>
+          </a:xfrm>
+          <a:prstGeom prst="rect">
+            <a:avLst/>
+          </a:prstGeom>
+          <a:noFill/>
+          <a:ln/>
+        </p:spPr>
+        <p:txBody>
+          <a:bodyPr wrap="square" lIns="0" tIns="0" rIns="0" bIns="0" rtlCol="0" anchor="ctr"/>
+          <a:lstStyle/>
+          <a:p>
+            <a:pPr algn="ctr" indent="0" marL="0">
+              <a:buNone/>
+            </a:pPr>
+            <a:r>
+              <a:rPr lang="en-US" sz="1100" b="1" dirty="0">
+                <a:solidFill>
+                  <a:srgbClr val="FFFFFF"/>
+                </a:solidFill>
+                <a:latin typeface="Aptos" pitchFamily="34" charset="0"/>
+                <a:ea typeface="Aptos" pitchFamily="34" charset="-122"/>
+                <a:cs typeface="Aptos" pitchFamily="34" charset="-120"/>
+              </a:rPr>
+              <a:t>13</a:t>
+            </a:r>
+            <a:endParaRPr lang="en-US" sz="1100" dirty="0"/>
+          </a:p>
+        </p:txBody>
+      </p:sp>
+      <p:sp>
+        <p:nvSpPr>
+          <p:cNvPr id="9" name="Text 7"/>
+          <p:cNvSpPr/>
+          <p:nvPr/>
+        </p:nvSpPr>
+        <p:spPr>
+          <a:xfrm>
+            <a:off x="640080" y="621792"/>
+            <a:ext cx="10881360" cy="566928"/>
+          </a:xfrm>
+          <a:prstGeom prst="rect">
+            <a:avLst/>
+          </a:prstGeom>
+          <a:noFill/>
+          <a:ln/>
+        </p:spPr>
+        <p:txBody>
+          <a:bodyPr wrap="square" lIns="0" tIns="0" rIns="0" bIns="0" rtlCol="0" anchor="ctr">
+            <a:normAutofit/>
+          </a:bodyPr>
+          <a:lstStyle/>
+          <a:p>
+            <a:pPr indent="0" marL="0">
+              <a:buNone/>
+            </a:pPr>
+            <a:r>
+              <a:rPr lang="en-US" sz="2700" b="1" dirty="0">
+                <a:solidFill>
+                  <a:srgbClr val="003A63"/>
+                </a:solidFill>
+                <a:latin typeface="Aptos Display" pitchFamily="34" charset="0"/>
+                <a:ea typeface="Aptos Display" pitchFamily="34" charset="-122"/>
+                <a:cs typeface="Aptos Display" pitchFamily="34" charset="-120"/>
+              </a:rPr>
+              <a:t>References and Resources</a:t>
+            </a:r>
+            <a:endParaRPr lang="en-US" sz="2700" dirty="0"/>
+          </a:p>
+        </p:txBody>
+      </p:sp>
+      <p:sp>
+        <p:nvSpPr>
+          <p:cNvPr id="10" name="Text 8"/>
+          <p:cNvSpPr/>
+          <p:nvPr/>
+        </p:nvSpPr>
+        <p:spPr>
+          <a:xfrm>
+            <a:off x="868680" y="1417320"/>
+            <a:ext cx="6675120" cy="4434840"/>
+          </a:xfrm>
+          <a:prstGeom prst="rect">
+            <a:avLst/>
+          </a:prstGeom>
+          <a:noFill/>
+          <a:ln/>
+        </p:spPr>
+        <p:txBody>
+          <a:bodyPr wrap="square" lIns="635" tIns="635" rIns="635" bIns="635" rtlCol="0" anchor="t">
+            <a:normAutofit/>
+          </a:bodyPr>
+          <a:lstStyle/>
+          <a:p>
+            <a:r>
+              <a:rPr lang="en-US" sz="1700" dirty="0">
+                <a:solidFill>
+                  <a:srgbClr val="17364A"/>
+                </a:solidFill>
+                <a:latin typeface="Aptos" pitchFamily="34" charset="0"/>
+                <a:ea typeface="Aptos" pitchFamily="34" charset="-122"/>
+                <a:cs typeface="Aptos" pitchFamily="34" charset="-120"/>
+              </a:rPr>
               <a:t>NIST Artificial Intelligence Risk Management Framework: https://www.nist.gov/itl/ai-risk-management-framework</a:t>
             </a:r>
-            <a:endParaRPr lang="en-US" sz="1450" dirty="0"/>
-          </a:p>
-          <a:p>
-            <a:r>
-              <a:rPr lang="en-US" sz="1450" dirty="0">
+            <a:endParaRPr lang="en-US" sz="1700" dirty="0"/>
+          </a:p>
+          <a:p>
+            <a:r>
+              <a:rPr lang="en-US" sz="1700" dirty="0">
                 <a:solidFill>
                   <a:srgbClr val="17364A"/>
                 </a:solidFill>
@@ -6046,13 +10725,13 @@
                 <a:ea typeface="Aptos" pitchFamily="34" charset="-122"/>
                 <a:cs typeface="Aptos" pitchFamily="34" charset="-120"/>
               </a:rPr>
-              <a:t>NIST AI RMF Generative AI Profile: https://www.nist.gov/publications/artificial-intelligence-risk-management-framework-generative-artificial-intelligence</a:t>
-            </a:r>
-            <a:endParaRPr lang="en-US" sz="1450" dirty="0"/>
-          </a:p>
-          <a:p>
-            <a:r>
-              <a:rPr lang="en-US" sz="1450" dirty="0">
+              <a:t>NIST AI RMF Generative AI Profile:.</a:t>
+            </a:r>
+            <a:endParaRPr lang="en-US" sz="1700" dirty="0"/>
+          </a:p>
+          <a:p>
+            <a:r>
+              <a:rPr lang="en-US" sz="1700" dirty="0">
                 <a:solidFill>
                   <a:srgbClr val="17364A"/>
                 </a:solidFill>
@@ -6062,11 +10741,11 @@
               </a:rPr>
               <a:t>CDC Evaluation Framework: https://www.cdc.gov/evaluation/</a:t>
             </a:r>
-            <a:endParaRPr lang="en-US" sz="1450" dirty="0"/>
-          </a:p>
-          <a:p>
-            <a:r>
-              <a:rPr lang="en-US" sz="1450" dirty="0">
+            <a:endParaRPr lang="en-US" sz="1700" dirty="0"/>
+          </a:p>
+          <a:p>
+            <a:r>
+              <a:rPr lang="en-US" sz="1700" dirty="0">
                 <a:solidFill>
                   <a:srgbClr val="17364A"/>
                 </a:solidFill>
@@ -6076,7 +10755,221 @@
               </a:rPr>
               <a:t>CDC Public Health Data Strategy: https://www.cdc.gov/public-health-data-strategy/php/about/index.html</a:t>
             </a:r>
-            <a:endParaRPr lang="en-US" sz="1450" dirty="0"/>
+            <a:endParaRPr lang="en-US" sz="1700" dirty="0"/>
+          </a:p>
+        </p:txBody>
+      </p:sp>
+      <p:sp>
+        <p:nvSpPr>
+          <p:cNvPr id="11" name="Shape 9"/>
+          <p:cNvSpPr/>
+          <p:nvPr/>
+        </p:nvSpPr>
+        <p:spPr>
+          <a:xfrm>
+            <a:off x="7909560" y="1417320"/>
+            <a:ext cx="3154680" cy="1828800"/>
+          </a:xfrm>
+          <a:prstGeom prst="roundRect">
+            <a:avLst>
+              <a:gd name="adj" fmla="val 6000"/>
+            </a:avLst>
+          </a:prstGeom>
+          <a:solidFill>
+            <a:srgbClr val="EEF8ED"/>
+          </a:solidFill>
+          <a:ln w="12700">
+            <a:solidFill>
+              <a:srgbClr val="B9D7E6"/>
+            </a:solidFill>
+            <a:prstDash val="solid"/>
+          </a:ln>
+        </p:spPr>
+      </p:sp>
+      <p:sp>
+        <p:nvSpPr>
+          <p:cNvPr id="12" name="Text 10"/>
+          <p:cNvSpPr/>
+          <p:nvPr/>
+        </p:nvSpPr>
+        <p:spPr>
+          <a:xfrm>
+            <a:off x="8074152" y="1563624"/>
+            <a:ext cx="2825496" cy="201168"/>
+          </a:xfrm>
+          <a:prstGeom prst="rect">
+            <a:avLst/>
+          </a:prstGeom>
+          <a:noFill/>
+          <a:ln/>
+        </p:spPr>
+        <p:txBody>
+          <a:bodyPr wrap="square" lIns="0" tIns="0" rIns="0" bIns="0" rtlCol="0" anchor="ctr"/>
+          <a:lstStyle/>
+          <a:p>
+            <a:pPr indent="0" marL="0">
+              <a:buNone/>
+            </a:pPr>
+            <a:r>
+              <a:rPr lang="en-US" sz="950" b="1" dirty="0">
+                <a:solidFill>
+                  <a:srgbClr val="0068B7"/>
+                </a:solidFill>
+                <a:latin typeface="Aptos" pitchFamily="34" charset="0"/>
+                <a:ea typeface="Aptos" pitchFamily="34" charset="-122"/>
+                <a:cs typeface="Aptos" pitchFamily="34" charset="-120"/>
+              </a:rPr>
+              <a:t>Key idea</a:t>
+            </a:r>
+            <a:endParaRPr lang="en-US" sz="950" dirty="0"/>
+          </a:p>
+        </p:txBody>
+      </p:sp>
+      <p:sp>
+        <p:nvSpPr>
+          <p:cNvPr id="13" name="Text 11"/>
+          <p:cNvSpPr/>
+          <p:nvPr/>
+        </p:nvSpPr>
+        <p:spPr>
+          <a:xfrm>
+            <a:off x="8074152" y="1856232"/>
+            <a:ext cx="2825496" cy="1261872"/>
+          </a:xfrm>
+          <a:prstGeom prst="rect">
+            <a:avLst/>
+          </a:prstGeom>
+          <a:noFill/>
+          <a:ln/>
+        </p:spPr>
+        <p:txBody>
+          <a:bodyPr wrap="square" lIns="0" tIns="0" rIns="0" bIns="0" rtlCol="0" anchor="t">
+            <a:normAutofit/>
+          </a:bodyPr>
+          <a:lstStyle/>
+          <a:p>
+            <a:pPr indent="0" marL="0">
+              <a:buNone/>
+            </a:pPr>
+            <a:r>
+              <a:rPr lang="en-US" sz="1250" dirty="0">
+                <a:solidFill>
+                  <a:srgbClr val="17364A"/>
+                </a:solidFill>
+                <a:latin typeface="Aptos" pitchFamily="34" charset="0"/>
+                <a:ea typeface="Aptos" pitchFamily="34" charset="-122"/>
+                <a:cs typeface="Aptos" pitchFamily="34" charset="-120"/>
+              </a:rPr>
+              <a:t>NIST Artificial Intelligence Risk Management Framework: https://www.nist.gov/itl/ai-risk-management-framework</a:t>
+            </a:r>
+            <a:endParaRPr lang="en-US" sz="1250" dirty="0"/>
+          </a:p>
+        </p:txBody>
+      </p:sp>
+      <p:sp>
+        <p:nvSpPr>
+          <p:cNvPr id="14" name="Shape 12"/>
+          <p:cNvSpPr/>
+          <p:nvPr/>
+        </p:nvSpPr>
+        <p:spPr>
+          <a:xfrm>
+            <a:off x="7909560" y="3520440"/>
+            <a:ext cx="3154680" cy="1737360"/>
+          </a:xfrm>
+          <a:prstGeom prst="roundRect">
+            <a:avLst>
+              <a:gd name="adj" fmla="val 6316"/>
+            </a:avLst>
+          </a:prstGeom>
+          <a:solidFill>
+            <a:srgbClr val="EAF6F8"/>
+          </a:solidFill>
+          <a:ln w="12700">
+            <a:solidFill>
+              <a:srgbClr val="B9D7E6"/>
+            </a:solidFill>
+            <a:prstDash val="solid"/>
+          </a:ln>
+        </p:spPr>
+      </p:sp>
+      <p:sp>
+        <p:nvSpPr>
+          <p:cNvPr id="15" name="Text 13"/>
+          <p:cNvSpPr/>
+          <p:nvPr/>
+        </p:nvSpPr>
+        <p:spPr>
+          <a:xfrm>
+            <a:off x="8074152" y="3666744"/>
+            <a:ext cx="2825496" cy="201168"/>
+          </a:xfrm>
+          <a:prstGeom prst="rect">
+            <a:avLst/>
+          </a:prstGeom>
+          <a:noFill/>
+          <a:ln/>
+        </p:spPr>
+        <p:txBody>
+          <a:bodyPr wrap="square" lIns="0" tIns="0" rIns="0" bIns="0" rtlCol="0" anchor="ctr"/>
+          <a:lstStyle/>
+          <a:p>
+            <a:pPr indent="0" marL="0">
+              <a:buNone/>
+            </a:pPr>
+            <a:r>
+              <a:rPr lang="en-US" sz="950" b="1" dirty="0">
+                <a:solidFill>
+                  <a:srgbClr val="0068B7"/>
+                </a:solidFill>
+                <a:latin typeface="Aptos" pitchFamily="34" charset="0"/>
+                <a:ea typeface="Aptos" pitchFamily="34" charset="-122"/>
+                <a:cs typeface="Aptos" pitchFamily="34" charset="-120"/>
+              </a:rPr>
+              <a:t>Use this for</a:t>
+            </a:r>
+            <a:endParaRPr lang="en-US" sz="950" dirty="0"/>
+          </a:p>
+        </p:txBody>
+      </p:sp>
+      <p:sp>
+        <p:nvSpPr>
+          <p:cNvPr id="16" name="Text 14"/>
+          <p:cNvSpPr/>
+          <p:nvPr/>
+        </p:nvSpPr>
+        <p:spPr>
+          <a:xfrm>
+            <a:off x="8074152" y="3959352"/>
+            <a:ext cx="2825496" cy="1170432"/>
+          </a:xfrm>
+          <a:prstGeom prst="rect">
+            <a:avLst/>
+          </a:prstGeom>
+          <a:noFill/>
+          <a:ln/>
+        </p:spPr>
+        <p:txBody>
+          <a:bodyPr wrap="square" lIns="0" tIns="0" rIns="0" bIns="0" rtlCol="0" anchor="t">
+            <a:normAutofit/>
+          </a:bodyPr>
+          <a:lstStyle/>
+          <a:p>
+            <a:pPr indent="0" marL="0">
+              <a:buNone/>
+            </a:pPr>
+            <a:r>
+              <a:rPr lang="en-US" sz="1250" dirty="0">
+                <a:solidFill>
+                  <a:srgbClr val="17364A"/>
+                </a:solidFill>
+                <a:latin typeface="Aptos" pitchFamily="34" charset="0"/>
+                <a:ea typeface="Aptos" pitchFamily="34" charset="-122"/>
+                <a:cs typeface="Aptos" pitchFamily="34" charset="-120"/>
+              </a:rPr>
+              <a:t>Connect the concept to public health decisions, safeguards, documentation, or implementation work.</a:t>
+            </a:r>
+            <a:endParaRPr lang="en-US" sz="1250" dirty="0"/>
           </a:p>
         </p:txBody>
       </p:sp>
@@ -6139,7 +11032,32 @@
       </p:sp>
       <p:sp>
         <p:nvSpPr>
-          <p:cNvPr id="3" name="Text 1"/>
+          <p:cNvPr id="3" name="Shape 1"/>
+          <p:cNvSpPr/>
+          <p:nvPr/>
+        </p:nvSpPr>
+        <p:spPr>
+          <a:xfrm>
+            <a:off x="0" y="164592"/>
+            <a:ext cx="146304" cy="6693408"/>
+          </a:xfrm>
+          <a:prstGeom prst="rect">
+            <a:avLst/>
+          </a:prstGeom>
+          <a:solidFill>
+            <a:srgbClr val="2F8A28"/>
+          </a:solidFill>
+          <a:ln w="12700">
+            <a:solidFill>
+              <a:srgbClr val="2F8A28"/>
+            </a:solidFill>
+            <a:prstDash val="solid"/>
+          </a:ln>
+        </p:spPr>
+      </p:sp>
+      <p:sp>
+        <p:nvSpPr>
+          <p:cNvPr id="4" name="Text 2"/>
           <p:cNvSpPr/>
           <p:nvPr/>
         </p:nvSpPr>
@@ -6178,7 +11096,7 @@
       </p:sp>
       <p:sp>
         <p:nvSpPr>
-          <p:cNvPr id="4" name="Text 2"/>
+          <p:cNvPr id="5" name="Text 3"/>
           <p:cNvSpPr/>
           <p:nvPr/>
         </p:nvSpPr>
@@ -6217,7 +11135,7 @@
       </p:sp>
       <p:sp>
         <p:nvSpPr>
-          <p:cNvPr id="5" name="Text 3"/>
+          <p:cNvPr id="6" name="Text 4"/>
           <p:cNvSpPr/>
           <p:nvPr/>
         </p:nvSpPr>
@@ -6256,7 +11174,7 @@
       </p:sp>
       <p:sp>
         <p:nvSpPr>
-          <p:cNvPr id="6" name="Text 4"/>
+          <p:cNvPr id="7" name="Text 5"/>
           <p:cNvSpPr/>
           <p:nvPr/>
         </p:nvSpPr>
@@ -6289,7 +11207,7 @@
                 <a:ea typeface="Aptos Display" pitchFamily="34" charset="-122"/>
                 <a:cs typeface="Aptos Display" pitchFamily="34" charset="-120"/>
               </a:rPr>
-              <a:t>Learning Objectives</a:t>
+              <a:t>How this module connects to the playbook</a:t>
             </a:r>
             <a:endParaRPr lang="en-US" sz="2700" dirty="0"/>
           </a:p>
@@ -6297,14 +11215,14 @@
       </p:sp>
       <p:sp>
         <p:nvSpPr>
-          <p:cNvPr id="7" name="Text 5"/>
-          <p:cNvSpPr/>
-          <p:nvPr/>
-        </p:nvSpPr>
-        <p:spPr>
-          <a:xfrm>
-            <a:off x="822960" y="1325880"/>
-            <a:ext cx="10378440" cy="4800600"/>
+          <p:cNvPr id="8" name="Text 6"/>
+          <p:cNvSpPr/>
+          <p:nvPr/>
+        </p:nvSpPr>
+        <p:spPr>
+          <a:xfrm>
+            <a:off x="868680" y="1417320"/>
+            <a:ext cx="6903720" cy="4480560"/>
           </a:xfrm>
           <a:prstGeom prst="rect">
             <a:avLst/>
@@ -6319,7 +11237,7 @@
           <a:lstStyle/>
           <a:p>
             <a:r>
-              <a:rPr lang="en-US" sz="1450" dirty="0">
+              <a:rPr lang="en-US" sz="1540" dirty="0">
                 <a:solidFill>
                   <a:srgbClr val="17364A"/>
                 </a:solidFill>
@@ -6327,13 +11245,13 @@
                 <a:ea typeface="Aptos" pitchFamily="34" charset="-122"/>
                 <a:cs typeface="Aptos" pitchFamily="34" charset="-120"/>
               </a:rPr>
-              <a:t>Define predictive analytics and risk stratification in public health terms.</a:t>
-            </a:r>
-            <a:endParaRPr lang="en-US" sz="1450" dirty="0"/>
-          </a:p>
-          <a:p>
-            <a:r>
-              <a:rPr lang="en-US" sz="1450" dirty="0">
+              <a:t>Play 13: Monitor and Evaluate AI Systems - This lesson informs Play 13 by helping learners connect the lesson topic to monitor and.</a:t>
+            </a:r>
+            <a:endParaRPr lang="en-US" sz="1540" dirty="0"/>
+          </a:p>
+          <a:p>
+            <a:r>
+              <a:rPr lang="en-US" sz="1540" dirty="0">
                 <a:solidFill>
                   <a:srgbClr val="17364A"/>
                 </a:solidFill>
@@ -6341,13 +11259,13 @@
                 <a:ea typeface="Aptos" pitchFamily="34" charset="-122"/>
                 <a:cs typeface="Aptos" pitchFamily="34" charset="-120"/>
               </a:rPr>
-              <a:t>Distinguish prediction from causation, diagnosis, and eligibility determination.</a:t>
-            </a:r>
-            <a:endParaRPr lang="en-US" sz="1450" dirty="0"/>
-          </a:p>
-          <a:p>
-            <a:r>
-              <a:rPr lang="en-US" sz="1450" dirty="0">
+              <a:t>Play 1: Vision &amp; Guardrails - This lesson informs Play 1 by helping learners connect the lesson topic to vision &amp; guardrails work in.</a:t>
+            </a:r>
+            <a:endParaRPr lang="en-US" sz="1540" dirty="0"/>
+          </a:p>
+          <a:p>
+            <a:r>
+              <a:rPr lang="en-US" sz="1540" dirty="0">
                 <a:solidFill>
                   <a:srgbClr val="17364A"/>
                 </a:solidFill>
@@ -6355,13 +11273,13 @@
                 <a:ea typeface="Aptos" pitchFamily="34" charset="-122"/>
                 <a:cs typeface="Aptos" pitchFamily="34" charset="-120"/>
               </a:rPr>
-              <a:t>Interpret basic risk categories, thresholds, calibration, and error tradeoffs.</a:t>
-            </a:r>
-            <a:endParaRPr lang="en-US" sz="1450" dirty="0"/>
-          </a:p>
-          <a:p>
-            <a:r>
-              <a:rPr lang="en-US" sz="1450" dirty="0">
+              <a:t>Play 11: Build and Deploy AI Solutions - This lesson informs Play 11 by helping learners connect the lesson topic to build and deploy.</a:t>
+            </a:r>
+            <a:endParaRPr lang="en-US" sz="1540" dirty="0"/>
+          </a:p>
+          <a:p>
+            <a:r>
+              <a:rPr lang="en-US" sz="1540" dirty="0">
                 <a:solidFill>
                   <a:srgbClr val="17364A"/>
                 </a:solidFill>
@@ -6369,13 +11287,106 @@
                 <a:ea typeface="Aptos" pitchFamily="34" charset="-122"/>
                 <a:cs typeface="Aptos" pitchFamily="34" charset="-120"/>
               </a:rPr>
-              <a:t>Identify equity and operational risks associated with risk scores.</a:t>
-            </a:r>
-            <a:endParaRPr lang="en-US" sz="1450" dirty="0"/>
-          </a:p>
-          <a:p>
-            <a:r>
-              <a:rPr lang="en-US" sz="1450" dirty="0">
+              <a:t>Play 3: Establish AI Governance - This lesson informs Play 3 by helping learners connect the lesson topic to establish ai governance.</a:t>
+            </a:r>
+            <a:endParaRPr lang="en-US" sz="1540" dirty="0"/>
+          </a:p>
+        </p:txBody>
+      </p:sp>
+      <p:sp>
+        <p:nvSpPr>
+          <p:cNvPr id="9" name="Shape 7"/>
+          <p:cNvSpPr/>
+          <p:nvPr/>
+        </p:nvSpPr>
+        <p:spPr>
+          <a:xfrm>
+            <a:off x="8046720" y="1417320"/>
+            <a:ext cx="3063240" cy="2103120"/>
+          </a:xfrm>
+          <a:prstGeom prst="roundRect">
+            <a:avLst>
+              <a:gd name="adj" fmla="val 5217"/>
+            </a:avLst>
+          </a:prstGeom>
+          <a:solidFill>
+            <a:srgbClr val="EEF8ED"/>
+          </a:solidFill>
+          <a:ln w="12700">
+            <a:solidFill>
+              <a:srgbClr val="B9D7E6"/>
+            </a:solidFill>
+            <a:prstDash val="solid"/>
+          </a:ln>
+        </p:spPr>
+      </p:sp>
+      <p:sp>
+        <p:nvSpPr>
+          <p:cNvPr id="10" name="Text 8"/>
+          <p:cNvSpPr/>
+          <p:nvPr/>
+        </p:nvSpPr>
+        <p:spPr>
+          <a:xfrm>
+            <a:off x="8211312" y="1563624"/>
+            <a:ext cx="2734056" cy="201168"/>
+          </a:xfrm>
+          <a:prstGeom prst="rect">
+            <a:avLst/>
+          </a:prstGeom>
+          <a:noFill/>
+          <a:ln/>
+        </p:spPr>
+        <p:txBody>
+          <a:bodyPr wrap="square" lIns="0" tIns="0" rIns="0" bIns="0" rtlCol="0" anchor="ctr"/>
+          <a:lstStyle/>
+          <a:p>
+            <a:pPr indent="0" marL="0">
+              <a:buNone/>
+            </a:pPr>
+            <a:r>
+              <a:rPr lang="en-US" sz="950" b="1" dirty="0">
+                <a:solidFill>
+                  <a:srgbClr val="0068B7"/>
+                </a:solidFill>
+                <a:latin typeface="Aptos" pitchFamily="34" charset="0"/>
+                <a:ea typeface="Aptos" pitchFamily="34" charset="-122"/>
+                <a:cs typeface="Aptos" pitchFamily="34" charset="-120"/>
+              </a:rPr>
+              <a:t>Apply the lesson</a:t>
+            </a:r>
+            <a:endParaRPr lang="en-US" sz="950" dirty="0"/>
+          </a:p>
+        </p:txBody>
+      </p:sp>
+      <p:sp>
+        <p:nvSpPr>
+          <p:cNvPr id="11" name="Text 9"/>
+          <p:cNvSpPr/>
+          <p:nvPr/>
+        </p:nvSpPr>
+        <p:spPr>
+          <a:xfrm>
+            <a:off x="8211312" y="1856232"/>
+            <a:ext cx="2734056" cy="1536192"/>
+          </a:xfrm>
+          <a:prstGeom prst="rect">
+            <a:avLst/>
+          </a:prstGeom>
+          <a:noFill/>
+          <a:ln/>
+        </p:spPr>
+        <p:txBody>
+          <a:bodyPr wrap="square" lIns="0" tIns="0" rIns="0" bIns="0" rtlCol="0" anchor="t">
+            <a:normAutofit/>
+          </a:bodyPr>
+          <a:lstStyle/>
+          <a:p>
+            <a:pPr indent="0" marL="0">
+              <a:buNone/>
+            </a:pPr>
+            <a:r>
+              <a:rPr lang="en-US" sz="1250" dirty="0">
                 <a:solidFill>
                   <a:srgbClr val="17364A"/>
                 </a:solidFill>
@@ -6383,9 +11394,116 @@
                 <a:ea typeface="Aptos" pitchFamily="34" charset="-122"/>
                 <a:cs typeface="Aptos" pitchFamily="34" charset="-120"/>
               </a:rPr>
-              <a:t>Design safeguards for use of predictive outputs in resource allocation, outreach, surveillance, or triage.</a:t>
-            </a:r>
-            <a:endParaRPr lang="en-US" sz="1450" dirty="0"/>
+              <a:t>Use the related plays to identify decisions, participants, timing, approvals, and documentation needed for responsible implementation.</a:t>
+            </a:r>
+            <a:endParaRPr lang="en-US" sz="1250" dirty="0"/>
+          </a:p>
+        </p:txBody>
+      </p:sp>
+      <p:sp>
+        <p:nvSpPr>
+          <p:cNvPr id="12" name="Shape 10"/>
+          <p:cNvSpPr/>
+          <p:nvPr/>
+        </p:nvSpPr>
+        <p:spPr>
+          <a:xfrm>
+            <a:off x="8046720" y="3794760"/>
+            <a:ext cx="3063240" cy="1508760"/>
+          </a:xfrm>
+          <a:prstGeom prst="roundRect">
+            <a:avLst>
+              <a:gd name="adj" fmla="val 7273"/>
+            </a:avLst>
+          </a:prstGeom>
+          <a:solidFill>
+            <a:srgbClr val="FFF4D9"/>
+          </a:solidFill>
+          <a:ln w="12700">
+            <a:solidFill>
+              <a:srgbClr val="B9D7E6"/>
+            </a:solidFill>
+            <a:prstDash val="solid"/>
+          </a:ln>
+        </p:spPr>
+      </p:sp>
+      <p:sp>
+        <p:nvSpPr>
+          <p:cNvPr id="13" name="Text 11"/>
+          <p:cNvSpPr/>
+          <p:nvPr/>
+        </p:nvSpPr>
+        <p:spPr>
+          <a:xfrm>
+            <a:off x="8211312" y="3941064"/>
+            <a:ext cx="2734056" cy="201168"/>
+          </a:xfrm>
+          <a:prstGeom prst="rect">
+            <a:avLst/>
+          </a:prstGeom>
+          <a:noFill/>
+          <a:ln/>
+        </p:spPr>
+        <p:txBody>
+          <a:bodyPr wrap="square" lIns="0" tIns="0" rIns="0" bIns="0" rtlCol="0" anchor="ctr"/>
+          <a:lstStyle/>
+          <a:p>
+            <a:pPr indent="0" marL="0">
+              <a:buNone/>
+            </a:pPr>
+            <a:r>
+              <a:rPr lang="en-US" sz="950" b="1" dirty="0">
+                <a:solidFill>
+                  <a:srgbClr val="0068B7"/>
+                </a:solidFill>
+                <a:latin typeface="Aptos" pitchFamily="34" charset="0"/>
+                <a:ea typeface="Aptos" pitchFamily="34" charset="-122"/>
+                <a:cs typeface="Aptos" pitchFamily="34" charset="-120"/>
+              </a:rPr>
+              <a:t>Keep in mind</a:t>
+            </a:r>
+            <a:endParaRPr lang="en-US" sz="950" dirty="0"/>
+          </a:p>
+        </p:txBody>
+      </p:sp>
+      <p:sp>
+        <p:nvSpPr>
+          <p:cNvPr id="14" name="Text 12"/>
+          <p:cNvSpPr/>
+          <p:nvPr/>
+        </p:nvSpPr>
+        <p:spPr>
+          <a:xfrm>
+            <a:off x="8211312" y="4233672"/>
+            <a:ext cx="2734056" cy="941832"/>
+          </a:xfrm>
+          <a:prstGeom prst="rect">
+            <a:avLst/>
+          </a:prstGeom>
+          <a:noFill/>
+          <a:ln/>
+        </p:spPr>
+        <p:txBody>
+          <a:bodyPr wrap="square" lIns="0" tIns="0" rIns="0" bIns="0" rtlCol="0" anchor="t">
+            <a:normAutofit/>
+          </a:bodyPr>
+          <a:lstStyle/>
+          <a:p>
+            <a:pPr indent="0" marL="0">
+              <a:buNone/>
+            </a:pPr>
+            <a:r>
+              <a:rPr lang="en-US" sz="1250" dirty="0">
+                <a:solidFill>
+                  <a:srgbClr val="17364A"/>
+                </a:solidFill>
+                <a:latin typeface="Aptos" pitchFamily="34" charset="0"/>
+                <a:ea typeface="Aptos" pitchFamily="34" charset="-122"/>
+                <a:cs typeface="Aptos" pitchFamily="34" charset="-120"/>
+              </a:rPr>
+              <a:t>The playbook connection helps turn training into agency work, not just individual knowledge.</a:t>
+            </a:r>
+            <a:endParaRPr lang="en-US" sz="1250" dirty="0"/>
           </a:p>
         </p:txBody>
       </p:sp>
@@ -6448,7 +11566,32 @@
       </p:sp>
       <p:sp>
         <p:nvSpPr>
-          <p:cNvPr id="3" name="Text 1"/>
+          <p:cNvPr id="3" name="Shape 1"/>
+          <p:cNvSpPr/>
+          <p:nvPr/>
+        </p:nvSpPr>
+        <p:spPr>
+          <a:xfrm>
+            <a:off x="0" y="164592"/>
+            <a:ext cx="146304" cy="6693408"/>
+          </a:xfrm>
+          <a:prstGeom prst="rect">
+            <a:avLst/>
+          </a:prstGeom>
+          <a:solidFill>
+            <a:srgbClr val="2F8A28"/>
+          </a:solidFill>
+          <a:ln w="12700">
+            <a:solidFill>
+              <a:srgbClr val="2F8A28"/>
+            </a:solidFill>
+            <a:prstDash val="solid"/>
+          </a:ln>
+        </p:spPr>
+      </p:sp>
+      <p:sp>
+        <p:nvSpPr>
+          <p:cNvPr id="4" name="Text 2"/>
           <p:cNvSpPr/>
           <p:nvPr/>
         </p:nvSpPr>
@@ -6487,7 +11630,7 @@
       </p:sp>
       <p:sp>
         <p:nvSpPr>
-          <p:cNvPr id="4" name="Text 2"/>
+          <p:cNvPr id="5" name="Text 3"/>
           <p:cNvSpPr/>
           <p:nvPr/>
         </p:nvSpPr>
@@ -6526,7 +11669,7 @@
       </p:sp>
       <p:sp>
         <p:nvSpPr>
-          <p:cNvPr id="5" name="Text 3"/>
+          <p:cNvPr id="6" name="Text 4"/>
           <p:cNvSpPr/>
           <p:nvPr/>
         </p:nvSpPr>
@@ -6565,7 +11708,7 @@
       </p:sp>
       <p:sp>
         <p:nvSpPr>
-          <p:cNvPr id="6" name="Text 4"/>
+          <p:cNvPr id="7" name="Text 5"/>
           <p:cNvSpPr/>
           <p:nvPr/>
         </p:nvSpPr>
@@ -6598,7 +11741,7 @@
                 <a:ea typeface="Aptos Display" pitchFamily="34" charset="-122"/>
                 <a:cs typeface="Aptos Display" pitchFamily="34" charset="-120"/>
               </a:rPr>
-              <a:t>Learning Objectives Continued</a:t>
+              <a:t>Related toolkit resources</a:t>
             </a:r>
             <a:endParaRPr lang="en-US" sz="2700" dirty="0"/>
           </a:p>
@@ -6606,14 +11749,14 @@
       </p:sp>
       <p:sp>
         <p:nvSpPr>
-          <p:cNvPr id="7" name="Text 5"/>
-          <p:cNvSpPr/>
-          <p:nvPr/>
-        </p:nvSpPr>
-        <p:spPr>
-          <a:xfrm>
-            <a:off x="822960" y="1325880"/>
-            <a:ext cx="10378440" cy="4800600"/>
+          <p:cNvPr id="8" name="Text 6"/>
+          <p:cNvSpPr/>
+          <p:nvPr/>
+        </p:nvSpPr>
+        <p:spPr>
+          <a:xfrm>
+            <a:off x="868680" y="1417320"/>
+            <a:ext cx="6903720" cy="4480560"/>
           </a:xfrm>
           <a:prstGeom prst="rect">
             <a:avLst/>
@@ -6628,7 +11771,7 @@
           <a:lstStyle/>
           <a:p>
             <a:r>
-              <a:rPr lang="en-US" sz="1450" dirty="0">
+              <a:rPr lang="en-US" sz="1460" dirty="0">
                 <a:solidFill>
                   <a:srgbClr val="17364A"/>
                 </a:solidFill>
@@ -6636,9 +11779,279 @@
                 <a:ea typeface="Aptos" pitchFamily="34" charset="-122"/>
                 <a:cs typeface="Aptos" pitchFamily="34" charset="-120"/>
               </a:rPr>
-              <a:t>Produce a predictive model review plan for a public health workflow.</a:t>
-            </a:r>
-            <a:endParaRPr lang="en-US" sz="1450" dirty="0"/>
+              <a:t>Tool 44: Performance Monitoring Dashboard (Dashboard) - Use this tool to complete or strengthen the practical exercise for the module.</a:t>
+            </a:r>
+            <a:endParaRPr lang="en-US" sz="1460" dirty="0"/>
+          </a:p>
+          <a:p>
+            <a:r>
+              <a:rPr lang="en-US" sz="1460" dirty="0">
+                <a:solidFill>
+                  <a:srgbClr val="17364A"/>
+                </a:solidFill>
+                <a:latin typeface="Aptos" pitchFamily="34" charset="0"/>
+                <a:ea typeface="Aptos" pitchFamily="34" charset="-122"/>
+                <a:cs typeface="Aptos" pitchFamily="34" charset="-120"/>
+              </a:rPr>
+              <a:t>Tool 45: Continuous Improvement Log (Log) - Use Continuous Improvement Log to translate this lesson into a documented public health.</a:t>
+            </a:r>
+            <a:endParaRPr lang="en-US" sz="1460" dirty="0"/>
+          </a:p>
+          <a:p>
+            <a:r>
+              <a:rPr lang="en-US" sz="1460" dirty="0">
+                <a:solidFill>
+                  <a:srgbClr val="17364A"/>
+                </a:solidFill>
+                <a:latin typeface="Aptos" pitchFamily="34" charset="0"/>
+                <a:ea typeface="Aptos" pitchFamily="34" charset="-122"/>
+                <a:cs typeface="Aptos" pitchFamily="34" charset="-120"/>
+              </a:rPr>
+              <a:t>Tool 48: AI Evaluation &amp; Outcomes Reporting (Template) - Use this tool to complete or strengthen the practical exercise for the.</a:t>
+            </a:r>
+            <a:endParaRPr lang="en-US" sz="1460" dirty="0"/>
+          </a:p>
+          <a:p>
+            <a:r>
+              <a:rPr lang="en-US" sz="1460" dirty="0">
+                <a:solidFill>
+                  <a:srgbClr val="17364A"/>
+                </a:solidFill>
+                <a:latin typeface="Aptos" pitchFamily="34" charset="0"/>
+                <a:ea typeface="Aptos" pitchFamily="34" charset="-122"/>
+                <a:cs typeface="Aptos" pitchFamily="34" charset="-120"/>
+              </a:rPr>
+              <a:t>Tool 1: AI Vision &amp; Principles Workshop (Workshop) - Use AI Vision &amp; Principles Workshop to translate this lesson into a documented.</a:t>
+            </a:r>
+            <a:endParaRPr lang="en-US" sz="1460" dirty="0"/>
+          </a:p>
+          <a:p>
+            <a:r>
+              <a:rPr lang="en-US" sz="1460" dirty="0">
+                <a:solidFill>
+                  <a:srgbClr val="17364A"/>
+                </a:solidFill>
+                <a:latin typeface="Aptos" pitchFamily="34" charset="0"/>
+                <a:ea typeface="Aptos" pitchFamily="34" charset="-122"/>
+                <a:cs typeface="Aptos" pitchFamily="34" charset="-120"/>
+              </a:rPr>
+              <a:t>Tool 3: Equity Impact Assessment Checklist (Checklist) - Use this tool to complete or strengthen the practical exercise for the.</a:t>
+            </a:r>
+            <a:endParaRPr lang="en-US" sz="1460" dirty="0"/>
+          </a:p>
+        </p:txBody>
+      </p:sp>
+      <p:sp>
+        <p:nvSpPr>
+          <p:cNvPr id="9" name="Shape 7"/>
+          <p:cNvSpPr/>
+          <p:nvPr/>
+        </p:nvSpPr>
+        <p:spPr>
+          <a:xfrm>
+            <a:off x="8046720" y="1417320"/>
+            <a:ext cx="3063240" cy="2103120"/>
+          </a:xfrm>
+          <a:prstGeom prst="roundRect">
+            <a:avLst>
+              <a:gd name="adj" fmla="val 5217"/>
+            </a:avLst>
+          </a:prstGeom>
+          <a:solidFill>
+            <a:srgbClr val="EAF6F8"/>
+          </a:solidFill>
+          <a:ln w="12700">
+            <a:solidFill>
+              <a:srgbClr val="B9D7E6"/>
+            </a:solidFill>
+            <a:prstDash val="solid"/>
+          </a:ln>
+        </p:spPr>
+      </p:sp>
+      <p:sp>
+        <p:nvSpPr>
+          <p:cNvPr id="10" name="Text 8"/>
+          <p:cNvSpPr/>
+          <p:nvPr/>
+        </p:nvSpPr>
+        <p:spPr>
+          <a:xfrm>
+            <a:off x="8211312" y="1563624"/>
+            <a:ext cx="2734056" cy="201168"/>
+          </a:xfrm>
+          <a:prstGeom prst="rect">
+            <a:avLst/>
+          </a:prstGeom>
+          <a:noFill/>
+          <a:ln/>
+        </p:spPr>
+        <p:txBody>
+          <a:bodyPr wrap="square" lIns="0" tIns="0" rIns="0" bIns="0" rtlCol="0" anchor="ctr"/>
+          <a:lstStyle/>
+          <a:p>
+            <a:pPr indent="0" marL="0">
+              <a:buNone/>
+            </a:pPr>
+            <a:r>
+              <a:rPr lang="en-US" sz="950" b="1" dirty="0">
+                <a:solidFill>
+                  <a:srgbClr val="0068B7"/>
+                </a:solidFill>
+                <a:latin typeface="Aptos" pitchFamily="34" charset="0"/>
+                <a:ea typeface="Aptos" pitchFamily="34" charset="-122"/>
+                <a:cs typeface="Aptos" pitchFamily="34" charset="-120"/>
+              </a:rPr>
+              <a:t>Use the tools</a:t>
+            </a:r>
+            <a:endParaRPr lang="en-US" sz="950" dirty="0"/>
+          </a:p>
+        </p:txBody>
+      </p:sp>
+      <p:sp>
+        <p:nvSpPr>
+          <p:cNvPr id="11" name="Text 9"/>
+          <p:cNvSpPr/>
+          <p:nvPr/>
+        </p:nvSpPr>
+        <p:spPr>
+          <a:xfrm>
+            <a:off x="8211312" y="1856232"/>
+            <a:ext cx="2734056" cy="1536192"/>
+          </a:xfrm>
+          <a:prstGeom prst="rect">
+            <a:avLst/>
+          </a:prstGeom>
+          <a:noFill/>
+          <a:ln/>
+        </p:spPr>
+        <p:txBody>
+          <a:bodyPr wrap="square" lIns="0" tIns="0" rIns="0" bIns="0" rtlCol="0" anchor="t">
+            <a:normAutofit/>
+          </a:bodyPr>
+          <a:lstStyle/>
+          <a:p>
+            <a:pPr indent="0" marL="0">
+              <a:buNone/>
+            </a:pPr>
+            <a:r>
+              <a:rPr lang="en-US" sz="1250" dirty="0">
+                <a:solidFill>
+                  <a:srgbClr val="17364A"/>
+                </a:solidFill>
+                <a:latin typeface="Aptos" pitchFamily="34" charset="0"/>
+                <a:ea typeface="Aptos" pitchFamily="34" charset="-122"/>
+                <a:cs typeface="Aptos" pitchFamily="34" charset="-120"/>
+              </a:rPr>
+              <a:t>Use linked tools when your department needs a structured worksheet, template, checklist, review process, or documentation artifact.</a:t>
+            </a:r>
+            <a:endParaRPr lang="en-US" sz="1250" dirty="0"/>
+          </a:p>
+        </p:txBody>
+      </p:sp>
+      <p:sp>
+        <p:nvSpPr>
+          <p:cNvPr id="12" name="Shape 10"/>
+          <p:cNvSpPr/>
+          <p:nvPr/>
+        </p:nvSpPr>
+        <p:spPr>
+          <a:xfrm>
+            <a:off x="8046720" y="3794760"/>
+            <a:ext cx="3063240" cy="1508760"/>
+          </a:xfrm>
+          <a:prstGeom prst="roundRect">
+            <a:avLst>
+              <a:gd name="adj" fmla="val 7273"/>
+            </a:avLst>
+          </a:prstGeom>
+          <a:solidFill>
+            <a:srgbClr val="EEF8ED"/>
+          </a:solidFill>
+          <a:ln w="12700">
+            <a:solidFill>
+              <a:srgbClr val="B9D7E6"/>
+            </a:solidFill>
+            <a:prstDash val="solid"/>
+          </a:ln>
+        </p:spPr>
+      </p:sp>
+      <p:sp>
+        <p:nvSpPr>
+          <p:cNvPr id="13" name="Text 11"/>
+          <p:cNvSpPr/>
+          <p:nvPr/>
+        </p:nvSpPr>
+        <p:spPr>
+          <a:xfrm>
+            <a:off x="8211312" y="3941064"/>
+            <a:ext cx="2734056" cy="201168"/>
+          </a:xfrm>
+          <a:prstGeom prst="rect">
+            <a:avLst/>
+          </a:prstGeom>
+          <a:noFill/>
+          <a:ln/>
+        </p:spPr>
+        <p:txBody>
+          <a:bodyPr wrap="square" lIns="0" tIns="0" rIns="0" bIns="0" rtlCol="0" anchor="ctr"/>
+          <a:lstStyle/>
+          <a:p>
+            <a:pPr indent="0" marL="0">
+              <a:buNone/>
+            </a:pPr>
+            <a:r>
+              <a:rPr lang="en-US" sz="950" b="1" dirty="0">
+                <a:solidFill>
+                  <a:srgbClr val="0068B7"/>
+                </a:solidFill>
+                <a:latin typeface="Aptos" pitchFamily="34" charset="0"/>
+                <a:ea typeface="Aptos" pitchFamily="34" charset="-122"/>
+                <a:cs typeface="Aptos" pitchFamily="34" charset="-120"/>
+              </a:rPr>
+              <a:t>Avoid duplication</a:t>
+            </a:r>
+            <a:endParaRPr lang="en-US" sz="950" dirty="0"/>
+          </a:p>
+        </p:txBody>
+      </p:sp>
+      <p:sp>
+        <p:nvSpPr>
+          <p:cNvPr id="14" name="Text 12"/>
+          <p:cNvSpPr/>
+          <p:nvPr/>
+        </p:nvSpPr>
+        <p:spPr>
+          <a:xfrm>
+            <a:off x="8211312" y="4233672"/>
+            <a:ext cx="2734056" cy="941832"/>
+          </a:xfrm>
+          <a:prstGeom prst="rect">
+            <a:avLst/>
+          </a:prstGeom>
+          <a:noFill/>
+          <a:ln/>
+        </p:spPr>
+        <p:txBody>
+          <a:bodyPr wrap="square" lIns="0" tIns="0" rIns="0" bIns="0" rtlCol="0" anchor="t">
+            <a:normAutofit/>
+          </a:bodyPr>
+          <a:lstStyle/>
+          <a:p>
+            <a:pPr indent="0" marL="0">
+              <a:buNone/>
+            </a:pPr>
+            <a:r>
+              <a:rPr lang="en-US" sz="1250" dirty="0">
+                <a:solidFill>
+                  <a:srgbClr val="17364A"/>
+                </a:solidFill>
+                <a:latin typeface="Aptos" pitchFamily="34" charset="0"/>
+                <a:ea typeface="Aptos" pitchFamily="34" charset="-122"/>
+                <a:cs typeface="Aptos" pitchFamily="34" charset="-120"/>
+              </a:rPr>
+              <a:t>If your department already has a strong equivalent tool, adapt or use the existing process instead of recreating it.</a:t>
+            </a:r>
+            <a:endParaRPr lang="en-US" sz="1250" dirty="0"/>
           </a:p>
         </p:txBody>
       </p:sp>
@@ -6701,7 +12114,32 @@
       </p:sp>
       <p:sp>
         <p:nvSpPr>
-          <p:cNvPr id="3" name="Text 1"/>
+          <p:cNvPr id="3" name="Shape 1"/>
+          <p:cNvSpPr/>
+          <p:nvPr/>
+        </p:nvSpPr>
+        <p:spPr>
+          <a:xfrm>
+            <a:off x="0" y="164592"/>
+            <a:ext cx="146304" cy="6693408"/>
+          </a:xfrm>
+          <a:prstGeom prst="rect">
+            <a:avLst/>
+          </a:prstGeom>
+          <a:solidFill>
+            <a:srgbClr val="2F8A28"/>
+          </a:solidFill>
+          <a:ln w="12700">
+            <a:solidFill>
+              <a:srgbClr val="2F8A28"/>
+            </a:solidFill>
+            <a:prstDash val="solid"/>
+          </a:ln>
+        </p:spPr>
+      </p:sp>
+      <p:sp>
+        <p:nvSpPr>
+          <p:cNvPr id="4" name="Text 2"/>
           <p:cNvSpPr/>
           <p:nvPr/>
         </p:nvSpPr>
@@ -6740,7 +12178,7 @@
       </p:sp>
       <p:sp>
         <p:nvSpPr>
-          <p:cNvPr id="4" name="Text 2"/>
+          <p:cNvPr id="5" name="Text 3"/>
           <p:cNvSpPr/>
           <p:nvPr/>
         </p:nvSpPr>
@@ -6779,7 +12217,7 @@
       </p:sp>
       <p:sp>
         <p:nvSpPr>
-          <p:cNvPr id="5" name="Text 3"/>
+          <p:cNvPr id="6" name="Text 4"/>
           <p:cNvSpPr/>
           <p:nvPr/>
         </p:nvSpPr>
@@ -6818,13 +12256,77 @@
       </p:sp>
       <p:sp>
         <p:nvSpPr>
-          <p:cNvPr id="6" name="Text 4"/>
+          <p:cNvPr id="7" name="Shape 5"/>
           <p:cNvSpPr/>
           <p:nvPr/>
         </p:nvSpPr>
         <p:spPr>
           <a:xfrm>
             <a:off x="640080" y="658368"/>
+            <a:ext cx="420624" cy="420624"/>
+          </a:xfrm>
+          <a:prstGeom prst="ellipse">
+            <a:avLst/>
+          </a:prstGeom>
+          <a:solidFill>
+            <a:srgbClr val="0068B7"/>
+          </a:solidFill>
+          <a:ln w="12700">
+            <a:solidFill>
+              <a:srgbClr val="0068B7"/>
+            </a:solidFill>
+            <a:prstDash val="solid"/>
+          </a:ln>
+        </p:spPr>
+      </p:sp>
+      <p:sp>
+        <p:nvSpPr>
+          <p:cNvPr id="8" name="Text 6"/>
+          <p:cNvSpPr/>
+          <p:nvPr/>
+        </p:nvSpPr>
+        <p:spPr>
+          <a:xfrm>
+            <a:off x="640080" y="731520"/>
+            <a:ext cx="420624" cy="164592"/>
+          </a:xfrm>
+          <a:prstGeom prst="rect">
+            <a:avLst/>
+          </a:prstGeom>
+          <a:noFill/>
+          <a:ln/>
+        </p:spPr>
+        <p:txBody>
+          <a:bodyPr wrap="square" lIns="0" tIns="0" rIns="0" bIns="0" rtlCol="0" anchor="ctr"/>
+          <a:lstStyle/>
+          <a:p>
+            <a:pPr algn="ctr" indent="0" marL="0">
+              <a:buNone/>
+            </a:pPr>
+            <a:r>
+              <a:rPr lang="en-US" sz="1100" b="1" dirty="0">
+                <a:solidFill>
+                  <a:srgbClr val="FFFFFF"/>
+                </a:solidFill>
+                <a:latin typeface="Aptos" pitchFamily="34" charset="0"/>
+                <a:ea typeface="Aptos" pitchFamily="34" charset="-122"/>
+                <a:cs typeface="Aptos" pitchFamily="34" charset="-120"/>
+              </a:rPr>
+              <a:t>1</a:t>
+            </a:r>
+            <a:endParaRPr lang="en-US" sz="1100" dirty="0"/>
+          </a:p>
+        </p:txBody>
+      </p:sp>
+      <p:sp>
+        <p:nvSpPr>
+          <p:cNvPr id="9" name="Text 7"/>
+          <p:cNvSpPr/>
+          <p:nvPr/>
+        </p:nvSpPr>
+        <p:spPr>
+          <a:xfrm>
+            <a:off x="640080" y="621792"/>
             <a:ext cx="10881360" cy="566928"/>
           </a:xfrm>
           <a:prstGeom prst="rect">
@@ -6851,7 +12353,7 @@
                 <a:ea typeface="Aptos Display" pitchFamily="34" charset="-122"/>
                 <a:cs typeface="Aptos Display" pitchFamily="34" charset="-120"/>
               </a:rPr>
-              <a:t>Module Overview</a:t>
+              <a:t>Learning Objectives</a:t>
             </a:r>
             <a:endParaRPr lang="en-US" sz="2700" dirty="0"/>
           </a:p>
@@ -6859,32 +12361,178 @@
       </p:sp>
       <p:sp>
         <p:nvSpPr>
-          <p:cNvPr id="7" name="Text 5"/>
-          <p:cNvSpPr/>
-          <p:nvPr/>
-        </p:nvSpPr>
-        <p:spPr>
-          <a:xfrm>
-            <a:off x="822960" y="1325880"/>
-            <a:ext cx="10378440" cy="4800600"/>
-          </a:xfrm>
-          <a:prstGeom prst="rect">
-            <a:avLst/>
-          </a:prstGeom>
-          <a:noFill/>
-          <a:ln/>
-        </p:spPr>
-        <p:txBody>
-          <a:bodyPr wrap="square" lIns="1016" tIns="1016" rIns="1016" bIns="1016" rtlCol="0" anchor="t">
+          <p:cNvPr id="10" name="Text 8"/>
+          <p:cNvSpPr/>
+          <p:nvPr/>
+        </p:nvSpPr>
+        <p:spPr>
+          <a:xfrm>
+            <a:off x="868680" y="1417320"/>
+            <a:ext cx="6675120" cy="4434840"/>
+          </a:xfrm>
+          <a:prstGeom prst="rect">
+            <a:avLst/>
+          </a:prstGeom>
+          <a:noFill/>
+          <a:ln/>
+        </p:spPr>
+        <p:txBody>
+          <a:bodyPr wrap="square" lIns="635" tIns="635" rIns="635" bIns="635" rtlCol="0" anchor="t">
             <a:normAutofit/>
           </a:bodyPr>
           <a:lstStyle/>
           <a:p>
+            <a:r>
+              <a:rPr lang="en-US" sz="1700" dirty="0">
+                <a:solidFill>
+                  <a:srgbClr val="17364A"/>
+                </a:solidFill>
+                <a:latin typeface="Aptos" pitchFamily="34" charset="0"/>
+                <a:ea typeface="Aptos" pitchFamily="34" charset="-122"/>
+                <a:cs typeface="Aptos" pitchFamily="34" charset="-120"/>
+              </a:rPr>
+              <a:t>Define predictive analytics and risk stratification in public health terms.</a:t>
+            </a:r>
+            <a:endParaRPr lang="en-US" sz="1700" dirty="0"/>
+          </a:p>
+          <a:p>
+            <a:r>
+              <a:rPr lang="en-US" sz="1700" dirty="0">
+                <a:solidFill>
+                  <a:srgbClr val="17364A"/>
+                </a:solidFill>
+                <a:latin typeface="Aptos" pitchFamily="34" charset="0"/>
+                <a:ea typeface="Aptos" pitchFamily="34" charset="-122"/>
+                <a:cs typeface="Aptos" pitchFamily="34" charset="-120"/>
+              </a:rPr>
+              <a:t>Distinguish prediction from causation, diagnosis, and eligibility determination.</a:t>
+            </a:r>
+            <a:endParaRPr lang="en-US" sz="1700" dirty="0"/>
+          </a:p>
+          <a:p>
+            <a:r>
+              <a:rPr lang="en-US" sz="1700" dirty="0">
+                <a:solidFill>
+                  <a:srgbClr val="17364A"/>
+                </a:solidFill>
+                <a:latin typeface="Aptos" pitchFamily="34" charset="0"/>
+                <a:ea typeface="Aptos" pitchFamily="34" charset="-122"/>
+                <a:cs typeface="Aptos" pitchFamily="34" charset="-120"/>
+              </a:rPr>
+              <a:t>Interpret basic risk categories, thresholds, calibration, and error tradeoffs.</a:t>
+            </a:r>
+            <a:endParaRPr lang="en-US" sz="1700" dirty="0"/>
+          </a:p>
+          <a:p>
+            <a:r>
+              <a:rPr lang="en-US" sz="1700" dirty="0">
+                <a:solidFill>
+                  <a:srgbClr val="17364A"/>
+                </a:solidFill>
+                <a:latin typeface="Aptos" pitchFamily="34" charset="0"/>
+                <a:ea typeface="Aptos" pitchFamily="34" charset="-122"/>
+                <a:cs typeface="Aptos" pitchFamily="34" charset="-120"/>
+              </a:rPr>
+              <a:t>Identify equity and operational risks associated with risk scores.</a:t>
+            </a:r>
+            <a:endParaRPr lang="en-US" sz="1700" dirty="0"/>
+          </a:p>
+        </p:txBody>
+      </p:sp>
+      <p:sp>
+        <p:nvSpPr>
+          <p:cNvPr id="11" name="Shape 9"/>
+          <p:cNvSpPr/>
+          <p:nvPr/>
+        </p:nvSpPr>
+        <p:spPr>
+          <a:xfrm>
+            <a:off x="7909560" y="1417320"/>
+            <a:ext cx="3154680" cy="1828800"/>
+          </a:xfrm>
+          <a:prstGeom prst="roundRect">
+            <a:avLst>
+              <a:gd name="adj" fmla="val 6000"/>
+            </a:avLst>
+          </a:prstGeom>
+          <a:solidFill>
+            <a:srgbClr val="EEF8ED"/>
+          </a:solidFill>
+          <a:ln w="12700">
+            <a:solidFill>
+              <a:srgbClr val="B9D7E6"/>
+            </a:solidFill>
+            <a:prstDash val="solid"/>
+          </a:ln>
+        </p:spPr>
+      </p:sp>
+      <p:sp>
+        <p:nvSpPr>
+          <p:cNvPr id="12" name="Text 10"/>
+          <p:cNvSpPr/>
+          <p:nvPr/>
+        </p:nvSpPr>
+        <p:spPr>
+          <a:xfrm>
+            <a:off x="8074152" y="1563624"/>
+            <a:ext cx="2825496" cy="201168"/>
+          </a:xfrm>
+          <a:prstGeom prst="rect">
+            <a:avLst/>
+          </a:prstGeom>
+          <a:noFill/>
+          <a:ln/>
+        </p:spPr>
+        <p:txBody>
+          <a:bodyPr wrap="square" lIns="0" tIns="0" rIns="0" bIns="0" rtlCol="0" anchor="ctr"/>
+          <a:lstStyle/>
+          <a:p>
             <a:pPr indent="0" marL="0">
               <a:buNone/>
             </a:pPr>
             <a:r>
-              <a:rPr lang="en-US" sz="1420" dirty="0">
+              <a:rPr lang="en-US" sz="950" b="1" dirty="0">
+                <a:solidFill>
+                  <a:srgbClr val="0068B7"/>
+                </a:solidFill>
+                <a:latin typeface="Aptos" pitchFamily="34" charset="0"/>
+                <a:ea typeface="Aptos" pitchFamily="34" charset="-122"/>
+                <a:cs typeface="Aptos" pitchFamily="34" charset="-120"/>
+              </a:rPr>
+              <a:t>Key idea</a:t>
+            </a:r>
+            <a:endParaRPr lang="en-US" sz="950" dirty="0"/>
+          </a:p>
+        </p:txBody>
+      </p:sp>
+      <p:sp>
+        <p:nvSpPr>
+          <p:cNvPr id="13" name="Text 11"/>
+          <p:cNvSpPr/>
+          <p:nvPr/>
+        </p:nvSpPr>
+        <p:spPr>
+          <a:xfrm>
+            <a:off x="8074152" y="1856232"/>
+            <a:ext cx="2825496" cy="1261872"/>
+          </a:xfrm>
+          <a:prstGeom prst="rect">
+            <a:avLst/>
+          </a:prstGeom>
+          <a:noFill/>
+          <a:ln/>
+        </p:spPr>
+        <p:txBody>
+          <a:bodyPr wrap="square" lIns="0" tIns="0" rIns="0" bIns="0" rtlCol="0" anchor="t">
+            <a:normAutofit/>
+          </a:bodyPr>
+          <a:lstStyle/>
+          <a:p>
+            <a:pPr indent="0" marL="0">
+              <a:buNone/>
+            </a:pPr>
+            <a:r>
+              <a:rPr lang="en-US" sz="1250" dirty="0">
                 <a:solidFill>
                   <a:srgbClr val="17364A"/>
                 </a:solidFill>
@@ -6892,9 +12540,116 @@
                 <a:ea typeface="Aptos" pitchFamily="34" charset="-122"/>
                 <a:cs typeface="Aptos" pitchFamily="34" charset="-120"/>
               </a:rPr>
-              <a:t>Predictive analytics uses data to estimate the likelihood of future events or outcomes. In public health, predictive models may be used to anticipate disease burden, identify populations at higher risk, prioritize outreach, allocate limited resources, or support early intervention. Risk stratification is the practice of grouping individuals, facilities, areas, events, or populations into categories based on estimated risk. This module helps learners distinguish prediction from diagnosis, causation, eligibility determination, and public health judgment. A risk score can support planning or triage, but it should not automatically become a decision without validation, review, and governance. Public health staff need to know how predictive models are created, what performance measures mean, and how errors affect equity, trust, and operations. By the end of this module, learners should be able to review a predictive AI proposal, identify the data and outcome being predicted, assess the consequences of false positives and false negatives, and design appropriate human review and monitoring processes.</a:t>
-            </a:r>
-            <a:endParaRPr lang="en-US" sz="1420" dirty="0"/>
+              <a:t>Define predictive analytics and risk stratification in public health terms.</a:t>
+            </a:r>
+            <a:endParaRPr lang="en-US" sz="1250" dirty="0"/>
+          </a:p>
+        </p:txBody>
+      </p:sp>
+      <p:sp>
+        <p:nvSpPr>
+          <p:cNvPr id="14" name="Shape 12"/>
+          <p:cNvSpPr/>
+          <p:nvPr/>
+        </p:nvSpPr>
+        <p:spPr>
+          <a:xfrm>
+            <a:off x="7909560" y="3520440"/>
+            <a:ext cx="3154680" cy="1737360"/>
+          </a:xfrm>
+          <a:prstGeom prst="roundRect">
+            <a:avLst>
+              <a:gd name="adj" fmla="val 6316"/>
+            </a:avLst>
+          </a:prstGeom>
+          <a:solidFill>
+            <a:srgbClr val="EAF6F8"/>
+          </a:solidFill>
+          <a:ln w="12700">
+            <a:solidFill>
+              <a:srgbClr val="B9D7E6"/>
+            </a:solidFill>
+            <a:prstDash val="solid"/>
+          </a:ln>
+        </p:spPr>
+      </p:sp>
+      <p:sp>
+        <p:nvSpPr>
+          <p:cNvPr id="15" name="Text 13"/>
+          <p:cNvSpPr/>
+          <p:nvPr/>
+        </p:nvSpPr>
+        <p:spPr>
+          <a:xfrm>
+            <a:off x="8074152" y="3666744"/>
+            <a:ext cx="2825496" cy="201168"/>
+          </a:xfrm>
+          <a:prstGeom prst="rect">
+            <a:avLst/>
+          </a:prstGeom>
+          <a:noFill/>
+          <a:ln/>
+        </p:spPr>
+        <p:txBody>
+          <a:bodyPr wrap="square" lIns="0" tIns="0" rIns="0" bIns="0" rtlCol="0" anchor="ctr"/>
+          <a:lstStyle/>
+          <a:p>
+            <a:pPr indent="0" marL="0">
+              <a:buNone/>
+            </a:pPr>
+            <a:r>
+              <a:rPr lang="en-US" sz="950" b="1" dirty="0">
+                <a:solidFill>
+                  <a:srgbClr val="0068B7"/>
+                </a:solidFill>
+                <a:latin typeface="Aptos" pitchFamily="34" charset="0"/>
+                <a:ea typeface="Aptos" pitchFamily="34" charset="-122"/>
+                <a:cs typeface="Aptos" pitchFamily="34" charset="-120"/>
+              </a:rPr>
+              <a:t>Use this for</a:t>
+            </a:r>
+            <a:endParaRPr lang="en-US" sz="950" dirty="0"/>
+          </a:p>
+        </p:txBody>
+      </p:sp>
+      <p:sp>
+        <p:nvSpPr>
+          <p:cNvPr id="16" name="Text 14"/>
+          <p:cNvSpPr/>
+          <p:nvPr/>
+        </p:nvSpPr>
+        <p:spPr>
+          <a:xfrm>
+            <a:off x="8074152" y="3959352"/>
+            <a:ext cx="2825496" cy="1170432"/>
+          </a:xfrm>
+          <a:prstGeom prst="rect">
+            <a:avLst/>
+          </a:prstGeom>
+          <a:noFill/>
+          <a:ln/>
+        </p:spPr>
+        <p:txBody>
+          <a:bodyPr wrap="square" lIns="0" tIns="0" rIns="0" bIns="0" rtlCol="0" anchor="t">
+            <a:normAutofit/>
+          </a:bodyPr>
+          <a:lstStyle/>
+          <a:p>
+            <a:pPr indent="0" marL="0">
+              <a:buNone/>
+            </a:pPr>
+            <a:r>
+              <a:rPr lang="en-US" sz="1250" dirty="0">
+                <a:solidFill>
+                  <a:srgbClr val="17364A"/>
+                </a:solidFill>
+                <a:latin typeface="Aptos" pitchFamily="34" charset="0"/>
+                <a:ea typeface="Aptos" pitchFamily="34" charset="-122"/>
+                <a:cs typeface="Aptos" pitchFamily="34" charset="-120"/>
+              </a:rPr>
+              <a:t>Connect the concept to public health decisions, safeguards, documentation, or implementation work.</a:t>
+            </a:r>
+            <a:endParaRPr lang="en-US" sz="1250" dirty="0"/>
           </a:p>
         </p:txBody>
       </p:sp>
@@ -6957,7 +12712,32 @@
       </p:sp>
       <p:sp>
         <p:nvSpPr>
-          <p:cNvPr id="3" name="Text 1"/>
+          <p:cNvPr id="3" name="Shape 1"/>
+          <p:cNvSpPr/>
+          <p:nvPr/>
+        </p:nvSpPr>
+        <p:spPr>
+          <a:xfrm>
+            <a:off x="0" y="164592"/>
+            <a:ext cx="146304" cy="6693408"/>
+          </a:xfrm>
+          <a:prstGeom prst="rect">
+            <a:avLst/>
+          </a:prstGeom>
+          <a:solidFill>
+            <a:srgbClr val="2F8A28"/>
+          </a:solidFill>
+          <a:ln w="12700">
+            <a:solidFill>
+              <a:srgbClr val="2F8A28"/>
+            </a:solidFill>
+            <a:prstDash val="solid"/>
+          </a:ln>
+        </p:spPr>
+      </p:sp>
+      <p:sp>
+        <p:nvSpPr>
+          <p:cNvPr id="4" name="Text 2"/>
           <p:cNvSpPr/>
           <p:nvPr/>
         </p:nvSpPr>
@@ -6996,7 +12776,7 @@
       </p:sp>
       <p:sp>
         <p:nvSpPr>
-          <p:cNvPr id="4" name="Text 2"/>
+          <p:cNvPr id="5" name="Text 3"/>
           <p:cNvSpPr/>
           <p:nvPr/>
         </p:nvSpPr>
@@ -7035,7 +12815,7 @@
       </p:sp>
       <p:sp>
         <p:nvSpPr>
-          <p:cNvPr id="5" name="Text 3"/>
+          <p:cNvPr id="6" name="Text 4"/>
           <p:cNvSpPr/>
           <p:nvPr/>
         </p:nvSpPr>
@@ -7074,7 +12854,7 @@
       </p:sp>
       <p:sp>
         <p:nvSpPr>
-          <p:cNvPr id="6" name="Text 4"/>
+          <p:cNvPr id="7" name="Text 5"/>
           <p:cNvSpPr/>
           <p:nvPr/>
         </p:nvSpPr>
@@ -7107,7 +12887,7 @@
                 <a:ea typeface="Aptos Display" pitchFamily="34" charset="-122"/>
                 <a:cs typeface="Aptos Display" pitchFamily="34" charset="-120"/>
               </a:rPr>
-              <a:t>Why This Topic Matters for Public Health AI</a:t>
+              <a:t>Learning Objectives Continued</a:t>
             </a:r>
             <a:endParaRPr lang="en-US" sz="2700" dirty="0"/>
           </a:p>
@@ -7115,32 +12895,136 @@
       </p:sp>
       <p:sp>
         <p:nvSpPr>
-          <p:cNvPr id="7" name="Text 5"/>
-          <p:cNvSpPr/>
-          <p:nvPr/>
-        </p:nvSpPr>
-        <p:spPr>
-          <a:xfrm>
-            <a:off x="822960" y="1325880"/>
-            <a:ext cx="10378440" cy="4800600"/>
-          </a:xfrm>
-          <a:prstGeom prst="rect">
-            <a:avLst/>
-          </a:prstGeom>
-          <a:noFill/>
-          <a:ln/>
-        </p:spPr>
-        <p:txBody>
-          <a:bodyPr wrap="square" lIns="1016" tIns="1016" rIns="1016" bIns="1016" rtlCol="0" anchor="t">
+          <p:cNvPr id="8" name="Text 6"/>
+          <p:cNvSpPr/>
+          <p:nvPr/>
+        </p:nvSpPr>
+        <p:spPr>
+          <a:xfrm>
+            <a:off x="868680" y="1417320"/>
+            <a:ext cx="6675120" cy="4434840"/>
+          </a:xfrm>
+          <a:prstGeom prst="rect">
+            <a:avLst/>
+          </a:prstGeom>
+          <a:noFill/>
+          <a:ln/>
+        </p:spPr>
+        <p:txBody>
+          <a:bodyPr wrap="square" lIns="635" tIns="635" rIns="635" bIns="635" rtlCol="0" anchor="t">
             <a:normAutofit/>
           </a:bodyPr>
           <a:lstStyle/>
           <a:p>
+            <a:r>
+              <a:rPr lang="en-US" sz="1700" dirty="0">
+                <a:solidFill>
+                  <a:srgbClr val="17364A"/>
+                </a:solidFill>
+                <a:latin typeface="Aptos" pitchFamily="34" charset="0"/>
+                <a:ea typeface="Aptos" pitchFamily="34" charset="-122"/>
+                <a:cs typeface="Aptos" pitchFamily="34" charset="-120"/>
+              </a:rPr>
+              <a:t>Produce a predictive model review plan for a public health workflow.</a:t>
+            </a:r>
+            <a:endParaRPr lang="en-US" sz="1700" dirty="0"/>
+          </a:p>
+        </p:txBody>
+      </p:sp>
+      <p:sp>
+        <p:nvSpPr>
+          <p:cNvPr id="9" name="Shape 7"/>
+          <p:cNvSpPr/>
+          <p:nvPr/>
+        </p:nvSpPr>
+        <p:spPr>
+          <a:xfrm>
+            <a:off x="7909560" y="1417320"/>
+            <a:ext cx="3154680" cy="1828800"/>
+          </a:xfrm>
+          <a:prstGeom prst="roundRect">
+            <a:avLst>
+              <a:gd name="adj" fmla="val 6000"/>
+            </a:avLst>
+          </a:prstGeom>
+          <a:solidFill>
+            <a:srgbClr val="EEF8ED"/>
+          </a:solidFill>
+          <a:ln w="12700">
+            <a:solidFill>
+              <a:srgbClr val="B9D7E6"/>
+            </a:solidFill>
+            <a:prstDash val="solid"/>
+          </a:ln>
+        </p:spPr>
+      </p:sp>
+      <p:sp>
+        <p:nvSpPr>
+          <p:cNvPr id="10" name="Text 8"/>
+          <p:cNvSpPr/>
+          <p:nvPr/>
+        </p:nvSpPr>
+        <p:spPr>
+          <a:xfrm>
+            <a:off x="8074152" y="1563624"/>
+            <a:ext cx="2825496" cy="201168"/>
+          </a:xfrm>
+          <a:prstGeom prst="rect">
+            <a:avLst/>
+          </a:prstGeom>
+          <a:noFill/>
+          <a:ln/>
+        </p:spPr>
+        <p:txBody>
+          <a:bodyPr wrap="square" lIns="0" tIns="0" rIns="0" bIns="0" rtlCol="0" anchor="ctr"/>
+          <a:lstStyle/>
+          <a:p>
             <a:pPr indent="0" marL="0">
               <a:buNone/>
             </a:pPr>
             <a:r>
-              <a:rPr lang="en-US" sz="1420" dirty="0">
+              <a:rPr lang="en-US" sz="950" b="1" dirty="0">
+                <a:solidFill>
+                  <a:srgbClr val="0068B7"/>
+                </a:solidFill>
+                <a:latin typeface="Aptos" pitchFamily="34" charset="0"/>
+                <a:ea typeface="Aptos" pitchFamily="34" charset="-122"/>
+                <a:cs typeface="Aptos" pitchFamily="34" charset="-120"/>
+              </a:rPr>
+              <a:t>Key idea</a:t>
+            </a:r>
+            <a:endParaRPr lang="en-US" sz="950" dirty="0"/>
+          </a:p>
+        </p:txBody>
+      </p:sp>
+      <p:sp>
+        <p:nvSpPr>
+          <p:cNvPr id="11" name="Text 9"/>
+          <p:cNvSpPr/>
+          <p:nvPr/>
+        </p:nvSpPr>
+        <p:spPr>
+          <a:xfrm>
+            <a:off x="8074152" y="1856232"/>
+            <a:ext cx="2825496" cy="1261872"/>
+          </a:xfrm>
+          <a:prstGeom prst="rect">
+            <a:avLst/>
+          </a:prstGeom>
+          <a:noFill/>
+          <a:ln/>
+        </p:spPr>
+        <p:txBody>
+          <a:bodyPr wrap="square" lIns="0" tIns="0" rIns="0" bIns="0" rtlCol="0" anchor="t">
+            <a:normAutofit/>
+          </a:bodyPr>
+          <a:lstStyle/>
+          <a:p>
+            <a:pPr indent="0" marL="0">
+              <a:buNone/>
+            </a:pPr>
+            <a:r>
+              <a:rPr lang="en-US" sz="1250" dirty="0">
                 <a:solidFill>
                   <a:srgbClr val="17364A"/>
                 </a:solidFill>
@@ -7148,9 +13032,116 @@
                 <a:ea typeface="Aptos" pitchFamily="34" charset="-122"/>
                 <a:cs typeface="Aptos" pitchFamily="34" charset="-120"/>
               </a:rPr>
-              <a:t>Predictive analytics matters because public health agencies often must act before all information is available. During outbreaks, emergencies, or resource-constrained programs, agencies may need to decide where to send staff, which facilities need follow-up, which communities may need outreach, or which reports require expedited review. Prediction can help organize uncertainty, but it cannot remove uncertainty. Risk stratification can also create harm if used carelessly. A model may assign lower risk to groups with incomplete data, limited healthcare access, or fewer documented encounters. It may assign higher risk based on factors that reflect social vulnerability without ensuring supportive intervention. If a score is used to deny services, delay review, or reduce attention, the tool may worsen inequities. The responsible use of prediction requires a clear purpose, well-defined outcome, appropriate data, subgroup evaluation, calibrated scores, human review, and transparency about limitations. Public health staff should ask who benefits from the prediction, who could be harmed, and whether the intended action is supportive, punitive, or resource-constraining.</a:t>
-            </a:r>
-            <a:endParaRPr lang="en-US" sz="1420" dirty="0"/>
+              <a:t>Produce a predictive model review plan for a public health workflow.</a:t>
+            </a:r>
+            <a:endParaRPr lang="en-US" sz="1250" dirty="0"/>
+          </a:p>
+        </p:txBody>
+      </p:sp>
+      <p:sp>
+        <p:nvSpPr>
+          <p:cNvPr id="12" name="Shape 10"/>
+          <p:cNvSpPr/>
+          <p:nvPr/>
+        </p:nvSpPr>
+        <p:spPr>
+          <a:xfrm>
+            <a:off x="7909560" y="3520440"/>
+            <a:ext cx="3154680" cy="1737360"/>
+          </a:xfrm>
+          <a:prstGeom prst="roundRect">
+            <a:avLst>
+              <a:gd name="adj" fmla="val 6316"/>
+            </a:avLst>
+          </a:prstGeom>
+          <a:solidFill>
+            <a:srgbClr val="EAF6F8"/>
+          </a:solidFill>
+          <a:ln w="12700">
+            <a:solidFill>
+              <a:srgbClr val="B9D7E6"/>
+            </a:solidFill>
+            <a:prstDash val="solid"/>
+          </a:ln>
+        </p:spPr>
+      </p:sp>
+      <p:sp>
+        <p:nvSpPr>
+          <p:cNvPr id="13" name="Text 11"/>
+          <p:cNvSpPr/>
+          <p:nvPr/>
+        </p:nvSpPr>
+        <p:spPr>
+          <a:xfrm>
+            <a:off x="8074152" y="3666744"/>
+            <a:ext cx="2825496" cy="201168"/>
+          </a:xfrm>
+          <a:prstGeom prst="rect">
+            <a:avLst/>
+          </a:prstGeom>
+          <a:noFill/>
+          <a:ln/>
+        </p:spPr>
+        <p:txBody>
+          <a:bodyPr wrap="square" lIns="0" tIns="0" rIns="0" bIns="0" rtlCol="0" anchor="ctr"/>
+          <a:lstStyle/>
+          <a:p>
+            <a:pPr indent="0" marL="0">
+              <a:buNone/>
+            </a:pPr>
+            <a:r>
+              <a:rPr lang="en-US" sz="950" b="1" dirty="0">
+                <a:solidFill>
+                  <a:srgbClr val="0068B7"/>
+                </a:solidFill>
+                <a:latin typeface="Aptos" pitchFamily="34" charset="0"/>
+                <a:ea typeface="Aptos" pitchFamily="34" charset="-122"/>
+                <a:cs typeface="Aptos" pitchFamily="34" charset="-120"/>
+              </a:rPr>
+              <a:t>Use this for</a:t>
+            </a:r>
+            <a:endParaRPr lang="en-US" sz="950" dirty="0"/>
+          </a:p>
+        </p:txBody>
+      </p:sp>
+      <p:sp>
+        <p:nvSpPr>
+          <p:cNvPr id="14" name="Text 12"/>
+          <p:cNvSpPr/>
+          <p:nvPr/>
+        </p:nvSpPr>
+        <p:spPr>
+          <a:xfrm>
+            <a:off x="8074152" y="3959352"/>
+            <a:ext cx="2825496" cy="1170432"/>
+          </a:xfrm>
+          <a:prstGeom prst="rect">
+            <a:avLst/>
+          </a:prstGeom>
+          <a:noFill/>
+          <a:ln/>
+        </p:spPr>
+        <p:txBody>
+          <a:bodyPr wrap="square" lIns="0" tIns="0" rIns="0" bIns="0" rtlCol="0" anchor="t">
+            <a:normAutofit/>
+          </a:bodyPr>
+          <a:lstStyle/>
+          <a:p>
+            <a:pPr indent="0" marL="0">
+              <a:buNone/>
+            </a:pPr>
+            <a:r>
+              <a:rPr lang="en-US" sz="1250" dirty="0">
+                <a:solidFill>
+                  <a:srgbClr val="17364A"/>
+                </a:solidFill>
+                <a:latin typeface="Aptos" pitchFamily="34" charset="0"/>
+                <a:ea typeface="Aptos" pitchFamily="34" charset="-122"/>
+                <a:cs typeface="Aptos" pitchFamily="34" charset="-120"/>
+              </a:rPr>
+              <a:t>Connect the concept to public health decisions, safeguards, documentation, or implementation work.</a:t>
+            </a:r>
+            <a:endParaRPr lang="en-US" sz="1250" dirty="0"/>
           </a:p>
         </p:txBody>
       </p:sp>
@@ -7213,7 +13204,32 @@
       </p:sp>
       <p:sp>
         <p:nvSpPr>
-          <p:cNvPr id="3" name="Text 1"/>
+          <p:cNvPr id="3" name="Shape 1"/>
+          <p:cNvSpPr/>
+          <p:nvPr/>
+        </p:nvSpPr>
+        <p:spPr>
+          <a:xfrm>
+            <a:off x="0" y="164592"/>
+            <a:ext cx="146304" cy="6693408"/>
+          </a:xfrm>
+          <a:prstGeom prst="rect">
+            <a:avLst/>
+          </a:prstGeom>
+          <a:solidFill>
+            <a:srgbClr val="2F8A28"/>
+          </a:solidFill>
+          <a:ln w="12700">
+            <a:solidFill>
+              <a:srgbClr val="2F8A28"/>
+            </a:solidFill>
+            <a:prstDash val="solid"/>
+          </a:ln>
+        </p:spPr>
+      </p:sp>
+      <p:sp>
+        <p:nvSpPr>
+          <p:cNvPr id="4" name="Text 2"/>
           <p:cNvSpPr/>
           <p:nvPr/>
         </p:nvSpPr>
@@ -7252,7 +13268,7 @@
       </p:sp>
       <p:sp>
         <p:nvSpPr>
-          <p:cNvPr id="4" name="Text 2"/>
+          <p:cNvPr id="5" name="Text 3"/>
           <p:cNvSpPr/>
           <p:nvPr/>
         </p:nvSpPr>
@@ -7291,7 +13307,7 @@
       </p:sp>
       <p:sp>
         <p:nvSpPr>
-          <p:cNvPr id="5" name="Text 3"/>
+          <p:cNvPr id="6" name="Text 4"/>
           <p:cNvSpPr/>
           <p:nvPr/>
         </p:nvSpPr>
@@ -7330,13 +13346,77 @@
       </p:sp>
       <p:sp>
         <p:nvSpPr>
-          <p:cNvPr id="6" name="Text 4"/>
+          <p:cNvPr id="7" name="Shape 5"/>
           <p:cNvSpPr/>
           <p:nvPr/>
         </p:nvSpPr>
         <p:spPr>
           <a:xfrm>
             <a:off x="640080" y="658368"/>
+            <a:ext cx="420624" cy="420624"/>
+          </a:xfrm>
+          <a:prstGeom prst="ellipse">
+            <a:avLst/>
+          </a:prstGeom>
+          <a:solidFill>
+            <a:srgbClr val="0068B7"/>
+          </a:solidFill>
+          <a:ln w="12700">
+            <a:solidFill>
+              <a:srgbClr val="0068B7"/>
+            </a:solidFill>
+            <a:prstDash val="solid"/>
+          </a:ln>
+        </p:spPr>
+      </p:sp>
+      <p:sp>
+        <p:nvSpPr>
+          <p:cNvPr id="8" name="Text 6"/>
+          <p:cNvSpPr/>
+          <p:nvPr/>
+        </p:nvSpPr>
+        <p:spPr>
+          <a:xfrm>
+            <a:off x="640080" y="731520"/>
+            <a:ext cx="420624" cy="164592"/>
+          </a:xfrm>
+          <a:prstGeom prst="rect">
+            <a:avLst/>
+          </a:prstGeom>
+          <a:noFill/>
+          <a:ln/>
+        </p:spPr>
+        <p:txBody>
+          <a:bodyPr wrap="square" lIns="0" tIns="0" rIns="0" bIns="0" rtlCol="0" anchor="ctr"/>
+          <a:lstStyle/>
+          <a:p>
+            <a:pPr algn="ctr" indent="0" marL="0">
+              <a:buNone/>
+            </a:pPr>
+            <a:r>
+              <a:rPr lang="en-US" sz="1100" b="1" dirty="0">
+                <a:solidFill>
+                  <a:srgbClr val="FFFFFF"/>
+                </a:solidFill>
+                <a:latin typeface="Aptos" pitchFamily="34" charset="0"/>
+                <a:ea typeface="Aptos" pitchFamily="34" charset="-122"/>
+                <a:cs typeface="Aptos" pitchFamily="34" charset="-120"/>
+              </a:rPr>
+              <a:t>2</a:t>
+            </a:r>
+            <a:endParaRPr lang="en-US" sz="1100" dirty="0"/>
+          </a:p>
+        </p:txBody>
+      </p:sp>
+      <p:sp>
+        <p:nvSpPr>
+          <p:cNvPr id="9" name="Text 7"/>
+          <p:cNvSpPr/>
+          <p:nvPr/>
+        </p:nvSpPr>
+        <p:spPr>
+          <a:xfrm>
+            <a:off x="640080" y="621792"/>
             <a:ext cx="10881360" cy="566928"/>
           </a:xfrm>
           <a:prstGeom prst="rect">
@@ -7363,7 +13443,7 @@
                 <a:ea typeface="Aptos Display" pitchFamily="34" charset="-122"/>
                 <a:cs typeface="Aptos Display" pitchFamily="34" charset="-120"/>
               </a:rPr>
-              <a:t>Public Health Example</a:t>
+              <a:t>Module Overview</a:t>
             </a:r>
             <a:endParaRPr lang="en-US" sz="2700" dirty="0"/>
           </a:p>
@@ -7371,32 +13451,178 @@
       </p:sp>
       <p:sp>
         <p:nvSpPr>
-          <p:cNvPr id="7" name="Text 5"/>
-          <p:cNvSpPr/>
-          <p:nvPr/>
-        </p:nvSpPr>
-        <p:spPr>
-          <a:xfrm>
-            <a:off x="822960" y="1325880"/>
-            <a:ext cx="10378440" cy="4800600"/>
-          </a:xfrm>
-          <a:prstGeom prst="rect">
-            <a:avLst/>
-          </a:prstGeom>
-          <a:noFill/>
-          <a:ln/>
-        </p:spPr>
-        <p:txBody>
-          <a:bodyPr wrap="square" lIns="1016" tIns="1016" rIns="1016" bIns="1016" rtlCol="0" anchor="t">
+          <p:cNvPr id="10" name="Text 8"/>
+          <p:cNvSpPr/>
+          <p:nvPr/>
+        </p:nvSpPr>
+        <p:spPr>
+          <a:xfrm>
+            <a:off x="868680" y="1417320"/>
+            <a:ext cx="6675120" cy="4434840"/>
+          </a:xfrm>
+          <a:prstGeom prst="rect">
+            <a:avLst/>
+          </a:prstGeom>
+          <a:noFill/>
+          <a:ln/>
+        </p:spPr>
+        <p:txBody>
+          <a:bodyPr wrap="square" lIns="635" tIns="635" rIns="635" bIns="635" rtlCol="0" anchor="t">
             <a:normAutofit/>
           </a:bodyPr>
           <a:lstStyle/>
           <a:p>
+            <a:r>
+              <a:rPr lang="en-US" sz="1700" dirty="0">
+                <a:solidFill>
+                  <a:srgbClr val="17364A"/>
+                </a:solidFill>
+                <a:latin typeface="Aptos" pitchFamily="34" charset="0"/>
+                <a:ea typeface="Aptos" pitchFamily="34" charset="-122"/>
+                <a:cs typeface="Aptos" pitchFamily="34" charset="-120"/>
+              </a:rPr>
+              <a:t>Predictive analytics uses data to estimate the likelihood of future events or outcomes.</a:t>
+            </a:r>
+            <a:endParaRPr lang="en-US" sz="1700" dirty="0"/>
+          </a:p>
+          <a:p>
+            <a:r>
+              <a:rPr lang="en-US" sz="1700" dirty="0">
+                <a:solidFill>
+                  <a:srgbClr val="17364A"/>
+                </a:solidFill>
+                <a:latin typeface="Aptos" pitchFamily="34" charset="0"/>
+                <a:ea typeface="Aptos" pitchFamily="34" charset="-122"/>
+                <a:cs typeface="Aptos" pitchFamily="34" charset="-120"/>
+              </a:rPr>
+              <a:t>In public health, predictive models may be used to anticipate disease burden, identify populations at higher risk,.</a:t>
+            </a:r>
+            <a:endParaRPr lang="en-US" sz="1700" dirty="0"/>
+          </a:p>
+          <a:p>
+            <a:r>
+              <a:rPr lang="en-US" sz="1700" dirty="0">
+                <a:solidFill>
+                  <a:srgbClr val="17364A"/>
+                </a:solidFill>
+                <a:latin typeface="Aptos" pitchFamily="34" charset="0"/>
+                <a:ea typeface="Aptos" pitchFamily="34" charset="-122"/>
+                <a:cs typeface="Aptos" pitchFamily="34" charset="-120"/>
+              </a:rPr>
+              <a:t>Risk stratification is the practice of grouping individuals, facilities, areas, events, or populations into categories.</a:t>
+            </a:r>
+            <a:endParaRPr lang="en-US" sz="1700" dirty="0"/>
+          </a:p>
+          <a:p>
+            <a:r>
+              <a:rPr lang="en-US" sz="1700" dirty="0">
+                <a:solidFill>
+                  <a:srgbClr val="17364A"/>
+                </a:solidFill>
+                <a:latin typeface="Aptos" pitchFamily="34" charset="0"/>
+                <a:ea typeface="Aptos" pitchFamily="34" charset="-122"/>
+                <a:cs typeface="Aptos" pitchFamily="34" charset="-120"/>
+              </a:rPr>
+              <a:t>This module helps learners distinguish prediction from diagnosis, causation, eligibility determination, and public health.</a:t>
+            </a:r>
+            <a:endParaRPr lang="en-US" sz="1700" dirty="0"/>
+          </a:p>
+        </p:txBody>
+      </p:sp>
+      <p:sp>
+        <p:nvSpPr>
+          <p:cNvPr id="11" name="Shape 9"/>
+          <p:cNvSpPr/>
+          <p:nvPr/>
+        </p:nvSpPr>
+        <p:spPr>
+          <a:xfrm>
+            <a:off x="7909560" y="1417320"/>
+            <a:ext cx="3154680" cy="1828800"/>
+          </a:xfrm>
+          <a:prstGeom prst="roundRect">
+            <a:avLst>
+              <a:gd name="adj" fmla="val 6000"/>
+            </a:avLst>
+          </a:prstGeom>
+          <a:solidFill>
+            <a:srgbClr val="EEF8ED"/>
+          </a:solidFill>
+          <a:ln w="12700">
+            <a:solidFill>
+              <a:srgbClr val="B9D7E6"/>
+            </a:solidFill>
+            <a:prstDash val="solid"/>
+          </a:ln>
+        </p:spPr>
+      </p:sp>
+      <p:sp>
+        <p:nvSpPr>
+          <p:cNvPr id="12" name="Text 10"/>
+          <p:cNvSpPr/>
+          <p:nvPr/>
+        </p:nvSpPr>
+        <p:spPr>
+          <a:xfrm>
+            <a:off x="8074152" y="1563624"/>
+            <a:ext cx="2825496" cy="201168"/>
+          </a:xfrm>
+          <a:prstGeom prst="rect">
+            <a:avLst/>
+          </a:prstGeom>
+          <a:noFill/>
+          <a:ln/>
+        </p:spPr>
+        <p:txBody>
+          <a:bodyPr wrap="square" lIns="0" tIns="0" rIns="0" bIns="0" rtlCol="0" anchor="ctr"/>
+          <a:lstStyle/>
+          <a:p>
             <a:pPr indent="0" marL="0">
               <a:buNone/>
             </a:pPr>
             <a:r>
-              <a:rPr lang="en-US" sz="1420" dirty="0">
+              <a:rPr lang="en-US" sz="950" b="1" dirty="0">
+                <a:solidFill>
+                  <a:srgbClr val="0068B7"/>
+                </a:solidFill>
+                <a:latin typeface="Aptos" pitchFamily="34" charset="0"/>
+                <a:ea typeface="Aptos" pitchFamily="34" charset="-122"/>
+                <a:cs typeface="Aptos" pitchFamily="34" charset="-120"/>
+              </a:rPr>
+              <a:t>Key idea</a:t>
+            </a:r>
+            <a:endParaRPr lang="en-US" sz="950" dirty="0"/>
+          </a:p>
+        </p:txBody>
+      </p:sp>
+      <p:sp>
+        <p:nvSpPr>
+          <p:cNvPr id="13" name="Text 11"/>
+          <p:cNvSpPr/>
+          <p:nvPr/>
+        </p:nvSpPr>
+        <p:spPr>
+          <a:xfrm>
+            <a:off x="8074152" y="1856232"/>
+            <a:ext cx="2825496" cy="1261872"/>
+          </a:xfrm>
+          <a:prstGeom prst="rect">
+            <a:avLst/>
+          </a:prstGeom>
+          <a:noFill/>
+          <a:ln/>
+        </p:spPr>
+        <p:txBody>
+          <a:bodyPr wrap="square" lIns="0" tIns="0" rIns="0" bIns="0" rtlCol="0" anchor="t">
+            <a:normAutofit/>
+          </a:bodyPr>
+          <a:lstStyle/>
+          <a:p>
+            <a:pPr indent="0" marL="0">
+              <a:buNone/>
+            </a:pPr>
+            <a:r>
+              <a:rPr lang="en-US" sz="1250" dirty="0">
                 <a:solidFill>
                   <a:srgbClr val="17364A"/>
                 </a:solidFill>
@@ -7404,9 +13630,116 @@
                 <a:ea typeface="Aptos" pitchFamily="34" charset="-122"/>
                 <a:cs typeface="Aptos" pitchFamily="34" charset="-120"/>
               </a:rPr>
-              <a:t>A local health department may want to predict which neighborhoods are at increased risk of low vaccination coverage before school entry. The model could use prior immunization data, school enrollment patterns, appointment availability, language access indicators, transportation barriers, and historical outreach response. The output might help prioritize community outreach and mobile clinics. This use can support equity if it directs resources toward communities facing access barriers. It can create harm if the score stigmatizes neighborhoods, ignores missing data, or shifts responsibility away from system-level barriers. The model should be evaluated for calibration, data completeness, community context, and whether the intervention is supportive and accessible.</a:t>
-            </a:r>
-            <a:endParaRPr lang="en-US" sz="1420" dirty="0"/>
+              <a:t>Predictive analytics uses data to estimate the likelihood of future events or outcomes.</a:t>
+            </a:r>
+            <a:endParaRPr lang="en-US" sz="1250" dirty="0"/>
+          </a:p>
+        </p:txBody>
+      </p:sp>
+      <p:sp>
+        <p:nvSpPr>
+          <p:cNvPr id="14" name="Shape 12"/>
+          <p:cNvSpPr/>
+          <p:nvPr/>
+        </p:nvSpPr>
+        <p:spPr>
+          <a:xfrm>
+            <a:off x="7909560" y="3520440"/>
+            <a:ext cx="3154680" cy="1737360"/>
+          </a:xfrm>
+          <a:prstGeom prst="roundRect">
+            <a:avLst>
+              <a:gd name="adj" fmla="val 6316"/>
+            </a:avLst>
+          </a:prstGeom>
+          <a:solidFill>
+            <a:srgbClr val="EAF6F8"/>
+          </a:solidFill>
+          <a:ln w="12700">
+            <a:solidFill>
+              <a:srgbClr val="B9D7E6"/>
+            </a:solidFill>
+            <a:prstDash val="solid"/>
+          </a:ln>
+        </p:spPr>
+      </p:sp>
+      <p:sp>
+        <p:nvSpPr>
+          <p:cNvPr id="15" name="Text 13"/>
+          <p:cNvSpPr/>
+          <p:nvPr/>
+        </p:nvSpPr>
+        <p:spPr>
+          <a:xfrm>
+            <a:off x="8074152" y="3666744"/>
+            <a:ext cx="2825496" cy="201168"/>
+          </a:xfrm>
+          <a:prstGeom prst="rect">
+            <a:avLst/>
+          </a:prstGeom>
+          <a:noFill/>
+          <a:ln/>
+        </p:spPr>
+        <p:txBody>
+          <a:bodyPr wrap="square" lIns="0" tIns="0" rIns="0" bIns="0" rtlCol="0" anchor="ctr"/>
+          <a:lstStyle/>
+          <a:p>
+            <a:pPr indent="0" marL="0">
+              <a:buNone/>
+            </a:pPr>
+            <a:r>
+              <a:rPr lang="en-US" sz="950" b="1" dirty="0">
+                <a:solidFill>
+                  <a:srgbClr val="0068B7"/>
+                </a:solidFill>
+                <a:latin typeface="Aptos" pitchFamily="34" charset="0"/>
+                <a:ea typeface="Aptos" pitchFamily="34" charset="-122"/>
+                <a:cs typeface="Aptos" pitchFamily="34" charset="-120"/>
+              </a:rPr>
+              <a:t>Use this for</a:t>
+            </a:r>
+            <a:endParaRPr lang="en-US" sz="950" dirty="0"/>
+          </a:p>
+        </p:txBody>
+      </p:sp>
+      <p:sp>
+        <p:nvSpPr>
+          <p:cNvPr id="16" name="Text 14"/>
+          <p:cNvSpPr/>
+          <p:nvPr/>
+        </p:nvSpPr>
+        <p:spPr>
+          <a:xfrm>
+            <a:off x="8074152" y="3959352"/>
+            <a:ext cx="2825496" cy="1170432"/>
+          </a:xfrm>
+          <a:prstGeom prst="rect">
+            <a:avLst/>
+          </a:prstGeom>
+          <a:noFill/>
+          <a:ln/>
+        </p:spPr>
+        <p:txBody>
+          <a:bodyPr wrap="square" lIns="0" tIns="0" rIns="0" bIns="0" rtlCol="0" anchor="t">
+            <a:normAutofit/>
+          </a:bodyPr>
+          <a:lstStyle/>
+          <a:p>
+            <a:pPr indent="0" marL="0">
+              <a:buNone/>
+            </a:pPr>
+            <a:r>
+              <a:rPr lang="en-US" sz="1250" dirty="0">
+                <a:solidFill>
+                  <a:srgbClr val="17364A"/>
+                </a:solidFill>
+                <a:latin typeface="Aptos" pitchFamily="34" charset="0"/>
+                <a:ea typeface="Aptos" pitchFamily="34" charset="-122"/>
+                <a:cs typeface="Aptos" pitchFamily="34" charset="-120"/>
+              </a:rPr>
+              <a:t>Connect the concept to public health decisions, safeguards, documentation, or implementation work.</a:t>
+            </a:r>
+            <a:endParaRPr lang="en-US" sz="1250" dirty="0"/>
           </a:p>
         </p:txBody>
       </p:sp>
@@ -7469,7 +13802,32 @@
       </p:sp>
       <p:sp>
         <p:nvSpPr>
-          <p:cNvPr id="3" name="Text 1"/>
+          <p:cNvPr id="3" name="Shape 1"/>
+          <p:cNvSpPr/>
+          <p:nvPr/>
+        </p:nvSpPr>
+        <p:spPr>
+          <a:xfrm>
+            <a:off x="0" y="164592"/>
+            <a:ext cx="146304" cy="6693408"/>
+          </a:xfrm>
+          <a:prstGeom prst="rect">
+            <a:avLst/>
+          </a:prstGeom>
+          <a:solidFill>
+            <a:srgbClr val="2F8A28"/>
+          </a:solidFill>
+          <a:ln w="12700">
+            <a:solidFill>
+              <a:srgbClr val="2F8A28"/>
+            </a:solidFill>
+            <a:prstDash val="solid"/>
+          </a:ln>
+        </p:spPr>
+      </p:sp>
+      <p:sp>
+        <p:nvSpPr>
+          <p:cNvPr id="4" name="Text 2"/>
           <p:cNvSpPr/>
           <p:nvPr/>
         </p:nvSpPr>
@@ -7508,7 +13866,7 @@
       </p:sp>
       <p:sp>
         <p:nvSpPr>
-          <p:cNvPr id="4" name="Text 2"/>
+          <p:cNvPr id="5" name="Text 3"/>
           <p:cNvSpPr/>
           <p:nvPr/>
         </p:nvSpPr>
@@ -7547,7 +13905,7 @@
       </p:sp>
       <p:sp>
         <p:nvSpPr>
-          <p:cNvPr id="5" name="Text 3"/>
+          <p:cNvPr id="6" name="Text 4"/>
           <p:cNvSpPr/>
           <p:nvPr/>
         </p:nvSpPr>
@@ -7586,13 +13944,77 @@
       </p:sp>
       <p:sp>
         <p:nvSpPr>
-          <p:cNvPr id="6" name="Text 4"/>
+          <p:cNvPr id="7" name="Shape 5"/>
           <p:cNvSpPr/>
           <p:nvPr/>
         </p:nvSpPr>
         <p:spPr>
           <a:xfrm>
             <a:off x="640080" y="658368"/>
+            <a:ext cx="420624" cy="420624"/>
+          </a:xfrm>
+          <a:prstGeom prst="ellipse">
+            <a:avLst/>
+          </a:prstGeom>
+          <a:solidFill>
+            <a:srgbClr val="0068B7"/>
+          </a:solidFill>
+          <a:ln w="12700">
+            <a:solidFill>
+              <a:srgbClr val="0068B7"/>
+            </a:solidFill>
+            <a:prstDash val="solid"/>
+          </a:ln>
+        </p:spPr>
+      </p:sp>
+      <p:sp>
+        <p:nvSpPr>
+          <p:cNvPr id="8" name="Text 6"/>
+          <p:cNvSpPr/>
+          <p:nvPr/>
+        </p:nvSpPr>
+        <p:spPr>
+          <a:xfrm>
+            <a:off x="640080" y="731520"/>
+            <a:ext cx="420624" cy="164592"/>
+          </a:xfrm>
+          <a:prstGeom prst="rect">
+            <a:avLst/>
+          </a:prstGeom>
+          <a:noFill/>
+          <a:ln/>
+        </p:spPr>
+        <p:txBody>
+          <a:bodyPr wrap="square" lIns="0" tIns="0" rIns="0" bIns="0" rtlCol="0" anchor="ctr"/>
+          <a:lstStyle/>
+          <a:p>
+            <a:pPr algn="ctr" indent="0" marL="0">
+              <a:buNone/>
+            </a:pPr>
+            <a:r>
+              <a:rPr lang="en-US" sz="1100" b="1" dirty="0">
+                <a:solidFill>
+                  <a:srgbClr val="FFFFFF"/>
+                </a:solidFill>
+                <a:latin typeface="Aptos" pitchFamily="34" charset="0"/>
+                <a:ea typeface="Aptos" pitchFamily="34" charset="-122"/>
+                <a:cs typeface="Aptos" pitchFamily="34" charset="-120"/>
+              </a:rPr>
+              <a:t>3</a:t>
+            </a:r>
+            <a:endParaRPr lang="en-US" sz="1100" dirty="0"/>
+          </a:p>
+        </p:txBody>
+      </p:sp>
+      <p:sp>
+        <p:nvSpPr>
+          <p:cNvPr id="9" name="Text 7"/>
+          <p:cNvSpPr/>
+          <p:nvPr/>
+        </p:nvSpPr>
+        <p:spPr>
+          <a:xfrm>
+            <a:off x="640080" y="621792"/>
             <a:ext cx="10881360" cy="566928"/>
           </a:xfrm>
           <a:prstGeom prst="rect">
@@ -7619,7 +14041,7 @@
                 <a:ea typeface="Aptos Display" pitchFamily="34" charset="-122"/>
                 <a:cs typeface="Aptos Display" pitchFamily="34" charset="-120"/>
               </a:rPr>
-              <a:t>Technical Deep Dive</a:t>
+              <a:t>Why This Topic Matters for Public Health AI</a:t>
             </a:r>
             <a:endParaRPr lang="en-US" sz="2700" dirty="0"/>
           </a:p>
@@ -7627,32 +14049,178 @@
       </p:sp>
       <p:sp>
         <p:nvSpPr>
-          <p:cNvPr id="7" name="Text 5"/>
-          <p:cNvSpPr/>
-          <p:nvPr/>
-        </p:nvSpPr>
-        <p:spPr>
-          <a:xfrm>
-            <a:off x="822960" y="1325880"/>
-            <a:ext cx="10378440" cy="4800600"/>
-          </a:xfrm>
-          <a:prstGeom prst="rect">
-            <a:avLst/>
-          </a:prstGeom>
-          <a:noFill/>
-          <a:ln/>
-        </p:spPr>
-        <p:txBody>
-          <a:bodyPr wrap="square" lIns="1016" tIns="1016" rIns="1016" bIns="1016" rtlCol="0" anchor="t">
+          <p:cNvPr id="10" name="Text 8"/>
+          <p:cNvSpPr/>
+          <p:nvPr/>
+        </p:nvSpPr>
+        <p:spPr>
+          <a:xfrm>
+            <a:off x="868680" y="1417320"/>
+            <a:ext cx="6675120" cy="4434840"/>
+          </a:xfrm>
+          <a:prstGeom prst="rect">
+            <a:avLst/>
+          </a:prstGeom>
+          <a:noFill/>
+          <a:ln/>
+        </p:spPr>
+        <p:txBody>
+          <a:bodyPr wrap="square" lIns="635" tIns="635" rIns="635" bIns="635" rtlCol="0" anchor="t">
             <a:normAutofit/>
           </a:bodyPr>
           <a:lstStyle/>
           <a:p>
+            <a:r>
+              <a:rPr lang="en-US" sz="1700" dirty="0">
+                <a:solidFill>
+                  <a:srgbClr val="17364A"/>
+                </a:solidFill>
+                <a:latin typeface="Aptos" pitchFamily="34" charset="0"/>
+                <a:ea typeface="Aptos" pitchFamily="34" charset="-122"/>
+                <a:cs typeface="Aptos" pitchFamily="34" charset="-120"/>
+              </a:rPr>
+              <a:t>Predictive analytics matters because public health agencies often must act before all information is available.</a:t>
+            </a:r>
+            <a:endParaRPr lang="en-US" sz="1700" dirty="0"/>
+          </a:p>
+          <a:p>
+            <a:r>
+              <a:rPr lang="en-US" sz="1700" dirty="0">
+                <a:solidFill>
+                  <a:srgbClr val="17364A"/>
+                </a:solidFill>
+                <a:latin typeface="Aptos" pitchFamily="34" charset="0"/>
+                <a:ea typeface="Aptos" pitchFamily="34" charset="-122"/>
+                <a:cs typeface="Aptos" pitchFamily="34" charset="-120"/>
+              </a:rPr>
+              <a:t>During outbreaks, emergencies, or resource-constrained programs, agencies may need to decide where to send staff, which.</a:t>
+            </a:r>
+            <a:endParaRPr lang="en-US" sz="1700" dirty="0"/>
+          </a:p>
+          <a:p>
+            <a:r>
+              <a:rPr lang="en-US" sz="1700" dirty="0">
+                <a:solidFill>
+                  <a:srgbClr val="17364A"/>
+                </a:solidFill>
+                <a:latin typeface="Aptos" pitchFamily="34" charset="0"/>
+                <a:ea typeface="Aptos" pitchFamily="34" charset="-122"/>
+                <a:cs typeface="Aptos" pitchFamily="34" charset="-120"/>
+              </a:rPr>
+              <a:t>Prediction can help organize uncertainty, but it cannot remove uncertainty.</a:t>
+            </a:r>
+            <a:endParaRPr lang="en-US" sz="1700" dirty="0"/>
+          </a:p>
+          <a:p>
+            <a:r>
+              <a:rPr lang="en-US" sz="1700" dirty="0">
+                <a:solidFill>
+                  <a:srgbClr val="17364A"/>
+                </a:solidFill>
+                <a:latin typeface="Aptos" pitchFamily="34" charset="0"/>
+                <a:ea typeface="Aptos" pitchFamily="34" charset="-122"/>
+                <a:cs typeface="Aptos" pitchFamily="34" charset="-120"/>
+              </a:rPr>
+              <a:t>Risk stratification can also create harm if used carelessly.</a:t>
+            </a:r>
+            <a:endParaRPr lang="en-US" sz="1700" dirty="0"/>
+          </a:p>
+        </p:txBody>
+      </p:sp>
+      <p:sp>
+        <p:nvSpPr>
+          <p:cNvPr id="11" name="Shape 9"/>
+          <p:cNvSpPr/>
+          <p:nvPr/>
+        </p:nvSpPr>
+        <p:spPr>
+          <a:xfrm>
+            <a:off x="7909560" y="1417320"/>
+            <a:ext cx="3154680" cy="1828800"/>
+          </a:xfrm>
+          <a:prstGeom prst="roundRect">
+            <a:avLst>
+              <a:gd name="adj" fmla="val 6000"/>
+            </a:avLst>
+          </a:prstGeom>
+          <a:solidFill>
+            <a:srgbClr val="EEF8ED"/>
+          </a:solidFill>
+          <a:ln w="12700">
+            <a:solidFill>
+              <a:srgbClr val="B9D7E6"/>
+            </a:solidFill>
+            <a:prstDash val="solid"/>
+          </a:ln>
+        </p:spPr>
+      </p:sp>
+      <p:sp>
+        <p:nvSpPr>
+          <p:cNvPr id="12" name="Text 10"/>
+          <p:cNvSpPr/>
+          <p:nvPr/>
+        </p:nvSpPr>
+        <p:spPr>
+          <a:xfrm>
+            <a:off x="8074152" y="1563624"/>
+            <a:ext cx="2825496" cy="201168"/>
+          </a:xfrm>
+          <a:prstGeom prst="rect">
+            <a:avLst/>
+          </a:prstGeom>
+          <a:noFill/>
+          <a:ln/>
+        </p:spPr>
+        <p:txBody>
+          <a:bodyPr wrap="square" lIns="0" tIns="0" rIns="0" bIns="0" rtlCol="0" anchor="ctr"/>
+          <a:lstStyle/>
+          <a:p>
             <a:pPr indent="0" marL="0">
               <a:buNone/>
             </a:pPr>
             <a:r>
-              <a:rPr lang="en-US" sz="1420" dirty="0">
+              <a:rPr lang="en-US" sz="950" b="1" dirty="0">
+                <a:solidFill>
+                  <a:srgbClr val="0068B7"/>
+                </a:solidFill>
+                <a:latin typeface="Aptos" pitchFamily="34" charset="0"/>
+                <a:ea typeface="Aptos" pitchFamily="34" charset="-122"/>
+                <a:cs typeface="Aptos" pitchFamily="34" charset="-120"/>
+              </a:rPr>
+              <a:t>Key idea</a:t>
+            </a:r>
+            <a:endParaRPr lang="en-US" sz="950" dirty="0"/>
+          </a:p>
+        </p:txBody>
+      </p:sp>
+      <p:sp>
+        <p:nvSpPr>
+          <p:cNvPr id="13" name="Text 11"/>
+          <p:cNvSpPr/>
+          <p:nvPr/>
+        </p:nvSpPr>
+        <p:spPr>
+          <a:xfrm>
+            <a:off x="8074152" y="1856232"/>
+            <a:ext cx="2825496" cy="1261872"/>
+          </a:xfrm>
+          <a:prstGeom prst="rect">
+            <a:avLst/>
+          </a:prstGeom>
+          <a:noFill/>
+          <a:ln/>
+        </p:spPr>
+        <p:txBody>
+          <a:bodyPr wrap="square" lIns="0" tIns="0" rIns="0" bIns="0" rtlCol="0" anchor="t">
+            <a:normAutofit/>
+          </a:bodyPr>
+          <a:lstStyle/>
+          <a:p>
+            <a:pPr indent="0" marL="0">
+              <a:buNone/>
+            </a:pPr>
+            <a:r>
+              <a:rPr lang="en-US" sz="1250" dirty="0">
                 <a:solidFill>
                   <a:srgbClr val="17364A"/>
                 </a:solidFill>
@@ -7660,9 +14228,116 @@
                 <a:ea typeface="Aptos" pitchFamily="34" charset="-122"/>
                 <a:cs typeface="Aptos" pitchFamily="34" charset="-120"/>
               </a:rPr>
-              <a:t>A predictive workflow begins with the outcome. The outcome must be specific, measurable, and aligned with a public health action. Predicting “risk” is not enough. Staff must define risk of what, during what time period, for which population, and for what purpose. A model predicting hospitalization within 30 days is different from one predicting delayed case investigation or low service uptake. Feature selection should be reviewed for both technical and ethical implications. Some features may improve prediction but create fairness, privacy, or interpretability concerns. Geography, insurance status, prior utilization, language, disability, housing instability, or justice involvement may reflect structural inequities. These features require careful review because they may be useful for supportive outreach but inappropriate for restrictive decisions. Calibration and discrimination answer different questions. Discrimination describes whether a model can separate higher-risk from lower-risk cases. Calibration describes whether predicted probabilities correspond to observed outcomes. A model can rank cases reasonably well while still overstating or understating absolute risk, which matters when decisions depend on risk categories or thresholds.</a:t>
-            </a:r>
-            <a:endParaRPr lang="en-US" sz="1420" dirty="0"/>
+              <a:t>Predictive analytics matters because public health agencies often must act before all information is available.</a:t>
+            </a:r>
+            <a:endParaRPr lang="en-US" sz="1250" dirty="0"/>
+          </a:p>
+        </p:txBody>
+      </p:sp>
+      <p:sp>
+        <p:nvSpPr>
+          <p:cNvPr id="14" name="Shape 12"/>
+          <p:cNvSpPr/>
+          <p:nvPr/>
+        </p:nvSpPr>
+        <p:spPr>
+          <a:xfrm>
+            <a:off x="7909560" y="3520440"/>
+            <a:ext cx="3154680" cy="1737360"/>
+          </a:xfrm>
+          <a:prstGeom prst="roundRect">
+            <a:avLst>
+              <a:gd name="adj" fmla="val 6316"/>
+            </a:avLst>
+          </a:prstGeom>
+          <a:solidFill>
+            <a:srgbClr val="EAF6F8"/>
+          </a:solidFill>
+          <a:ln w="12700">
+            <a:solidFill>
+              <a:srgbClr val="B9D7E6"/>
+            </a:solidFill>
+            <a:prstDash val="solid"/>
+          </a:ln>
+        </p:spPr>
+      </p:sp>
+      <p:sp>
+        <p:nvSpPr>
+          <p:cNvPr id="15" name="Text 13"/>
+          <p:cNvSpPr/>
+          <p:nvPr/>
+        </p:nvSpPr>
+        <p:spPr>
+          <a:xfrm>
+            <a:off x="8074152" y="3666744"/>
+            <a:ext cx="2825496" cy="201168"/>
+          </a:xfrm>
+          <a:prstGeom prst="rect">
+            <a:avLst/>
+          </a:prstGeom>
+          <a:noFill/>
+          <a:ln/>
+        </p:spPr>
+        <p:txBody>
+          <a:bodyPr wrap="square" lIns="0" tIns="0" rIns="0" bIns="0" rtlCol="0" anchor="ctr"/>
+          <a:lstStyle/>
+          <a:p>
+            <a:pPr indent="0" marL="0">
+              <a:buNone/>
+            </a:pPr>
+            <a:r>
+              <a:rPr lang="en-US" sz="950" b="1" dirty="0">
+                <a:solidFill>
+                  <a:srgbClr val="0068B7"/>
+                </a:solidFill>
+                <a:latin typeface="Aptos" pitchFamily="34" charset="0"/>
+                <a:ea typeface="Aptos" pitchFamily="34" charset="-122"/>
+                <a:cs typeface="Aptos" pitchFamily="34" charset="-120"/>
+              </a:rPr>
+              <a:t>Use this for</a:t>
+            </a:r>
+            <a:endParaRPr lang="en-US" sz="950" dirty="0"/>
+          </a:p>
+        </p:txBody>
+      </p:sp>
+      <p:sp>
+        <p:nvSpPr>
+          <p:cNvPr id="16" name="Text 14"/>
+          <p:cNvSpPr/>
+          <p:nvPr/>
+        </p:nvSpPr>
+        <p:spPr>
+          <a:xfrm>
+            <a:off x="8074152" y="3959352"/>
+            <a:ext cx="2825496" cy="1170432"/>
+          </a:xfrm>
+          <a:prstGeom prst="rect">
+            <a:avLst/>
+          </a:prstGeom>
+          <a:noFill/>
+          <a:ln/>
+        </p:spPr>
+        <p:txBody>
+          <a:bodyPr wrap="square" lIns="0" tIns="0" rIns="0" bIns="0" rtlCol="0" anchor="t">
+            <a:normAutofit/>
+          </a:bodyPr>
+          <a:lstStyle/>
+          <a:p>
+            <a:pPr indent="0" marL="0">
+              <a:buNone/>
+            </a:pPr>
+            <a:r>
+              <a:rPr lang="en-US" sz="1250" dirty="0">
+                <a:solidFill>
+                  <a:srgbClr val="17364A"/>
+                </a:solidFill>
+                <a:latin typeface="Aptos" pitchFamily="34" charset="0"/>
+                <a:ea typeface="Aptos" pitchFamily="34" charset="-122"/>
+                <a:cs typeface="Aptos" pitchFamily="34" charset="-120"/>
+              </a:rPr>
+              <a:t>Connect the concept to public health decisions, safeguards, documentation, or implementation work.</a:t>
+            </a:r>
+            <a:endParaRPr lang="en-US" sz="1250" dirty="0"/>
           </a:p>
         </p:txBody>
       </p:sp>
@@ -7725,7 +14400,32 @@
       </p:sp>
       <p:sp>
         <p:nvSpPr>
-          <p:cNvPr id="3" name="Text 1"/>
+          <p:cNvPr id="3" name="Shape 1"/>
+          <p:cNvSpPr/>
+          <p:nvPr/>
+        </p:nvSpPr>
+        <p:spPr>
+          <a:xfrm>
+            <a:off x="0" y="164592"/>
+            <a:ext cx="146304" cy="6693408"/>
+          </a:xfrm>
+          <a:prstGeom prst="rect">
+            <a:avLst/>
+          </a:prstGeom>
+          <a:solidFill>
+            <a:srgbClr val="2F8A28"/>
+          </a:solidFill>
+          <a:ln w="12700">
+            <a:solidFill>
+              <a:srgbClr val="2F8A28"/>
+            </a:solidFill>
+            <a:prstDash val="solid"/>
+          </a:ln>
+        </p:spPr>
+      </p:sp>
+      <p:sp>
+        <p:nvSpPr>
+          <p:cNvPr id="4" name="Text 2"/>
           <p:cNvSpPr/>
           <p:nvPr/>
         </p:nvSpPr>
@@ -7764,7 +14464,7 @@
       </p:sp>
       <p:sp>
         <p:nvSpPr>
-          <p:cNvPr id="4" name="Text 2"/>
+          <p:cNvPr id="5" name="Text 3"/>
           <p:cNvSpPr/>
           <p:nvPr/>
         </p:nvSpPr>
@@ -7803,7 +14503,7 @@
       </p:sp>
       <p:sp>
         <p:nvSpPr>
-          <p:cNvPr id="5" name="Text 3"/>
+          <p:cNvPr id="6" name="Text 4"/>
           <p:cNvSpPr/>
           <p:nvPr/>
         </p:nvSpPr>
@@ -7842,13 +14542,77 @@
       </p:sp>
       <p:sp>
         <p:nvSpPr>
-          <p:cNvPr id="6" name="Text 4"/>
+          <p:cNvPr id="7" name="Shape 5"/>
           <p:cNvSpPr/>
           <p:nvPr/>
         </p:nvSpPr>
         <p:spPr>
           <a:xfrm>
             <a:off x="640080" y="658368"/>
+            <a:ext cx="420624" cy="420624"/>
+          </a:xfrm>
+          <a:prstGeom prst="ellipse">
+            <a:avLst/>
+          </a:prstGeom>
+          <a:solidFill>
+            <a:srgbClr val="0068B7"/>
+          </a:solidFill>
+          <a:ln w="12700">
+            <a:solidFill>
+              <a:srgbClr val="0068B7"/>
+            </a:solidFill>
+            <a:prstDash val="solid"/>
+          </a:ln>
+        </p:spPr>
+      </p:sp>
+      <p:sp>
+        <p:nvSpPr>
+          <p:cNvPr id="8" name="Text 6"/>
+          <p:cNvSpPr/>
+          <p:nvPr/>
+        </p:nvSpPr>
+        <p:spPr>
+          <a:xfrm>
+            <a:off x="640080" y="731520"/>
+            <a:ext cx="420624" cy="164592"/>
+          </a:xfrm>
+          <a:prstGeom prst="rect">
+            <a:avLst/>
+          </a:prstGeom>
+          <a:noFill/>
+          <a:ln/>
+        </p:spPr>
+        <p:txBody>
+          <a:bodyPr wrap="square" lIns="0" tIns="0" rIns="0" bIns="0" rtlCol="0" anchor="ctr"/>
+          <a:lstStyle/>
+          <a:p>
+            <a:pPr algn="ctr" indent="0" marL="0">
+              <a:buNone/>
+            </a:pPr>
+            <a:r>
+              <a:rPr lang="en-US" sz="1100" b="1" dirty="0">
+                <a:solidFill>
+                  <a:srgbClr val="FFFFFF"/>
+                </a:solidFill>
+                <a:latin typeface="Aptos" pitchFamily="34" charset="0"/>
+                <a:ea typeface="Aptos" pitchFamily="34" charset="-122"/>
+                <a:cs typeface="Aptos" pitchFamily="34" charset="-120"/>
+              </a:rPr>
+              <a:t>4</a:t>
+            </a:r>
+            <a:endParaRPr lang="en-US" sz="1100" dirty="0"/>
+          </a:p>
+        </p:txBody>
+      </p:sp>
+      <p:sp>
+        <p:nvSpPr>
+          <p:cNvPr id="9" name="Text 7"/>
+          <p:cNvSpPr/>
+          <p:nvPr/>
+        </p:nvSpPr>
+        <p:spPr>
+          <a:xfrm>
+            <a:off x="640080" y="621792"/>
             <a:ext cx="10881360" cy="566928"/>
           </a:xfrm>
           <a:prstGeom prst="rect">
@@ -7875,7 +14639,7 @@
                 <a:ea typeface="Aptos Display" pitchFamily="34" charset="-122"/>
                 <a:cs typeface="Aptos Display" pitchFamily="34" charset="-120"/>
               </a:rPr>
-              <a:t>Technical Deep Dive Continued</a:t>
+              <a:t>Public Health Example</a:t>
             </a:r>
             <a:endParaRPr lang="en-US" sz="2700" dirty="0"/>
           </a:p>
@@ -7883,32 +14647,178 @@
       </p:sp>
       <p:sp>
         <p:nvSpPr>
-          <p:cNvPr id="7" name="Text 5"/>
-          <p:cNvSpPr/>
-          <p:nvPr/>
-        </p:nvSpPr>
-        <p:spPr>
-          <a:xfrm>
-            <a:off x="822960" y="1325880"/>
-            <a:ext cx="10378440" cy="4800600"/>
-          </a:xfrm>
-          <a:prstGeom prst="rect">
-            <a:avLst/>
-          </a:prstGeom>
-          <a:noFill/>
-          <a:ln/>
-        </p:spPr>
-        <p:txBody>
-          <a:bodyPr wrap="square" lIns="1016" tIns="1016" rIns="1016" bIns="1016" rtlCol="0" anchor="t">
+          <p:cNvPr id="10" name="Text 8"/>
+          <p:cNvSpPr/>
+          <p:nvPr/>
+        </p:nvSpPr>
+        <p:spPr>
+          <a:xfrm>
+            <a:off x="868680" y="1417320"/>
+            <a:ext cx="6675120" cy="4434840"/>
+          </a:xfrm>
+          <a:prstGeom prst="rect">
+            <a:avLst/>
+          </a:prstGeom>
+          <a:noFill/>
+          <a:ln/>
+        </p:spPr>
+        <p:txBody>
+          <a:bodyPr wrap="square" lIns="635" tIns="635" rIns="635" bIns="635" rtlCol="0" anchor="t">
             <a:normAutofit/>
           </a:bodyPr>
           <a:lstStyle/>
           <a:p>
+            <a:r>
+              <a:rPr lang="en-US" sz="1700" dirty="0">
+                <a:solidFill>
+                  <a:srgbClr val="17364A"/>
+                </a:solidFill>
+                <a:latin typeface="Aptos" pitchFamily="34" charset="0"/>
+                <a:ea typeface="Aptos" pitchFamily="34" charset="-122"/>
+                <a:cs typeface="Aptos" pitchFamily="34" charset="-120"/>
+              </a:rPr>
+              <a:t>A local health department may want to predict which neighborhoods are at increased risk of low vaccination coverage before.</a:t>
+            </a:r>
+            <a:endParaRPr lang="en-US" sz="1700" dirty="0"/>
+          </a:p>
+          <a:p>
+            <a:r>
+              <a:rPr lang="en-US" sz="1700" dirty="0">
+                <a:solidFill>
+                  <a:srgbClr val="17364A"/>
+                </a:solidFill>
+                <a:latin typeface="Aptos" pitchFamily="34" charset="0"/>
+                <a:ea typeface="Aptos" pitchFamily="34" charset="-122"/>
+                <a:cs typeface="Aptos" pitchFamily="34" charset="-120"/>
+              </a:rPr>
+              <a:t>The model could use prior immunization data, school enrollment patterns, appointment availability, language access.</a:t>
+            </a:r>
+            <a:endParaRPr lang="en-US" sz="1700" dirty="0"/>
+          </a:p>
+          <a:p>
+            <a:r>
+              <a:rPr lang="en-US" sz="1700" dirty="0">
+                <a:solidFill>
+                  <a:srgbClr val="17364A"/>
+                </a:solidFill>
+                <a:latin typeface="Aptos" pitchFamily="34" charset="0"/>
+                <a:ea typeface="Aptos" pitchFamily="34" charset="-122"/>
+                <a:cs typeface="Aptos" pitchFamily="34" charset="-120"/>
+              </a:rPr>
+              <a:t>The output might help prioritize community outreach and mobile clinics.</a:t>
+            </a:r>
+            <a:endParaRPr lang="en-US" sz="1700" dirty="0"/>
+          </a:p>
+          <a:p>
+            <a:r>
+              <a:rPr lang="en-US" sz="1700" dirty="0">
+                <a:solidFill>
+                  <a:srgbClr val="17364A"/>
+                </a:solidFill>
+                <a:latin typeface="Aptos" pitchFamily="34" charset="0"/>
+                <a:ea typeface="Aptos" pitchFamily="34" charset="-122"/>
+                <a:cs typeface="Aptos" pitchFamily="34" charset="-120"/>
+              </a:rPr>
+              <a:t>This use can support equity if it directs resources toward communities facing access barriers.</a:t>
+            </a:r>
+            <a:endParaRPr lang="en-US" sz="1700" dirty="0"/>
+          </a:p>
+        </p:txBody>
+      </p:sp>
+      <p:sp>
+        <p:nvSpPr>
+          <p:cNvPr id="11" name="Shape 9"/>
+          <p:cNvSpPr/>
+          <p:nvPr/>
+        </p:nvSpPr>
+        <p:spPr>
+          <a:xfrm>
+            <a:off x="7909560" y="1417320"/>
+            <a:ext cx="3154680" cy="1828800"/>
+          </a:xfrm>
+          <a:prstGeom prst="roundRect">
+            <a:avLst>
+              <a:gd name="adj" fmla="val 6000"/>
+            </a:avLst>
+          </a:prstGeom>
+          <a:solidFill>
+            <a:srgbClr val="EEF8ED"/>
+          </a:solidFill>
+          <a:ln w="12700">
+            <a:solidFill>
+              <a:srgbClr val="B9D7E6"/>
+            </a:solidFill>
+            <a:prstDash val="solid"/>
+          </a:ln>
+        </p:spPr>
+      </p:sp>
+      <p:sp>
+        <p:nvSpPr>
+          <p:cNvPr id="12" name="Text 10"/>
+          <p:cNvSpPr/>
+          <p:nvPr/>
+        </p:nvSpPr>
+        <p:spPr>
+          <a:xfrm>
+            <a:off x="8074152" y="1563624"/>
+            <a:ext cx="2825496" cy="201168"/>
+          </a:xfrm>
+          <a:prstGeom prst="rect">
+            <a:avLst/>
+          </a:prstGeom>
+          <a:noFill/>
+          <a:ln/>
+        </p:spPr>
+        <p:txBody>
+          <a:bodyPr wrap="square" lIns="0" tIns="0" rIns="0" bIns="0" rtlCol="0" anchor="ctr"/>
+          <a:lstStyle/>
+          <a:p>
             <a:pPr indent="0" marL="0">
               <a:buNone/>
             </a:pPr>
             <a:r>
-              <a:rPr lang="en-US" sz="1420" dirty="0">
+              <a:rPr lang="en-US" sz="950" b="1" dirty="0">
+                <a:solidFill>
+                  <a:srgbClr val="0068B7"/>
+                </a:solidFill>
+                <a:latin typeface="Aptos" pitchFamily="34" charset="0"/>
+                <a:ea typeface="Aptos" pitchFamily="34" charset="-122"/>
+                <a:cs typeface="Aptos" pitchFamily="34" charset="-120"/>
+              </a:rPr>
+              <a:t>Key idea</a:t>
+            </a:r>
+            <a:endParaRPr lang="en-US" sz="950" dirty="0"/>
+          </a:p>
+        </p:txBody>
+      </p:sp>
+      <p:sp>
+        <p:nvSpPr>
+          <p:cNvPr id="13" name="Text 11"/>
+          <p:cNvSpPr/>
+          <p:nvPr/>
+        </p:nvSpPr>
+        <p:spPr>
+          <a:xfrm>
+            <a:off x="8074152" y="1856232"/>
+            <a:ext cx="2825496" cy="1261872"/>
+          </a:xfrm>
+          <a:prstGeom prst="rect">
+            <a:avLst/>
+          </a:prstGeom>
+          <a:noFill/>
+          <a:ln/>
+        </p:spPr>
+        <p:txBody>
+          <a:bodyPr wrap="square" lIns="0" tIns="0" rIns="0" bIns="0" rtlCol="0" anchor="t">
+            <a:normAutofit/>
+          </a:bodyPr>
+          <a:lstStyle/>
+          <a:p>
+            <a:pPr indent="0" marL="0">
+              <a:buNone/>
+            </a:pPr>
+            <a:r>
+              <a:rPr lang="en-US" sz="1250" dirty="0">
                 <a:solidFill>
                   <a:srgbClr val="17364A"/>
                 </a:solidFill>
@@ -7916,9 +14826,116 @@
                 <a:ea typeface="Aptos" pitchFamily="34" charset="-122"/>
                 <a:cs typeface="Aptos" pitchFamily="34" charset="-120"/>
               </a:rPr>
-              <a:t>Thresholds are policy and workflow decisions as much as technical decisions. A lower threshold may catch more true high-risk cases but create more false positives and burden staff. A higher threshold may conserve resources but miss people or places needing support. Threshold selection should consider staffing capacity, consequence severity, equity, and the availability of human review. Post-deployment monitoring is essential. A model that worked during development may degrade as disease patterns, reporting systems, access to care, community behavior, or program operations change. Monitoring should include performance, calibration, subgroup effects, workflow impact, user overrides, and community feedback.</a:t>
-            </a:r>
-            <a:endParaRPr lang="en-US" sz="1420" dirty="0"/>
+              <a:t>A local health department may want to predict which neighborhoods are at increased risk of low vaccination coverage before.</a:t>
+            </a:r>
+            <a:endParaRPr lang="en-US" sz="1250" dirty="0"/>
+          </a:p>
+        </p:txBody>
+      </p:sp>
+      <p:sp>
+        <p:nvSpPr>
+          <p:cNvPr id="14" name="Shape 12"/>
+          <p:cNvSpPr/>
+          <p:nvPr/>
+        </p:nvSpPr>
+        <p:spPr>
+          <a:xfrm>
+            <a:off x="7909560" y="3520440"/>
+            <a:ext cx="3154680" cy="1737360"/>
+          </a:xfrm>
+          <a:prstGeom prst="roundRect">
+            <a:avLst>
+              <a:gd name="adj" fmla="val 6316"/>
+            </a:avLst>
+          </a:prstGeom>
+          <a:solidFill>
+            <a:srgbClr val="EAF6F8"/>
+          </a:solidFill>
+          <a:ln w="12700">
+            <a:solidFill>
+              <a:srgbClr val="B9D7E6"/>
+            </a:solidFill>
+            <a:prstDash val="solid"/>
+          </a:ln>
+        </p:spPr>
+      </p:sp>
+      <p:sp>
+        <p:nvSpPr>
+          <p:cNvPr id="15" name="Text 13"/>
+          <p:cNvSpPr/>
+          <p:nvPr/>
+        </p:nvSpPr>
+        <p:spPr>
+          <a:xfrm>
+            <a:off x="8074152" y="3666744"/>
+            <a:ext cx="2825496" cy="201168"/>
+          </a:xfrm>
+          <a:prstGeom prst="rect">
+            <a:avLst/>
+          </a:prstGeom>
+          <a:noFill/>
+          <a:ln/>
+        </p:spPr>
+        <p:txBody>
+          <a:bodyPr wrap="square" lIns="0" tIns="0" rIns="0" bIns="0" rtlCol="0" anchor="ctr"/>
+          <a:lstStyle/>
+          <a:p>
+            <a:pPr indent="0" marL="0">
+              <a:buNone/>
+            </a:pPr>
+            <a:r>
+              <a:rPr lang="en-US" sz="950" b="1" dirty="0">
+                <a:solidFill>
+                  <a:srgbClr val="0068B7"/>
+                </a:solidFill>
+                <a:latin typeface="Aptos" pitchFamily="34" charset="0"/>
+                <a:ea typeface="Aptos" pitchFamily="34" charset="-122"/>
+                <a:cs typeface="Aptos" pitchFamily="34" charset="-120"/>
+              </a:rPr>
+              <a:t>Use this for</a:t>
+            </a:r>
+            <a:endParaRPr lang="en-US" sz="950" dirty="0"/>
+          </a:p>
+        </p:txBody>
+      </p:sp>
+      <p:sp>
+        <p:nvSpPr>
+          <p:cNvPr id="16" name="Text 14"/>
+          <p:cNvSpPr/>
+          <p:nvPr/>
+        </p:nvSpPr>
+        <p:spPr>
+          <a:xfrm>
+            <a:off x="8074152" y="3959352"/>
+            <a:ext cx="2825496" cy="1170432"/>
+          </a:xfrm>
+          <a:prstGeom prst="rect">
+            <a:avLst/>
+          </a:prstGeom>
+          <a:noFill/>
+          <a:ln/>
+        </p:spPr>
+        <p:txBody>
+          <a:bodyPr wrap="square" lIns="0" tIns="0" rIns="0" bIns="0" rtlCol="0" anchor="t">
+            <a:normAutofit/>
+          </a:bodyPr>
+          <a:lstStyle/>
+          <a:p>
+            <a:pPr indent="0" marL="0">
+              <a:buNone/>
+            </a:pPr>
+            <a:r>
+              <a:rPr lang="en-US" sz="1250" dirty="0">
+                <a:solidFill>
+                  <a:srgbClr val="17364A"/>
+                </a:solidFill>
+                <a:latin typeface="Aptos" pitchFamily="34" charset="0"/>
+                <a:ea typeface="Aptos" pitchFamily="34" charset="-122"/>
+                <a:cs typeface="Aptos" pitchFamily="34" charset="-120"/>
+              </a:rPr>
+              <a:t>Connect the concept to public health decisions, safeguards, documentation, or implementation work.</a:t>
+            </a:r>
+            <a:endParaRPr lang="en-US" sz="1250" dirty="0"/>
           </a:p>
         </p:txBody>
       </p:sp>

--- a/downloads/presentations/modules/lesson-04-predictive-analytics-and-risk-stratification.pptx
+++ b/downloads/presentations/modules/lesson-04-predictive-analytics-and-risk-stratification.pptx
@@ -2999,6 +2999,45 @@
           </a:p>
         </p:txBody>
       </p:sp>
+      <p:sp>
+        <p:nvSpPr>
+          <p:cNvPr id="8" name="Text 5"/>
+          <p:cNvSpPr/>
+          <p:nvPr/>
+        </p:nvSpPr>
+        <p:spPr>
+          <a:xfrm>
+            <a:off x="11137392" y="6510528"/>
+            <a:ext cx="411480" cy="201168"/>
+          </a:xfrm>
+          <a:prstGeom prst="rect">
+            <a:avLst/>
+          </a:prstGeom>
+          <a:noFill/>
+          <a:ln/>
+        </p:spPr>
+        <p:txBody>
+          <a:bodyPr wrap="square" lIns="0" tIns="0" rIns="0" bIns="0" rtlCol="0" anchor="ctr"/>
+          <a:lstStyle/>
+          <a:p>
+            <a:pPr algn="r" indent="0" marL="0">
+              <a:buNone/>
+            </a:pPr>
+            <a:r>
+              <a:rPr lang="en-US" sz="900" dirty="0">
+                <a:solidFill>
+                  <a:srgbClr val="5F7181"/>
+                </a:solidFill>
+                <a:latin typeface="Aptos" pitchFamily="34" charset="0"/>
+                <a:ea typeface="Aptos" pitchFamily="34" charset="-122"/>
+                <a:cs typeface="Aptos" pitchFamily="34" charset="-120"/>
+              </a:rPr>
+              <a:t>1</a:t>
+            </a:r>
+            <a:endParaRPr lang="en-US" sz="900" dirty="0"/>
+          </a:p>
+        </p:txBody>
+      </p:sp>
     </p:spTree>
   </p:cSld>
   <p:clrMapOvr>
@@ -3192,7 +3231,7 @@
                 <a:ea typeface="Aptos" pitchFamily="34" charset="-122"/>
                 <a:cs typeface="Aptos" pitchFamily="34" charset="-120"/>
               </a:rPr>
-              <a:t>© Paula Soper</a:t>
+              <a:t>Â© Paula Soper</a:t>
             </a:r>
             <a:endParaRPr lang="en-US" sz="800" dirty="0"/>
           </a:p>
@@ -3200,7 +3239,46 @@
       </p:sp>
       <p:sp>
         <p:nvSpPr>
-          <p:cNvPr id="7" name="Shape 5"/>
+          <p:cNvPr id="7" name="Text 5"/>
+          <p:cNvSpPr/>
+          <p:nvPr/>
+        </p:nvSpPr>
+        <p:spPr>
+          <a:xfrm>
+            <a:off x="11137392" y="6510528"/>
+            <a:ext cx="411480" cy="201168"/>
+          </a:xfrm>
+          <a:prstGeom prst="rect">
+            <a:avLst/>
+          </a:prstGeom>
+          <a:noFill/>
+          <a:ln/>
+        </p:spPr>
+        <p:txBody>
+          <a:bodyPr wrap="square" lIns="0" tIns="0" rIns="0" bIns="0" rtlCol="0" anchor="ctr"/>
+          <a:lstStyle/>
+          <a:p>
+            <a:pPr algn="r" indent="0" marL="0">
+              <a:buNone/>
+            </a:pPr>
+            <a:r>
+              <a:rPr lang="en-US" sz="900" dirty="0">
+                <a:solidFill>
+                  <a:srgbClr val="5F7181"/>
+                </a:solidFill>
+                <a:latin typeface="Aptos" pitchFamily="34" charset="0"/>
+                <a:ea typeface="Aptos" pitchFamily="34" charset="-122"/>
+                <a:cs typeface="Aptos" pitchFamily="34" charset="-120"/>
+              </a:rPr>
+              <a:t>10</a:t>
+            </a:r>
+            <a:endParaRPr lang="en-US" sz="900" dirty="0"/>
+          </a:p>
+        </p:txBody>
+      </p:sp>
+      <p:sp>
+        <p:nvSpPr>
+          <p:cNvPr id="8" name="Shape 6"/>
           <p:cNvSpPr/>
           <p:nvPr/>
         </p:nvSpPr>
@@ -3225,7 +3303,7 @@
       </p:sp>
       <p:sp>
         <p:nvSpPr>
-          <p:cNvPr id="8" name="Text 6"/>
+          <p:cNvPr id="9" name="Text 7"/>
           <p:cNvSpPr/>
           <p:nvPr/>
         </p:nvSpPr>
@@ -3264,14 +3342,14 @@
       </p:sp>
       <p:sp>
         <p:nvSpPr>
-          <p:cNvPr id="9" name="Text 7"/>
+          <p:cNvPr id="10" name="Text 8"/>
           <p:cNvSpPr/>
           <p:nvPr/>
         </p:nvSpPr>
         <p:spPr>
           <a:xfrm>
             <a:off x="640080" y="621792"/>
-            <a:ext cx="10881360" cy="566928"/>
+            <a:ext cx="10881360" cy="713232"/>
           </a:xfrm>
           <a:prstGeom prst="rect">
             <a:avLst/>
@@ -3289,7 +3367,7 @@
               <a:buNone/>
             </a:pPr>
             <a:r>
-              <a:rPr lang="en-US" sz="2700" b="1" dirty="0">
+              <a:rPr lang="en-US" sz="3400" b="1" dirty="0">
                 <a:solidFill>
                   <a:srgbClr val="003A63"/>
                 </a:solidFill>
@@ -3299,20 +3377,20 @@
               </a:rPr>
               <a:t>Technical Deep Dive</a:t>
             </a:r>
-            <a:endParaRPr lang="en-US" sz="2700" dirty="0"/>
-          </a:p>
-        </p:txBody>
-      </p:sp>
-      <p:sp>
-        <p:nvSpPr>
-          <p:cNvPr id="10" name="Text 8"/>
-          <p:cNvSpPr/>
-          <p:nvPr/>
-        </p:nvSpPr>
-        <p:spPr>
-          <a:xfrm>
-            <a:off x="868680" y="1417320"/>
-            <a:ext cx="6675120" cy="4434840"/>
+            <a:endParaRPr lang="en-US" sz="3400" dirty="0"/>
+          </a:p>
+        </p:txBody>
+      </p:sp>
+      <p:sp>
+        <p:nvSpPr>
+          <p:cNvPr id="11" name="Text 9"/>
+          <p:cNvSpPr/>
+          <p:nvPr/>
+        </p:nvSpPr>
+        <p:spPr>
+          <a:xfrm>
+            <a:off x="868680" y="1508760"/>
+            <a:ext cx="6537960" cy="4160520"/>
           </a:xfrm>
           <a:prstGeom prst="rect">
             <a:avLst/>
@@ -3327,7 +3405,7 @@
           <a:lstStyle/>
           <a:p>
             <a:r>
-              <a:rPr lang="en-US" sz="1700" dirty="0">
+              <a:rPr lang="en-US" sz="2100" dirty="0">
                 <a:solidFill>
                   <a:srgbClr val="17364A"/>
                 </a:solidFill>
@@ -3337,11 +3415,11 @@
               </a:rPr>
               <a:t>A predictive workflow begins with the outcome.</a:t>
             </a:r>
-            <a:endParaRPr lang="en-US" sz="1700" dirty="0"/>
-          </a:p>
-          <a:p>
-            <a:r>
-              <a:rPr lang="en-US" sz="1700" dirty="0">
+            <a:endParaRPr lang="en-US" sz="2100" dirty="0"/>
+          </a:p>
+          <a:p>
+            <a:r>
+              <a:rPr lang="en-US" sz="2100" dirty="0">
                 <a:solidFill>
                   <a:srgbClr val="17364A"/>
                 </a:solidFill>
@@ -3351,11 +3429,11 @@
               </a:rPr>
               <a:t>The outcome must be specific, measurable, and aligned with a public health action.</a:t>
             </a:r>
-            <a:endParaRPr lang="en-US" sz="1700" dirty="0"/>
-          </a:p>
-          <a:p>
-            <a:r>
-              <a:rPr lang="en-US" sz="1700" dirty="0">
+            <a:endParaRPr lang="en-US" sz="2100" dirty="0"/>
+          </a:p>
+          <a:p>
+            <a:r>
+              <a:rPr lang="en-US" sz="2100" dirty="0">
                 <a:solidFill>
                   <a:srgbClr val="17364A"/>
                 </a:solidFill>
@@ -3365,27 +3443,13 @@
               </a:rPr>
               <a:t>Predicting “risk” is not enough.</a:t>
             </a:r>
-            <a:endParaRPr lang="en-US" sz="1700" dirty="0"/>
-          </a:p>
-          <a:p>
-            <a:r>
-              <a:rPr lang="en-US" sz="1700" dirty="0">
-                <a:solidFill>
-                  <a:srgbClr val="17364A"/>
-                </a:solidFill>
-                <a:latin typeface="Aptos" pitchFamily="34" charset="0"/>
-                <a:ea typeface="Aptos" pitchFamily="34" charset="-122"/>
-                <a:cs typeface="Aptos" pitchFamily="34" charset="-120"/>
-              </a:rPr>
-              <a:t>Staff must define risk of what, during what time period, for which population, and for what purpose.</a:t>
-            </a:r>
-            <a:endParaRPr lang="en-US" sz="1700" dirty="0"/>
-          </a:p>
-        </p:txBody>
-      </p:sp>
-      <p:sp>
-        <p:nvSpPr>
-          <p:cNvPr id="11" name="Shape 9"/>
+            <a:endParaRPr lang="en-US" sz="2100" dirty="0"/>
+          </a:p>
+        </p:txBody>
+      </p:sp>
+      <p:sp>
+        <p:nvSpPr>
+          <p:cNvPr id="12" name="Shape 10"/>
           <p:cNvSpPr/>
           <p:nvPr/>
         </p:nvSpPr>
@@ -3412,14 +3476,14 @@
       </p:sp>
       <p:sp>
         <p:nvSpPr>
-          <p:cNvPr id="12" name="Text 10"/>
+          <p:cNvPr id="13" name="Text 11"/>
           <p:cNvSpPr/>
           <p:nvPr/>
         </p:nvSpPr>
         <p:spPr>
           <a:xfrm>
             <a:off x="8074152" y="1563624"/>
-            <a:ext cx="2825496" cy="201168"/>
+            <a:ext cx="2825496" cy="256032"/>
           </a:xfrm>
           <a:prstGeom prst="rect">
             <a:avLst/>
@@ -3435,7 +3499,7 @@
               <a:buNone/>
             </a:pPr>
             <a:r>
-              <a:rPr lang="en-US" sz="950" b="1" dirty="0">
+              <a:rPr lang="en-US" sz="1300" b="1" dirty="0">
                 <a:solidFill>
                   <a:srgbClr val="0068B7"/>
                 </a:solidFill>
@@ -3445,20 +3509,20 @@
               </a:rPr>
               <a:t>Key idea</a:t>
             </a:r>
-            <a:endParaRPr lang="en-US" sz="950" dirty="0"/>
-          </a:p>
-        </p:txBody>
-      </p:sp>
-      <p:sp>
-        <p:nvSpPr>
-          <p:cNvPr id="13" name="Text 11"/>
-          <p:cNvSpPr/>
-          <p:nvPr/>
-        </p:nvSpPr>
-        <p:spPr>
-          <a:xfrm>
-            <a:off x="8074152" y="1856232"/>
-            <a:ext cx="2825496" cy="1261872"/>
+            <a:endParaRPr lang="en-US" sz="1300" dirty="0"/>
+          </a:p>
+        </p:txBody>
+      </p:sp>
+      <p:sp>
+        <p:nvSpPr>
+          <p:cNvPr id="14" name="Text 12"/>
+          <p:cNvSpPr/>
+          <p:nvPr/>
+        </p:nvSpPr>
+        <p:spPr>
+          <a:xfrm>
+            <a:off x="8074152" y="1920240"/>
+            <a:ext cx="2825496" cy="1188720"/>
           </a:xfrm>
           <a:prstGeom prst="rect">
             <a:avLst/>
@@ -3476,7 +3540,7 @@
               <a:buNone/>
             </a:pPr>
             <a:r>
-              <a:rPr lang="en-US" sz="1250" dirty="0">
+              <a:rPr lang="en-US" sz="1550" dirty="0">
                 <a:solidFill>
                   <a:srgbClr val="17364A"/>
                 </a:solidFill>
@@ -3486,13 +3550,13 @@
               </a:rPr>
               <a:t>A predictive workflow begins with the outcome.</a:t>
             </a:r>
-            <a:endParaRPr lang="en-US" sz="1250" dirty="0"/>
-          </a:p>
-        </p:txBody>
-      </p:sp>
-      <p:sp>
-        <p:nvSpPr>
-          <p:cNvPr id="14" name="Shape 12"/>
+            <a:endParaRPr lang="en-US" sz="1550" dirty="0"/>
+          </a:p>
+        </p:txBody>
+      </p:sp>
+      <p:sp>
+        <p:nvSpPr>
+          <p:cNvPr id="15" name="Shape 13"/>
           <p:cNvSpPr/>
           <p:nvPr/>
         </p:nvSpPr>
@@ -3519,14 +3583,14 @@
       </p:sp>
       <p:sp>
         <p:nvSpPr>
-          <p:cNvPr id="15" name="Text 13"/>
+          <p:cNvPr id="16" name="Text 14"/>
           <p:cNvSpPr/>
           <p:nvPr/>
         </p:nvSpPr>
         <p:spPr>
           <a:xfrm>
             <a:off x="8074152" y="3666744"/>
-            <a:ext cx="2825496" cy="201168"/>
+            <a:ext cx="2825496" cy="256032"/>
           </a:xfrm>
           <a:prstGeom prst="rect">
             <a:avLst/>
@@ -3542,7 +3606,7 @@
               <a:buNone/>
             </a:pPr>
             <a:r>
-              <a:rPr lang="en-US" sz="950" b="1" dirty="0">
+              <a:rPr lang="en-US" sz="1300" b="1" dirty="0">
                 <a:solidFill>
                   <a:srgbClr val="0068B7"/>
                 </a:solidFill>
@@ -3552,20 +3616,20 @@
               </a:rPr>
               <a:t>Use this for</a:t>
             </a:r>
-            <a:endParaRPr lang="en-US" sz="950" dirty="0"/>
-          </a:p>
-        </p:txBody>
-      </p:sp>
-      <p:sp>
-        <p:nvSpPr>
-          <p:cNvPr id="16" name="Text 14"/>
-          <p:cNvSpPr/>
-          <p:nvPr/>
-        </p:nvSpPr>
-        <p:spPr>
-          <a:xfrm>
-            <a:off x="8074152" y="3959352"/>
-            <a:ext cx="2825496" cy="1170432"/>
+            <a:endParaRPr lang="en-US" sz="1300" dirty="0"/>
+          </a:p>
+        </p:txBody>
+      </p:sp>
+      <p:sp>
+        <p:nvSpPr>
+          <p:cNvPr id="17" name="Text 15"/>
+          <p:cNvSpPr/>
+          <p:nvPr/>
+        </p:nvSpPr>
+        <p:spPr>
+          <a:xfrm>
+            <a:off x="8074152" y="4023360"/>
+            <a:ext cx="2825496" cy="1097280"/>
           </a:xfrm>
           <a:prstGeom prst="rect">
             <a:avLst/>
@@ -3583,7 +3647,7 @@
               <a:buNone/>
             </a:pPr>
             <a:r>
-              <a:rPr lang="en-US" sz="1250" dirty="0">
+              <a:rPr lang="en-US" sz="1550" dirty="0">
                 <a:solidFill>
                   <a:srgbClr val="17364A"/>
                 </a:solidFill>
@@ -3593,7 +3657,7 @@
               </a:rPr>
               <a:t>Connect the concept to public health decisions, safeguards, documentation, or implementation work.</a:t>
             </a:r>
-            <a:endParaRPr lang="en-US" sz="1250" dirty="0"/>
+            <a:endParaRPr lang="en-US" sz="1550" dirty="0"/>
           </a:p>
         </p:txBody>
       </p:sp>
@@ -3790,7 +3854,7 @@
                 <a:ea typeface="Aptos" pitchFamily="34" charset="-122"/>
                 <a:cs typeface="Aptos" pitchFamily="34" charset="-120"/>
               </a:rPr>
-              <a:t>© Paula Soper</a:t>
+              <a:t>Â© Paula Soper</a:t>
             </a:r>
             <a:endParaRPr lang="en-US" sz="800" dirty="0"/>
           </a:p>
@@ -3804,8 +3868,47 @@
         </p:nvSpPr>
         <p:spPr>
           <a:xfrm>
+            <a:off x="11137392" y="6510528"/>
+            <a:ext cx="411480" cy="201168"/>
+          </a:xfrm>
+          <a:prstGeom prst="rect">
+            <a:avLst/>
+          </a:prstGeom>
+          <a:noFill/>
+          <a:ln/>
+        </p:spPr>
+        <p:txBody>
+          <a:bodyPr wrap="square" lIns="0" tIns="0" rIns="0" bIns="0" rtlCol="0" anchor="ctr"/>
+          <a:lstStyle/>
+          <a:p>
+            <a:pPr algn="r" indent="0" marL="0">
+              <a:buNone/>
+            </a:pPr>
+            <a:r>
+              <a:rPr lang="en-US" sz="900" dirty="0">
+                <a:solidFill>
+                  <a:srgbClr val="5F7181"/>
+                </a:solidFill>
+                <a:latin typeface="Aptos" pitchFamily="34" charset="0"/>
+                <a:ea typeface="Aptos" pitchFamily="34" charset="-122"/>
+                <a:cs typeface="Aptos" pitchFamily="34" charset="-120"/>
+              </a:rPr>
+              <a:t>11</a:t>
+            </a:r>
+            <a:endParaRPr lang="en-US" sz="900" dirty="0"/>
+          </a:p>
+        </p:txBody>
+      </p:sp>
+      <p:sp>
+        <p:nvSpPr>
+          <p:cNvPr id="8" name="Text 6"/>
+          <p:cNvSpPr/>
+          <p:nvPr/>
+        </p:nvSpPr>
+        <p:spPr>
+          <a:xfrm>
             <a:off x="640080" y="658368"/>
-            <a:ext cx="10881360" cy="566928"/>
+            <a:ext cx="10881360" cy="713232"/>
           </a:xfrm>
           <a:prstGeom prst="rect">
             <a:avLst/>
@@ -3823,7 +3926,7 @@
               <a:buNone/>
             </a:pPr>
             <a:r>
-              <a:rPr lang="en-US" sz="2700" b="1" dirty="0">
+              <a:rPr lang="en-US" sz="3400" b="1" dirty="0">
                 <a:solidFill>
                   <a:srgbClr val="003A63"/>
                 </a:solidFill>
@@ -3833,20 +3936,20 @@
               </a:rPr>
               <a:t>Technical Deep Dive Continued</a:t>
             </a:r>
-            <a:endParaRPr lang="en-US" sz="2700" dirty="0"/>
-          </a:p>
-        </p:txBody>
-      </p:sp>
-      <p:sp>
-        <p:nvSpPr>
-          <p:cNvPr id="8" name="Text 6"/>
-          <p:cNvSpPr/>
-          <p:nvPr/>
-        </p:nvSpPr>
-        <p:spPr>
-          <a:xfrm>
-            <a:off x="868680" y="1417320"/>
-            <a:ext cx="6675120" cy="4434840"/>
+            <a:endParaRPr lang="en-US" sz="3400" dirty="0"/>
+          </a:p>
+        </p:txBody>
+      </p:sp>
+      <p:sp>
+        <p:nvSpPr>
+          <p:cNvPr id="9" name="Text 7"/>
+          <p:cNvSpPr/>
+          <p:nvPr/>
+        </p:nvSpPr>
+        <p:spPr>
+          <a:xfrm>
+            <a:off x="868680" y="1508760"/>
+            <a:ext cx="6537960" cy="4160520"/>
           </a:xfrm>
           <a:prstGeom prst="rect">
             <a:avLst/>
@@ -3861,7 +3964,7 @@
           <a:lstStyle/>
           <a:p>
             <a:r>
-              <a:rPr lang="en-US" sz="1700" dirty="0">
+              <a:rPr lang="en-US" sz="2100" dirty="0">
                 <a:solidFill>
                   <a:srgbClr val="17364A"/>
                 </a:solidFill>
@@ -3871,11 +3974,11 @@
               </a:rPr>
               <a:t>Thresholds are policy and workflow decisions as much as technical decisions.</a:t>
             </a:r>
-            <a:endParaRPr lang="en-US" sz="1700" dirty="0"/>
-          </a:p>
-          <a:p>
-            <a:r>
-              <a:rPr lang="en-US" sz="1700" dirty="0">
+            <a:endParaRPr lang="en-US" sz="2100" dirty="0"/>
+          </a:p>
+          <a:p>
+            <a:r>
+              <a:rPr lang="en-US" sz="2100" dirty="0">
                 <a:solidFill>
                   <a:srgbClr val="17364A"/>
                 </a:solidFill>
@@ -3885,11 +3988,11 @@
               </a:rPr>
               <a:t>A lower threshold may catch more true high-risk cases but create more false positives and burden staff.</a:t>
             </a:r>
-            <a:endParaRPr lang="en-US" sz="1700" dirty="0"/>
-          </a:p>
-          <a:p>
-            <a:r>
-              <a:rPr lang="en-US" sz="1700" dirty="0">
+            <a:endParaRPr lang="en-US" sz="2100" dirty="0"/>
+          </a:p>
+          <a:p>
+            <a:r>
+              <a:rPr lang="en-US" sz="2100" dirty="0">
                 <a:solidFill>
                   <a:srgbClr val="17364A"/>
                 </a:solidFill>
@@ -3899,27 +4002,13 @@
               </a:rPr>
               <a:t>A higher threshold may conserve resources but miss people or places needing support.</a:t>
             </a:r>
-            <a:endParaRPr lang="en-US" sz="1700" dirty="0"/>
-          </a:p>
-          <a:p>
-            <a:r>
-              <a:rPr lang="en-US" sz="1700" dirty="0">
-                <a:solidFill>
-                  <a:srgbClr val="17364A"/>
-                </a:solidFill>
-                <a:latin typeface="Aptos" pitchFamily="34" charset="0"/>
-                <a:ea typeface="Aptos" pitchFamily="34" charset="-122"/>
-                <a:cs typeface="Aptos" pitchFamily="34" charset="-120"/>
-              </a:rPr>
-              <a:t>Threshold selection should consider staffing capacity, consequence severity, equity, and the availability of human review.</a:t>
-            </a:r>
-            <a:endParaRPr lang="en-US" sz="1700" dirty="0"/>
-          </a:p>
-        </p:txBody>
-      </p:sp>
-      <p:sp>
-        <p:nvSpPr>
-          <p:cNvPr id="9" name="Shape 7"/>
+            <a:endParaRPr lang="en-US" sz="2100" dirty="0"/>
+          </a:p>
+        </p:txBody>
+      </p:sp>
+      <p:sp>
+        <p:nvSpPr>
+          <p:cNvPr id="10" name="Shape 8"/>
           <p:cNvSpPr/>
           <p:nvPr/>
         </p:nvSpPr>
@@ -3946,14 +4035,14 @@
       </p:sp>
       <p:sp>
         <p:nvSpPr>
-          <p:cNvPr id="10" name="Text 8"/>
+          <p:cNvPr id="11" name="Text 9"/>
           <p:cNvSpPr/>
           <p:nvPr/>
         </p:nvSpPr>
         <p:spPr>
           <a:xfrm>
             <a:off x="8074152" y="1563624"/>
-            <a:ext cx="2825496" cy="201168"/>
+            <a:ext cx="2825496" cy="256032"/>
           </a:xfrm>
           <a:prstGeom prst="rect">
             <a:avLst/>
@@ -3969,7 +4058,7 @@
               <a:buNone/>
             </a:pPr>
             <a:r>
-              <a:rPr lang="en-US" sz="950" b="1" dirty="0">
+              <a:rPr lang="en-US" sz="1300" b="1" dirty="0">
                 <a:solidFill>
                   <a:srgbClr val="0068B7"/>
                 </a:solidFill>
@@ -3979,20 +4068,20 @@
               </a:rPr>
               <a:t>Key idea</a:t>
             </a:r>
-            <a:endParaRPr lang="en-US" sz="950" dirty="0"/>
-          </a:p>
-        </p:txBody>
-      </p:sp>
-      <p:sp>
-        <p:nvSpPr>
-          <p:cNvPr id="11" name="Text 9"/>
-          <p:cNvSpPr/>
-          <p:nvPr/>
-        </p:nvSpPr>
-        <p:spPr>
-          <a:xfrm>
-            <a:off x="8074152" y="1856232"/>
-            <a:ext cx="2825496" cy="1261872"/>
+            <a:endParaRPr lang="en-US" sz="1300" dirty="0"/>
+          </a:p>
+        </p:txBody>
+      </p:sp>
+      <p:sp>
+        <p:nvSpPr>
+          <p:cNvPr id="12" name="Text 10"/>
+          <p:cNvSpPr/>
+          <p:nvPr/>
+        </p:nvSpPr>
+        <p:spPr>
+          <a:xfrm>
+            <a:off x="8074152" y="1920240"/>
+            <a:ext cx="2825496" cy="1188720"/>
           </a:xfrm>
           <a:prstGeom prst="rect">
             <a:avLst/>
@@ -4010,7 +4099,7 @@
               <a:buNone/>
             </a:pPr>
             <a:r>
-              <a:rPr lang="en-US" sz="1250" dirty="0">
+              <a:rPr lang="en-US" sz="1550" dirty="0">
                 <a:solidFill>
                   <a:srgbClr val="17364A"/>
                 </a:solidFill>
@@ -4020,13 +4109,13 @@
               </a:rPr>
               <a:t>Thresholds are policy and workflow decisions as much as technical decisions.</a:t>
             </a:r>
-            <a:endParaRPr lang="en-US" sz="1250" dirty="0"/>
-          </a:p>
-        </p:txBody>
-      </p:sp>
-      <p:sp>
-        <p:nvSpPr>
-          <p:cNvPr id="12" name="Shape 10"/>
+            <a:endParaRPr lang="en-US" sz="1550" dirty="0"/>
+          </a:p>
+        </p:txBody>
+      </p:sp>
+      <p:sp>
+        <p:nvSpPr>
+          <p:cNvPr id="13" name="Shape 11"/>
           <p:cNvSpPr/>
           <p:nvPr/>
         </p:nvSpPr>
@@ -4053,14 +4142,14 @@
       </p:sp>
       <p:sp>
         <p:nvSpPr>
-          <p:cNvPr id="13" name="Text 11"/>
+          <p:cNvPr id="14" name="Text 12"/>
           <p:cNvSpPr/>
           <p:nvPr/>
         </p:nvSpPr>
         <p:spPr>
           <a:xfrm>
             <a:off x="8074152" y="3666744"/>
-            <a:ext cx="2825496" cy="201168"/>
+            <a:ext cx="2825496" cy="256032"/>
           </a:xfrm>
           <a:prstGeom prst="rect">
             <a:avLst/>
@@ -4076,7 +4165,7 @@
               <a:buNone/>
             </a:pPr>
             <a:r>
-              <a:rPr lang="en-US" sz="950" b="1" dirty="0">
+              <a:rPr lang="en-US" sz="1300" b="1" dirty="0">
                 <a:solidFill>
                   <a:srgbClr val="0068B7"/>
                 </a:solidFill>
@@ -4086,20 +4175,20 @@
               </a:rPr>
               <a:t>Use this for</a:t>
             </a:r>
-            <a:endParaRPr lang="en-US" sz="950" dirty="0"/>
-          </a:p>
-        </p:txBody>
-      </p:sp>
-      <p:sp>
-        <p:nvSpPr>
-          <p:cNvPr id="14" name="Text 12"/>
-          <p:cNvSpPr/>
-          <p:nvPr/>
-        </p:nvSpPr>
-        <p:spPr>
-          <a:xfrm>
-            <a:off x="8074152" y="3959352"/>
-            <a:ext cx="2825496" cy="1170432"/>
+            <a:endParaRPr lang="en-US" sz="1300" dirty="0"/>
+          </a:p>
+        </p:txBody>
+      </p:sp>
+      <p:sp>
+        <p:nvSpPr>
+          <p:cNvPr id="15" name="Text 13"/>
+          <p:cNvSpPr/>
+          <p:nvPr/>
+        </p:nvSpPr>
+        <p:spPr>
+          <a:xfrm>
+            <a:off x="8074152" y="4023360"/>
+            <a:ext cx="2825496" cy="1097280"/>
           </a:xfrm>
           <a:prstGeom prst="rect">
             <a:avLst/>
@@ -4117,7 +4206,7 @@
               <a:buNone/>
             </a:pPr>
             <a:r>
-              <a:rPr lang="en-US" sz="1250" dirty="0">
+              <a:rPr lang="en-US" sz="1550" dirty="0">
                 <a:solidFill>
                   <a:srgbClr val="17364A"/>
                 </a:solidFill>
@@ -4127,7 +4216,7 @@
               </a:rPr>
               <a:t>Connect the concept to public health decisions, safeguards, documentation, or implementation work.</a:t>
             </a:r>
-            <a:endParaRPr lang="en-US" sz="1250" dirty="0"/>
+            <a:endParaRPr lang="en-US" sz="1550" dirty="0"/>
           </a:p>
         </p:txBody>
       </p:sp>
@@ -4324,7 +4413,7 @@
                 <a:ea typeface="Aptos" pitchFamily="34" charset="-122"/>
                 <a:cs typeface="Aptos" pitchFamily="34" charset="-120"/>
               </a:rPr>
-              <a:t>© Paula Soper</a:t>
+              <a:t>Â© Paula Soper</a:t>
             </a:r>
             <a:endParaRPr lang="en-US" sz="800" dirty="0"/>
           </a:p>
@@ -4332,7 +4421,46 @@
       </p:sp>
       <p:sp>
         <p:nvSpPr>
-          <p:cNvPr id="7" name="Shape 5"/>
+          <p:cNvPr id="7" name="Text 5"/>
+          <p:cNvSpPr/>
+          <p:nvPr/>
+        </p:nvSpPr>
+        <p:spPr>
+          <a:xfrm>
+            <a:off x="11137392" y="6510528"/>
+            <a:ext cx="411480" cy="201168"/>
+          </a:xfrm>
+          <a:prstGeom prst="rect">
+            <a:avLst/>
+          </a:prstGeom>
+          <a:noFill/>
+          <a:ln/>
+        </p:spPr>
+        <p:txBody>
+          <a:bodyPr wrap="square" lIns="0" tIns="0" rIns="0" bIns="0" rtlCol="0" anchor="ctr"/>
+          <a:lstStyle/>
+          <a:p>
+            <a:pPr algn="r" indent="0" marL="0">
+              <a:buNone/>
+            </a:pPr>
+            <a:r>
+              <a:rPr lang="en-US" sz="900" dirty="0">
+                <a:solidFill>
+                  <a:srgbClr val="5F7181"/>
+                </a:solidFill>
+                <a:latin typeface="Aptos" pitchFamily="34" charset="0"/>
+                <a:ea typeface="Aptos" pitchFamily="34" charset="-122"/>
+                <a:cs typeface="Aptos" pitchFamily="34" charset="-120"/>
+              </a:rPr>
+              <a:t>12</a:t>
+            </a:r>
+            <a:endParaRPr lang="en-US" sz="900" dirty="0"/>
+          </a:p>
+        </p:txBody>
+      </p:sp>
+      <p:sp>
+        <p:nvSpPr>
+          <p:cNvPr id="8" name="Shape 6"/>
           <p:cNvSpPr/>
           <p:nvPr/>
         </p:nvSpPr>
@@ -4357,7 +4485,7 @@
       </p:sp>
       <p:sp>
         <p:nvSpPr>
-          <p:cNvPr id="8" name="Text 6"/>
+          <p:cNvPr id="9" name="Text 7"/>
           <p:cNvSpPr/>
           <p:nvPr/>
         </p:nvSpPr>
@@ -4396,14 +4524,14 @@
       </p:sp>
       <p:sp>
         <p:nvSpPr>
-          <p:cNvPr id="9" name="Text 7"/>
+          <p:cNvPr id="10" name="Text 8"/>
           <p:cNvSpPr/>
           <p:nvPr/>
         </p:nvSpPr>
         <p:spPr>
           <a:xfrm>
             <a:off x="640080" y="621792"/>
-            <a:ext cx="10881360" cy="566928"/>
+            <a:ext cx="10881360" cy="713232"/>
           </a:xfrm>
           <a:prstGeom prst="rect">
             <a:avLst/>
@@ -4421,7 +4549,7 @@
               <a:buNone/>
             </a:pPr>
             <a:r>
-              <a:rPr lang="en-US" sz="2700" b="1" dirty="0">
+              <a:rPr lang="en-US" sz="3400" b="1" dirty="0">
                 <a:solidFill>
                   <a:srgbClr val="003A63"/>
                 </a:solidFill>
@@ -4431,20 +4559,20 @@
               </a:rPr>
               <a:t>Risks, Failure Modes, and Guardrails</a:t>
             </a:r>
-            <a:endParaRPr lang="en-US" sz="2700" dirty="0"/>
-          </a:p>
-        </p:txBody>
-      </p:sp>
-      <p:sp>
-        <p:nvSpPr>
-          <p:cNvPr id="10" name="Text 8"/>
-          <p:cNvSpPr/>
-          <p:nvPr/>
-        </p:nvSpPr>
-        <p:spPr>
-          <a:xfrm>
-            <a:off x="868680" y="1417320"/>
-            <a:ext cx="6675120" cy="4434840"/>
+            <a:endParaRPr lang="en-US" sz="3400" dirty="0"/>
+          </a:p>
+        </p:txBody>
+      </p:sp>
+      <p:sp>
+        <p:nvSpPr>
+          <p:cNvPr id="11" name="Text 9"/>
+          <p:cNvSpPr/>
+          <p:nvPr/>
+        </p:nvSpPr>
+        <p:spPr>
+          <a:xfrm>
+            <a:off x="868680" y="1508760"/>
+            <a:ext cx="6537960" cy="4160520"/>
           </a:xfrm>
           <a:prstGeom prst="rect">
             <a:avLst/>
@@ -4459,7 +4587,7 @@
           <a:lstStyle/>
           <a:p>
             <a:r>
-              <a:rPr lang="en-US" sz="1700" dirty="0">
+              <a:rPr lang="en-US" sz="2100" dirty="0">
                 <a:solidFill>
                   <a:srgbClr val="17364A"/>
                 </a:solidFill>
@@ -4469,11 +4597,11 @@
               </a:rPr>
               <a:t>Prediction used as decision.</a:t>
             </a:r>
-            <a:endParaRPr lang="en-US" sz="1700" dirty="0"/>
-          </a:p>
-          <a:p>
-            <a:r>
-              <a:rPr lang="en-US" sz="1700" dirty="0">
+            <a:endParaRPr lang="en-US" sz="2100" dirty="0"/>
+          </a:p>
+          <a:p>
+            <a:r>
+              <a:rPr lang="en-US" sz="2100" dirty="0">
                 <a:solidFill>
                   <a:srgbClr val="17364A"/>
                 </a:solidFill>
@@ -4483,11 +4611,11 @@
               </a:rPr>
               <a:t>A risk score may be treated as a final decision rather than decision support.</a:t>
             </a:r>
-            <a:endParaRPr lang="en-US" sz="1700" dirty="0"/>
-          </a:p>
-          <a:p>
-            <a:r>
-              <a:rPr lang="en-US" sz="1700" dirty="0">
+            <a:endParaRPr lang="en-US" sz="2100" dirty="0"/>
+          </a:p>
+          <a:p>
+            <a:r>
+              <a:rPr lang="en-US" sz="2100" dirty="0">
                 <a:solidFill>
                   <a:srgbClr val="17364A"/>
                 </a:solidFill>
@@ -4497,27 +4625,13 @@
               </a:rPr>
               <a:t>Guardrails include role-based guidance, human review, and documentation of final decisions.</a:t>
             </a:r>
-            <a:endParaRPr lang="en-US" sz="1700" dirty="0"/>
-          </a:p>
-          <a:p>
-            <a:r>
-              <a:rPr lang="en-US" sz="1700" dirty="0">
-                <a:solidFill>
-                  <a:srgbClr val="17364A"/>
-                </a:solidFill>
-                <a:latin typeface="Aptos" pitchFamily="34" charset="0"/>
-                <a:ea typeface="Aptos" pitchFamily="34" charset="-122"/>
-                <a:cs typeface="Aptos" pitchFamily="34" charset="-120"/>
-              </a:rPr>
-              <a:t>Equity distortion.</a:t>
-            </a:r>
-            <a:endParaRPr lang="en-US" sz="1700" dirty="0"/>
-          </a:p>
-        </p:txBody>
-      </p:sp>
-      <p:sp>
-        <p:nvSpPr>
-          <p:cNvPr id="11" name="Shape 9"/>
+            <a:endParaRPr lang="en-US" sz="2100" dirty="0"/>
+          </a:p>
+        </p:txBody>
+      </p:sp>
+      <p:sp>
+        <p:nvSpPr>
+          <p:cNvPr id="12" name="Shape 10"/>
           <p:cNvSpPr/>
           <p:nvPr/>
         </p:nvSpPr>
@@ -4544,14 +4658,14 @@
       </p:sp>
       <p:sp>
         <p:nvSpPr>
-          <p:cNvPr id="12" name="Text 10"/>
+          <p:cNvPr id="13" name="Text 11"/>
           <p:cNvSpPr/>
           <p:nvPr/>
         </p:nvSpPr>
         <p:spPr>
           <a:xfrm>
             <a:off x="8074152" y="1563624"/>
-            <a:ext cx="2825496" cy="201168"/>
+            <a:ext cx="2825496" cy="256032"/>
           </a:xfrm>
           <a:prstGeom prst="rect">
             <a:avLst/>
@@ -4567,7 +4681,7 @@
               <a:buNone/>
             </a:pPr>
             <a:r>
-              <a:rPr lang="en-US" sz="950" b="1" dirty="0">
+              <a:rPr lang="en-US" sz="1300" b="1" dirty="0">
                 <a:solidFill>
                   <a:srgbClr val="0068B7"/>
                 </a:solidFill>
@@ -4577,20 +4691,20 @@
               </a:rPr>
               <a:t>Key idea</a:t>
             </a:r>
-            <a:endParaRPr lang="en-US" sz="950" dirty="0"/>
-          </a:p>
-        </p:txBody>
-      </p:sp>
-      <p:sp>
-        <p:nvSpPr>
-          <p:cNvPr id="13" name="Text 11"/>
-          <p:cNvSpPr/>
-          <p:nvPr/>
-        </p:nvSpPr>
-        <p:spPr>
-          <a:xfrm>
-            <a:off x="8074152" y="1856232"/>
-            <a:ext cx="2825496" cy="1261872"/>
+            <a:endParaRPr lang="en-US" sz="1300" dirty="0"/>
+          </a:p>
+        </p:txBody>
+      </p:sp>
+      <p:sp>
+        <p:nvSpPr>
+          <p:cNvPr id="14" name="Text 12"/>
+          <p:cNvSpPr/>
+          <p:nvPr/>
+        </p:nvSpPr>
+        <p:spPr>
+          <a:xfrm>
+            <a:off x="8074152" y="1920240"/>
+            <a:ext cx="2825496" cy="1188720"/>
           </a:xfrm>
           <a:prstGeom prst="rect">
             <a:avLst/>
@@ -4608,7 +4722,7 @@
               <a:buNone/>
             </a:pPr>
             <a:r>
-              <a:rPr lang="en-US" sz="1250" dirty="0">
+              <a:rPr lang="en-US" sz="1550" dirty="0">
                 <a:solidFill>
                   <a:srgbClr val="17364A"/>
                 </a:solidFill>
@@ -4618,13 +4732,13 @@
               </a:rPr>
               <a:t>Prediction used as decision.</a:t>
             </a:r>
-            <a:endParaRPr lang="en-US" sz="1250" dirty="0"/>
-          </a:p>
-        </p:txBody>
-      </p:sp>
-      <p:sp>
-        <p:nvSpPr>
-          <p:cNvPr id="14" name="Shape 12"/>
+            <a:endParaRPr lang="en-US" sz="1550" dirty="0"/>
+          </a:p>
+        </p:txBody>
+      </p:sp>
+      <p:sp>
+        <p:nvSpPr>
+          <p:cNvPr id="15" name="Shape 13"/>
           <p:cNvSpPr/>
           <p:nvPr/>
         </p:nvSpPr>
@@ -4651,14 +4765,14 @@
       </p:sp>
       <p:sp>
         <p:nvSpPr>
-          <p:cNvPr id="15" name="Text 13"/>
+          <p:cNvPr id="16" name="Text 14"/>
           <p:cNvSpPr/>
           <p:nvPr/>
         </p:nvSpPr>
         <p:spPr>
           <a:xfrm>
             <a:off x="8074152" y="3666744"/>
-            <a:ext cx="2825496" cy="201168"/>
+            <a:ext cx="2825496" cy="256032"/>
           </a:xfrm>
           <a:prstGeom prst="rect">
             <a:avLst/>
@@ -4674,7 +4788,7 @@
               <a:buNone/>
             </a:pPr>
             <a:r>
-              <a:rPr lang="en-US" sz="950" b="1" dirty="0">
+              <a:rPr lang="en-US" sz="1300" b="1" dirty="0">
                 <a:solidFill>
                   <a:srgbClr val="0068B7"/>
                 </a:solidFill>
@@ -4684,20 +4798,20 @@
               </a:rPr>
               <a:t>Use this for</a:t>
             </a:r>
-            <a:endParaRPr lang="en-US" sz="950" dirty="0"/>
-          </a:p>
-        </p:txBody>
-      </p:sp>
-      <p:sp>
-        <p:nvSpPr>
-          <p:cNvPr id="16" name="Text 14"/>
-          <p:cNvSpPr/>
-          <p:nvPr/>
-        </p:nvSpPr>
-        <p:spPr>
-          <a:xfrm>
-            <a:off x="8074152" y="3959352"/>
-            <a:ext cx="2825496" cy="1170432"/>
+            <a:endParaRPr lang="en-US" sz="1300" dirty="0"/>
+          </a:p>
+        </p:txBody>
+      </p:sp>
+      <p:sp>
+        <p:nvSpPr>
+          <p:cNvPr id="17" name="Text 15"/>
+          <p:cNvSpPr/>
+          <p:nvPr/>
+        </p:nvSpPr>
+        <p:spPr>
+          <a:xfrm>
+            <a:off x="8074152" y="4023360"/>
+            <a:ext cx="2825496" cy="1097280"/>
           </a:xfrm>
           <a:prstGeom prst="rect">
             <a:avLst/>
@@ -4715,7 +4829,7 @@
               <a:buNone/>
             </a:pPr>
             <a:r>
-              <a:rPr lang="en-US" sz="1250" dirty="0">
+              <a:rPr lang="en-US" sz="1550" dirty="0">
                 <a:solidFill>
                   <a:srgbClr val="17364A"/>
                 </a:solidFill>
@@ -4725,7 +4839,7 @@
               </a:rPr>
               <a:t>Connect the concept to public health decisions, safeguards, documentation, or implementation work.</a:t>
             </a:r>
-            <a:endParaRPr lang="en-US" sz="1250" dirty="0"/>
+            <a:endParaRPr lang="en-US" sz="1550" dirty="0"/>
           </a:p>
         </p:txBody>
       </p:sp>
@@ -4922,7 +5036,7 @@
                 <a:ea typeface="Aptos" pitchFamily="34" charset="-122"/>
                 <a:cs typeface="Aptos" pitchFamily="34" charset="-120"/>
               </a:rPr>
-              <a:t>© Paula Soper</a:t>
+              <a:t>Â© Paula Soper</a:t>
             </a:r>
             <a:endParaRPr lang="en-US" sz="800" dirty="0"/>
           </a:p>
@@ -4936,8 +5050,47 @@
         </p:nvSpPr>
         <p:spPr>
           <a:xfrm>
+            <a:off x="11137392" y="6510528"/>
+            <a:ext cx="411480" cy="201168"/>
+          </a:xfrm>
+          <a:prstGeom prst="rect">
+            <a:avLst/>
+          </a:prstGeom>
+          <a:noFill/>
+          <a:ln/>
+        </p:spPr>
+        <p:txBody>
+          <a:bodyPr wrap="square" lIns="0" tIns="0" rIns="0" bIns="0" rtlCol="0" anchor="ctr"/>
+          <a:lstStyle/>
+          <a:p>
+            <a:pPr algn="r" indent="0" marL="0">
+              <a:buNone/>
+            </a:pPr>
+            <a:r>
+              <a:rPr lang="en-US" sz="900" dirty="0">
+                <a:solidFill>
+                  <a:srgbClr val="5F7181"/>
+                </a:solidFill>
+                <a:latin typeface="Aptos" pitchFamily="34" charset="0"/>
+                <a:ea typeface="Aptos" pitchFamily="34" charset="-122"/>
+                <a:cs typeface="Aptos" pitchFamily="34" charset="-120"/>
+              </a:rPr>
+              <a:t>13</a:t>
+            </a:r>
+            <a:endParaRPr lang="en-US" sz="900" dirty="0"/>
+          </a:p>
+        </p:txBody>
+      </p:sp>
+      <p:sp>
+        <p:nvSpPr>
+          <p:cNvPr id="8" name="Text 6"/>
+          <p:cNvSpPr/>
+          <p:nvPr/>
+        </p:nvSpPr>
+        <p:spPr>
+          <a:xfrm>
             <a:off x="640080" y="658368"/>
-            <a:ext cx="10881360" cy="566928"/>
+            <a:ext cx="10881360" cy="713232"/>
           </a:xfrm>
           <a:prstGeom prst="rect">
             <a:avLst/>
@@ -4955,7 +5108,7 @@
               <a:buNone/>
             </a:pPr>
             <a:r>
-              <a:rPr lang="en-US" sz="2700" b="1" dirty="0">
+              <a:rPr lang="en-US" sz="3400" b="1" dirty="0">
                 <a:solidFill>
                   <a:srgbClr val="003A63"/>
                 </a:solidFill>
@@ -4965,20 +5118,20 @@
               </a:rPr>
               <a:t>Risks, Failure Modes, and Guardrails Continued</a:t>
             </a:r>
-            <a:endParaRPr lang="en-US" sz="2700" dirty="0"/>
-          </a:p>
-        </p:txBody>
-      </p:sp>
-      <p:sp>
-        <p:nvSpPr>
-          <p:cNvPr id="8" name="Text 6"/>
-          <p:cNvSpPr/>
-          <p:nvPr/>
-        </p:nvSpPr>
-        <p:spPr>
-          <a:xfrm>
-            <a:off x="868680" y="1417320"/>
-            <a:ext cx="6675120" cy="4434840"/>
+            <a:endParaRPr lang="en-US" sz="3400" dirty="0"/>
+          </a:p>
+        </p:txBody>
+      </p:sp>
+      <p:sp>
+        <p:nvSpPr>
+          <p:cNvPr id="9" name="Text 7"/>
+          <p:cNvSpPr/>
+          <p:nvPr/>
+        </p:nvSpPr>
+        <p:spPr>
+          <a:xfrm>
+            <a:off x="868680" y="1508760"/>
+            <a:ext cx="6537960" cy="4160520"/>
           </a:xfrm>
           <a:prstGeom prst="rect">
             <a:avLst/>
@@ -4993,7 +5146,7 @@
           <a:lstStyle/>
           <a:p>
             <a:r>
-              <a:rPr lang="en-US" sz="1700" dirty="0">
+              <a:rPr lang="en-US" sz="2100" dirty="0">
                 <a:solidFill>
                   <a:srgbClr val="17364A"/>
                 </a:solidFill>
@@ -5003,11 +5156,11 @@
               </a:rPr>
               <a:t>Model drift.</a:t>
             </a:r>
-            <a:endParaRPr lang="en-US" sz="1700" dirty="0"/>
-          </a:p>
-          <a:p>
-            <a:r>
-              <a:rPr lang="en-US" sz="1700" dirty="0">
+            <a:endParaRPr lang="en-US" sz="2100" dirty="0"/>
+          </a:p>
+          <a:p>
+            <a:r>
+              <a:rPr lang="en-US" sz="2100" dirty="0">
                 <a:solidFill>
                   <a:srgbClr val="17364A"/>
                 </a:solidFill>
@@ -5017,11 +5170,11 @@
               </a:rPr>
               <a:t>Performance may change over time.</a:t>
             </a:r>
-            <a:endParaRPr lang="en-US" sz="1700" dirty="0"/>
-          </a:p>
-          <a:p>
-            <a:r>
-              <a:rPr lang="en-US" sz="1700" dirty="0">
+            <a:endParaRPr lang="en-US" sz="2100" dirty="0"/>
+          </a:p>
+          <a:p>
+            <a:r>
+              <a:rPr lang="en-US" sz="2100" dirty="0">
                 <a:solidFill>
                   <a:srgbClr val="17364A"/>
                 </a:solidFill>
@@ -5031,13 +5184,13 @@
               </a:rPr>
               <a:t>Guardrails include periodic recalibration, drift monitoring, and authority to pause or modify use.</a:t>
             </a:r>
-            <a:endParaRPr lang="en-US" sz="1700" dirty="0"/>
-          </a:p>
-        </p:txBody>
-      </p:sp>
-      <p:sp>
-        <p:nvSpPr>
-          <p:cNvPr id="9" name="Shape 7"/>
+            <a:endParaRPr lang="en-US" sz="2100" dirty="0"/>
+          </a:p>
+        </p:txBody>
+      </p:sp>
+      <p:sp>
+        <p:nvSpPr>
+          <p:cNvPr id="10" name="Shape 8"/>
           <p:cNvSpPr/>
           <p:nvPr/>
         </p:nvSpPr>
@@ -5064,14 +5217,14 @@
       </p:sp>
       <p:sp>
         <p:nvSpPr>
-          <p:cNvPr id="10" name="Text 8"/>
+          <p:cNvPr id="11" name="Text 9"/>
           <p:cNvSpPr/>
           <p:nvPr/>
         </p:nvSpPr>
         <p:spPr>
           <a:xfrm>
             <a:off x="8074152" y="1563624"/>
-            <a:ext cx="2825496" cy="201168"/>
+            <a:ext cx="2825496" cy="256032"/>
           </a:xfrm>
           <a:prstGeom prst="rect">
             <a:avLst/>
@@ -5087,7 +5240,7 @@
               <a:buNone/>
             </a:pPr>
             <a:r>
-              <a:rPr lang="en-US" sz="950" b="1" dirty="0">
+              <a:rPr lang="en-US" sz="1300" b="1" dirty="0">
                 <a:solidFill>
                   <a:srgbClr val="0068B7"/>
                 </a:solidFill>
@@ -5097,20 +5250,20 @@
               </a:rPr>
               <a:t>Key idea</a:t>
             </a:r>
-            <a:endParaRPr lang="en-US" sz="950" dirty="0"/>
-          </a:p>
-        </p:txBody>
-      </p:sp>
-      <p:sp>
-        <p:nvSpPr>
-          <p:cNvPr id="11" name="Text 9"/>
-          <p:cNvSpPr/>
-          <p:nvPr/>
-        </p:nvSpPr>
-        <p:spPr>
-          <a:xfrm>
-            <a:off x="8074152" y="1856232"/>
-            <a:ext cx="2825496" cy="1261872"/>
+            <a:endParaRPr lang="en-US" sz="1300" dirty="0"/>
+          </a:p>
+        </p:txBody>
+      </p:sp>
+      <p:sp>
+        <p:nvSpPr>
+          <p:cNvPr id="12" name="Text 10"/>
+          <p:cNvSpPr/>
+          <p:nvPr/>
+        </p:nvSpPr>
+        <p:spPr>
+          <a:xfrm>
+            <a:off x="8074152" y="1920240"/>
+            <a:ext cx="2825496" cy="1188720"/>
           </a:xfrm>
           <a:prstGeom prst="rect">
             <a:avLst/>
@@ -5128,7 +5281,7 @@
               <a:buNone/>
             </a:pPr>
             <a:r>
-              <a:rPr lang="en-US" sz="1250" dirty="0">
+              <a:rPr lang="en-US" sz="1550" dirty="0">
                 <a:solidFill>
                   <a:srgbClr val="17364A"/>
                 </a:solidFill>
@@ -5138,13 +5291,13 @@
               </a:rPr>
               <a:t>Model drift.</a:t>
             </a:r>
-            <a:endParaRPr lang="en-US" sz="1250" dirty="0"/>
-          </a:p>
-        </p:txBody>
-      </p:sp>
-      <p:sp>
-        <p:nvSpPr>
-          <p:cNvPr id="12" name="Shape 10"/>
+            <a:endParaRPr lang="en-US" sz="1550" dirty="0"/>
+          </a:p>
+        </p:txBody>
+      </p:sp>
+      <p:sp>
+        <p:nvSpPr>
+          <p:cNvPr id="13" name="Shape 11"/>
           <p:cNvSpPr/>
           <p:nvPr/>
         </p:nvSpPr>
@@ -5171,14 +5324,14 @@
       </p:sp>
       <p:sp>
         <p:nvSpPr>
-          <p:cNvPr id="13" name="Text 11"/>
+          <p:cNvPr id="14" name="Text 12"/>
           <p:cNvSpPr/>
           <p:nvPr/>
         </p:nvSpPr>
         <p:spPr>
           <a:xfrm>
             <a:off x="8074152" y="3666744"/>
-            <a:ext cx="2825496" cy="201168"/>
+            <a:ext cx="2825496" cy="256032"/>
           </a:xfrm>
           <a:prstGeom prst="rect">
             <a:avLst/>
@@ -5194,7 +5347,7 @@
               <a:buNone/>
             </a:pPr>
             <a:r>
-              <a:rPr lang="en-US" sz="950" b="1" dirty="0">
+              <a:rPr lang="en-US" sz="1300" b="1" dirty="0">
                 <a:solidFill>
                   <a:srgbClr val="0068B7"/>
                 </a:solidFill>
@@ -5204,20 +5357,20 @@
               </a:rPr>
               <a:t>Use this for</a:t>
             </a:r>
-            <a:endParaRPr lang="en-US" sz="950" dirty="0"/>
-          </a:p>
-        </p:txBody>
-      </p:sp>
-      <p:sp>
-        <p:nvSpPr>
-          <p:cNvPr id="14" name="Text 12"/>
-          <p:cNvSpPr/>
-          <p:nvPr/>
-        </p:nvSpPr>
-        <p:spPr>
-          <a:xfrm>
-            <a:off x="8074152" y="3959352"/>
-            <a:ext cx="2825496" cy="1170432"/>
+            <a:endParaRPr lang="en-US" sz="1300" dirty="0"/>
+          </a:p>
+        </p:txBody>
+      </p:sp>
+      <p:sp>
+        <p:nvSpPr>
+          <p:cNvPr id="15" name="Text 13"/>
+          <p:cNvSpPr/>
+          <p:nvPr/>
+        </p:nvSpPr>
+        <p:spPr>
+          <a:xfrm>
+            <a:off x="8074152" y="4023360"/>
+            <a:ext cx="2825496" cy="1097280"/>
           </a:xfrm>
           <a:prstGeom prst="rect">
             <a:avLst/>
@@ -5235,7 +5388,7 @@
               <a:buNone/>
             </a:pPr>
             <a:r>
-              <a:rPr lang="en-US" sz="1250" dirty="0">
+              <a:rPr lang="en-US" sz="1550" dirty="0">
                 <a:solidFill>
                   <a:srgbClr val="17364A"/>
                 </a:solidFill>
@@ -5245,7 +5398,7 @@
               </a:rPr>
               <a:t>Connect the concept to public health decisions, safeguards, documentation, or implementation work.</a:t>
             </a:r>
-            <a:endParaRPr lang="en-US" sz="1250" dirty="0"/>
+            <a:endParaRPr lang="en-US" sz="1550" dirty="0"/>
           </a:p>
         </p:txBody>
       </p:sp>
@@ -5442,7 +5595,7 @@
                 <a:ea typeface="Aptos" pitchFamily="34" charset="-122"/>
                 <a:cs typeface="Aptos" pitchFamily="34" charset="-120"/>
               </a:rPr>
-              <a:t>© Paula Soper</a:t>
+              <a:t>Â© Paula Soper</a:t>
             </a:r>
             <a:endParaRPr lang="en-US" sz="800" dirty="0"/>
           </a:p>
@@ -5450,7 +5603,46 @@
       </p:sp>
       <p:sp>
         <p:nvSpPr>
-          <p:cNvPr id="7" name="Shape 5"/>
+          <p:cNvPr id="7" name="Text 5"/>
+          <p:cNvSpPr/>
+          <p:nvPr/>
+        </p:nvSpPr>
+        <p:spPr>
+          <a:xfrm>
+            <a:off x="11137392" y="6510528"/>
+            <a:ext cx="411480" cy="201168"/>
+          </a:xfrm>
+          <a:prstGeom prst="rect">
+            <a:avLst/>
+          </a:prstGeom>
+          <a:noFill/>
+          <a:ln/>
+        </p:spPr>
+        <p:txBody>
+          <a:bodyPr wrap="square" lIns="0" tIns="0" rIns="0" bIns="0" rtlCol="0" anchor="ctr"/>
+          <a:lstStyle/>
+          <a:p>
+            <a:pPr algn="r" indent="0" marL="0">
+              <a:buNone/>
+            </a:pPr>
+            <a:r>
+              <a:rPr lang="en-US" sz="900" dirty="0">
+                <a:solidFill>
+                  <a:srgbClr val="5F7181"/>
+                </a:solidFill>
+                <a:latin typeface="Aptos" pitchFamily="34" charset="0"/>
+                <a:ea typeface="Aptos" pitchFamily="34" charset="-122"/>
+                <a:cs typeface="Aptos" pitchFamily="34" charset="-120"/>
+              </a:rPr>
+              <a:t>14</a:t>
+            </a:r>
+            <a:endParaRPr lang="en-US" sz="900" dirty="0"/>
+          </a:p>
+        </p:txBody>
+      </p:sp>
+      <p:sp>
+        <p:nvSpPr>
+          <p:cNvPr id="8" name="Shape 6"/>
           <p:cNvSpPr/>
           <p:nvPr/>
         </p:nvSpPr>
@@ -5475,7 +5667,7 @@
       </p:sp>
       <p:sp>
         <p:nvSpPr>
-          <p:cNvPr id="8" name="Text 6"/>
+          <p:cNvPr id="9" name="Text 7"/>
           <p:cNvSpPr/>
           <p:nvPr/>
         </p:nvSpPr>
@@ -5514,14 +5706,14 @@
       </p:sp>
       <p:sp>
         <p:nvSpPr>
-          <p:cNvPr id="9" name="Text 7"/>
+          <p:cNvPr id="10" name="Text 8"/>
           <p:cNvSpPr/>
           <p:nvPr/>
         </p:nvSpPr>
         <p:spPr>
           <a:xfrm>
             <a:off x="640080" y="621792"/>
-            <a:ext cx="10881360" cy="566928"/>
+            <a:ext cx="10881360" cy="713232"/>
           </a:xfrm>
           <a:prstGeom prst="rect">
             <a:avLst/>
@@ -5539,7 +5731,7 @@
               <a:buNone/>
             </a:pPr>
             <a:r>
-              <a:rPr lang="en-US" sz="2700" b="1" dirty="0">
+              <a:rPr lang="en-US" sz="3400" b="1" dirty="0">
                 <a:solidFill>
                   <a:srgbClr val="003A63"/>
                 </a:solidFill>
@@ -5549,20 +5741,20 @@
               </a:rPr>
               <a:t>Application to AI-Supported Workflows</a:t>
             </a:r>
-            <a:endParaRPr lang="en-US" sz="2700" dirty="0"/>
-          </a:p>
-        </p:txBody>
-      </p:sp>
-      <p:sp>
-        <p:nvSpPr>
-          <p:cNvPr id="10" name="Text 8"/>
-          <p:cNvSpPr/>
-          <p:nvPr/>
-        </p:nvSpPr>
-        <p:spPr>
-          <a:xfrm>
-            <a:off x="868680" y="1417320"/>
-            <a:ext cx="6675120" cy="4434840"/>
+            <a:endParaRPr lang="en-US" sz="3400" dirty="0"/>
+          </a:p>
+        </p:txBody>
+      </p:sp>
+      <p:sp>
+        <p:nvSpPr>
+          <p:cNvPr id="11" name="Text 9"/>
+          <p:cNvSpPr/>
+          <p:nvPr/>
+        </p:nvSpPr>
+        <p:spPr>
+          <a:xfrm>
+            <a:off x="868680" y="1508760"/>
+            <a:ext cx="6537960" cy="4160520"/>
           </a:xfrm>
           <a:prstGeom prst="rect">
             <a:avLst/>
@@ -5577,7 +5769,7 @@
           <a:lstStyle/>
           <a:p>
             <a:r>
-              <a:rPr lang="en-US" sz="1700" dirty="0">
+              <a:rPr lang="en-US" sz="2100" dirty="0">
                 <a:solidFill>
                   <a:srgbClr val="17364A"/>
                 </a:solidFill>
@@ -5585,13 +5777,13 @@
                 <a:ea typeface="Aptos" pitchFamily="34" charset="-122"/>
                 <a:cs typeface="Aptos" pitchFamily="34" charset="-120"/>
               </a:rPr>
-              <a:t>Predictive analytics may be embedded in dashboards, case management systems, early warning tools, outreach lists, or.</a:t>
-            </a:r>
-            <a:endParaRPr lang="en-US" sz="1700" dirty="0"/>
-          </a:p>
-          <a:p>
-            <a:r>
-              <a:rPr lang="en-US" sz="1700" dirty="0">
+              <a:t>Predictive analytics may be embedded in dashboards, case management systems, early warning tools,.</a:t>
+            </a:r>
+            <a:endParaRPr lang="en-US" sz="2100" dirty="0"/>
+          </a:p>
+          <a:p>
+            <a:r>
+              <a:rPr lang="en-US" sz="2100" dirty="0">
                 <a:solidFill>
                   <a:srgbClr val="17364A"/>
                 </a:solidFill>
@@ -5599,13 +5791,13 @@
                 <a:ea typeface="Aptos" pitchFamily="34" charset="-122"/>
                 <a:cs typeface="Aptos" pitchFamily="34" charset="-120"/>
               </a:rPr>
-              <a:t>Generative AI may explain or summarize predictive outputs, but those explanations must not imply certainty that the model.</a:t>
-            </a:r>
-            <a:endParaRPr lang="en-US" sz="1700" dirty="0"/>
-          </a:p>
-          <a:p>
-            <a:r>
-              <a:rPr lang="en-US" sz="1700" dirty="0">
+              <a:t>Generative AI may explain or summarize predictive outputs, but those explanations must not imply.</a:t>
+            </a:r>
+            <a:endParaRPr lang="en-US" sz="2100" dirty="0"/>
+          </a:p>
+          <a:p>
+            <a:r>
+              <a:rPr lang="en-US" sz="2100" dirty="0">
                 <a:solidFill>
                   <a:srgbClr val="17364A"/>
                 </a:solidFill>
@@ -5613,29 +5805,15 @@
                 <a:ea typeface="Aptos" pitchFamily="34" charset="-122"/>
                 <a:cs typeface="Aptos" pitchFamily="34" charset="-120"/>
               </a:rPr>
-              <a:t>RAG systems may combine risk results with policy guidance, while agentic workflows may trigger tasks or notifications based.</a:t>
-            </a:r>
-            <a:endParaRPr lang="en-US" sz="1700" dirty="0"/>
-          </a:p>
-          <a:p>
-            <a:r>
-              <a:rPr lang="en-US" sz="1700" dirty="0">
-                <a:solidFill>
-                  <a:srgbClr val="17364A"/>
-                </a:solidFill>
-                <a:latin typeface="Aptos" pitchFamily="34" charset="0"/>
-                <a:ea typeface="Aptos" pitchFamily="34" charset="-122"/>
-                <a:cs typeface="Aptos" pitchFamily="34" charset="-120"/>
-              </a:rPr>
-              <a:t>When prediction supports public health action, the workflow should make the score, its limitations, and the source data.</a:t>
-            </a:r>
-            <a:endParaRPr lang="en-US" sz="1700" dirty="0"/>
-          </a:p>
-        </p:txBody>
-      </p:sp>
-      <p:sp>
-        <p:nvSpPr>
-          <p:cNvPr id="11" name="Shape 9"/>
+              <a:t>RAG systems may combine risk results with policy guidance, while agentic workflows may trigger tasks or.</a:t>
+            </a:r>
+            <a:endParaRPr lang="en-US" sz="2100" dirty="0"/>
+          </a:p>
+        </p:txBody>
+      </p:sp>
+      <p:sp>
+        <p:nvSpPr>
+          <p:cNvPr id="12" name="Shape 10"/>
           <p:cNvSpPr/>
           <p:nvPr/>
         </p:nvSpPr>
@@ -5662,14 +5840,14 @@
       </p:sp>
       <p:sp>
         <p:nvSpPr>
-          <p:cNvPr id="12" name="Text 10"/>
+          <p:cNvPr id="13" name="Text 11"/>
           <p:cNvSpPr/>
           <p:nvPr/>
         </p:nvSpPr>
         <p:spPr>
           <a:xfrm>
             <a:off x="8074152" y="1563624"/>
-            <a:ext cx="2825496" cy="201168"/>
+            <a:ext cx="2825496" cy="256032"/>
           </a:xfrm>
           <a:prstGeom prst="rect">
             <a:avLst/>
@@ -5685,7 +5863,7 @@
               <a:buNone/>
             </a:pPr>
             <a:r>
-              <a:rPr lang="en-US" sz="950" b="1" dirty="0">
+              <a:rPr lang="en-US" sz="1300" b="1" dirty="0">
                 <a:solidFill>
                   <a:srgbClr val="0068B7"/>
                 </a:solidFill>
@@ -5695,20 +5873,20 @@
               </a:rPr>
               <a:t>Key idea</a:t>
             </a:r>
-            <a:endParaRPr lang="en-US" sz="950" dirty="0"/>
-          </a:p>
-        </p:txBody>
-      </p:sp>
-      <p:sp>
-        <p:nvSpPr>
-          <p:cNvPr id="13" name="Text 11"/>
-          <p:cNvSpPr/>
-          <p:nvPr/>
-        </p:nvSpPr>
-        <p:spPr>
-          <a:xfrm>
-            <a:off x="8074152" y="1856232"/>
-            <a:ext cx="2825496" cy="1261872"/>
+            <a:endParaRPr lang="en-US" sz="1300" dirty="0"/>
+          </a:p>
+        </p:txBody>
+      </p:sp>
+      <p:sp>
+        <p:nvSpPr>
+          <p:cNvPr id="14" name="Text 12"/>
+          <p:cNvSpPr/>
+          <p:nvPr/>
+        </p:nvSpPr>
+        <p:spPr>
+          <a:xfrm>
+            <a:off x="8074152" y="1920240"/>
+            <a:ext cx="2825496" cy="1188720"/>
           </a:xfrm>
           <a:prstGeom prst="rect">
             <a:avLst/>
@@ -5726,7 +5904,7 @@
               <a:buNone/>
             </a:pPr>
             <a:r>
-              <a:rPr lang="en-US" sz="1250" dirty="0">
+              <a:rPr lang="en-US" sz="1550" dirty="0">
                 <a:solidFill>
                   <a:srgbClr val="17364A"/>
                 </a:solidFill>
@@ -5734,15 +5912,15 @@
                 <a:ea typeface="Aptos" pitchFamily="34" charset="-122"/>
                 <a:cs typeface="Aptos" pitchFamily="34" charset="-120"/>
               </a:rPr>
-              <a:t>Predictive analytics may be embedded in dashboards, case management systems, early warning tools, outreach lists, or.</a:t>
-            </a:r>
-            <a:endParaRPr lang="en-US" sz="1250" dirty="0"/>
-          </a:p>
-        </p:txBody>
-      </p:sp>
-      <p:sp>
-        <p:nvSpPr>
-          <p:cNvPr id="14" name="Shape 12"/>
+              <a:t>Predictive analytics may be embedded in dashboards, case management systems, early warning tools,.</a:t>
+            </a:r>
+            <a:endParaRPr lang="en-US" sz="1550" dirty="0"/>
+          </a:p>
+        </p:txBody>
+      </p:sp>
+      <p:sp>
+        <p:nvSpPr>
+          <p:cNvPr id="15" name="Shape 13"/>
           <p:cNvSpPr/>
           <p:nvPr/>
         </p:nvSpPr>
@@ -5769,14 +5947,14 @@
       </p:sp>
       <p:sp>
         <p:nvSpPr>
-          <p:cNvPr id="15" name="Text 13"/>
+          <p:cNvPr id="16" name="Text 14"/>
           <p:cNvSpPr/>
           <p:nvPr/>
         </p:nvSpPr>
         <p:spPr>
           <a:xfrm>
             <a:off x="8074152" y="3666744"/>
-            <a:ext cx="2825496" cy="201168"/>
+            <a:ext cx="2825496" cy="256032"/>
           </a:xfrm>
           <a:prstGeom prst="rect">
             <a:avLst/>
@@ -5792,7 +5970,7 @@
               <a:buNone/>
             </a:pPr>
             <a:r>
-              <a:rPr lang="en-US" sz="950" b="1" dirty="0">
+              <a:rPr lang="en-US" sz="1300" b="1" dirty="0">
                 <a:solidFill>
                   <a:srgbClr val="0068B7"/>
                 </a:solidFill>
@@ -5802,20 +5980,20 @@
               </a:rPr>
               <a:t>Use this for</a:t>
             </a:r>
-            <a:endParaRPr lang="en-US" sz="950" dirty="0"/>
-          </a:p>
-        </p:txBody>
-      </p:sp>
-      <p:sp>
-        <p:nvSpPr>
-          <p:cNvPr id="16" name="Text 14"/>
-          <p:cNvSpPr/>
-          <p:nvPr/>
-        </p:nvSpPr>
-        <p:spPr>
-          <a:xfrm>
-            <a:off x="8074152" y="3959352"/>
-            <a:ext cx="2825496" cy="1170432"/>
+            <a:endParaRPr lang="en-US" sz="1300" dirty="0"/>
+          </a:p>
+        </p:txBody>
+      </p:sp>
+      <p:sp>
+        <p:nvSpPr>
+          <p:cNvPr id="17" name="Text 15"/>
+          <p:cNvSpPr/>
+          <p:nvPr/>
+        </p:nvSpPr>
+        <p:spPr>
+          <a:xfrm>
+            <a:off x="8074152" y="4023360"/>
+            <a:ext cx="2825496" cy="1097280"/>
           </a:xfrm>
           <a:prstGeom prst="rect">
             <a:avLst/>
@@ -5833,7 +6011,7 @@
               <a:buNone/>
             </a:pPr>
             <a:r>
-              <a:rPr lang="en-US" sz="1250" dirty="0">
+              <a:rPr lang="en-US" sz="1550" dirty="0">
                 <a:solidFill>
                   <a:srgbClr val="17364A"/>
                 </a:solidFill>
@@ -5843,7 +6021,7 @@
               </a:rPr>
               <a:t>Connect the concept to public health decisions, safeguards, documentation, or implementation work.</a:t>
             </a:r>
-            <a:endParaRPr lang="en-US" sz="1250" dirty="0"/>
+            <a:endParaRPr lang="en-US" sz="1550" dirty="0"/>
           </a:p>
         </p:txBody>
       </p:sp>
@@ -6040,7 +6218,7 @@
                 <a:ea typeface="Aptos" pitchFamily="34" charset="-122"/>
                 <a:cs typeface="Aptos" pitchFamily="34" charset="-120"/>
               </a:rPr>
-              <a:t>© Paula Soper</a:t>
+              <a:t>Â© Paula Soper</a:t>
             </a:r>
             <a:endParaRPr lang="en-US" sz="800" dirty="0"/>
           </a:p>
@@ -6048,7 +6226,46 @@
       </p:sp>
       <p:sp>
         <p:nvSpPr>
-          <p:cNvPr id="7" name="Shape 5"/>
+          <p:cNvPr id="7" name="Text 5"/>
+          <p:cNvSpPr/>
+          <p:nvPr/>
+        </p:nvSpPr>
+        <p:spPr>
+          <a:xfrm>
+            <a:off x="11137392" y="6510528"/>
+            <a:ext cx="411480" cy="201168"/>
+          </a:xfrm>
+          <a:prstGeom prst="rect">
+            <a:avLst/>
+          </a:prstGeom>
+          <a:noFill/>
+          <a:ln/>
+        </p:spPr>
+        <p:txBody>
+          <a:bodyPr wrap="square" lIns="0" tIns="0" rIns="0" bIns="0" rtlCol="0" anchor="ctr"/>
+          <a:lstStyle/>
+          <a:p>
+            <a:pPr algn="r" indent="0" marL="0">
+              <a:buNone/>
+            </a:pPr>
+            <a:r>
+              <a:rPr lang="en-US" sz="900" dirty="0">
+                <a:solidFill>
+                  <a:srgbClr val="5F7181"/>
+                </a:solidFill>
+                <a:latin typeface="Aptos" pitchFamily="34" charset="0"/>
+                <a:ea typeface="Aptos" pitchFamily="34" charset="-122"/>
+                <a:cs typeface="Aptos" pitchFamily="34" charset="-120"/>
+              </a:rPr>
+              <a:t>15</a:t>
+            </a:r>
+            <a:endParaRPr lang="en-US" sz="900" dirty="0"/>
+          </a:p>
+        </p:txBody>
+      </p:sp>
+      <p:sp>
+        <p:nvSpPr>
+          <p:cNvPr id="8" name="Shape 6"/>
           <p:cNvSpPr/>
           <p:nvPr/>
         </p:nvSpPr>
@@ -6073,7 +6290,7 @@
       </p:sp>
       <p:sp>
         <p:nvSpPr>
-          <p:cNvPr id="8" name="Text 6"/>
+          <p:cNvPr id="9" name="Text 7"/>
           <p:cNvSpPr/>
           <p:nvPr/>
         </p:nvSpPr>
@@ -6112,14 +6329,14 @@
       </p:sp>
       <p:sp>
         <p:nvSpPr>
-          <p:cNvPr id="9" name="Text 7"/>
+          <p:cNvPr id="10" name="Text 8"/>
           <p:cNvSpPr/>
           <p:nvPr/>
         </p:nvSpPr>
         <p:spPr>
           <a:xfrm>
             <a:off x="640080" y="621792"/>
-            <a:ext cx="10881360" cy="566928"/>
+            <a:ext cx="10881360" cy="713232"/>
           </a:xfrm>
           <a:prstGeom prst="rect">
             <a:avLst/>
@@ -6137,7 +6354,7 @@
               <a:buNone/>
             </a:pPr>
             <a:r>
-              <a:rPr lang="en-US" sz="2700" b="1" dirty="0">
+              <a:rPr lang="en-US" sz="3400" b="1" dirty="0">
                 <a:solidFill>
                   <a:srgbClr val="003A63"/>
                 </a:solidFill>
@@ -6147,20 +6364,20 @@
               </a:rPr>
               <a:t>Reflection Questions</a:t>
             </a:r>
-            <a:endParaRPr lang="en-US" sz="2700" dirty="0"/>
-          </a:p>
-        </p:txBody>
-      </p:sp>
-      <p:sp>
-        <p:nvSpPr>
-          <p:cNvPr id="10" name="Text 8"/>
-          <p:cNvSpPr/>
-          <p:nvPr/>
-        </p:nvSpPr>
-        <p:spPr>
-          <a:xfrm>
-            <a:off x="868680" y="1417320"/>
-            <a:ext cx="6675120" cy="4434840"/>
+            <a:endParaRPr lang="en-US" sz="3400" dirty="0"/>
+          </a:p>
+        </p:txBody>
+      </p:sp>
+      <p:sp>
+        <p:nvSpPr>
+          <p:cNvPr id="11" name="Text 9"/>
+          <p:cNvSpPr/>
+          <p:nvPr/>
+        </p:nvSpPr>
+        <p:spPr>
+          <a:xfrm>
+            <a:off x="868680" y="1508760"/>
+            <a:ext cx="6537960" cy="4160520"/>
           </a:xfrm>
           <a:prstGeom prst="rect">
             <a:avLst/>
@@ -6175,7 +6392,7 @@
           <a:lstStyle/>
           <a:p>
             <a:r>
-              <a:rPr lang="en-US" sz="1700" dirty="0">
+              <a:rPr lang="en-US" sz="2100" dirty="0">
                 <a:solidFill>
                   <a:srgbClr val="17364A"/>
                 </a:solidFill>
@@ -6185,11 +6402,11 @@
               </a:rPr>
               <a:t>What outcome is being predicted, and over what time period?</a:t>
             </a:r>
-            <a:endParaRPr lang="en-US" sz="1700" dirty="0"/>
-          </a:p>
-          <a:p>
-            <a:r>
-              <a:rPr lang="en-US" sz="1700" dirty="0">
+            <a:endParaRPr lang="en-US" sz="2100" dirty="0"/>
+          </a:p>
+          <a:p>
+            <a:r>
+              <a:rPr lang="en-US" sz="2100" dirty="0">
                 <a:solidFill>
                   <a:srgbClr val="17364A"/>
                 </a:solidFill>
@@ -6199,11 +6416,11 @@
               </a:rPr>
               <a:t>What public health action will follow a high-risk score?</a:t>
             </a:r>
-            <a:endParaRPr lang="en-US" sz="1700" dirty="0"/>
-          </a:p>
-          <a:p>
-            <a:r>
-              <a:rPr lang="en-US" sz="1700" dirty="0">
+            <a:endParaRPr lang="en-US" sz="2100" dirty="0"/>
+          </a:p>
+          <a:p>
+            <a:r>
+              <a:rPr lang="en-US" sz="2100" dirty="0">
                 <a:solidFill>
                   <a:srgbClr val="17364A"/>
                 </a:solidFill>
@@ -6213,13 +6430,13 @@
               </a:rPr>
               <a:t>Which data sources may underrepresent some populations?</a:t>
             </a:r>
-            <a:endParaRPr lang="en-US" sz="1700" dirty="0"/>
-          </a:p>
-        </p:txBody>
-      </p:sp>
-      <p:sp>
-        <p:nvSpPr>
-          <p:cNvPr id="11" name="Shape 9"/>
+            <a:endParaRPr lang="en-US" sz="2100" dirty="0"/>
+          </a:p>
+        </p:txBody>
+      </p:sp>
+      <p:sp>
+        <p:nvSpPr>
+          <p:cNvPr id="12" name="Shape 10"/>
           <p:cNvSpPr/>
           <p:nvPr/>
         </p:nvSpPr>
@@ -6246,14 +6463,14 @@
       </p:sp>
       <p:sp>
         <p:nvSpPr>
-          <p:cNvPr id="12" name="Text 10"/>
+          <p:cNvPr id="13" name="Text 11"/>
           <p:cNvSpPr/>
           <p:nvPr/>
         </p:nvSpPr>
         <p:spPr>
           <a:xfrm>
             <a:off x="8074152" y="1563624"/>
-            <a:ext cx="2825496" cy="201168"/>
+            <a:ext cx="2825496" cy="256032"/>
           </a:xfrm>
           <a:prstGeom prst="rect">
             <a:avLst/>
@@ -6269,7 +6486,7 @@
               <a:buNone/>
             </a:pPr>
             <a:r>
-              <a:rPr lang="en-US" sz="950" b="1" dirty="0">
+              <a:rPr lang="en-US" sz="1300" b="1" dirty="0">
                 <a:solidFill>
                   <a:srgbClr val="0068B7"/>
                 </a:solidFill>
@@ -6279,20 +6496,20 @@
               </a:rPr>
               <a:t>Key idea</a:t>
             </a:r>
-            <a:endParaRPr lang="en-US" sz="950" dirty="0"/>
-          </a:p>
-        </p:txBody>
-      </p:sp>
-      <p:sp>
-        <p:nvSpPr>
-          <p:cNvPr id="13" name="Text 11"/>
-          <p:cNvSpPr/>
-          <p:nvPr/>
-        </p:nvSpPr>
-        <p:spPr>
-          <a:xfrm>
-            <a:off x="8074152" y="1856232"/>
-            <a:ext cx="2825496" cy="1261872"/>
+            <a:endParaRPr lang="en-US" sz="1300" dirty="0"/>
+          </a:p>
+        </p:txBody>
+      </p:sp>
+      <p:sp>
+        <p:nvSpPr>
+          <p:cNvPr id="14" name="Text 12"/>
+          <p:cNvSpPr/>
+          <p:nvPr/>
+        </p:nvSpPr>
+        <p:spPr>
+          <a:xfrm>
+            <a:off x="8074152" y="1920240"/>
+            <a:ext cx="2825496" cy="1188720"/>
           </a:xfrm>
           <a:prstGeom prst="rect">
             <a:avLst/>
@@ -6310,7 +6527,7 @@
               <a:buNone/>
             </a:pPr>
             <a:r>
-              <a:rPr lang="en-US" sz="1250" dirty="0">
+              <a:rPr lang="en-US" sz="1550" dirty="0">
                 <a:solidFill>
                   <a:srgbClr val="17364A"/>
                 </a:solidFill>
@@ -6320,13 +6537,13 @@
               </a:rPr>
               <a:t>What outcome is being predicted, and over what time period?</a:t>
             </a:r>
-            <a:endParaRPr lang="en-US" sz="1250" dirty="0"/>
-          </a:p>
-        </p:txBody>
-      </p:sp>
-      <p:sp>
-        <p:nvSpPr>
-          <p:cNvPr id="14" name="Shape 12"/>
+            <a:endParaRPr lang="en-US" sz="1550" dirty="0"/>
+          </a:p>
+        </p:txBody>
+      </p:sp>
+      <p:sp>
+        <p:nvSpPr>
+          <p:cNvPr id="15" name="Shape 13"/>
           <p:cNvSpPr/>
           <p:nvPr/>
         </p:nvSpPr>
@@ -6353,14 +6570,14 @@
       </p:sp>
       <p:sp>
         <p:nvSpPr>
-          <p:cNvPr id="15" name="Text 13"/>
+          <p:cNvPr id="16" name="Text 14"/>
           <p:cNvSpPr/>
           <p:nvPr/>
         </p:nvSpPr>
         <p:spPr>
           <a:xfrm>
             <a:off x="8074152" y="3666744"/>
-            <a:ext cx="2825496" cy="201168"/>
+            <a:ext cx="2825496" cy="256032"/>
           </a:xfrm>
           <a:prstGeom prst="rect">
             <a:avLst/>
@@ -6376,7 +6593,7 @@
               <a:buNone/>
             </a:pPr>
             <a:r>
-              <a:rPr lang="en-US" sz="950" b="1" dirty="0">
+              <a:rPr lang="en-US" sz="1300" b="1" dirty="0">
                 <a:solidFill>
                   <a:srgbClr val="0068B7"/>
                 </a:solidFill>
@@ -6386,20 +6603,20 @@
               </a:rPr>
               <a:t>Use this for</a:t>
             </a:r>
-            <a:endParaRPr lang="en-US" sz="950" dirty="0"/>
-          </a:p>
-        </p:txBody>
-      </p:sp>
-      <p:sp>
-        <p:nvSpPr>
-          <p:cNvPr id="16" name="Text 14"/>
-          <p:cNvSpPr/>
-          <p:nvPr/>
-        </p:nvSpPr>
-        <p:spPr>
-          <a:xfrm>
-            <a:off x="8074152" y="3959352"/>
-            <a:ext cx="2825496" cy="1170432"/>
+            <a:endParaRPr lang="en-US" sz="1300" dirty="0"/>
+          </a:p>
+        </p:txBody>
+      </p:sp>
+      <p:sp>
+        <p:nvSpPr>
+          <p:cNvPr id="17" name="Text 15"/>
+          <p:cNvSpPr/>
+          <p:nvPr/>
+        </p:nvSpPr>
+        <p:spPr>
+          <a:xfrm>
+            <a:off x="8074152" y="4023360"/>
+            <a:ext cx="2825496" cy="1097280"/>
           </a:xfrm>
           <a:prstGeom prst="rect">
             <a:avLst/>
@@ -6417,7 +6634,7 @@
               <a:buNone/>
             </a:pPr>
             <a:r>
-              <a:rPr lang="en-US" sz="1250" dirty="0">
+              <a:rPr lang="en-US" sz="1550" dirty="0">
                 <a:solidFill>
                   <a:srgbClr val="17364A"/>
                 </a:solidFill>
@@ -6427,7 +6644,7 @@
               </a:rPr>
               <a:t>Connect the concept to public health decisions, safeguards, documentation, or implementation work.</a:t>
             </a:r>
-            <a:endParaRPr lang="en-US" sz="1250" dirty="0"/>
+            <a:endParaRPr lang="en-US" sz="1550" dirty="0"/>
           </a:p>
         </p:txBody>
       </p:sp>
@@ -6624,7 +6841,7 @@
                 <a:ea typeface="Aptos" pitchFamily="34" charset="-122"/>
                 <a:cs typeface="Aptos" pitchFamily="34" charset="-120"/>
               </a:rPr>
-              <a:t>© Paula Soper</a:t>
+              <a:t>Â© Paula Soper</a:t>
             </a:r>
             <a:endParaRPr lang="en-US" sz="800" dirty="0"/>
           </a:p>
@@ -6638,8 +6855,47 @@
         </p:nvSpPr>
         <p:spPr>
           <a:xfrm>
+            <a:off x="11137392" y="6510528"/>
+            <a:ext cx="411480" cy="201168"/>
+          </a:xfrm>
+          <a:prstGeom prst="rect">
+            <a:avLst/>
+          </a:prstGeom>
+          <a:noFill/>
+          <a:ln/>
+        </p:spPr>
+        <p:txBody>
+          <a:bodyPr wrap="square" lIns="0" tIns="0" rIns="0" bIns="0" rtlCol="0" anchor="ctr"/>
+          <a:lstStyle/>
+          <a:p>
+            <a:pPr algn="r" indent="0" marL="0">
+              <a:buNone/>
+            </a:pPr>
+            <a:r>
+              <a:rPr lang="en-US" sz="900" dirty="0">
+                <a:solidFill>
+                  <a:srgbClr val="5F7181"/>
+                </a:solidFill>
+                <a:latin typeface="Aptos" pitchFamily="34" charset="0"/>
+                <a:ea typeface="Aptos" pitchFamily="34" charset="-122"/>
+                <a:cs typeface="Aptos" pitchFamily="34" charset="-120"/>
+              </a:rPr>
+              <a:t>16</a:t>
+            </a:r>
+            <a:endParaRPr lang="en-US" sz="900" dirty="0"/>
+          </a:p>
+        </p:txBody>
+      </p:sp>
+      <p:sp>
+        <p:nvSpPr>
+          <p:cNvPr id="8" name="Text 6"/>
+          <p:cNvSpPr/>
+          <p:nvPr/>
+        </p:nvSpPr>
+        <p:spPr>
+          <a:xfrm>
             <a:off x="640080" y="658368"/>
-            <a:ext cx="10881360" cy="566928"/>
+            <a:ext cx="10881360" cy="713232"/>
           </a:xfrm>
           <a:prstGeom prst="rect">
             <a:avLst/>
@@ -6657,7 +6913,7 @@
               <a:buNone/>
             </a:pPr>
             <a:r>
-              <a:rPr lang="en-US" sz="2700" b="1" dirty="0">
+              <a:rPr lang="en-US" sz="3400" b="1" dirty="0">
                 <a:solidFill>
                   <a:srgbClr val="003A63"/>
                 </a:solidFill>
@@ -6667,20 +6923,20 @@
               </a:rPr>
               <a:t>Reflection Questions Continued</a:t>
             </a:r>
-            <a:endParaRPr lang="en-US" sz="2700" dirty="0"/>
-          </a:p>
-        </p:txBody>
-      </p:sp>
-      <p:sp>
-        <p:nvSpPr>
-          <p:cNvPr id="8" name="Text 6"/>
-          <p:cNvSpPr/>
-          <p:nvPr/>
-        </p:nvSpPr>
-        <p:spPr>
-          <a:xfrm>
-            <a:off x="868680" y="1417320"/>
-            <a:ext cx="6675120" cy="4434840"/>
+            <a:endParaRPr lang="en-US" sz="3400" dirty="0"/>
+          </a:p>
+        </p:txBody>
+      </p:sp>
+      <p:sp>
+        <p:nvSpPr>
+          <p:cNvPr id="9" name="Text 7"/>
+          <p:cNvSpPr/>
+          <p:nvPr/>
+        </p:nvSpPr>
+        <p:spPr>
+          <a:xfrm>
+            <a:off x="868680" y="1508760"/>
+            <a:ext cx="6537960" cy="4160520"/>
           </a:xfrm>
           <a:prstGeom prst="rect">
             <a:avLst/>
@@ -6695,7 +6951,7 @@
           <a:lstStyle/>
           <a:p>
             <a:r>
-              <a:rPr lang="en-US" sz="1700" dirty="0">
+              <a:rPr lang="en-US" sz="2100" dirty="0">
                 <a:solidFill>
                   <a:srgbClr val="17364A"/>
                 </a:solidFill>
@@ -6705,11 +6961,11 @@
               </a:rPr>
               <a:t>What are the consequences of false positives and false negatives?</a:t>
             </a:r>
-            <a:endParaRPr lang="en-US" sz="1700" dirty="0"/>
-          </a:p>
-          <a:p>
-            <a:r>
-              <a:rPr lang="en-US" sz="1700" dirty="0">
+            <a:endParaRPr lang="en-US" sz="2100" dirty="0"/>
+          </a:p>
+          <a:p>
+            <a:r>
+              <a:rPr lang="en-US" sz="2100" dirty="0">
                 <a:solidFill>
                   <a:srgbClr val="17364A"/>
                 </a:solidFill>
@@ -6719,13 +6975,13 @@
               </a:rPr>
               <a:t>How will thresholds, calibration, and subgroup performance be monitored?</a:t>
             </a:r>
-            <a:endParaRPr lang="en-US" sz="1700" dirty="0"/>
-          </a:p>
-        </p:txBody>
-      </p:sp>
-      <p:sp>
-        <p:nvSpPr>
-          <p:cNvPr id="9" name="Shape 7"/>
+            <a:endParaRPr lang="en-US" sz="2100" dirty="0"/>
+          </a:p>
+        </p:txBody>
+      </p:sp>
+      <p:sp>
+        <p:nvSpPr>
+          <p:cNvPr id="10" name="Shape 8"/>
           <p:cNvSpPr/>
           <p:nvPr/>
         </p:nvSpPr>
@@ -6752,14 +7008,14 @@
       </p:sp>
       <p:sp>
         <p:nvSpPr>
-          <p:cNvPr id="10" name="Text 8"/>
+          <p:cNvPr id="11" name="Text 9"/>
           <p:cNvSpPr/>
           <p:nvPr/>
         </p:nvSpPr>
         <p:spPr>
           <a:xfrm>
             <a:off x="8074152" y="1563624"/>
-            <a:ext cx="2825496" cy="201168"/>
+            <a:ext cx="2825496" cy="256032"/>
           </a:xfrm>
           <a:prstGeom prst="rect">
             <a:avLst/>
@@ -6775,7 +7031,7 @@
               <a:buNone/>
             </a:pPr>
             <a:r>
-              <a:rPr lang="en-US" sz="950" b="1" dirty="0">
+              <a:rPr lang="en-US" sz="1300" b="1" dirty="0">
                 <a:solidFill>
                   <a:srgbClr val="0068B7"/>
                 </a:solidFill>
@@ -6785,20 +7041,20 @@
               </a:rPr>
               <a:t>Key idea</a:t>
             </a:r>
-            <a:endParaRPr lang="en-US" sz="950" dirty="0"/>
-          </a:p>
-        </p:txBody>
-      </p:sp>
-      <p:sp>
-        <p:nvSpPr>
-          <p:cNvPr id="11" name="Text 9"/>
-          <p:cNvSpPr/>
-          <p:nvPr/>
-        </p:nvSpPr>
-        <p:spPr>
-          <a:xfrm>
-            <a:off x="8074152" y="1856232"/>
-            <a:ext cx="2825496" cy="1261872"/>
+            <a:endParaRPr lang="en-US" sz="1300" dirty="0"/>
+          </a:p>
+        </p:txBody>
+      </p:sp>
+      <p:sp>
+        <p:nvSpPr>
+          <p:cNvPr id="12" name="Text 10"/>
+          <p:cNvSpPr/>
+          <p:nvPr/>
+        </p:nvSpPr>
+        <p:spPr>
+          <a:xfrm>
+            <a:off x="8074152" y="1920240"/>
+            <a:ext cx="2825496" cy="1188720"/>
           </a:xfrm>
           <a:prstGeom prst="rect">
             <a:avLst/>
@@ -6816,7 +7072,7 @@
               <a:buNone/>
             </a:pPr>
             <a:r>
-              <a:rPr lang="en-US" sz="1250" dirty="0">
+              <a:rPr lang="en-US" sz="1550" dirty="0">
                 <a:solidFill>
                   <a:srgbClr val="17364A"/>
                 </a:solidFill>
@@ -6826,13 +7082,13 @@
               </a:rPr>
               <a:t>What are the consequences of false positives and false negatives?</a:t>
             </a:r>
-            <a:endParaRPr lang="en-US" sz="1250" dirty="0"/>
-          </a:p>
-        </p:txBody>
-      </p:sp>
-      <p:sp>
-        <p:nvSpPr>
-          <p:cNvPr id="12" name="Shape 10"/>
+            <a:endParaRPr lang="en-US" sz="1550" dirty="0"/>
+          </a:p>
+        </p:txBody>
+      </p:sp>
+      <p:sp>
+        <p:nvSpPr>
+          <p:cNvPr id="13" name="Shape 11"/>
           <p:cNvSpPr/>
           <p:nvPr/>
         </p:nvSpPr>
@@ -6859,14 +7115,14 @@
       </p:sp>
       <p:sp>
         <p:nvSpPr>
-          <p:cNvPr id="13" name="Text 11"/>
+          <p:cNvPr id="14" name="Text 12"/>
           <p:cNvSpPr/>
           <p:nvPr/>
         </p:nvSpPr>
         <p:spPr>
           <a:xfrm>
             <a:off x="8074152" y="3666744"/>
-            <a:ext cx="2825496" cy="201168"/>
+            <a:ext cx="2825496" cy="256032"/>
           </a:xfrm>
           <a:prstGeom prst="rect">
             <a:avLst/>
@@ -6882,7 +7138,7 @@
               <a:buNone/>
             </a:pPr>
             <a:r>
-              <a:rPr lang="en-US" sz="950" b="1" dirty="0">
+              <a:rPr lang="en-US" sz="1300" b="1" dirty="0">
                 <a:solidFill>
                   <a:srgbClr val="0068B7"/>
                 </a:solidFill>
@@ -6892,20 +7148,20 @@
               </a:rPr>
               <a:t>Use this for</a:t>
             </a:r>
-            <a:endParaRPr lang="en-US" sz="950" dirty="0"/>
-          </a:p>
-        </p:txBody>
-      </p:sp>
-      <p:sp>
-        <p:nvSpPr>
-          <p:cNvPr id="14" name="Text 12"/>
-          <p:cNvSpPr/>
-          <p:nvPr/>
-        </p:nvSpPr>
-        <p:spPr>
-          <a:xfrm>
-            <a:off x="8074152" y="3959352"/>
-            <a:ext cx="2825496" cy="1170432"/>
+            <a:endParaRPr lang="en-US" sz="1300" dirty="0"/>
+          </a:p>
+        </p:txBody>
+      </p:sp>
+      <p:sp>
+        <p:nvSpPr>
+          <p:cNvPr id="15" name="Text 13"/>
+          <p:cNvSpPr/>
+          <p:nvPr/>
+        </p:nvSpPr>
+        <p:spPr>
+          <a:xfrm>
+            <a:off x="8074152" y="4023360"/>
+            <a:ext cx="2825496" cy="1097280"/>
           </a:xfrm>
           <a:prstGeom prst="rect">
             <a:avLst/>
@@ -6923,7 +7179,7 @@
               <a:buNone/>
             </a:pPr>
             <a:r>
-              <a:rPr lang="en-US" sz="1250" dirty="0">
+              <a:rPr lang="en-US" sz="1550" dirty="0">
                 <a:solidFill>
                   <a:srgbClr val="17364A"/>
                 </a:solidFill>
@@ -6933,7 +7189,7 @@
               </a:rPr>
               <a:t>Connect the concept to public health decisions, safeguards, documentation, or implementation work.</a:t>
             </a:r>
-            <a:endParaRPr lang="en-US" sz="1250" dirty="0"/>
+            <a:endParaRPr lang="en-US" sz="1550" dirty="0"/>
           </a:p>
         </p:txBody>
       </p:sp>
@@ -7130,7 +7386,7 @@
                 <a:ea typeface="Aptos" pitchFamily="34" charset="-122"/>
                 <a:cs typeface="Aptos" pitchFamily="34" charset="-120"/>
               </a:rPr>
-              <a:t>© Paula Soper</a:t>
+              <a:t>Â© Paula Soper</a:t>
             </a:r>
             <a:endParaRPr lang="en-US" sz="800" dirty="0"/>
           </a:p>
@@ -7138,7 +7394,46 @@
       </p:sp>
       <p:sp>
         <p:nvSpPr>
-          <p:cNvPr id="7" name="Shape 5"/>
+          <p:cNvPr id="7" name="Text 5"/>
+          <p:cNvSpPr/>
+          <p:nvPr/>
+        </p:nvSpPr>
+        <p:spPr>
+          <a:xfrm>
+            <a:off x="11137392" y="6510528"/>
+            <a:ext cx="411480" cy="201168"/>
+          </a:xfrm>
+          <a:prstGeom prst="rect">
+            <a:avLst/>
+          </a:prstGeom>
+          <a:noFill/>
+          <a:ln/>
+        </p:spPr>
+        <p:txBody>
+          <a:bodyPr wrap="square" lIns="0" tIns="0" rIns="0" bIns="0" rtlCol="0" anchor="ctr"/>
+          <a:lstStyle/>
+          <a:p>
+            <a:pPr algn="r" indent="0" marL="0">
+              <a:buNone/>
+            </a:pPr>
+            <a:r>
+              <a:rPr lang="en-US" sz="900" dirty="0">
+                <a:solidFill>
+                  <a:srgbClr val="5F7181"/>
+                </a:solidFill>
+                <a:latin typeface="Aptos" pitchFamily="34" charset="0"/>
+                <a:ea typeface="Aptos" pitchFamily="34" charset="-122"/>
+                <a:cs typeface="Aptos" pitchFamily="34" charset="-120"/>
+              </a:rPr>
+              <a:t>17</a:t>
+            </a:r>
+            <a:endParaRPr lang="en-US" sz="900" dirty="0"/>
+          </a:p>
+        </p:txBody>
+      </p:sp>
+      <p:sp>
+        <p:nvSpPr>
+          <p:cNvPr id="8" name="Shape 6"/>
           <p:cNvSpPr/>
           <p:nvPr/>
         </p:nvSpPr>
@@ -7163,7 +7458,7 @@
       </p:sp>
       <p:sp>
         <p:nvSpPr>
-          <p:cNvPr id="8" name="Text 6"/>
+          <p:cNvPr id="9" name="Text 7"/>
           <p:cNvSpPr/>
           <p:nvPr/>
         </p:nvSpPr>
@@ -7202,14 +7497,14 @@
       </p:sp>
       <p:sp>
         <p:nvSpPr>
-          <p:cNvPr id="9" name="Text 7"/>
+          <p:cNvPr id="10" name="Text 8"/>
           <p:cNvSpPr/>
           <p:nvPr/>
         </p:nvSpPr>
         <p:spPr>
           <a:xfrm>
             <a:off x="640080" y="621792"/>
-            <a:ext cx="10881360" cy="566928"/>
+            <a:ext cx="10881360" cy="713232"/>
           </a:xfrm>
           <a:prstGeom prst="rect">
             <a:avLst/>
@@ -7227,7 +7522,7 @@
               <a:buNone/>
             </a:pPr>
             <a:r>
-              <a:rPr lang="en-US" sz="2700" b="1" dirty="0">
+              <a:rPr lang="en-US" sz="3400" b="1" dirty="0">
                 <a:solidFill>
                   <a:srgbClr val="003A63"/>
                 </a:solidFill>
@@ -7237,20 +7532,20 @@
               </a:rPr>
               <a:t>Practical Exercise</a:t>
             </a:r>
-            <a:endParaRPr lang="en-US" sz="2700" dirty="0"/>
-          </a:p>
-        </p:txBody>
-      </p:sp>
-      <p:sp>
-        <p:nvSpPr>
-          <p:cNvPr id="10" name="Text 8"/>
-          <p:cNvSpPr/>
-          <p:nvPr/>
-        </p:nvSpPr>
-        <p:spPr>
-          <a:xfrm>
-            <a:off x="868680" y="1417320"/>
-            <a:ext cx="6675120" cy="4434840"/>
+            <a:endParaRPr lang="en-US" sz="3400" dirty="0"/>
+          </a:p>
+        </p:txBody>
+      </p:sp>
+      <p:sp>
+        <p:nvSpPr>
+          <p:cNvPr id="11" name="Text 9"/>
+          <p:cNvSpPr/>
+          <p:nvPr/>
+        </p:nvSpPr>
+        <p:spPr>
+          <a:xfrm>
+            <a:off x="868680" y="1508760"/>
+            <a:ext cx="6537960" cy="4160520"/>
           </a:xfrm>
           <a:prstGeom prst="rect">
             <a:avLst/>
@@ -7265,7 +7560,7 @@
           <a:lstStyle/>
           <a:p>
             <a:r>
-              <a:rPr lang="en-US" sz="1700" dirty="0">
+              <a:rPr lang="en-US" sz="2100" dirty="0">
                 <a:solidFill>
                   <a:srgbClr val="17364A"/>
                 </a:solidFill>
@@ -7275,11 +7570,11 @@
               </a:rPr>
               <a:t>Create a predictive model review plan for one public health use case.</a:t>
             </a:r>
-            <a:endParaRPr lang="en-US" sz="1700" dirty="0"/>
-          </a:p>
-          <a:p>
-            <a:r>
-              <a:rPr lang="en-US" sz="1700" dirty="0">
+            <a:endParaRPr lang="en-US" sz="2100" dirty="0"/>
+          </a:p>
+          <a:p>
+            <a:r>
+              <a:rPr lang="en-US" sz="2100" dirty="0">
                 <a:solidFill>
                   <a:srgbClr val="17364A"/>
                 </a:solidFill>
@@ -7287,13 +7582,13 @@
                 <a:ea typeface="Aptos" pitchFamily="34" charset="-122"/>
                 <a:cs typeface="Aptos" pitchFamily="34" charset="-120"/>
               </a:rPr>
-              <a:t>Include the outcome, population, time horizon, data sources, candidate features, risk categories, thresholds, performance.</a:t>
-            </a:r>
-            <a:endParaRPr lang="en-US" sz="1700" dirty="0"/>
-          </a:p>
-          <a:p>
-            <a:r>
-              <a:rPr lang="en-US" sz="1700" dirty="0">
+              <a:t>Include the outcome, population, time horizon, data sources, candidate features, risk categories,.</a:t>
+            </a:r>
+            <a:endParaRPr lang="en-US" sz="2100" dirty="0"/>
+          </a:p>
+          <a:p>
+            <a:r>
+              <a:rPr lang="en-US" sz="2100" dirty="0">
                 <a:solidFill>
                   <a:srgbClr val="17364A"/>
                 </a:solidFill>
@@ -7303,27 +7598,13 @@
               </a:rPr>
               <a:t>The plan should also identify whether the use is supportive, restrictive, or consequential.</a:t>
             </a:r>
-            <a:endParaRPr lang="en-US" sz="1700" dirty="0"/>
-          </a:p>
-          <a:p>
-            <a:r>
-              <a:rPr lang="en-US" sz="1700" dirty="0">
-                <a:solidFill>
-                  <a:srgbClr val="17364A"/>
-                </a:solidFill>
-                <a:latin typeface="Aptos" pitchFamily="34" charset="0"/>
-                <a:ea typeface="Aptos" pitchFamily="34" charset="-122"/>
-                <a:cs typeface="Aptos" pitchFamily="34" charset="-120"/>
-              </a:rPr>
-              <a:t>Predictive tools used to allocate supportive resources have different risk profiles than tools used to deny, delay, or.</a:t>
-            </a:r>
-            <a:endParaRPr lang="en-US" sz="1700" dirty="0"/>
-          </a:p>
-        </p:txBody>
-      </p:sp>
-      <p:sp>
-        <p:nvSpPr>
-          <p:cNvPr id="11" name="Shape 9"/>
+            <a:endParaRPr lang="en-US" sz="2100" dirty="0"/>
+          </a:p>
+        </p:txBody>
+      </p:sp>
+      <p:sp>
+        <p:nvSpPr>
+          <p:cNvPr id="12" name="Shape 10"/>
           <p:cNvSpPr/>
           <p:nvPr/>
         </p:nvSpPr>
@@ -7350,14 +7631,14 @@
       </p:sp>
       <p:sp>
         <p:nvSpPr>
-          <p:cNvPr id="12" name="Text 10"/>
+          <p:cNvPr id="13" name="Text 11"/>
           <p:cNvSpPr/>
           <p:nvPr/>
         </p:nvSpPr>
         <p:spPr>
           <a:xfrm>
             <a:off x="8074152" y="1563624"/>
-            <a:ext cx="2825496" cy="201168"/>
+            <a:ext cx="2825496" cy="256032"/>
           </a:xfrm>
           <a:prstGeom prst="rect">
             <a:avLst/>
@@ -7373,7 +7654,7 @@
               <a:buNone/>
             </a:pPr>
             <a:r>
-              <a:rPr lang="en-US" sz="950" b="1" dirty="0">
+              <a:rPr lang="en-US" sz="1300" b="1" dirty="0">
                 <a:solidFill>
                   <a:srgbClr val="0068B7"/>
                 </a:solidFill>
@@ -7383,20 +7664,20 @@
               </a:rPr>
               <a:t>Key idea</a:t>
             </a:r>
-            <a:endParaRPr lang="en-US" sz="950" dirty="0"/>
-          </a:p>
-        </p:txBody>
-      </p:sp>
-      <p:sp>
-        <p:nvSpPr>
-          <p:cNvPr id="13" name="Text 11"/>
-          <p:cNvSpPr/>
-          <p:nvPr/>
-        </p:nvSpPr>
-        <p:spPr>
-          <a:xfrm>
-            <a:off x="8074152" y="1856232"/>
-            <a:ext cx="2825496" cy="1261872"/>
+            <a:endParaRPr lang="en-US" sz="1300" dirty="0"/>
+          </a:p>
+        </p:txBody>
+      </p:sp>
+      <p:sp>
+        <p:nvSpPr>
+          <p:cNvPr id="14" name="Text 12"/>
+          <p:cNvSpPr/>
+          <p:nvPr/>
+        </p:nvSpPr>
+        <p:spPr>
+          <a:xfrm>
+            <a:off x="8074152" y="1920240"/>
+            <a:ext cx="2825496" cy="1188720"/>
           </a:xfrm>
           <a:prstGeom prst="rect">
             <a:avLst/>
@@ -7414,7 +7695,7 @@
               <a:buNone/>
             </a:pPr>
             <a:r>
-              <a:rPr lang="en-US" sz="1250" dirty="0">
+              <a:rPr lang="en-US" sz="1550" dirty="0">
                 <a:solidFill>
                   <a:srgbClr val="17364A"/>
                 </a:solidFill>
@@ -7424,13 +7705,13 @@
               </a:rPr>
               <a:t>Create a predictive model review plan for one public health use case.</a:t>
             </a:r>
-            <a:endParaRPr lang="en-US" sz="1250" dirty="0"/>
-          </a:p>
-        </p:txBody>
-      </p:sp>
-      <p:sp>
-        <p:nvSpPr>
-          <p:cNvPr id="14" name="Shape 12"/>
+            <a:endParaRPr lang="en-US" sz="1550" dirty="0"/>
+          </a:p>
+        </p:txBody>
+      </p:sp>
+      <p:sp>
+        <p:nvSpPr>
+          <p:cNvPr id="15" name="Shape 13"/>
           <p:cNvSpPr/>
           <p:nvPr/>
         </p:nvSpPr>
@@ -7457,14 +7738,14 @@
       </p:sp>
       <p:sp>
         <p:nvSpPr>
-          <p:cNvPr id="15" name="Text 13"/>
+          <p:cNvPr id="16" name="Text 14"/>
           <p:cNvSpPr/>
           <p:nvPr/>
         </p:nvSpPr>
         <p:spPr>
           <a:xfrm>
             <a:off x="8074152" y="3666744"/>
-            <a:ext cx="2825496" cy="201168"/>
+            <a:ext cx="2825496" cy="256032"/>
           </a:xfrm>
           <a:prstGeom prst="rect">
             <a:avLst/>
@@ -7480,7 +7761,7 @@
               <a:buNone/>
             </a:pPr>
             <a:r>
-              <a:rPr lang="en-US" sz="950" b="1" dirty="0">
+              <a:rPr lang="en-US" sz="1300" b="1" dirty="0">
                 <a:solidFill>
                   <a:srgbClr val="0068B7"/>
                 </a:solidFill>
@@ -7490,20 +7771,20 @@
               </a:rPr>
               <a:t>Use this for</a:t>
             </a:r>
-            <a:endParaRPr lang="en-US" sz="950" dirty="0"/>
-          </a:p>
-        </p:txBody>
-      </p:sp>
-      <p:sp>
-        <p:nvSpPr>
-          <p:cNvPr id="16" name="Text 14"/>
-          <p:cNvSpPr/>
-          <p:nvPr/>
-        </p:nvSpPr>
-        <p:spPr>
-          <a:xfrm>
-            <a:off x="8074152" y="3959352"/>
-            <a:ext cx="2825496" cy="1170432"/>
+            <a:endParaRPr lang="en-US" sz="1300" dirty="0"/>
+          </a:p>
+        </p:txBody>
+      </p:sp>
+      <p:sp>
+        <p:nvSpPr>
+          <p:cNvPr id="17" name="Text 15"/>
+          <p:cNvSpPr/>
+          <p:nvPr/>
+        </p:nvSpPr>
+        <p:spPr>
+          <a:xfrm>
+            <a:off x="8074152" y="4023360"/>
+            <a:ext cx="2825496" cy="1097280"/>
           </a:xfrm>
           <a:prstGeom prst="rect">
             <a:avLst/>
@@ -7521,7 +7802,7 @@
               <a:buNone/>
             </a:pPr>
             <a:r>
-              <a:rPr lang="en-US" sz="1250" dirty="0">
+              <a:rPr lang="en-US" sz="1550" dirty="0">
                 <a:solidFill>
                   <a:srgbClr val="17364A"/>
                 </a:solidFill>
@@ -7531,7 +7812,7 @@
               </a:rPr>
               <a:t>Connect the concept to public health decisions, safeguards, documentation, or implementation work.</a:t>
             </a:r>
-            <a:endParaRPr lang="en-US" sz="1250" dirty="0"/>
+            <a:endParaRPr lang="en-US" sz="1550" dirty="0"/>
           </a:p>
         </p:txBody>
       </p:sp>
@@ -7728,7 +8009,7 @@
                 <a:ea typeface="Aptos" pitchFamily="34" charset="-122"/>
                 <a:cs typeface="Aptos" pitchFamily="34" charset="-120"/>
               </a:rPr>
-              <a:t>© Paula Soper</a:t>
+              <a:t>Â© Paula Soper</a:t>
             </a:r>
             <a:endParaRPr lang="en-US" sz="800" dirty="0"/>
           </a:p>
@@ -7736,7 +8017,46 @@
       </p:sp>
       <p:sp>
         <p:nvSpPr>
-          <p:cNvPr id="7" name="Shape 5"/>
+          <p:cNvPr id="7" name="Text 5"/>
+          <p:cNvSpPr/>
+          <p:nvPr/>
+        </p:nvSpPr>
+        <p:spPr>
+          <a:xfrm>
+            <a:off x="11137392" y="6510528"/>
+            <a:ext cx="411480" cy="201168"/>
+          </a:xfrm>
+          <a:prstGeom prst="rect">
+            <a:avLst/>
+          </a:prstGeom>
+          <a:noFill/>
+          <a:ln/>
+        </p:spPr>
+        <p:txBody>
+          <a:bodyPr wrap="square" lIns="0" tIns="0" rIns="0" bIns="0" rtlCol="0" anchor="ctr"/>
+          <a:lstStyle/>
+          <a:p>
+            <a:pPr algn="r" indent="0" marL="0">
+              <a:buNone/>
+            </a:pPr>
+            <a:r>
+              <a:rPr lang="en-US" sz="900" dirty="0">
+                <a:solidFill>
+                  <a:srgbClr val="5F7181"/>
+                </a:solidFill>
+                <a:latin typeface="Aptos" pitchFamily="34" charset="0"/>
+                <a:ea typeface="Aptos" pitchFamily="34" charset="-122"/>
+                <a:cs typeface="Aptos" pitchFamily="34" charset="-120"/>
+              </a:rPr>
+              <a:t>18</a:t>
+            </a:r>
+            <a:endParaRPr lang="en-US" sz="900" dirty="0"/>
+          </a:p>
+        </p:txBody>
+      </p:sp>
+      <p:sp>
+        <p:nvSpPr>
+          <p:cNvPr id="8" name="Shape 6"/>
           <p:cNvSpPr/>
           <p:nvPr/>
         </p:nvSpPr>
@@ -7761,7 +8081,7 @@
       </p:sp>
       <p:sp>
         <p:nvSpPr>
-          <p:cNvPr id="8" name="Text 6"/>
+          <p:cNvPr id="9" name="Text 7"/>
           <p:cNvSpPr/>
           <p:nvPr/>
         </p:nvSpPr>
@@ -7800,14 +8120,14 @@
       </p:sp>
       <p:sp>
         <p:nvSpPr>
-          <p:cNvPr id="9" name="Text 7"/>
+          <p:cNvPr id="10" name="Text 8"/>
           <p:cNvSpPr/>
           <p:nvPr/>
         </p:nvSpPr>
         <p:spPr>
           <a:xfrm>
             <a:off x="640080" y="621792"/>
-            <a:ext cx="10881360" cy="566928"/>
+            <a:ext cx="10881360" cy="713232"/>
           </a:xfrm>
           <a:prstGeom prst="rect">
             <a:avLst/>
@@ -7825,7 +8145,7 @@
               <a:buNone/>
             </a:pPr>
             <a:r>
-              <a:rPr lang="en-US" sz="2700" b="1" dirty="0">
+              <a:rPr lang="en-US" sz="3400" b="1" dirty="0">
                 <a:solidFill>
                   <a:srgbClr val="003A63"/>
                 </a:solidFill>
@@ -7835,20 +8155,20 @@
               </a:rPr>
               <a:t>Expected Artifact or Evidence</a:t>
             </a:r>
-            <a:endParaRPr lang="en-US" sz="2700" dirty="0"/>
-          </a:p>
-        </p:txBody>
-      </p:sp>
-      <p:sp>
-        <p:nvSpPr>
-          <p:cNvPr id="10" name="Text 8"/>
-          <p:cNvSpPr/>
-          <p:nvPr/>
-        </p:nvSpPr>
-        <p:spPr>
-          <a:xfrm>
-            <a:off x="868680" y="1417320"/>
-            <a:ext cx="6675120" cy="4434840"/>
+            <a:endParaRPr lang="en-US" sz="3400" dirty="0"/>
+          </a:p>
+        </p:txBody>
+      </p:sp>
+      <p:sp>
+        <p:nvSpPr>
+          <p:cNvPr id="11" name="Text 9"/>
+          <p:cNvSpPr/>
+          <p:nvPr/>
+        </p:nvSpPr>
+        <p:spPr>
+          <a:xfrm>
+            <a:off x="868680" y="1508760"/>
+            <a:ext cx="6537960" cy="4160520"/>
           </a:xfrm>
           <a:prstGeom prst="rect">
             <a:avLst/>
@@ -7863,7 +8183,7 @@
           <a:lstStyle/>
           <a:p>
             <a:r>
-              <a:rPr lang="en-US" sz="1700" dirty="0">
+              <a:rPr lang="en-US" sz="2100" dirty="0">
                 <a:solidFill>
                   <a:srgbClr val="17364A"/>
                 </a:solidFill>
@@ -7873,11 +8193,11 @@
               </a:rPr>
               <a:t>Predictive model review plan</a:t>
             </a:r>
-            <a:endParaRPr lang="en-US" sz="1700" dirty="0"/>
-          </a:p>
-          <a:p>
-            <a:r>
-              <a:rPr lang="en-US" sz="1700" dirty="0">
+            <a:endParaRPr lang="en-US" sz="2100" dirty="0"/>
+          </a:p>
+          <a:p>
+            <a:r>
+              <a:rPr lang="en-US" sz="2100" dirty="0">
                 <a:solidFill>
                   <a:srgbClr val="17364A"/>
                 </a:solidFill>
@@ -7887,11 +8207,11 @@
               </a:rPr>
               <a:t>Risk score interpretation guide</a:t>
             </a:r>
-            <a:endParaRPr lang="en-US" sz="1700" dirty="0"/>
-          </a:p>
-          <a:p>
-            <a:r>
-              <a:rPr lang="en-US" sz="1700" dirty="0">
+            <a:endParaRPr lang="en-US" sz="2100" dirty="0"/>
+          </a:p>
+          <a:p>
+            <a:r>
+              <a:rPr lang="en-US" sz="2100" dirty="0">
                 <a:solidFill>
                   <a:srgbClr val="17364A"/>
                 </a:solidFill>
@@ -7901,13 +8221,13 @@
               </a:rPr>
               <a:t>Threshold and error tradeoff memo</a:t>
             </a:r>
-            <a:endParaRPr lang="en-US" sz="1700" dirty="0"/>
-          </a:p>
-        </p:txBody>
-      </p:sp>
-      <p:sp>
-        <p:nvSpPr>
-          <p:cNvPr id="11" name="Shape 9"/>
+            <a:endParaRPr lang="en-US" sz="2100" dirty="0"/>
+          </a:p>
+        </p:txBody>
+      </p:sp>
+      <p:sp>
+        <p:nvSpPr>
+          <p:cNvPr id="12" name="Shape 10"/>
           <p:cNvSpPr/>
           <p:nvPr/>
         </p:nvSpPr>
@@ -7934,14 +8254,14 @@
       </p:sp>
       <p:sp>
         <p:nvSpPr>
-          <p:cNvPr id="12" name="Text 10"/>
+          <p:cNvPr id="13" name="Text 11"/>
           <p:cNvSpPr/>
           <p:nvPr/>
         </p:nvSpPr>
         <p:spPr>
           <a:xfrm>
             <a:off x="8074152" y="1563624"/>
-            <a:ext cx="2825496" cy="201168"/>
+            <a:ext cx="2825496" cy="256032"/>
           </a:xfrm>
           <a:prstGeom prst="rect">
             <a:avLst/>
@@ -7957,7 +8277,7 @@
               <a:buNone/>
             </a:pPr>
             <a:r>
-              <a:rPr lang="en-US" sz="950" b="1" dirty="0">
+              <a:rPr lang="en-US" sz="1300" b="1" dirty="0">
                 <a:solidFill>
                   <a:srgbClr val="0068B7"/>
                 </a:solidFill>
@@ -7967,20 +8287,20 @@
               </a:rPr>
               <a:t>Key idea</a:t>
             </a:r>
-            <a:endParaRPr lang="en-US" sz="950" dirty="0"/>
-          </a:p>
-        </p:txBody>
-      </p:sp>
-      <p:sp>
-        <p:nvSpPr>
-          <p:cNvPr id="13" name="Text 11"/>
-          <p:cNvSpPr/>
-          <p:nvPr/>
-        </p:nvSpPr>
-        <p:spPr>
-          <a:xfrm>
-            <a:off x="8074152" y="1856232"/>
-            <a:ext cx="2825496" cy="1261872"/>
+            <a:endParaRPr lang="en-US" sz="1300" dirty="0"/>
+          </a:p>
+        </p:txBody>
+      </p:sp>
+      <p:sp>
+        <p:nvSpPr>
+          <p:cNvPr id="14" name="Text 12"/>
+          <p:cNvSpPr/>
+          <p:nvPr/>
+        </p:nvSpPr>
+        <p:spPr>
+          <a:xfrm>
+            <a:off x="8074152" y="1920240"/>
+            <a:ext cx="2825496" cy="1188720"/>
           </a:xfrm>
           <a:prstGeom prst="rect">
             <a:avLst/>
@@ -7998,7 +8318,7 @@
               <a:buNone/>
             </a:pPr>
             <a:r>
-              <a:rPr lang="en-US" sz="1250" dirty="0">
+              <a:rPr lang="en-US" sz="1550" dirty="0">
                 <a:solidFill>
                   <a:srgbClr val="17364A"/>
                 </a:solidFill>
@@ -8008,13 +8328,13 @@
               </a:rPr>
               <a:t>Predictive model review plan</a:t>
             </a:r>
-            <a:endParaRPr lang="en-US" sz="1250" dirty="0"/>
-          </a:p>
-        </p:txBody>
-      </p:sp>
-      <p:sp>
-        <p:nvSpPr>
-          <p:cNvPr id="14" name="Shape 12"/>
+            <a:endParaRPr lang="en-US" sz="1550" dirty="0"/>
+          </a:p>
+        </p:txBody>
+      </p:sp>
+      <p:sp>
+        <p:nvSpPr>
+          <p:cNvPr id="15" name="Shape 13"/>
           <p:cNvSpPr/>
           <p:nvPr/>
         </p:nvSpPr>
@@ -8041,14 +8361,14 @@
       </p:sp>
       <p:sp>
         <p:nvSpPr>
-          <p:cNvPr id="15" name="Text 13"/>
+          <p:cNvPr id="16" name="Text 14"/>
           <p:cNvSpPr/>
           <p:nvPr/>
         </p:nvSpPr>
         <p:spPr>
           <a:xfrm>
             <a:off x="8074152" y="3666744"/>
-            <a:ext cx="2825496" cy="201168"/>
+            <a:ext cx="2825496" cy="256032"/>
           </a:xfrm>
           <a:prstGeom prst="rect">
             <a:avLst/>
@@ -8064,7 +8384,7 @@
               <a:buNone/>
             </a:pPr>
             <a:r>
-              <a:rPr lang="en-US" sz="950" b="1" dirty="0">
+              <a:rPr lang="en-US" sz="1300" b="1" dirty="0">
                 <a:solidFill>
                   <a:srgbClr val="0068B7"/>
                 </a:solidFill>
@@ -8074,20 +8394,20 @@
               </a:rPr>
               <a:t>Use this for</a:t>
             </a:r>
-            <a:endParaRPr lang="en-US" sz="950" dirty="0"/>
-          </a:p>
-        </p:txBody>
-      </p:sp>
-      <p:sp>
-        <p:nvSpPr>
-          <p:cNvPr id="16" name="Text 14"/>
-          <p:cNvSpPr/>
-          <p:nvPr/>
-        </p:nvSpPr>
-        <p:spPr>
-          <a:xfrm>
-            <a:off x="8074152" y="3959352"/>
-            <a:ext cx="2825496" cy="1170432"/>
+            <a:endParaRPr lang="en-US" sz="1300" dirty="0"/>
+          </a:p>
+        </p:txBody>
+      </p:sp>
+      <p:sp>
+        <p:nvSpPr>
+          <p:cNvPr id="17" name="Text 15"/>
+          <p:cNvSpPr/>
+          <p:nvPr/>
+        </p:nvSpPr>
+        <p:spPr>
+          <a:xfrm>
+            <a:off x="8074152" y="4023360"/>
+            <a:ext cx="2825496" cy="1097280"/>
           </a:xfrm>
           <a:prstGeom prst="rect">
             <a:avLst/>
@@ -8105,7 +8425,7 @@
               <a:buNone/>
             </a:pPr>
             <a:r>
-              <a:rPr lang="en-US" sz="1250" dirty="0">
+              <a:rPr lang="en-US" sz="1550" dirty="0">
                 <a:solidFill>
                   <a:srgbClr val="17364A"/>
                 </a:solidFill>
@@ -8115,7 +8435,7 @@
               </a:rPr>
               <a:t>Connect the concept to public health decisions, safeguards, documentation, or implementation work.</a:t>
             </a:r>
-            <a:endParaRPr lang="en-US" sz="1250" dirty="0"/>
+            <a:endParaRPr lang="en-US" sz="1550" dirty="0"/>
           </a:p>
         </p:txBody>
       </p:sp>
@@ -8312,7 +8632,7 @@
                 <a:ea typeface="Aptos" pitchFamily="34" charset="-122"/>
                 <a:cs typeface="Aptos" pitchFamily="34" charset="-120"/>
               </a:rPr>
-              <a:t>© Paula Soper</a:t>
+              <a:t>Â© Paula Soper</a:t>
             </a:r>
             <a:endParaRPr lang="en-US" sz="800" dirty="0"/>
           </a:p>
@@ -8326,8 +8646,47 @@
         </p:nvSpPr>
         <p:spPr>
           <a:xfrm>
+            <a:off x="11137392" y="6510528"/>
+            <a:ext cx="411480" cy="201168"/>
+          </a:xfrm>
+          <a:prstGeom prst="rect">
+            <a:avLst/>
+          </a:prstGeom>
+          <a:noFill/>
+          <a:ln/>
+        </p:spPr>
+        <p:txBody>
+          <a:bodyPr wrap="square" lIns="0" tIns="0" rIns="0" bIns="0" rtlCol="0" anchor="ctr"/>
+          <a:lstStyle/>
+          <a:p>
+            <a:pPr algn="r" indent="0" marL="0">
+              <a:buNone/>
+            </a:pPr>
+            <a:r>
+              <a:rPr lang="en-US" sz="900" dirty="0">
+                <a:solidFill>
+                  <a:srgbClr val="5F7181"/>
+                </a:solidFill>
+                <a:latin typeface="Aptos" pitchFamily="34" charset="0"/>
+                <a:ea typeface="Aptos" pitchFamily="34" charset="-122"/>
+                <a:cs typeface="Aptos" pitchFamily="34" charset="-120"/>
+              </a:rPr>
+              <a:t>19</a:t>
+            </a:r>
+            <a:endParaRPr lang="en-US" sz="900" dirty="0"/>
+          </a:p>
+        </p:txBody>
+      </p:sp>
+      <p:sp>
+        <p:nvSpPr>
+          <p:cNvPr id="8" name="Text 6"/>
+          <p:cNvSpPr/>
+          <p:nvPr/>
+        </p:nvSpPr>
+        <p:spPr>
+          <a:xfrm>
             <a:off x="640080" y="658368"/>
-            <a:ext cx="10881360" cy="566928"/>
+            <a:ext cx="10881360" cy="713232"/>
           </a:xfrm>
           <a:prstGeom prst="rect">
             <a:avLst/>
@@ -8345,7 +8704,7 @@
               <a:buNone/>
             </a:pPr>
             <a:r>
-              <a:rPr lang="en-US" sz="2700" b="1" dirty="0">
+              <a:rPr lang="en-US" sz="3400" b="1" dirty="0">
                 <a:solidFill>
                   <a:srgbClr val="003A63"/>
                 </a:solidFill>
@@ -8355,20 +8714,20 @@
               </a:rPr>
               <a:t>Expected Artifact or Evidence Continued</a:t>
             </a:r>
-            <a:endParaRPr lang="en-US" sz="2700" dirty="0"/>
-          </a:p>
-        </p:txBody>
-      </p:sp>
-      <p:sp>
-        <p:nvSpPr>
-          <p:cNvPr id="8" name="Text 6"/>
-          <p:cNvSpPr/>
-          <p:nvPr/>
-        </p:nvSpPr>
-        <p:spPr>
-          <a:xfrm>
-            <a:off x="868680" y="1417320"/>
-            <a:ext cx="6675120" cy="4434840"/>
+            <a:endParaRPr lang="en-US" sz="3400" dirty="0"/>
+          </a:p>
+        </p:txBody>
+      </p:sp>
+      <p:sp>
+        <p:nvSpPr>
+          <p:cNvPr id="9" name="Text 7"/>
+          <p:cNvSpPr/>
+          <p:nvPr/>
+        </p:nvSpPr>
+        <p:spPr>
+          <a:xfrm>
+            <a:off x="868680" y="1508760"/>
+            <a:ext cx="6537960" cy="4160520"/>
           </a:xfrm>
           <a:prstGeom prst="rect">
             <a:avLst/>
@@ -8383,7 +8742,7 @@
           <a:lstStyle/>
           <a:p>
             <a:r>
-              <a:rPr lang="en-US" sz="1700" dirty="0">
+              <a:rPr lang="en-US" sz="2100" dirty="0">
                 <a:solidFill>
                   <a:srgbClr val="17364A"/>
                 </a:solidFill>
@@ -8393,13 +8752,13 @@
               </a:rPr>
               <a:t>Subgroup monitoring plan</a:t>
             </a:r>
-            <a:endParaRPr lang="en-US" sz="1700" dirty="0"/>
-          </a:p>
-        </p:txBody>
-      </p:sp>
-      <p:sp>
-        <p:nvSpPr>
-          <p:cNvPr id="9" name="Shape 7"/>
+            <a:endParaRPr lang="en-US" sz="2100" dirty="0"/>
+          </a:p>
+        </p:txBody>
+      </p:sp>
+      <p:sp>
+        <p:nvSpPr>
+          <p:cNvPr id="10" name="Shape 8"/>
           <p:cNvSpPr/>
           <p:nvPr/>
         </p:nvSpPr>
@@ -8426,14 +8785,14 @@
       </p:sp>
       <p:sp>
         <p:nvSpPr>
-          <p:cNvPr id="10" name="Text 8"/>
+          <p:cNvPr id="11" name="Text 9"/>
           <p:cNvSpPr/>
           <p:nvPr/>
         </p:nvSpPr>
         <p:spPr>
           <a:xfrm>
             <a:off x="8074152" y="1563624"/>
-            <a:ext cx="2825496" cy="201168"/>
+            <a:ext cx="2825496" cy="256032"/>
           </a:xfrm>
           <a:prstGeom prst="rect">
             <a:avLst/>
@@ -8449,7 +8808,7 @@
               <a:buNone/>
             </a:pPr>
             <a:r>
-              <a:rPr lang="en-US" sz="950" b="1" dirty="0">
+              <a:rPr lang="en-US" sz="1300" b="1" dirty="0">
                 <a:solidFill>
                   <a:srgbClr val="0068B7"/>
                 </a:solidFill>
@@ -8459,20 +8818,20 @@
               </a:rPr>
               <a:t>Key idea</a:t>
             </a:r>
-            <a:endParaRPr lang="en-US" sz="950" dirty="0"/>
-          </a:p>
-        </p:txBody>
-      </p:sp>
-      <p:sp>
-        <p:nvSpPr>
-          <p:cNvPr id="11" name="Text 9"/>
-          <p:cNvSpPr/>
-          <p:nvPr/>
-        </p:nvSpPr>
-        <p:spPr>
-          <a:xfrm>
-            <a:off x="8074152" y="1856232"/>
-            <a:ext cx="2825496" cy="1261872"/>
+            <a:endParaRPr lang="en-US" sz="1300" dirty="0"/>
+          </a:p>
+        </p:txBody>
+      </p:sp>
+      <p:sp>
+        <p:nvSpPr>
+          <p:cNvPr id="12" name="Text 10"/>
+          <p:cNvSpPr/>
+          <p:nvPr/>
+        </p:nvSpPr>
+        <p:spPr>
+          <a:xfrm>
+            <a:off x="8074152" y="1920240"/>
+            <a:ext cx="2825496" cy="1188720"/>
           </a:xfrm>
           <a:prstGeom prst="rect">
             <a:avLst/>
@@ -8490,7 +8849,7 @@
               <a:buNone/>
             </a:pPr>
             <a:r>
-              <a:rPr lang="en-US" sz="1250" dirty="0">
+              <a:rPr lang="en-US" sz="1550" dirty="0">
                 <a:solidFill>
                   <a:srgbClr val="17364A"/>
                 </a:solidFill>
@@ -8500,13 +8859,13 @@
               </a:rPr>
               <a:t>Subgroup monitoring plan</a:t>
             </a:r>
-            <a:endParaRPr lang="en-US" sz="1250" dirty="0"/>
-          </a:p>
-        </p:txBody>
-      </p:sp>
-      <p:sp>
-        <p:nvSpPr>
-          <p:cNvPr id="12" name="Shape 10"/>
+            <a:endParaRPr lang="en-US" sz="1550" dirty="0"/>
+          </a:p>
+        </p:txBody>
+      </p:sp>
+      <p:sp>
+        <p:nvSpPr>
+          <p:cNvPr id="13" name="Shape 11"/>
           <p:cNvSpPr/>
           <p:nvPr/>
         </p:nvSpPr>
@@ -8533,14 +8892,14 @@
       </p:sp>
       <p:sp>
         <p:nvSpPr>
-          <p:cNvPr id="13" name="Text 11"/>
+          <p:cNvPr id="14" name="Text 12"/>
           <p:cNvSpPr/>
           <p:nvPr/>
         </p:nvSpPr>
         <p:spPr>
           <a:xfrm>
             <a:off x="8074152" y="3666744"/>
-            <a:ext cx="2825496" cy="201168"/>
+            <a:ext cx="2825496" cy="256032"/>
           </a:xfrm>
           <a:prstGeom prst="rect">
             <a:avLst/>
@@ -8556,7 +8915,7 @@
               <a:buNone/>
             </a:pPr>
             <a:r>
-              <a:rPr lang="en-US" sz="950" b="1" dirty="0">
+              <a:rPr lang="en-US" sz="1300" b="1" dirty="0">
                 <a:solidFill>
                   <a:srgbClr val="0068B7"/>
                 </a:solidFill>
@@ -8566,20 +8925,20 @@
               </a:rPr>
               <a:t>Use this for</a:t>
             </a:r>
-            <a:endParaRPr lang="en-US" sz="950" dirty="0"/>
-          </a:p>
-        </p:txBody>
-      </p:sp>
-      <p:sp>
-        <p:nvSpPr>
-          <p:cNvPr id="14" name="Text 12"/>
-          <p:cNvSpPr/>
-          <p:nvPr/>
-        </p:nvSpPr>
-        <p:spPr>
-          <a:xfrm>
-            <a:off x="8074152" y="3959352"/>
-            <a:ext cx="2825496" cy="1170432"/>
+            <a:endParaRPr lang="en-US" sz="1300" dirty="0"/>
+          </a:p>
+        </p:txBody>
+      </p:sp>
+      <p:sp>
+        <p:nvSpPr>
+          <p:cNvPr id="15" name="Text 13"/>
+          <p:cNvSpPr/>
+          <p:nvPr/>
+        </p:nvSpPr>
+        <p:spPr>
+          <a:xfrm>
+            <a:off x="8074152" y="4023360"/>
+            <a:ext cx="2825496" cy="1097280"/>
           </a:xfrm>
           <a:prstGeom prst="rect">
             <a:avLst/>
@@ -8597,7 +8956,7 @@
               <a:buNone/>
             </a:pPr>
             <a:r>
-              <a:rPr lang="en-US" sz="1250" dirty="0">
+              <a:rPr lang="en-US" sz="1550" dirty="0">
                 <a:solidFill>
                   <a:srgbClr val="17364A"/>
                 </a:solidFill>
@@ -8607,7 +8966,7 @@
               </a:rPr>
               <a:t>Connect the concept to public health decisions, safeguards, documentation, or implementation work.</a:t>
             </a:r>
-            <a:endParaRPr lang="en-US" sz="1250" dirty="0"/>
+            <a:endParaRPr lang="en-US" sz="1550" dirty="0"/>
           </a:p>
         </p:txBody>
       </p:sp>
@@ -8804,7 +9163,7 @@
                 <a:ea typeface="Aptos" pitchFamily="34" charset="-122"/>
                 <a:cs typeface="Aptos" pitchFamily="34" charset="-120"/>
               </a:rPr>
-              <a:t>© Paula Soper</a:t>
+              <a:t>Â© Paula Soper</a:t>
             </a:r>
             <a:endParaRPr lang="en-US" sz="800" dirty="0"/>
           </a:p>
@@ -8818,8 +9177,47 @@
         </p:nvSpPr>
         <p:spPr>
           <a:xfrm>
+            <a:off x="11137392" y="6510528"/>
+            <a:ext cx="411480" cy="201168"/>
+          </a:xfrm>
+          <a:prstGeom prst="rect">
+            <a:avLst/>
+          </a:prstGeom>
+          <a:noFill/>
+          <a:ln/>
+        </p:spPr>
+        <p:txBody>
+          <a:bodyPr wrap="square" lIns="0" tIns="0" rIns="0" bIns="0" rtlCol="0" anchor="ctr"/>
+          <a:lstStyle/>
+          <a:p>
+            <a:pPr algn="r" indent="0" marL="0">
+              <a:buNone/>
+            </a:pPr>
+            <a:r>
+              <a:rPr lang="en-US" sz="900" dirty="0">
+                <a:solidFill>
+                  <a:srgbClr val="5F7181"/>
+                </a:solidFill>
+                <a:latin typeface="Aptos" pitchFamily="34" charset="0"/>
+                <a:ea typeface="Aptos" pitchFamily="34" charset="-122"/>
+                <a:cs typeface="Aptos" pitchFamily="34" charset="-120"/>
+              </a:rPr>
+              <a:t>2</a:t>
+            </a:r>
+            <a:endParaRPr lang="en-US" sz="900" dirty="0"/>
+          </a:p>
+        </p:txBody>
+      </p:sp>
+      <p:sp>
+        <p:nvSpPr>
+          <p:cNvPr id="8" name="Text 6"/>
+          <p:cNvSpPr/>
+          <p:nvPr/>
+        </p:nvSpPr>
+        <p:spPr>
+          <a:xfrm>
             <a:off x="640080" y="658368"/>
-            <a:ext cx="10881360" cy="566928"/>
+            <a:ext cx="10881360" cy="713232"/>
           </a:xfrm>
           <a:prstGeom prst="rect">
             <a:avLst/>
@@ -8837,7 +9235,7 @@
               <a:buNone/>
             </a:pPr>
             <a:r>
-              <a:rPr lang="en-US" sz="2700" b="1" dirty="0">
+              <a:rPr lang="en-US" sz="3400" b="1" dirty="0">
                 <a:solidFill>
                   <a:srgbClr val="003A63"/>
                 </a:solidFill>
@@ -8847,20 +9245,20 @@
               </a:rPr>
               <a:t>What this module helps you do</a:t>
             </a:r>
-            <a:endParaRPr lang="en-US" sz="2700" dirty="0"/>
-          </a:p>
-        </p:txBody>
-      </p:sp>
-      <p:sp>
-        <p:nvSpPr>
-          <p:cNvPr id="8" name="Text 6"/>
-          <p:cNvSpPr/>
-          <p:nvPr/>
-        </p:nvSpPr>
-        <p:spPr>
-          <a:xfrm>
-            <a:off x="868680" y="1417320"/>
-            <a:ext cx="6675120" cy="3291840"/>
+            <a:endParaRPr lang="en-US" sz="3400" dirty="0"/>
+          </a:p>
+        </p:txBody>
+      </p:sp>
+      <p:sp>
+        <p:nvSpPr>
+          <p:cNvPr id="9" name="Text 7"/>
+          <p:cNvSpPr/>
+          <p:nvPr/>
+        </p:nvSpPr>
+        <p:spPr>
+          <a:xfrm>
+            <a:off x="868680" y="1508760"/>
+            <a:ext cx="6446520" cy="2926080"/>
           </a:xfrm>
           <a:prstGeom prst="rect">
             <a:avLst/>
@@ -8875,7 +9273,7 @@
           <a:lstStyle/>
           <a:p>
             <a:r>
-              <a:rPr lang="en-US" sz="1700" dirty="0">
+              <a:rPr lang="en-US" sz="2100" dirty="0">
                 <a:solidFill>
                   <a:srgbClr val="17364A"/>
                 </a:solidFill>
@@ -8885,11 +9283,11 @@
               </a:rPr>
               <a:t>Predictive analytics uses data to estimate the likelihood of future events or outcomes.</a:t>
             </a:r>
-            <a:endParaRPr lang="en-US" sz="1700" dirty="0"/>
-          </a:p>
-          <a:p>
-            <a:r>
-              <a:rPr lang="en-US" sz="1700" dirty="0">
+            <a:endParaRPr lang="en-US" sz="2100" dirty="0"/>
+          </a:p>
+          <a:p>
+            <a:r>
+              <a:rPr lang="en-US" sz="2100" dirty="0">
                 <a:solidFill>
                   <a:srgbClr val="17364A"/>
                 </a:solidFill>
@@ -8897,13 +9295,13 @@
                 <a:ea typeface="Aptos" pitchFamily="34" charset="-122"/>
                 <a:cs typeface="Aptos" pitchFamily="34" charset="-120"/>
               </a:rPr>
-              <a:t>In public health, predictive models may be used to anticipate disease burden, identify populations at higher risk, prioritize outreach, allocate.</a:t>
-            </a:r>
-            <a:endParaRPr lang="en-US" sz="1700" dirty="0"/>
-          </a:p>
-          <a:p>
-            <a:r>
-              <a:rPr lang="en-US" sz="1700" dirty="0">
+              <a:t>In public health, predictive models may be used to anticipate disease burden, identify populations at higher.</a:t>
+            </a:r>
+            <a:endParaRPr lang="en-US" sz="2100" dirty="0"/>
+          </a:p>
+          <a:p>
+            <a:r>
+              <a:rPr lang="en-US" sz="2100" dirty="0">
                 <a:solidFill>
                   <a:srgbClr val="17364A"/>
                 </a:solidFill>
@@ -8911,29 +9309,15 @@
                 <a:ea typeface="Aptos" pitchFamily="34" charset="-122"/>
                 <a:cs typeface="Aptos" pitchFamily="34" charset="-120"/>
               </a:rPr>
-              <a:t>Risk stratification is the practice of grouping individuals, facilities, areas, events, or populations into categories based on estimated risk.</a:t>
-            </a:r>
-            <a:endParaRPr lang="en-US" sz="1700" dirty="0"/>
-          </a:p>
-          <a:p>
-            <a:r>
-              <a:rPr lang="en-US" sz="1700" dirty="0">
-                <a:solidFill>
-                  <a:srgbClr val="17364A"/>
-                </a:solidFill>
-                <a:latin typeface="Aptos" pitchFamily="34" charset="0"/>
-                <a:ea typeface="Aptos" pitchFamily="34" charset="-122"/>
-                <a:cs typeface="Aptos" pitchFamily="34" charset="-120"/>
-              </a:rPr>
-              <a:t>This module helps learners distinguish prediction from diagnosis, causation, eligibility determination, and public health judgment.</a:t>
-            </a:r>
-            <a:endParaRPr lang="en-US" sz="1700" dirty="0"/>
-          </a:p>
-        </p:txBody>
-      </p:sp>
-      <p:sp>
-        <p:nvSpPr>
-          <p:cNvPr id="9" name="Shape 7"/>
+              <a:t>Risk stratification is the practice of grouping individuals, facilities, areas, events, or populations into.</a:t>
+            </a:r>
+            <a:endParaRPr lang="en-US" sz="2100" dirty="0"/>
+          </a:p>
+        </p:txBody>
+      </p:sp>
+      <p:sp>
+        <p:nvSpPr>
+          <p:cNvPr id="10" name="Shape 8"/>
           <p:cNvSpPr/>
           <p:nvPr/>
         </p:nvSpPr>
@@ -8960,14 +9344,14 @@
       </p:sp>
       <p:sp>
         <p:nvSpPr>
-          <p:cNvPr id="10" name="Text 8"/>
+          <p:cNvPr id="11" name="Text 9"/>
           <p:cNvSpPr/>
           <p:nvPr/>
         </p:nvSpPr>
         <p:spPr>
           <a:xfrm>
             <a:off x="8074152" y="1563624"/>
-            <a:ext cx="2825496" cy="201168"/>
+            <a:ext cx="2825496" cy="256032"/>
           </a:xfrm>
           <a:prstGeom prst="rect">
             <a:avLst/>
@@ -8983,7 +9367,7 @@
               <a:buNone/>
             </a:pPr>
             <a:r>
-              <a:rPr lang="en-US" sz="950" b="1" dirty="0">
+              <a:rPr lang="en-US" sz="1300" b="1" dirty="0">
                 <a:solidFill>
                   <a:srgbClr val="0068B7"/>
                 </a:solidFill>
@@ -8993,20 +9377,20 @@
               </a:rPr>
               <a:t>Module details</a:t>
             </a:r>
-            <a:endParaRPr lang="en-US" sz="950" dirty="0"/>
-          </a:p>
-        </p:txBody>
-      </p:sp>
-      <p:sp>
-        <p:nvSpPr>
-          <p:cNvPr id="11" name="Text 9"/>
-          <p:cNvSpPr/>
-          <p:nvPr/>
-        </p:nvSpPr>
-        <p:spPr>
-          <a:xfrm>
-            <a:off x="8074152" y="1856232"/>
-            <a:ext cx="2825496" cy="1353312"/>
+            <a:endParaRPr lang="en-US" sz="1300" dirty="0"/>
+          </a:p>
+        </p:txBody>
+      </p:sp>
+      <p:sp>
+        <p:nvSpPr>
+          <p:cNvPr id="12" name="Text 10"/>
+          <p:cNvSpPr/>
+          <p:nvPr/>
+        </p:nvSpPr>
+        <p:spPr>
+          <a:xfrm>
+            <a:off x="8074152" y="1920240"/>
+            <a:ext cx="2825496" cy="1280160"/>
           </a:xfrm>
           <a:prstGeom prst="rect">
             <a:avLst/>
@@ -9024,7 +9408,7 @@
               <a:buNone/>
             </a:pPr>
             <a:r>
-              <a:rPr lang="en-US" sz="1250" dirty="0">
+              <a:rPr lang="en-US" sz="1550" dirty="0">
                 <a:solidFill>
                   <a:srgbClr val="17364A"/>
                 </a:solidFill>
@@ -9034,14 +9418,14 @@
               </a:rPr>
               <a:t>Level: applied/foundational</a:t>
             </a:r>
-            <a:endParaRPr lang="en-US" sz="1250" dirty="0"/>
+            <a:endParaRPr lang="en-US" sz="1550" dirty="0"/>
           </a:p>
           <a:p>
             <a:pPr indent="0" marL="0">
               <a:buNone/>
             </a:pPr>
             <a:r>
-              <a:rPr lang="en-US" sz="1250" dirty="0">
+              <a:rPr lang="en-US" sz="1550" dirty="0">
                 <a:solidFill>
                   <a:srgbClr val="17364A"/>
                 </a:solidFill>
@@ -9051,14 +9435,14 @@
               </a:rPr>
               <a:t>Primary track: Analytics and Modeling Track</a:t>
             </a:r>
-            <a:endParaRPr lang="en-US" sz="1250" dirty="0"/>
+            <a:endParaRPr lang="en-US" sz="1550" dirty="0"/>
           </a:p>
           <a:p>
             <a:pPr indent="0" marL="0">
               <a:buNone/>
             </a:pPr>
             <a:r>
-              <a:rPr lang="en-US" sz="1250" dirty="0">
+              <a:rPr lang="en-US" sz="1550" dirty="0">
                 <a:solidFill>
                   <a:srgbClr val="17364A"/>
                 </a:solidFill>
@@ -9068,32 +9452,32 @@
               </a:rPr>
               <a:t>Appears in tracks: analytics-modeling</a:t>
             </a:r>
-            <a:endParaRPr lang="en-US" sz="1250" dirty="0"/>
-          </a:p>
-        </p:txBody>
-      </p:sp>
-      <p:sp>
-        <p:nvSpPr>
-          <p:cNvPr id="12" name="Shape 10"/>
-          <p:cNvSpPr/>
-          <p:nvPr/>
-        </p:nvSpPr>
-        <p:spPr>
-          <a:xfrm>
-            <a:off x="7909560" y="3611880"/>
-            <a:ext cx="3154680" cy="1783080"/>
+            <a:endParaRPr lang="en-US" sz="1550" dirty="0"/>
+          </a:p>
+        </p:txBody>
+      </p:sp>
+      <p:sp>
+        <p:nvSpPr>
+          <p:cNvPr id="13" name="Shape 11"/>
+          <p:cNvSpPr/>
+          <p:nvPr/>
+        </p:nvSpPr>
+        <p:spPr>
+          <a:xfrm>
+            <a:off x="7635240" y="3730752"/>
+            <a:ext cx="1033272" cy="749808"/>
           </a:xfrm>
           <a:prstGeom prst="roundRect">
             <a:avLst>
-              <a:gd name="adj" fmla="val 6154"/>
+              <a:gd name="adj" fmla="val 14634"/>
             </a:avLst>
           </a:prstGeom>
           <a:solidFill>
-            <a:srgbClr val="EEF8ED"/>
+            <a:srgbClr val="0068B7"/>
           </a:solidFill>
           <a:ln w="12700">
             <a:solidFill>
-              <a:srgbClr val="B9D7E6"/>
+              <a:srgbClr val="0068B7"/>
             </a:solidFill>
             <a:prstDash val="solid"/>
           </a:ln>
@@ -9101,81 +9485,256 @@
       </p:sp>
       <p:sp>
         <p:nvSpPr>
-          <p:cNvPr id="13" name="Text 11"/>
-          <p:cNvSpPr/>
-          <p:nvPr/>
-        </p:nvSpPr>
-        <p:spPr>
-          <a:xfrm>
-            <a:off x="8074152" y="3758184"/>
-            <a:ext cx="2825496" cy="201168"/>
-          </a:xfrm>
-          <a:prstGeom prst="rect">
-            <a:avLst/>
-          </a:prstGeom>
-          <a:noFill/>
-          <a:ln/>
-        </p:spPr>
-        <p:txBody>
-          <a:bodyPr wrap="square" lIns="0" tIns="0" rIns="0" bIns="0" rtlCol="0" anchor="ctr"/>
-          <a:lstStyle/>
-          <a:p>
-            <a:pPr indent="0" marL="0">
-              <a:buNone/>
-            </a:pPr>
-            <a:r>
-              <a:rPr lang="en-US" sz="950" b="1" dirty="0">
-                <a:solidFill>
-                  <a:srgbClr val="0068B7"/>
-                </a:solidFill>
-                <a:latin typeface="Aptos" pitchFamily="34" charset="0"/>
-                <a:ea typeface="Aptos" pitchFamily="34" charset="-122"/>
-                <a:cs typeface="Aptos" pitchFamily="34" charset="-120"/>
-              </a:rPr>
-              <a:t>Learning approach</a:t>
-            </a:r>
-            <a:endParaRPr lang="en-US" sz="950" dirty="0"/>
-          </a:p>
-        </p:txBody>
-      </p:sp>
-      <p:sp>
-        <p:nvSpPr>
           <p:cNvPr id="14" name="Text 12"/>
           <p:cNvSpPr/>
           <p:nvPr/>
         </p:nvSpPr>
         <p:spPr>
           <a:xfrm>
-            <a:off x="8074152" y="4050792"/>
-            <a:ext cx="2825496" cy="1216152"/>
-          </a:xfrm>
-          <a:prstGeom prst="rect">
-            <a:avLst/>
-          </a:prstGeom>
-          <a:noFill/>
-          <a:ln/>
-        </p:spPr>
-        <p:txBody>
-          <a:bodyPr wrap="square" lIns="0" tIns="0" rIns="0" bIns="0" rtlCol="0" anchor="t">
+            <a:off x="7708392" y="3922776"/>
+            <a:ext cx="886968" cy="310896"/>
+          </a:xfrm>
+          <a:prstGeom prst="rect">
+            <a:avLst/>
+          </a:prstGeom>
+          <a:noFill/>
+          <a:ln/>
+        </p:spPr>
+        <p:txBody>
+          <a:bodyPr wrap="square" lIns="0" tIns="0" rIns="0" bIns="0" rtlCol="0" anchor="ctr">
             <a:normAutofit/>
           </a:bodyPr>
           <a:lstStyle/>
           <a:p>
-            <a:pPr indent="0" marL="0">
-              <a:buNone/>
-            </a:pPr>
-            <a:r>
-              <a:rPr lang="en-US" sz="1250" dirty="0">
-                <a:solidFill>
-                  <a:srgbClr val="17364A"/>
-                </a:solidFill>
-                <a:latin typeface="Aptos" pitchFamily="34" charset="0"/>
-                <a:ea typeface="Aptos" pitchFamily="34" charset="-122"/>
-                <a:cs typeface="Aptos" pitchFamily="34" charset="-120"/>
-              </a:rPr>
-              <a:t>Review the core ideas, complete the practical exercise, check your understanding, and use the related plays and tools to apply the lesson.</a:t>
-            </a:r>
-            <a:endParaRPr lang="en-US" sz="1250" dirty="0"/>
+            <a:pPr algn="ctr" indent="0" marL="0">
+              <a:buNone/>
+            </a:pPr>
+            <a:r>
+              <a:rPr lang="en-US" sz="1500" b="1" dirty="0">
+                <a:solidFill>
+                  <a:srgbClr val="FFFFFF"/>
+                </a:solidFill>
+                <a:latin typeface="Aptos" pitchFamily="34" charset="0"/>
+                <a:ea typeface="Aptos" pitchFamily="34" charset="-122"/>
+                <a:cs typeface="Aptos" pitchFamily="34" charset="-120"/>
+              </a:rPr>
+              <a:t>Learn</a:t>
+            </a:r>
+            <a:endParaRPr lang="en-US" sz="1500" dirty="0"/>
+          </a:p>
+        </p:txBody>
+      </p:sp>
+      <p:sp>
+        <p:nvSpPr>
+          <p:cNvPr id="15" name="Text 13"/>
+          <p:cNvSpPr/>
+          <p:nvPr/>
+        </p:nvSpPr>
+        <p:spPr>
+          <a:xfrm>
+            <a:off x="8695944" y="3941064"/>
+            <a:ext cx="201168" cy="256032"/>
+          </a:xfrm>
+          <a:prstGeom prst="rect">
+            <a:avLst/>
+          </a:prstGeom>
+          <a:noFill/>
+          <a:ln/>
+        </p:spPr>
+        <p:txBody>
+          <a:bodyPr wrap="square" lIns="0" tIns="0" rIns="0" bIns="0" rtlCol="0" anchor="ctr"/>
+          <a:lstStyle/>
+          <a:p>
+            <a:pPr algn="ctr" indent="0" marL="0">
+              <a:buNone/>
+            </a:pPr>
+            <a:r>
+              <a:rPr lang="en-US" sz="1800" b="1" dirty="0">
+                <a:solidFill>
+                  <a:srgbClr val="0068B7"/>
+                </a:solidFill>
+                <a:latin typeface="Aptos" pitchFamily="34" charset="0"/>
+                <a:ea typeface="Aptos" pitchFamily="34" charset="-122"/>
+                <a:cs typeface="Aptos" pitchFamily="34" charset="-120"/>
+              </a:rPr>
+              <a:t>â†’</a:t>
+            </a:r>
+            <a:endParaRPr lang="en-US" sz="1800" dirty="0"/>
+          </a:p>
+        </p:txBody>
+      </p:sp>
+      <p:sp>
+        <p:nvSpPr>
+          <p:cNvPr id="16" name="Shape 14"/>
+          <p:cNvSpPr/>
+          <p:nvPr/>
+        </p:nvSpPr>
+        <p:spPr>
+          <a:xfrm>
+            <a:off x="8924544" y="3730752"/>
+            <a:ext cx="1033272" cy="749808"/>
+          </a:xfrm>
+          <a:prstGeom prst="roundRect">
+            <a:avLst>
+              <a:gd name="adj" fmla="val 14634"/>
+            </a:avLst>
+          </a:prstGeom>
+          <a:solidFill>
+            <a:srgbClr val="2F8A28"/>
+          </a:solidFill>
+          <a:ln w="12700">
+            <a:solidFill>
+              <a:srgbClr val="2F8A28"/>
+            </a:solidFill>
+            <a:prstDash val="solid"/>
+          </a:ln>
+        </p:spPr>
+      </p:sp>
+      <p:sp>
+        <p:nvSpPr>
+          <p:cNvPr id="17" name="Text 15"/>
+          <p:cNvSpPr/>
+          <p:nvPr/>
+        </p:nvSpPr>
+        <p:spPr>
+          <a:xfrm>
+            <a:off x="8997696" y="3922776"/>
+            <a:ext cx="886968" cy="310896"/>
+          </a:xfrm>
+          <a:prstGeom prst="rect">
+            <a:avLst/>
+          </a:prstGeom>
+          <a:noFill/>
+          <a:ln/>
+        </p:spPr>
+        <p:txBody>
+          <a:bodyPr wrap="square" lIns="0" tIns="0" rIns="0" bIns="0" rtlCol="0" anchor="ctr">
+            <a:normAutofit/>
+          </a:bodyPr>
+          <a:lstStyle/>
+          <a:p>
+            <a:pPr algn="ctr" indent="0" marL="0">
+              <a:buNone/>
+            </a:pPr>
+            <a:r>
+              <a:rPr lang="en-US" sz="1500" b="1" dirty="0">
+                <a:solidFill>
+                  <a:srgbClr val="FFFFFF"/>
+                </a:solidFill>
+                <a:latin typeface="Aptos" pitchFamily="34" charset="0"/>
+                <a:ea typeface="Aptos" pitchFamily="34" charset="-122"/>
+                <a:cs typeface="Aptos" pitchFamily="34" charset="-120"/>
+              </a:rPr>
+              <a:t>Apply</a:t>
+            </a:r>
+            <a:endParaRPr lang="en-US" sz="1500" dirty="0"/>
+          </a:p>
+        </p:txBody>
+      </p:sp>
+      <p:sp>
+        <p:nvSpPr>
+          <p:cNvPr id="18" name="Text 16"/>
+          <p:cNvSpPr/>
+          <p:nvPr/>
+        </p:nvSpPr>
+        <p:spPr>
+          <a:xfrm>
+            <a:off x="9985248" y="3941064"/>
+            <a:ext cx="201168" cy="256032"/>
+          </a:xfrm>
+          <a:prstGeom prst="rect">
+            <a:avLst/>
+          </a:prstGeom>
+          <a:noFill/>
+          <a:ln/>
+        </p:spPr>
+        <p:txBody>
+          <a:bodyPr wrap="square" lIns="0" tIns="0" rIns="0" bIns="0" rtlCol="0" anchor="ctr"/>
+          <a:lstStyle/>
+          <a:p>
+            <a:pPr algn="ctr" indent="0" marL="0">
+              <a:buNone/>
+            </a:pPr>
+            <a:r>
+              <a:rPr lang="en-US" sz="1800" b="1" dirty="0">
+                <a:solidFill>
+                  <a:srgbClr val="0068B7"/>
+                </a:solidFill>
+                <a:latin typeface="Aptos" pitchFamily="34" charset="0"/>
+                <a:ea typeface="Aptos" pitchFamily="34" charset="-122"/>
+                <a:cs typeface="Aptos" pitchFamily="34" charset="-120"/>
+              </a:rPr>
+              <a:t>â†’</a:t>
+            </a:r>
+            <a:endParaRPr lang="en-US" sz="1800" dirty="0"/>
+          </a:p>
+        </p:txBody>
+      </p:sp>
+      <p:sp>
+        <p:nvSpPr>
+          <p:cNvPr id="19" name="Shape 17"/>
+          <p:cNvSpPr/>
+          <p:nvPr/>
+        </p:nvSpPr>
+        <p:spPr>
+          <a:xfrm>
+            <a:off x="10213848" y="3730752"/>
+            <a:ext cx="1033272" cy="749808"/>
+          </a:xfrm>
+          <a:prstGeom prst="roundRect">
+            <a:avLst>
+              <a:gd name="adj" fmla="val 14634"/>
+            </a:avLst>
+          </a:prstGeom>
+          <a:solidFill>
+            <a:srgbClr val="6A4CA3"/>
+          </a:solidFill>
+          <a:ln w="12700">
+            <a:solidFill>
+              <a:srgbClr val="6A4CA3"/>
+            </a:solidFill>
+            <a:prstDash val="solid"/>
+          </a:ln>
+        </p:spPr>
+      </p:sp>
+      <p:sp>
+        <p:nvSpPr>
+          <p:cNvPr id="20" name="Text 18"/>
+          <p:cNvSpPr/>
+          <p:nvPr/>
+        </p:nvSpPr>
+        <p:spPr>
+          <a:xfrm>
+            <a:off x="10287000" y="3922776"/>
+            <a:ext cx="886968" cy="310896"/>
+          </a:xfrm>
+          <a:prstGeom prst="rect">
+            <a:avLst/>
+          </a:prstGeom>
+          <a:noFill/>
+          <a:ln/>
+        </p:spPr>
+        <p:txBody>
+          <a:bodyPr wrap="square" lIns="0" tIns="0" rIns="0" bIns="0" rtlCol="0" anchor="ctr">
+            <a:normAutofit/>
+          </a:bodyPr>
+          <a:lstStyle/>
+          <a:p>
+            <a:pPr algn="ctr" indent="0" marL="0">
+              <a:buNone/>
+            </a:pPr>
+            <a:r>
+              <a:rPr lang="en-US" sz="1500" b="1" dirty="0">
+                <a:solidFill>
+                  <a:srgbClr val="FFFFFF"/>
+                </a:solidFill>
+                <a:latin typeface="Aptos" pitchFamily="34" charset="0"/>
+                <a:ea typeface="Aptos" pitchFamily="34" charset="-122"/>
+                <a:cs typeface="Aptos" pitchFamily="34" charset="-120"/>
+              </a:rPr>
+              <a:t>Document</a:t>
+            </a:r>
+            <a:endParaRPr lang="en-US" sz="1500" dirty="0"/>
           </a:p>
         </p:txBody>
       </p:sp>
@@ -9372,7 +9931,7 @@
                 <a:ea typeface="Aptos" pitchFamily="34" charset="-122"/>
                 <a:cs typeface="Aptos" pitchFamily="34" charset="-120"/>
               </a:rPr>
-              <a:t>© Paula Soper</a:t>
+              <a:t>Â© Paula Soper</a:t>
             </a:r>
             <a:endParaRPr lang="en-US" sz="800" dirty="0"/>
           </a:p>
@@ -9380,7 +9939,46 @@
       </p:sp>
       <p:sp>
         <p:nvSpPr>
-          <p:cNvPr id="7" name="Shape 5"/>
+          <p:cNvPr id="7" name="Text 5"/>
+          <p:cNvSpPr/>
+          <p:nvPr/>
+        </p:nvSpPr>
+        <p:spPr>
+          <a:xfrm>
+            <a:off x="11137392" y="6510528"/>
+            <a:ext cx="411480" cy="201168"/>
+          </a:xfrm>
+          <a:prstGeom prst="rect">
+            <a:avLst/>
+          </a:prstGeom>
+          <a:noFill/>
+          <a:ln/>
+        </p:spPr>
+        <p:txBody>
+          <a:bodyPr wrap="square" lIns="0" tIns="0" rIns="0" bIns="0" rtlCol="0" anchor="ctr"/>
+          <a:lstStyle/>
+          <a:p>
+            <a:pPr algn="r" indent="0" marL="0">
+              <a:buNone/>
+            </a:pPr>
+            <a:r>
+              <a:rPr lang="en-US" sz="900" dirty="0">
+                <a:solidFill>
+                  <a:srgbClr val="5F7181"/>
+                </a:solidFill>
+                <a:latin typeface="Aptos" pitchFamily="34" charset="0"/>
+                <a:ea typeface="Aptos" pitchFamily="34" charset="-122"/>
+                <a:cs typeface="Aptos" pitchFamily="34" charset="-120"/>
+              </a:rPr>
+              <a:t>20</a:t>
+            </a:r>
+            <a:endParaRPr lang="en-US" sz="900" dirty="0"/>
+          </a:p>
+        </p:txBody>
+      </p:sp>
+      <p:sp>
+        <p:nvSpPr>
+          <p:cNvPr id="8" name="Shape 6"/>
           <p:cNvSpPr/>
           <p:nvPr/>
         </p:nvSpPr>
@@ -9405,7 +10003,7 @@
       </p:sp>
       <p:sp>
         <p:nvSpPr>
-          <p:cNvPr id="8" name="Text 6"/>
+          <p:cNvPr id="9" name="Text 7"/>
           <p:cNvSpPr/>
           <p:nvPr/>
         </p:nvSpPr>
@@ -9444,14 +10042,14 @@
       </p:sp>
       <p:sp>
         <p:nvSpPr>
-          <p:cNvPr id="9" name="Text 7"/>
+          <p:cNvPr id="10" name="Text 8"/>
           <p:cNvSpPr/>
           <p:nvPr/>
         </p:nvSpPr>
         <p:spPr>
           <a:xfrm>
             <a:off x="640080" y="621792"/>
-            <a:ext cx="10881360" cy="566928"/>
+            <a:ext cx="10881360" cy="713232"/>
           </a:xfrm>
           <a:prstGeom prst="rect">
             <a:avLst/>
@@ -9469,7 +10067,7 @@
               <a:buNone/>
             </a:pPr>
             <a:r>
-              <a:rPr lang="en-US" sz="2700" b="1" dirty="0">
+              <a:rPr lang="en-US" sz="3400" b="1" dirty="0">
                 <a:solidFill>
                   <a:srgbClr val="003A63"/>
                 </a:solidFill>
@@ -9479,20 +10077,20 @@
               </a:rPr>
               <a:t>Expected Assignment</a:t>
             </a:r>
-            <a:endParaRPr lang="en-US" sz="2700" dirty="0"/>
-          </a:p>
-        </p:txBody>
-      </p:sp>
-      <p:sp>
-        <p:nvSpPr>
-          <p:cNvPr id="10" name="Text 8"/>
-          <p:cNvSpPr/>
-          <p:nvPr/>
-        </p:nvSpPr>
-        <p:spPr>
-          <a:xfrm>
-            <a:off x="868680" y="1417320"/>
-            <a:ext cx="6675120" cy="4434840"/>
+            <a:endParaRPr lang="en-US" sz="3400" dirty="0"/>
+          </a:p>
+        </p:txBody>
+      </p:sp>
+      <p:sp>
+        <p:nvSpPr>
+          <p:cNvPr id="11" name="Text 9"/>
+          <p:cNvSpPr/>
+          <p:nvPr/>
+        </p:nvSpPr>
+        <p:spPr>
+          <a:xfrm>
+            <a:off x="868680" y="1508760"/>
+            <a:ext cx="6537960" cy="4160520"/>
           </a:xfrm>
           <a:prstGeom prst="rect">
             <a:avLst/>
@@ -9507,7 +10105,7 @@
           <a:lstStyle/>
           <a:p>
             <a:r>
-              <a:rPr lang="en-US" sz="1700" dirty="0">
+              <a:rPr lang="en-US" sz="2100" dirty="0">
                 <a:solidFill>
                   <a:srgbClr val="17364A"/>
                 </a:solidFill>
@@ -9517,11 +10115,11 @@
               </a:rPr>
               <a:t>Predictive model review plan</a:t>
             </a:r>
-            <a:endParaRPr lang="en-US" sz="1700" dirty="0"/>
-          </a:p>
-          <a:p>
-            <a:r>
-              <a:rPr lang="en-US" sz="1700" dirty="0">
+            <a:endParaRPr lang="en-US" sz="2100" dirty="0"/>
+          </a:p>
+          <a:p>
+            <a:r>
+              <a:rPr lang="en-US" sz="2100" dirty="0">
                 <a:solidFill>
                   <a:srgbClr val="17364A"/>
                 </a:solidFill>
@@ -9531,11 +10129,11 @@
               </a:rPr>
               <a:t>Risk score interpretation guide</a:t>
             </a:r>
-            <a:endParaRPr lang="en-US" sz="1700" dirty="0"/>
-          </a:p>
-          <a:p>
-            <a:r>
-              <a:rPr lang="en-US" sz="1700" dirty="0">
+            <a:endParaRPr lang="en-US" sz="2100" dirty="0"/>
+          </a:p>
+          <a:p>
+            <a:r>
+              <a:rPr lang="en-US" sz="2100" dirty="0">
                 <a:solidFill>
                   <a:srgbClr val="17364A"/>
                 </a:solidFill>
@@ -9545,27 +10143,13 @@
               </a:rPr>
               <a:t>Threshold and error tradeoff memo</a:t>
             </a:r>
-            <a:endParaRPr lang="en-US" sz="1700" dirty="0"/>
-          </a:p>
-          <a:p>
-            <a:r>
-              <a:rPr lang="en-US" sz="1700" dirty="0">
-                <a:solidFill>
-                  <a:srgbClr val="17364A"/>
-                </a:solidFill>
-                <a:latin typeface="Aptos" pitchFamily="34" charset="0"/>
-                <a:ea typeface="Aptos" pitchFamily="34" charset="-122"/>
-                <a:cs typeface="Aptos" pitchFamily="34" charset="-120"/>
-              </a:rPr>
-              <a:t>Subgroup monitoring plan</a:t>
-            </a:r>
-            <a:endParaRPr lang="en-US" sz="1700" dirty="0"/>
-          </a:p>
-        </p:txBody>
-      </p:sp>
-      <p:sp>
-        <p:nvSpPr>
-          <p:cNvPr id="11" name="Shape 9"/>
+            <a:endParaRPr lang="en-US" sz="2100" dirty="0"/>
+          </a:p>
+        </p:txBody>
+      </p:sp>
+      <p:sp>
+        <p:nvSpPr>
+          <p:cNvPr id="12" name="Shape 10"/>
           <p:cNvSpPr/>
           <p:nvPr/>
         </p:nvSpPr>
@@ -9592,14 +10176,14 @@
       </p:sp>
       <p:sp>
         <p:nvSpPr>
-          <p:cNvPr id="12" name="Text 10"/>
+          <p:cNvPr id="13" name="Text 11"/>
           <p:cNvSpPr/>
           <p:nvPr/>
         </p:nvSpPr>
         <p:spPr>
           <a:xfrm>
             <a:off x="8074152" y="1563624"/>
-            <a:ext cx="2825496" cy="201168"/>
+            <a:ext cx="2825496" cy="256032"/>
           </a:xfrm>
           <a:prstGeom prst="rect">
             <a:avLst/>
@@ -9615,7 +10199,7 @@
               <a:buNone/>
             </a:pPr>
             <a:r>
-              <a:rPr lang="en-US" sz="950" b="1" dirty="0">
+              <a:rPr lang="en-US" sz="1300" b="1" dirty="0">
                 <a:solidFill>
                   <a:srgbClr val="0068B7"/>
                 </a:solidFill>
@@ -9625,20 +10209,20 @@
               </a:rPr>
               <a:t>Key idea</a:t>
             </a:r>
-            <a:endParaRPr lang="en-US" sz="950" dirty="0"/>
-          </a:p>
-        </p:txBody>
-      </p:sp>
-      <p:sp>
-        <p:nvSpPr>
-          <p:cNvPr id="13" name="Text 11"/>
-          <p:cNvSpPr/>
-          <p:nvPr/>
-        </p:nvSpPr>
-        <p:spPr>
-          <a:xfrm>
-            <a:off x="8074152" y="1856232"/>
-            <a:ext cx="2825496" cy="1261872"/>
+            <a:endParaRPr lang="en-US" sz="1300" dirty="0"/>
+          </a:p>
+        </p:txBody>
+      </p:sp>
+      <p:sp>
+        <p:nvSpPr>
+          <p:cNvPr id="14" name="Text 12"/>
+          <p:cNvSpPr/>
+          <p:nvPr/>
+        </p:nvSpPr>
+        <p:spPr>
+          <a:xfrm>
+            <a:off x="8074152" y="1920240"/>
+            <a:ext cx="2825496" cy="1188720"/>
           </a:xfrm>
           <a:prstGeom prst="rect">
             <a:avLst/>
@@ -9656,7 +10240,7 @@
               <a:buNone/>
             </a:pPr>
             <a:r>
-              <a:rPr lang="en-US" sz="1250" dirty="0">
+              <a:rPr lang="en-US" sz="1550" dirty="0">
                 <a:solidFill>
                   <a:srgbClr val="17364A"/>
                 </a:solidFill>
@@ -9666,13 +10250,13 @@
               </a:rPr>
               <a:t>Predictive model review plan</a:t>
             </a:r>
-            <a:endParaRPr lang="en-US" sz="1250" dirty="0"/>
-          </a:p>
-        </p:txBody>
-      </p:sp>
-      <p:sp>
-        <p:nvSpPr>
-          <p:cNvPr id="14" name="Shape 12"/>
+            <a:endParaRPr lang="en-US" sz="1550" dirty="0"/>
+          </a:p>
+        </p:txBody>
+      </p:sp>
+      <p:sp>
+        <p:nvSpPr>
+          <p:cNvPr id="15" name="Shape 13"/>
           <p:cNvSpPr/>
           <p:nvPr/>
         </p:nvSpPr>
@@ -9699,14 +10283,14 @@
       </p:sp>
       <p:sp>
         <p:nvSpPr>
-          <p:cNvPr id="15" name="Text 13"/>
+          <p:cNvPr id="16" name="Text 14"/>
           <p:cNvSpPr/>
           <p:nvPr/>
         </p:nvSpPr>
         <p:spPr>
           <a:xfrm>
             <a:off x="8074152" y="3666744"/>
-            <a:ext cx="2825496" cy="201168"/>
+            <a:ext cx="2825496" cy="256032"/>
           </a:xfrm>
           <a:prstGeom prst="rect">
             <a:avLst/>
@@ -9722,7 +10306,7 @@
               <a:buNone/>
             </a:pPr>
             <a:r>
-              <a:rPr lang="en-US" sz="950" b="1" dirty="0">
+              <a:rPr lang="en-US" sz="1300" b="1" dirty="0">
                 <a:solidFill>
                   <a:srgbClr val="0068B7"/>
                 </a:solidFill>
@@ -9732,20 +10316,20 @@
               </a:rPr>
               <a:t>Use this for</a:t>
             </a:r>
-            <a:endParaRPr lang="en-US" sz="950" dirty="0"/>
-          </a:p>
-        </p:txBody>
-      </p:sp>
-      <p:sp>
-        <p:nvSpPr>
-          <p:cNvPr id="16" name="Text 14"/>
-          <p:cNvSpPr/>
-          <p:nvPr/>
-        </p:nvSpPr>
-        <p:spPr>
-          <a:xfrm>
-            <a:off x="8074152" y="3959352"/>
-            <a:ext cx="2825496" cy="1170432"/>
+            <a:endParaRPr lang="en-US" sz="1300" dirty="0"/>
+          </a:p>
+        </p:txBody>
+      </p:sp>
+      <p:sp>
+        <p:nvSpPr>
+          <p:cNvPr id="17" name="Text 15"/>
+          <p:cNvSpPr/>
+          <p:nvPr/>
+        </p:nvSpPr>
+        <p:spPr>
+          <a:xfrm>
+            <a:off x="8074152" y="4023360"/>
+            <a:ext cx="2825496" cy="1097280"/>
           </a:xfrm>
           <a:prstGeom prst="rect">
             <a:avLst/>
@@ -9763,7 +10347,7 @@
               <a:buNone/>
             </a:pPr>
             <a:r>
-              <a:rPr lang="en-US" sz="1250" dirty="0">
+              <a:rPr lang="en-US" sz="1550" dirty="0">
                 <a:solidFill>
                   <a:srgbClr val="17364A"/>
                 </a:solidFill>
@@ -9773,7 +10357,7 @@
               </a:rPr>
               <a:t>Connect the concept to public health decisions, safeguards, documentation, or implementation work.</a:t>
             </a:r>
-            <a:endParaRPr lang="en-US" sz="1250" dirty="0"/>
+            <a:endParaRPr lang="en-US" sz="1550" dirty="0"/>
           </a:p>
         </p:txBody>
       </p:sp>
@@ -9970,7 +10554,7 @@
                 <a:ea typeface="Aptos" pitchFamily="34" charset="-122"/>
                 <a:cs typeface="Aptos" pitchFamily="34" charset="-120"/>
               </a:rPr>
-              <a:t>© Paula Soper</a:t>
+              <a:t>Â© Paula Soper</a:t>
             </a:r>
             <a:endParaRPr lang="en-US" sz="800" dirty="0"/>
           </a:p>
@@ -9978,7 +10562,46 @@
       </p:sp>
       <p:sp>
         <p:nvSpPr>
-          <p:cNvPr id="7" name="Shape 5"/>
+          <p:cNvPr id="7" name="Text 5"/>
+          <p:cNvSpPr/>
+          <p:nvPr/>
+        </p:nvSpPr>
+        <p:spPr>
+          <a:xfrm>
+            <a:off x="11137392" y="6510528"/>
+            <a:ext cx="411480" cy="201168"/>
+          </a:xfrm>
+          <a:prstGeom prst="rect">
+            <a:avLst/>
+          </a:prstGeom>
+          <a:noFill/>
+          <a:ln/>
+        </p:spPr>
+        <p:txBody>
+          <a:bodyPr wrap="square" lIns="0" tIns="0" rIns="0" bIns="0" rtlCol="0" anchor="ctr"/>
+          <a:lstStyle/>
+          <a:p>
+            <a:pPr algn="r" indent="0" marL="0">
+              <a:buNone/>
+            </a:pPr>
+            <a:r>
+              <a:rPr lang="en-US" sz="900" dirty="0">
+                <a:solidFill>
+                  <a:srgbClr val="5F7181"/>
+                </a:solidFill>
+                <a:latin typeface="Aptos" pitchFamily="34" charset="0"/>
+                <a:ea typeface="Aptos" pitchFamily="34" charset="-122"/>
+                <a:cs typeface="Aptos" pitchFamily="34" charset="-120"/>
+              </a:rPr>
+              <a:t>21</a:t>
+            </a:r>
+            <a:endParaRPr lang="en-US" sz="900" dirty="0"/>
+          </a:p>
+        </p:txBody>
+      </p:sp>
+      <p:sp>
+        <p:nvSpPr>
+          <p:cNvPr id="8" name="Shape 6"/>
           <p:cNvSpPr/>
           <p:nvPr/>
         </p:nvSpPr>
@@ -10003,7 +10626,7 @@
       </p:sp>
       <p:sp>
         <p:nvSpPr>
-          <p:cNvPr id="8" name="Text 6"/>
+          <p:cNvPr id="9" name="Text 7"/>
           <p:cNvSpPr/>
           <p:nvPr/>
         </p:nvSpPr>
@@ -10042,14 +10665,14 @@
       </p:sp>
       <p:sp>
         <p:nvSpPr>
-          <p:cNvPr id="9" name="Text 7"/>
+          <p:cNvPr id="10" name="Text 8"/>
           <p:cNvSpPr/>
           <p:nvPr/>
         </p:nvSpPr>
         <p:spPr>
           <a:xfrm>
             <a:off x="640080" y="621792"/>
-            <a:ext cx="10881360" cy="566928"/>
+            <a:ext cx="10881360" cy="713232"/>
           </a:xfrm>
           <a:prstGeom prst="rect">
             <a:avLst/>
@@ -10067,7 +10690,7 @@
               <a:buNone/>
             </a:pPr>
             <a:r>
-              <a:rPr lang="en-US" sz="2700" b="1" dirty="0">
+              <a:rPr lang="en-US" sz="3400" b="1" dirty="0">
                 <a:solidFill>
                   <a:srgbClr val="003A63"/>
                 </a:solidFill>
@@ -10077,20 +10700,20 @@
               </a:rPr>
               <a:t>Knowledge Check</a:t>
             </a:r>
-            <a:endParaRPr lang="en-US" sz="2700" dirty="0"/>
-          </a:p>
-        </p:txBody>
-      </p:sp>
-      <p:sp>
-        <p:nvSpPr>
-          <p:cNvPr id="10" name="Text 8"/>
-          <p:cNvSpPr/>
-          <p:nvPr/>
-        </p:nvSpPr>
-        <p:spPr>
-          <a:xfrm>
-            <a:off x="868680" y="1417320"/>
-            <a:ext cx="6675120" cy="4434840"/>
+            <a:endParaRPr lang="en-US" sz="3400" dirty="0"/>
+          </a:p>
+        </p:txBody>
+      </p:sp>
+      <p:sp>
+        <p:nvSpPr>
+          <p:cNvPr id="11" name="Text 9"/>
+          <p:cNvSpPr/>
+          <p:nvPr/>
+        </p:nvSpPr>
+        <p:spPr>
+          <a:xfrm>
+            <a:off x="868680" y="1508760"/>
+            <a:ext cx="6537960" cy="4160520"/>
           </a:xfrm>
           <a:prstGeom prst="rect">
             <a:avLst/>
@@ -10105,7 +10728,7 @@
           <a:lstStyle/>
           <a:p>
             <a:r>
-              <a:rPr lang="en-US" sz="1700" dirty="0">
+              <a:rPr lang="en-US" sz="2100" dirty="0">
                 <a:solidFill>
                   <a:srgbClr val="17364A"/>
                 </a:solidFill>
@@ -10115,11 +10738,11 @@
               </a:rPr>
               <a:t>1. What is calibration?</a:t>
             </a:r>
-            <a:endParaRPr lang="en-US" sz="1700" dirty="0"/>
-          </a:p>
-          <a:p>
-            <a:r>
-              <a:rPr lang="en-US" sz="1700" dirty="0">
+            <a:endParaRPr lang="en-US" sz="2100" dirty="0"/>
+          </a:p>
+          <a:p>
+            <a:r>
+              <a:rPr lang="en-US" sz="2100" dirty="0">
                 <a:solidFill>
                   <a:srgbClr val="17364A"/>
                 </a:solidFill>
@@ -10129,11 +10752,11 @@
               </a:rPr>
               <a:t>2. Why should thresholds be reviewed by public health staff?</a:t>
             </a:r>
-            <a:endParaRPr lang="en-US" sz="1700" dirty="0"/>
-          </a:p>
-          <a:p>
-            <a:r>
-              <a:rPr lang="en-US" sz="1700" dirty="0">
+            <a:endParaRPr lang="en-US" sz="2100" dirty="0"/>
+          </a:p>
+          <a:p>
+            <a:r>
+              <a:rPr lang="en-US" sz="2100" dirty="0">
                 <a:solidFill>
                   <a:srgbClr val="17364A"/>
                 </a:solidFill>
@@ -10143,27 +10766,13 @@
               </a:rPr>
               <a:t>3. Which use of a risk score is most concerning without additional safeguards?</a:t>
             </a:r>
-            <a:endParaRPr lang="en-US" sz="1700" dirty="0"/>
-          </a:p>
-          <a:p>
-            <a:r>
-              <a:rPr lang="en-US" sz="1700" dirty="0">
-                <a:solidFill>
-                  <a:srgbClr val="17364A"/>
-                </a:solidFill>
-                <a:latin typeface="Aptos" pitchFamily="34" charset="0"/>
-                <a:ea typeface="Aptos" pitchFamily="34" charset="-122"/>
-                <a:cs typeface="Aptos" pitchFamily="34" charset="-120"/>
-              </a:rPr>
-              <a:t>4. What is a false negative in a predictive workflow?</a:t>
-            </a:r>
-            <a:endParaRPr lang="en-US" sz="1700" dirty="0"/>
-          </a:p>
-        </p:txBody>
-      </p:sp>
-      <p:sp>
-        <p:nvSpPr>
-          <p:cNvPr id="11" name="Shape 9"/>
+            <a:endParaRPr lang="en-US" sz="2100" dirty="0"/>
+          </a:p>
+        </p:txBody>
+      </p:sp>
+      <p:sp>
+        <p:nvSpPr>
+          <p:cNvPr id="12" name="Shape 10"/>
           <p:cNvSpPr/>
           <p:nvPr/>
         </p:nvSpPr>
@@ -10190,14 +10799,14 @@
       </p:sp>
       <p:sp>
         <p:nvSpPr>
-          <p:cNvPr id="12" name="Text 10"/>
+          <p:cNvPr id="13" name="Text 11"/>
           <p:cNvSpPr/>
           <p:nvPr/>
         </p:nvSpPr>
         <p:spPr>
           <a:xfrm>
             <a:off x="8074152" y="1563624"/>
-            <a:ext cx="2825496" cy="201168"/>
+            <a:ext cx="2825496" cy="256032"/>
           </a:xfrm>
           <a:prstGeom prst="rect">
             <a:avLst/>
@@ -10213,7 +10822,7 @@
               <a:buNone/>
             </a:pPr>
             <a:r>
-              <a:rPr lang="en-US" sz="950" b="1" dirty="0">
+              <a:rPr lang="en-US" sz="1300" b="1" dirty="0">
                 <a:solidFill>
                   <a:srgbClr val="0068B7"/>
                 </a:solidFill>
@@ -10223,20 +10832,20 @@
               </a:rPr>
               <a:t>Key idea</a:t>
             </a:r>
-            <a:endParaRPr lang="en-US" sz="950" dirty="0"/>
-          </a:p>
-        </p:txBody>
-      </p:sp>
-      <p:sp>
-        <p:nvSpPr>
-          <p:cNvPr id="13" name="Text 11"/>
-          <p:cNvSpPr/>
-          <p:nvPr/>
-        </p:nvSpPr>
-        <p:spPr>
-          <a:xfrm>
-            <a:off x="8074152" y="1856232"/>
-            <a:ext cx="2825496" cy="1261872"/>
+            <a:endParaRPr lang="en-US" sz="1300" dirty="0"/>
+          </a:p>
+        </p:txBody>
+      </p:sp>
+      <p:sp>
+        <p:nvSpPr>
+          <p:cNvPr id="14" name="Text 12"/>
+          <p:cNvSpPr/>
+          <p:nvPr/>
+        </p:nvSpPr>
+        <p:spPr>
+          <a:xfrm>
+            <a:off x="8074152" y="1920240"/>
+            <a:ext cx="2825496" cy="1188720"/>
           </a:xfrm>
           <a:prstGeom prst="rect">
             <a:avLst/>
@@ -10254,7 +10863,7 @@
               <a:buNone/>
             </a:pPr>
             <a:r>
-              <a:rPr lang="en-US" sz="1250" dirty="0">
+              <a:rPr lang="en-US" sz="1550" dirty="0">
                 <a:solidFill>
                   <a:srgbClr val="17364A"/>
                 </a:solidFill>
@@ -10264,13 +10873,13 @@
               </a:rPr>
               <a:t>1. What is calibration?</a:t>
             </a:r>
-            <a:endParaRPr lang="en-US" sz="1250" dirty="0"/>
-          </a:p>
-        </p:txBody>
-      </p:sp>
-      <p:sp>
-        <p:nvSpPr>
-          <p:cNvPr id="14" name="Shape 12"/>
+            <a:endParaRPr lang="en-US" sz="1550" dirty="0"/>
+          </a:p>
+        </p:txBody>
+      </p:sp>
+      <p:sp>
+        <p:nvSpPr>
+          <p:cNvPr id="15" name="Shape 13"/>
           <p:cNvSpPr/>
           <p:nvPr/>
         </p:nvSpPr>
@@ -10297,14 +10906,14 @@
       </p:sp>
       <p:sp>
         <p:nvSpPr>
-          <p:cNvPr id="15" name="Text 13"/>
+          <p:cNvPr id="16" name="Text 14"/>
           <p:cNvSpPr/>
           <p:nvPr/>
         </p:nvSpPr>
         <p:spPr>
           <a:xfrm>
             <a:off x="8074152" y="3666744"/>
-            <a:ext cx="2825496" cy="201168"/>
+            <a:ext cx="2825496" cy="256032"/>
           </a:xfrm>
           <a:prstGeom prst="rect">
             <a:avLst/>
@@ -10320,7 +10929,7 @@
               <a:buNone/>
             </a:pPr>
             <a:r>
-              <a:rPr lang="en-US" sz="950" b="1" dirty="0">
+              <a:rPr lang="en-US" sz="1300" b="1" dirty="0">
                 <a:solidFill>
                   <a:srgbClr val="0068B7"/>
                 </a:solidFill>
@@ -10330,20 +10939,20 @@
               </a:rPr>
               <a:t>Use this for</a:t>
             </a:r>
-            <a:endParaRPr lang="en-US" sz="950" dirty="0"/>
-          </a:p>
-        </p:txBody>
-      </p:sp>
-      <p:sp>
-        <p:nvSpPr>
-          <p:cNvPr id="16" name="Text 14"/>
-          <p:cNvSpPr/>
-          <p:nvPr/>
-        </p:nvSpPr>
-        <p:spPr>
-          <a:xfrm>
-            <a:off x="8074152" y="3959352"/>
-            <a:ext cx="2825496" cy="1170432"/>
+            <a:endParaRPr lang="en-US" sz="1300" dirty="0"/>
+          </a:p>
+        </p:txBody>
+      </p:sp>
+      <p:sp>
+        <p:nvSpPr>
+          <p:cNvPr id="17" name="Text 15"/>
+          <p:cNvSpPr/>
+          <p:nvPr/>
+        </p:nvSpPr>
+        <p:spPr>
+          <a:xfrm>
+            <a:off x="8074152" y="4023360"/>
+            <a:ext cx="2825496" cy="1097280"/>
           </a:xfrm>
           <a:prstGeom prst="rect">
             <a:avLst/>
@@ -10361,7 +10970,7 @@
               <a:buNone/>
             </a:pPr>
             <a:r>
-              <a:rPr lang="en-US" sz="1250" dirty="0">
+              <a:rPr lang="en-US" sz="1550" dirty="0">
                 <a:solidFill>
                   <a:srgbClr val="17364A"/>
                 </a:solidFill>
@@ -10371,7 +10980,7 @@
               </a:rPr>
               <a:t>Connect the concept to public health decisions, safeguards, documentation, or implementation work.</a:t>
             </a:r>
-            <a:endParaRPr lang="en-US" sz="1250" dirty="0"/>
+            <a:endParaRPr lang="en-US" sz="1550" dirty="0"/>
           </a:p>
         </p:txBody>
       </p:sp>
@@ -10568,7 +11177,7 @@
                 <a:ea typeface="Aptos" pitchFamily="34" charset="-122"/>
                 <a:cs typeface="Aptos" pitchFamily="34" charset="-120"/>
               </a:rPr>
-              <a:t>© Paula Soper</a:t>
+              <a:t>Â© Paula Soper</a:t>
             </a:r>
             <a:endParaRPr lang="en-US" sz="800" dirty="0"/>
           </a:p>
@@ -10576,7 +11185,46 @@
       </p:sp>
       <p:sp>
         <p:nvSpPr>
-          <p:cNvPr id="7" name="Shape 5"/>
+          <p:cNvPr id="7" name="Text 5"/>
+          <p:cNvSpPr/>
+          <p:nvPr/>
+        </p:nvSpPr>
+        <p:spPr>
+          <a:xfrm>
+            <a:off x="11137392" y="6510528"/>
+            <a:ext cx="411480" cy="201168"/>
+          </a:xfrm>
+          <a:prstGeom prst="rect">
+            <a:avLst/>
+          </a:prstGeom>
+          <a:noFill/>
+          <a:ln/>
+        </p:spPr>
+        <p:txBody>
+          <a:bodyPr wrap="square" lIns="0" tIns="0" rIns="0" bIns="0" rtlCol="0" anchor="ctr"/>
+          <a:lstStyle/>
+          <a:p>
+            <a:pPr algn="r" indent="0" marL="0">
+              <a:buNone/>
+            </a:pPr>
+            <a:r>
+              <a:rPr lang="en-US" sz="900" dirty="0">
+                <a:solidFill>
+                  <a:srgbClr val="5F7181"/>
+                </a:solidFill>
+                <a:latin typeface="Aptos" pitchFamily="34" charset="0"/>
+                <a:ea typeface="Aptos" pitchFamily="34" charset="-122"/>
+                <a:cs typeface="Aptos" pitchFamily="34" charset="-120"/>
+              </a:rPr>
+              <a:t>22</a:t>
+            </a:r>
+            <a:endParaRPr lang="en-US" sz="900" dirty="0"/>
+          </a:p>
+        </p:txBody>
+      </p:sp>
+      <p:sp>
+        <p:nvSpPr>
+          <p:cNvPr id="8" name="Shape 6"/>
           <p:cNvSpPr/>
           <p:nvPr/>
         </p:nvSpPr>
@@ -10601,7 +11249,7 @@
       </p:sp>
       <p:sp>
         <p:nvSpPr>
-          <p:cNvPr id="8" name="Text 6"/>
+          <p:cNvPr id="9" name="Text 7"/>
           <p:cNvSpPr/>
           <p:nvPr/>
         </p:nvSpPr>
@@ -10640,14 +11288,14 @@
       </p:sp>
       <p:sp>
         <p:nvSpPr>
-          <p:cNvPr id="9" name="Text 7"/>
+          <p:cNvPr id="10" name="Text 8"/>
           <p:cNvSpPr/>
           <p:nvPr/>
         </p:nvSpPr>
         <p:spPr>
           <a:xfrm>
             <a:off x="640080" y="621792"/>
-            <a:ext cx="10881360" cy="566928"/>
+            <a:ext cx="10881360" cy="713232"/>
           </a:xfrm>
           <a:prstGeom prst="rect">
             <a:avLst/>
@@ -10665,7 +11313,7 @@
               <a:buNone/>
             </a:pPr>
             <a:r>
-              <a:rPr lang="en-US" sz="2700" b="1" dirty="0">
+              <a:rPr lang="en-US" sz="3400" b="1" dirty="0">
                 <a:solidFill>
                   <a:srgbClr val="003A63"/>
                 </a:solidFill>
@@ -10675,20 +11323,20 @@
               </a:rPr>
               <a:t>References and Resources</a:t>
             </a:r>
-            <a:endParaRPr lang="en-US" sz="2700" dirty="0"/>
-          </a:p>
-        </p:txBody>
-      </p:sp>
-      <p:sp>
-        <p:nvSpPr>
-          <p:cNvPr id="10" name="Text 8"/>
-          <p:cNvSpPr/>
-          <p:nvPr/>
-        </p:nvSpPr>
-        <p:spPr>
-          <a:xfrm>
-            <a:off x="868680" y="1417320"/>
-            <a:ext cx="6675120" cy="4434840"/>
+            <a:endParaRPr lang="en-US" sz="3400" dirty="0"/>
+          </a:p>
+        </p:txBody>
+      </p:sp>
+      <p:sp>
+        <p:nvSpPr>
+          <p:cNvPr id="11" name="Text 9"/>
+          <p:cNvSpPr/>
+          <p:nvPr/>
+        </p:nvSpPr>
+        <p:spPr>
+          <a:xfrm>
+            <a:off x="868680" y="1508760"/>
+            <a:ext cx="6537960" cy="4160520"/>
           </a:xfrm>
           <a:prstGeom prst="rect">
             <a:avLst/>
@@ -10703,7 +11351,7 @@
           <a:lstStyle/>
           <a:p>
             <a:r>
-              <a:rPr lang="en-US" sz="1700" dirty="0">
+              <a:rPr lang="en-US" sz="2100" dirty="0">
                 <a:solidFill>
                   <a:srgbClr val="17364A"/>
                 </a:solidFill>
@@ -10711,13 +11359,13 @@
                 <a:ea typeface="Aptos" pitchFamily="34" charset="-122"/>
                 <a:cs typeface="Aptos" pitchFamily="34" charset="-120"/>
               </a:rPr>
-              <a:t>NIST Artificial Intelligence Risk Management Framework: https://www.nist.gov/itl/ai-risk-management-framework</a:t>
-            </a:r>
-            <a:endParaRPr lang="en-US" sz="1700" dirty="0"/>
-          </a:p>
-          <a:p>
-            <a:r>
-              <a:rPr lang="en-US" sz="1700" dirty="0">
+              <a:t>NIST Artificial Intelligence Risk Management Framework:.</a:t>
+            </a:r>
+            <a:endParaRPr lang="en-US" sz="2100" dirty="0"/>
+          </a:p>
+          <a:p>
+            <a:r>
+              <a:rPr lang="en-US" sz="2100" dirty="0">
                 <a:solidFill>
                   <a:srgbClr val="17364A"/>
                 </a:solidFill>
@@ -10727,11 +11375,11 @@
               </a:rPr>
               <a:t>NIST AI RMF Generative AI Profile:.</a:t>
             </a:r>
-            <a:endParaRPr lang="en-US" sz="1700" dirty="0"/>
-          </a:p>
-          <a:p>
-            <a:r>
-              <a:rPr lang="en-US" sz="1700" dirty="0">
+            <a:endParaRPr lang="en-US" sz="2100" dirty="0"/>
+          </a:p>
+          <a:p>
+            <a:r>
+              <a:rPr lang="en-US" sz="2100" dirty="0">
                 <a:solidFill>
                   <a:srgbClr val="17364A"/>
                 </a:solidFill>
@@ -10741,27 +11389,13 @@
               </a:rPr>
               <a:t>CDC Evaluation Framework: https://www.cdc.gov/evaluation/</a:t>
             </a:r>
-            <a:endParaRPr lang="en-US" sz="1700" dirty="0"/>
-          </a:p>
-          <a:p>
-            <a:r>
-              <a:rPr lang="en-US" sz="1700" dirty="0">
-                <a:solidFill>
-                  <a:srgbClr val="17364A"/>
-                </a:solidFill>
-                <a:latin typeface="Aptos" pitchFamily="34" charset="0"/>
-                <a:ea typeface="Aptos" pitchFamily="34" charset="-122"/>
-                <a:cs typeface="Aptos" pitchFamily="34" charset="-120"/>
-              </a:rPr>
-              <a:t>CDC Public Health Data Strategy: https://www.cdc.gov/public-health-data-strategy/php/about/index.html</a:t>
-            </a:r>
-            <a:endParaRPr lang="en-US" sz="1700" dirty="0"/>
-          </a:p>
-        </p:txBody>
-      </p:sp>
-      <p:sp>
-        <p:nvSpPr>
-          <p:cNvPr id="11" name="Shape 9"/>
+            <a:endParaRPr lang="en-US" sz="2100" dirty="0"/>
+          </a:p>
+        </p:txBody>
+      </p:sp>
+      <p:sp>
+        <p:nvSpPr>
+          <p:cNvPr id="12" name="Shape 10"/>
           <p:cNvSpPr/>
           <p:nvPr/>
         </p:nvSpPr>
@@ -10788,14 +11422,14 @@
       </p:sp>
       <p:sp>
         <p:nvSpPr>
-          <p:cNvPr id="12" name="Text 10"/>
+          <p:cNvPr id="13" name="Text 11"/>
           <p:cNvSpPr/>
           <p:nvPr/>
         </p:nvSpPr>
         <p:spPr>
           <a:xfrm>
             <a:off x="8074152" y="1563624"/>
-            <a:ext cx="2825496" cy="201168"/>
+            <a:ext cx="2825496" cy="256032"/>
           </a:xfrm>
           <a:prstGeom prst="rect">
             <a:avLst/>
@@ -10811,7 +11445,7 @@
               <a:buNone/>
             </a:pPr>
             <a:r>
-              <a:rPr lang="en-US" sz="950" b="1" dirty="0">
+              <a:rPr lang="en-US" sz="1300" b="1" dirty="0">
                 <a:solidFill>
                   <a:srgbClr val="0068B7"/>
                 </a:solidFill>
@@ -10821,20 +11455,20 @@
               </a:rPr>
               <a:t>Key idea</a:t>
             </a:r>
-            <a:endParaRPr lang="en-US" sz="950" dirty="0"/>
-          </a:p>
-        </p:txBody>
-      </p:sp>
-      <p:sp>
-        <p:nvSpPr>
-          <p:cNvPr id="13" name="Text 11"/>
-          <p:cNvSpPr/>
-          <p:nvPr/>
-        </p:nvSpPr>
-        <p:spPr>
-          <a:xfrm>
-            <a:off x="8074152" y="1856232"/>
-            <a:ext cx="2825496" cy="1261872"/>
+            <a:endParaRPr lang="en-US" sz="1300" dirty="0"/>
+          </a:p>
+        </p:txBody>
+      </p:sp>
+      <p:sp>
+        <p:nvSpPr>
+          <p:cNvPr id="14" name="Text 12"/>
+          <p:cNvSpPr/>
+          <p:nvPr/>
+        </p:nvSpPr>
+        <p:spPr>
+          <a:xfrm>
+            <a:off x="8074152" y="1920240"/>
+            <a:ext cx="2825496" cy="1188720"/>
           </a:xfrm>
           <a:prstGeom prst="rect">
             <a:avLst/>
@@ -10852,7 +11486,7 @@
               <a:buNone/>
             </a:pPr>
             <a:r>
-              <a:rPr lang="en-US" sz="1250" dirty="0">
+              <a:rPr lang="en-US" sz="1550" dirty="0">
                 <a:solidFill>
                   <a:srgbClr val="17364A"/>
                 </a:solidFill>
@@ -10860,15 +11494,15 @@
                 <a:ea typeface="Aptos" pitchFamily="34" charset="-122"/>
                 <a:cs typeface="Aptos" pitchFamily="34" charset="-120"/>
               </a:rPr>
-              <a:t>NIST Artificial Intelligence Risk Management Framework: https://www.nist.gov/itl/ai-risk-management-framework</a:t>
-            </a:r>
-            <a:endParaRPr lang="en-US" sz="1250" dirty="0"/>
-          </a:p>
-        </p:txBody>
-      </p:sp>
-      <p:sp>
-        <p:nvSpPr>
-          <p:cNvPr id="14" name="Shape 12"/>
+              <a:t>NIST Artificial Intelligence Risk Management Framework:.</a:t>
+            </a:r>
+            <a:endParaRPr lang="en-US" sz="1550" dirty="0"/>
+          </a:p>
+        </p:txBody>
+      </p:sp>
+      <p:sp>
+        <p:nvSpPr>
+          <p:cNvPr id="15" name="Shape 13"/>
           <p:cNvSpPr/>
           <p:nvPr/>
         </p:nvSpPr>
@@ -10895,14 +11529,14 @@
       </p:sp>
       <p:sp>
         <p:nvSpPr>
-          <p:cNvPr id="15" name="Text 13"/>
+          <p:cNvPr id="16" name="Text 14"/>
           <p:cNvSpPr/>
           <p:nvPr/>
         </p:nvSpPr>
         <p:spPr>
           <a:xfrm>
             <a:off x="8074152" y="3666744"/>
-            <a:ext cx="2825496" cy="201168"/>
+            <a:ext cx="2825496" cy="256032"/>
           </a:xfrm>
           <a:prstGeom prst="rect">
             <a:avLst/>
@@ -10918,7 +11552,7 @@
               <a:buNone/>
             </a:pPr>
             <a:r>
-              <a:rPr lang="en-US" sz="950" b="1" dirty="0">
+              <a:rPr lang="en-US" sz="1300" b="1" dirty="0">
                 <a:solidFill>
                   <a:srgbClr val="0068B7"/>
                 </a:solidFill>
@@ -10928,20 +11562,20 @@
               </a:rPr>
               <a:t>Use this for</a:t>
             </a:r>
-            <a:endParaRPr lang="en-US" sz="950" dirty="0"/>
-          </a:p>
-        </p:txBody>
-      </p:sp>
-      <p:sp>
-        <p:nvSpPr>
-          <p:cNvPr id="16" name="Text 14"/>
-          <p:cNvSpPr/>
-          <p:nvPr/>
-        </p:nvSpPr>
-        <p:spPr>
-          <a:xfrm>
-            <a:off x="8074152" y="3959352"/>
-            <a:ext cx="2825496" cy="1170432"/>
+            <a:endParaRPr lang="en-US" sz="1300" dirty="0"/>
+          </a:p>
+        </p:txBody>
+      </p:sp>
+      <p:sp>
+        <p:nvSpPr>
+          <p:cNvPr id="17" name="Text 15"/>
+          <p:cNvSpPr/>
+          <p:nvPr/>
+        </p:nvSpPr>
+        <p:spPr>
+          <a:xfrm>
+            <a:off x="8074152" y="4023360"/>
+            <a:ext cx="2825496" cy="1097280"/>
           </a:xfrm>
           <a:prstGeom prst="rect">
             <a:avLst/>
@@ -10959,7 +11593,7 @@
               <a:buNone/>
             </a:pPr>
             <a:r>
-              <a:rPr lang="en-US" sz="1250" dirty="0">
+              <a:rPr lang="en-US" sz="1550" dirty="0">
                 <a:solidFill>
                   <a:srgbClr val="17364A"/>
                 </a:solidFill>
@@ -10969,7 +11603,7 @@
               </a:rPr>
               <a:t>Connect the concept to public health decisions, safeguards, documentation, or implementation work.</a:t>
             </a:r>
-            <a:endParaRPr lang="en-US" sz="1250" dirty="0"/>
+            <a:endParaRPr lang="en-US" sz="1550" dirty="0"/>
           </a:p>
         </p:txBody>
       </p:sp>
@@ -11166,7 +11800,7 @@
                 <a:ea typeface="Aptos" pitchFamily="34" charset="-122"/>
                 <a:cs typeface="Aptos" pitchFamily="34" charset="-120"/>
               </a:rPr>
-              <a:t>© Paula Soper</a:t>
+              <a:t>Â© Paula Soper</a:t>
             </a:r>
             <a:endParaRPr lang="en-US" sz="800" dirty="0"/>
           </a:p>
@@ -11180,8 +11814,47 @@
         </p:nvSpPr>
         <p:spPr>
           <a:xfrm>
+            <a:off x="11137392" y="6510528"/>
+            <a:ext cx="411480" cy="201168"/>
+          </a:xfrm>
+          <a:prstGeom prst="rect">
+            <a:avLst/>
+          </a:prstGeom>
+          <a:noFill/>
+          <a:ln/>
+        </p:spPr>
+        <p:txBody>
+          <a:bodyPr wrap="square" lIns="0" tIns="0" rIns="0" bIns="0" rtlCol="0" anchor="ctr"/>
+          <a:lstStyle/>
+          <a:p>
+            <a:pPr algn="r" indent="0" marL="0">
+              <a:buNone/>
+            </a:pPr>
+            <a:r>
+              <a:rPr lang="en-US" sz="900" dirty="0">
+                <a:solidFill>
+                  <a:srgbClr val="5F7181"/>
+                </a:solidFill>
+                <a:latin typeface="Aptos" pitchFamily="34" charset="0"/>
+                <a:ea typeface="Aptos" pitchFamily="34" charset="-122"/>
+                <a:cs typeface="Aptos" pitchFamily="34" charset="-120"/>
+              </a:rPr>
+              <a:t>3</a:t>
+            </a:r>
+            <a:endParaRPr lang="en-US" sz="900" dirty="0"/>
+          </a:p>
+        </p:txBody>
+      </p:sp>
+      <p:sp>
+        <p:nvSpPr>
+          <p:cNvPr id="8" name="Text 6"/>
+          <p:cNvSpPr/>
+          <p:nvPr/>
+        </p:nvSpPr>
+        <p:spPr>
+          <a:xfrm>
             <a:off x="640080" y="658368"/>
-            <a:ext cx="10881360" cy="566928"/>
+            <a:ext cx="10881360" cy="713232"/>
           </a:xfrm>
           <a:prstGeom prst="rect">
             <a:avLst/>
@@ -11199,7 +11872,7 @@
               <a:buNone/>
             </a:pPr>
             <a:r>
-              <a:rPr lang="en-US" sz="2700" b="1" dirty="0">
+              <a:rPr lang="en-US" sz="3400" b="1" dirty="0">
                 <a:solidFill>
                   <a:srgbClr val="003A63"/>
                 </a:solidFill>
@@ -11209,20 +11882,20 @@
               </a:rPr>
               <a:t>How this module connects to the playbook</a:t>
             </a:r>
-            <a:endParaRPr lang="en-US" sz="2700" dirty="0"/>
-          </a:p>
-        </p:txBody>
-      </p:sp>
-      <p:sp>
-        <p:nvSpPr>
-          <p:cNvPr id="8" name="Text 6"/>
-          <p:cNvSpPr/>
-          <p:nvPr/>
-        </p:nvSpPr>
-        <p:spPr>
-          <a:xfrm>
-            <a:off x="868680" y="1417320"/>
-            <a:ext cx="6903720" cy="4480560"/>
+            <a:endParaRPr lang="en-US" sz="3400" dirty="0"/>
+          </a:p>
+        </p:txBody>
+      </p:sp>
+      <p:sp>
+        <p:nvSpPr>
+          <p:cNvPr id="9" name="Text 7"/>
+          <p:cNvSpPr/>
+          <p:nvPr/>
+        </p:nvSpPr>
+        <p:spPr>
+          <a:xfrm>
+            <a:off x="868680" y="1508760"/>
+            <a:ext cx="6812280" cy="3977640"/>
           </a:xfrm>
           <a:prstGeom prst="rect">
             <a:avLst/>
@@ -11237,7 +11910,7 @@
           <a:lstStyle/>
           <a:p>
             <a:r>
-              <a:rPr lang="en-US" sz="1540" dirty="0">
+              <a:rPr lang="en-US" sz="1900" dirty="0">
                 <a:solidFill>
                   <a:srgbClr val="17364A"/>
                 </a:solidFill>
@@ -11245,13 +11918,13 @@
                 <a:ea typeface="Aptos" pitchFamily="34" charset="-122"/>
                 <a:cs typeface="Aptos" pitchFamily="34" charset="-120"/>
               </a:rPr>
-              <a:t>Play 13: Monitor and Evaluate AI Systems - This lesson informs Play 13 by helping learners connect the lesson topic to monitor and.</a:t>
-            </a:r>
-            <a:endParaRPr lang="en-US" sz="1540" dirty="0"/>
-          </a:p>
-          <a:p>
-            <a:r>
-              <a:rPr lang="en-US" sz="1540" dirty="0">
+              <a:t>Play 13: Monitor and Evaluate AI Systems - This lesson informs Play 13 by helping learners connect the.</a:t>
+            </a:r>
+            <a:endParaRPr lang="en-US" sz="1900" dirty="0"/>
+          </a:p>
+          <a:p>
+            <a:r>
+              <a:rPr lang="en-US" sz="1900" dirty="0">
                 <a:solidFill>
                   <a:srgbClr val="17364A"/>
                 </a:solidFill>
@@ -11259,13 +11932,13 @@
                 <a:ea typeface="Aptos" pitchFamily="34" charset="-122"/>
                 <a:cs typeface="Aptos" pitchFamily="34" charset="-120"/>
               </a:rPr>
-              <a:t>Play 1: Vision &amp; Guardrails - This lesson informs Play 1 by helping learners connect the lesson topic to vision &amp; guardrails work in.</a:t>
-            </a:r>
-            <a:endParaRPr lang="en-US" sz="1540" dirty="0"/>
-          </a:p>
-          <a:p>
-            <a:r>
-              <a:rPr lang="en-US" sz="1540" dirty="0">
+              <a:t>Play 1: Vision &amp; Guardrails - This lesson informs Play 1 by helping learners connect the lesson topic to.</a:t>
+            </a:r>
+            <a:endParaRPr lang="en-US" sz="1900" dirty="0"/>
+          </a:p>
+          <a:p>
+            <a:r>
+              <a:rPr lang="en-US" sz="1900" dirty="0">
                 <a:solidFill>
                   <a:srgbClr val="17364A"/>
                 </a:solidFill>
@@ -11273,13 +11946,13 @@
                 <a:ea typeface="Aptos" pitchFamily="34" charset="-122"/>
                 <a:cs typeface="Aptos" pitchFamily="34" charset="-120"/>
               </a:rPr>
-              <a:t>Play 11: Build and Deploy AI Solutions - This lesson informs Play 11 by helping learners connect the lesson topic to build and deploy.</a:t>
-            </a:r>
-            <a:endParaRPr lang="en-US" sz="1540" dirty="0"/>
-          </a:p>
-          <a:p>
-            <a:r>
-              <a:rPr lang="en-US" sz="1540" dirty="0">
+              <a:t>Play 11: Build and Deploy AI Solutions - This lesson informs Play 11 by helping learners connect the lesson.</a:t>
+            </a:r>
+            <a:endParaRPr lang="en-US" sz="1900" dirty="0"/>
+          </a:p>
+          <a:p>
+            <a:r>
+              <a:rPr lang="en-US" sz="1900" dirty="0">
                 <a:solidFill>
                   <a:srgbClr val="17364A"/>
                 </a:solidFill>
@@ -11287,15 +11960,15 @@
                 <a:ea typeface="Aptos" pitchFamily="34" charset="-122"/>
                 <a:cs typeface="Aptos" pitchFamily="34" charset="-120"/>
               </a:rPr>
-              <a:t>Play 3: Establish AI Governance - This lesson informs Play 3 by helping learners connect the lesson topic to establish ai governance.</a:t>
-            </a:r>
-            <a:endParaRPr lang="en-US" sz="1540" dirty="0"/>
-          </a:p>
-        </p:txBody>
-      </p:sp>
-      <p:sp>
-        <p:nvSpPr>
-          <p:cNvPr id="9" name="Shape 7"/>
+              <a:t>Play 3: Establish AI Governance - This lesson informs Play 3 by helping learners connect the lesson topic to.</a:t>
+            </a:r>
+            <a:endParaRPr lang="en-US" sz="1900" dirty="0"/>
+          </a:p>
+        </p:txBody>
+      </p:sp>
+      <p:sp>
+        <p:nvSpPr>
+          <p:cNvPr id="10" name="Shape 8"/>
           <p:cNvSpPr/>
           <p:nvPr/>
         </p:nvSpPr>
@@ -11322,14 +11995,14 @@
       </p:sp>
       <p:sp>
         <p:nvSpPr>
-          <p:cNvPr id="10" name="Text 8"/>
+          <p:cNvPr id="11" name="Text 9"/>
           <p:cNvSpPr/>
           <p:nvPr/>
         </p:nvSpPr>
         <p:spPr>
           <a:xfrm>
             <a:off x="8211312" y="1563624"/>
-            <a:ext cx="2734056" cy="201168"/>
+            <a:ext cx="2734056" cy="256032"/>
           </a:xfrm>
           <a:prstGeom prst="rect">
             <a:avLst/>
@@ -11345,7 +12018,7 @@
               <a:buNone/>
             </a:pPr>
             <a:r>
-              <a:rPr lang="en-US" sz="950" b="1" dirty="0">
+              <a:rPr lang="en-US" sz="1300" b="1" dirty="0">
                 <a:solidFill>
                   <a:srgbClr val="0068B7"/>
                 </a:solidFill>
@@ -11355,20 +12028,20 @@
               </a:rPr>
               <a:t>Apply the lesson</a:t>
             </a:r>
-            <a:endParaRPr lang="en-US" sz="950" dirty="0"/>
-          </a:p>
-        </p:txBody>
-      </p:sp>
-      <p:sp>
-        <p:nvSpPr>
-          <p:cNvPr id="11" name="Text 9"/>
-          <p:cNvSpPr/>
-          <p:nvPr/>
-        </p:nvSpPr>
-        <p:spPr>
-          <a:xfrm>
-            <a:off x="8211312" y="1856232"/>
-            <a:ext cx="2734056" cy="1536192"/>
+            <a:endParaRPr lang="en-US" sz="1300" dirty="0"/>
+          </a:p>
+        </p:txBody>
+      </p:sp>
+      <p:sp>
+        <p:nvSpPr>
+          <p:cNvPr id="12" name="Text 10"/>
+          <p:cNvSpPr/>
+          <p:nvPr/>
+        </p:nvSpPr>
+        <p:spPr>
+          <a:xfrm>
+            <a:off x="8211312" y="1920240"/>
+            <a:ext cx="2734056" cy="1463040"/>
           </a:xfrm>
           <a:prstGeom prst="rect">
             <a:avLst/>
@@ -11386,7 +12059,7 @@
               <a:buNone/>
             </a:pPr>
             <a:r>
-              <a:rPr lang="en-US" sz="1250" dirty="0">
+              <a:rPr lang="en-US" sz="1550" dirty="0">
                 <a:solidFill>
                   <a:srgbClr val="17364A"/>
                 </a:solidFill>
@@ -11396,32 +12069,32 @@
               </a:rPr>
               <a:t>Use the related plays to identify decisions, participants, timing, approvals, and documentation needed for responsible implementation.</a:t>
             </a:r>
-            <a:endParaRPr lang="en-US" sz="1250" dirty="0"/>
-          </a:p>
-        </p:txBody>
-      </p:sp>
-      <p:sp>
-        <p:nvSpPr>
-          <p:cNvPr id="12" name="Shape 10"/>
-          <p:cNvSpPr/>
-          <p:nvPr/>
-        </p:nvSpPr>
-        <p:spPr>
-          <a:xfrm>
-            <a:off x="8046720" y="3794760"/>
-            <a:ext cx="3063240" cy="1508760"/>
+            <a:endParaRPr lang="en-US" sz="1550" dirty="0"/>
+          </a:p>
+        </p:txBody>
+      </p:sp>
+      <p:sp>
+        <p:nvSpPr>
+          <p:cNvPr id="13" name="Shape 11"/>
+          <p:cNvSpPr/>
+          <p:nvPr/>
+        </p:nvSpPr>
+        <p:spPr>
+          <a:xfrm>
+            <a:off x="7818120" y="3977640"/>
+            <a:ext cx="972312" cy="749808"/>
           </a:xfrm>
           <a:prstGeom prst="roundRect">
             <a:avLst>
-              <a:gd name="adj" fmla="val 7273"/>
+              <a:gd name="adj" fmla="val 14634"/>
             </a:avLst>
           </a:prstGeom>
           <a:solidFill>
-            <a:srgbClr val="FFF4D9"/>
+            <a:srgbClr val="0068B7"/>
           </a:solidFill>
           <a:ln w="12700">
             <a:solidFill>
-              <a:srgbClr val="B9D7E6"/>
+              <a:srgbClr val="0068B7"/>
             </a:solidFill>
             <a:prstDash val="solid"/>
           </a:ln>
@@ -11429,81 +12102,256 @@
       </p:sp>
       <p:sp>
         <p:nvSpPr>
-          <p:cNvPr id="13" name="Text 11"/>
-          <p:cNvSpPr/>
-          <p:nvPr/>
-        </p:nvSpPr>
-        <p:spPr>
-          <a:xfrm>
-            <a:off x="8211312" y="3941064"/>
-            <a:ext cx="2734056" cy="201168"/>
-          </a:xfrm>
-          <a:prstGeom prst="rect">
-            <a:avLst/>
-          </a:prstGeom>
-          <a:noFill/>
-          <a:ln/>
-        </p:spPr>
-        <p:txBody>
-          <a:bodyPr wrap="square" lIns="0" tIns="0" rIns="0" bIns="0" rtlCol="0" anchor="ctr"/>
-          <a:lstStyle/>
-          <a:p>
-            <a:pPr indent="0" marL="0">
-              <a:buNone/>
-            </a:pPr>
-            <a:r>
-              <a:rPr lang="en-US" sz="950" b="1" dirty="0">
-                <a:solidFill>
-                  <a:srgbClr val="0068B7"/>
-                </a:solidFill>
-                <a:latin typeface="Aptos" pitchFamily="34" charset="0"/>
-                <a:ea typeface="Aptos" pitchFamily="34" charset="-122"/>
-                <a:cs typeface="Aptos" pitchFamily="34" charset="-120"/>
-              </a:rPr>
-              <a:t>Keep in mind</a:t>
-            </a:r>
-            <a:endParaRPr lang="en-US" sz="950" dirty="0"/>
-          </a:p>
-        </p:txBody>
-      </p:sp>
-      <p:sp>
-        <p:nvSpPr>
           <p:cNvPr id="14" name="Text 12"/>
           <p:cNvSpPr/>
           <p:nvPr/>
         </p:nvSpPr>
         <p:spPr>
           <a:xfrm>
-            <a:off x="8211312" y="4233672"/>
-            <a:ext cx="2734056" cy="941832"/>
-          </a:xfrm>
-          <a:prstGeom prst="rect">
-            <a:avLst/>
-          </a:prstGeom>
-          <a:noFill/>
-          <a:ln/>
-        </p:spPr>
-        <p:txBody>
-          <a:bodyPr wrap="square" lIns="0" tIns="0" rIns="0" bIns="0" rtlCol="0" anchor="t">
+            <a:off x="7891272" y="4169664"/>
+            <a:ext cx="826008" cy="310896"/>
+          </a:xfrm>
+          <a:prstGeom prst="rect">
+            <a:avLst/>
+          </a:prstGeom>
+          <a:noFill/>
+          <a:ln/>
+        </p:spPr>
+        <p:txBody>
+          <a:bodyPr wrap="square" lIns="0" tIns="0" rIns="0" bIns="0" rtlCol="0" anchor="ctr">
             <a:normAutofit/>
           </a:bodyPr>
           <a:lstStyle/>
           <a:p>
-            <a:pPr indent="0" marL="0">
-              <a:buNone/>
-            </a:pPr>
-            <a:r>
-              <a:rPr lang="en-US" sz="1250" dirty="0">
-                <a:solidFill>
-                  <a:srgbClr val="17364A"/>
-                </a:solidFill>
-                <a:latin typeface="Aptos" pitchFamily="34" charset="0"/>
-                <a:ea typeface="Aptos" pitchFamily="34" charset="-122"/>
-                <a:cs typeface="Aptos" pitchFamily="34" charset="-120"/>
-              </a:rPr>
-              <a:t>The playbook connection helps turn training into agency work, not just individual knowledge.</a:t>
-            </a:r>
-            <a:endParaRPr lang="en-US" sz="1250" dirty="0"/>
+            <a:pPr algn="ctr" indent="0" marL="0">
+              <a:buNone/>
+            </a:pPr>
+            <a:r>
+              <a:rPr lang="en-US" sz="1500" b="1" dirty="0">
+                <a:solidFill>
+                  <a:srgbClr val="FFFFFF"/>
+                </a:solidFill>
+                <a:latin typeface="Aptos" pitchFamily="34" charset="0"/>
+                <a:ea typeface="Aptos" pitchFamily="34" charset="-122"/>
+                <a:cs typeface="Aptos" pitchFamily="34" charset="-120"/>
+              </a:rPr>
+              <a:t>Lesson</a:t>
+            </a:r>
+            <a:endParaRPr lang="en-US" sz="1500" dirty="0"/>
+          </a:p>
+        </p:txBody>
+      </p:sp>
+      <p:sp>
+        <p:nvSpPr>
+          <p:cNvPr id="15" name="Text 13"/>
+          <p:cNvSpPr/>
+          <p:nvPr/>
+        </p:nvSpPr>
+        <p:spPr>
+          <a:xfrm>
+            <a:off x="8817864" y="4187952"/>
+            <a:ext cx="201168" cy="256032"/>
+          </a:xfrm>
+          <a:prstGeom prst="rect">
+            <a:avLst/>
+          </a:prstGeom>
+          <a:noFill/>
+          <a:ln/>
+        </p:spPr>
+        <p:txBody>
+          <a:bodyPr wrap="square" lIns="0" tIns="0" rIns="0" bIns="0" rtlCol="0" anchor="ctr"/>
+          <a:lstStyle/>
+          <a:p>
+            <a:pPr algn="ctr" indent="0" marL="0">
+              <a:buNone/>
+            </a:pPr>
+            <a:r>
+              <a:rPr lang="en-US" sz="1800" b="1" dirty="0">
+                <a:solidFill>
+                  <a:srgbClr val="0068B7"/>
+                </a:solidFill>
+                <a:latin typeface="Aptos" pitchFamily="34" charset="0"/>
+                <a:ea typeface="Aptos" pitchFamily="34" charset="-122"/>
+                <a:cs typeface="Aptos" pitchFamily="34" charset="-120"/>
+              </a:rPr>
+              <a:t>â†’</a:t>
+            </a:r>
+            <a:endParaRPr lang="en-US" sz="1800" dirty="0"/>
+          </a:p>
+        </p:txBody>
+      </p:sp>
+      <p:sp>
+        <p:nvSpPr>
+          <p:cNvPr id="16" name="Shape 14"/>
+          <p:cNvSpPr/>
+          <p:nvPr/>
+        </p:nvSpPr>
+        <p:spPr>
+          <a:xfrm>
+            <a:off x="9046464" y="3977640"/>
+            <a:ext cx="972312" cy="749808"/>
+          </a:xfrm>
+          <a:prstGeom prst="roundRect">
+            <a:avLst>
+              <a:gd name="adj" fmla="val 14634"/>
+            </a:avLst>
+          </a:prstGeom>
+          <a:solidFill>
+            <a:srgbClr val="2F8A28"/>
+          </a:solidFill>
+          <a:ln w="12700">
+            <a:solidFill>
+              <a:srgbClr val="2F8A28"/>
+            </a:solidFill>
+            <a:prstDash val="solid"/>
+          </a:ln>
+        </p:spPr>
+      </p:sp>
+      <p:sp>
+        <p:nvSpPr>
+          <p:cNvPr id="17" name="Text 15"/>
+          <p:cNvSpPr/>
+          <p:nvPr/>
+        </p:nvSpPr>
+        <p:spPr>
+          <a:xfrm>
+            <a:off x="9119616" y="4169664"/>
+            <a:ext cx="826008" cy="310896"/>
+          </a:xfrm>
+          <a:prstGeom prst="rect">
+            <a:avLst/>
+          </a:prstGeom>
+          <a:noFill/>
+          <a:ln/>
+        </p:spPr>
+        <p:txBody>
+          <a:bodyPr wrap="square" lIns="0" tIns="0" rIns="0" bIns="0" rtlCol="0" anchor="ctr">
+            <a:normAutofit/>
+          </a:bodyPr>
+          <a:lstStyle/>
+          <a:p>
+            <a:pPr algn="ctr" indent="0" marL="0">
+              <a:buNone/>
+            </a:pPr>
+            <a:r>
+              <a:rPr lang="en-US" sz="1500" b="1" dirty="0">
+                <a:solidFill>
+                  <a:srgbClr val="FFFFFF"/>
+                </a:solidFill>
+                <a:latin typeface="Aptos" pitchFamily="34" charset="0"/>
+                <a:ea typeface="Aptos" pitchFamily="34" charset="-122"/>
+                <a:cs typeface="Aptos" pitchFamily="34" charset="-120"/>
+              </a:rPr>
+              <a:t>Plays</a:t>
+            </a:r>
+            <a:endParaRPr lang="en-US" sz="1500" dirty="0"/>
+          </a:p>
+        </p:txBody>
+      </p:sp>
+      <p:sp>
+        <p:nvSpPr>
+          <p:cNvPr id="18" name="Text 16"/>
+          <p:cNvSpPr/>
+          <p:nvPr/>
+        </p:nvSpPr>
+        <p:spPr>
+          <a:xfrm>
+            <a:off x="10046208" y="4187952"/>
+            <a:ext cx="201168" cy="256032"/>
+          </a:xfrm>
+          <a:prstGeom prst="rect">
+            <a:avLst/>
+          </a:prstGeom>
+          <a:noFill/>
+          <a:ln/>
+        </p:spPr>
+        <p:txBody>
+          <a:bodyPr wrap="square" lIns="0" tIns="0" rIns="0" bIns="0" rtlCol="0" anchor="ctr"/>
+          <a:lstStyle/>
+          <a:p>
+            <a:pPr algn="ctr" indent="0" marL="0">
+              <a:buNone/>
+            </a:pPr>
+            <a:r>
+              <a:rPr lang="en-US" sz="1800" b="1" dirty="0">
+                <a:solidFill>
+                  <a:srgbClr val="0068B7"/>
+                </a:solidFill>
+                <a:latin typeface="Aptos" pitchFamily="34" charset="0"/>
+                <a:ea typeface="Aptos" pitchFamily="34" charset="-122"/>
+                <a:cs typeface="Aptos" pitchFamily="34" charset="-120"/>
+              </a:rPr>
+              <a:t>â†’</a:t>
+            </a:r>
+            <a:endParaRPr lang="en-US" sz="1800" dirty="0"/>
+          </a:p>
+        </p:txBody>
+      </p:sp>
+      <p:sp>
+        <p:nvSpPr>
+          <p:cNvPr id="19" name="Shape 17"/>
+          <p:cNvSpPr/>
+          <p:nvPr/>
+        </p:nvSpPr>
+        <p:spPr>
+          <a:xfrm>
+            <a:off x="10274808" y="3977640"/>
+            <a:ext cx="972312" cy="749808"/>
+          </a:xfrm>
+          <a:prstGeom prst="roundRect">
+            <a:avLst>
+              <a:gd name="adj" fmla="val 14634"/>
+            </a:avLst>
+          </a:prstGeom>
+          <a:solidFill>
+            <a:srgbClr val="6A4CA3"/>
+          </a:solidFill>
+          <a:ln w="12700">
+            <a:solidFill>
+              <a:srgbClr val="6A4CA3"/>
+            </a:solidFill>
+            <a:prstDash val="solid"/>
+          </a:ln>
+        </p:spPr>
+      </p:sp>
+      <p:sp>
+        <p:nvSpPr>
+          <p:cNvPr id="20" name="Text 18"/>
+          <p:cNvSpPr/>
+          <p:nvPr/>
+        </p:nvSpPr>
+        <p:spPr>
+          <a:xfrm>
+            <a:off x="10347960" y="4169664"/>
+            <a:ext cx="826008" cy="310896"/>
+          </a:xfrm>
+          <a:prstGeom prst="rect">
+            <a:avLst/>
+          </a:prstGeom>
+          <a:noFill/>
+          <a:ln/>
+        </p:spPr>
+        <p:txBody>
+          <a:bodyPr wrap="square" lIns="0" tIns="0" rIns="0" bIns="0" rtlCol="0" anchor="ctr">
+            <a:normAutofit/>
+          </a:bodyPr>
+          <a:lstStyle/>
+          <a:p>
+            <a:pPr algn="ctr" indent="0" marL="0">
+              <a:buNone/>
+            </a:pPr>
+            <a:r>
+              <a:rPr lang="en-US" sz="1500" b="1" dirty="0">
+                <a:solidFill>
+                  <a:srgbClr val="FFFFFF"/>
+                </a:solidFill>
+                <a:latin typeface="Aptos" pitchFamily="34" charset="0"/>
+                <a:ea typeface="Aptos" pitchFamily="34" charset="-122"/>
+                <a:cs typeface="Aptos" pitchFamily="34" charset="-120"/>
+              </a:rPr>
+              <a:t>Action</a:t>
+            </a:r>
+            <a:endParaRPr lang="en-US" sz="1500" dirty="0"/>
           </a:p>
         </p:txBody>
       </p:sp>
@@ -11700,7 +12548,7 @@
                 <a:ea typeface="Aptos" pitchFamily="34" charset="-122"/>
                 <a:cs typeface="Aptos" pitchFamily="34" charset="-120"/>
               </a:rPr>
-              <a:t>© Paula Soper</a:t>
+              <a:t>Â© Paula Soper</a:t>
             </a:r>
             <a:endParaRPr lang="en-US" sz="800" dirty="0"/>
           </a:p>
@@ -11714,8 +12562,47 @@
         </p:nvSpPr>
         <p:spPr>
           <a:xfrm>
+            <a:off x="11137392" y="6510528"/>
+            <a:ext cx="411480" cy="201168"/>
+          </a:xfrm>
+          <a:prstGeom prst="rect">
+            <a:avLst/>
+          </a:prstGeom>
+          <a:noFill/>
+          <a:ln/>
+        </p:spPr>
+        <p:txBody>
+          <a:bodyPr wrap="square" lIns="0" tIns="0" rIns="0" bIns="0" rtlCol="0" anchor="ctr"/>
+          <a:lstStyle/>
+          <a:p>
+            <a:pPr algn="r" indent="0" marL="0">
+              <a:buNone/>
+            </a:pPr>
+            <a:r>
+              <a:rPr lang="en-US" sz="900" dirty="0">
+                <a:solidFill>
+                  <a:srgbClr val="5F7181"/>
+                </a:solidFill>
+                <a:latin typeface="Aptos" pitchFamily="34" charset="0"/>
+                <a:ea typeface="Aptos" pitchFamily="34" charset="-122"/>
+                <a:cs typeface="Aptos" pitchFamily="34" charset="-120"/>
+              </a:rPr>
+              <a:t>4</a:t>
+            </a:r>
+            <a:endParaRPr lang="en-US" sz="900" dirty="0"/>
+          </a:p>
+        </p:txBody>
+      </p:sp>
+      <p:sp>
+        <p:nvSpPr>
+          <p:cNvPr id="8" name="Text 6"/>
+          <p:cNvSpPr/>
+          <p:nvPr/>
+        </p:nvSpPr>
+        <p:spPr>
+          <a:xfrm>
             <a:off x="640080" y="658368"/>
-            <a:ext cx="10881360" cy="566928"/>
+            <a:ext cx="10881360" cy="713232"/>
           </a:xfrm>
           <a:prstGeom prst="rect">
             <a:avLst/>
@@ -11733,7 +12620,7 @@
               <a:buNone/>
             </a:pPr>
             <a:r>
-              <a:rPr lang="en-US" sz="2700" b="1" dirty="0">
+              <a:rPr lang="en-US" sz="3400" b="1" dirty="0">
                 <a:solidFill>
                   <a:srgbClr val="003A63"/>
                 </a:solidFill>
@@ -11743,20 +12630,20 @@
               </a:rPr>
               <a:t>Related toolkit resources</a:t>
             </a:r>
-            <a:endParaRPr lang="en-US" sz="2700" dirty="0"/>
-          </a:p>
-        </p:txBody>
-      </p:sp>
-      <p:sp>
-        <p:nvSpPr>
-          <p:cNvPr id="8" name="Text 6"/>
-          <p:cNvSpPr/>
-          <p:nvPr/>
-        </p:nvSpPr>
-        <p:spPr>
-          <a:xfrm>
-            <a:off x="868680" y="1417320"/>
-            <a:ext cx="6903720" cy="4480560"/>
+            <a:endParaRPr lang="en-US" sz="3400" dirty="0"/>
+          </a:p>
+        </p:txBody>
+      </p:sp>
+      <p:sp>
+        <p:nvSpPr>
+          <p:cNvPr id="9" name="Text 7"/>
+          <p:cNvSpPr/>
+          <p:nvPr/>
+        </p:nvSpPr>
+        <p:spPr>
+          <a:xfrm>
+            <a:off x="868680" y="1508760"/>
+            <a:ext cx="6812280" cy="3977640"/>
           </a:xfrm>
           <a:prstGeom prst="rect">
             <a:avLst/>
@@ -11771,7 +12658,7 @@
           <a:lstStyle/>
           <a:p>
             <a:r>
-              <a:rPr lang="en-US" sz="1460" dirty="0">
+              <a:rPr lang="en-US" sz="1850" dirty="0">
                 <a:solidFill>
                   <a:srgbClr val="17364A"/>
                 </a:solidFill>
@@ -11779,13 +12666,13 @@
                 <a:ea typeface="Aptos" pitchFamily="34" charset="-122"/>
                 <a:cs typeface="Aptos" pitchFamily="34" charset="-120"/>
               </a:rPr>
-              <a:t>Tool 44: Performance Monitoring Dashboard (Dashboard) - Use this tool to complete or strengthen the practical exercise for the module.</a:t>
-            </a:r>
-            <a:endParaRPr lang="en-US" sz="1460" dirty="0"/>
-          </a:p>
-          <a:p>
-            <a:r>
-              <a:rPr lang="en-US" sz="1460" dirty="0">
+              <a:t>Tool 44: Performance Monitoring Dashboard (Dashboard) - Use this tool to complete or strengthen the.</a:t>
+            </a:r>
+            <a:endParaRPr lang="en-US" sz="1850" dirty="0"/>
+          </a:p>
+          <a:p>
+            <a:r>
+              <a:rPr lang="en-US" sz="1850" dirty="0">
                 <a:solidFill>
                   <a:srgbClr val="17364A"/>
                 </a:solidFill>
@@ -11793,13 +12680,13 @@
                 <a:ea typeface="Aptos" pitchFamily="34" charset="-122"/>
                 <a:cs typeface="Aptos" pitchFamily="34" charset="-120"/>
               </a:rPr>
-              <a:t>Tool 45: Continuous Improvement Log (Log) - Use Continuous Improvement Log to translate this lesson into a documented public health.</a:t>
-            </a:r>
-            <a:endParaRPr lang="en-US" sz="1460" dirty="0"/>
-          </a:p>
-          <a:p>
-            <a:r>
-              <a:rPr lang="en-US" sz="1460" dirty="0">
+              <a:t>Tool 45: Continuous Improvement Log (Log) - Use Continuous Improvement Log to translate this lesson into a.</a:t>
+            </a:r>
+            <a:endParaRPr lang="en-US" sz="1850" dirty="0"/>
+          </a:p>
+          <a:p>
+            <a:r>
+              <a:rPr lang="en-US" sz="1850" dirty="0">
                 <a:solidFill>
                   <a:srgbClr val="17364A"/>
                 </a:solidFill>
@@ -11807,13 +12694,13 @@
                 <a:ea typeface="Aptos" pitchFamily="34" charset="-122"/>
                 <a:cs typeface="Aptos" pitchFamily="34" charset="-120"/>
               </a:rPr>
-              <a:t>Tool 48: AI Evaluation &amp; Outcomes Reporting (Template) - Use this tool to complete or strengthen the practical exercise for the.</a:t>
-            </a:r>
-            <a:endParaRPr lang="en-US" sz="1460" dirty="0"/>
-          </a:p>
-          <a:p>
-            <a:r>
-              <a:rPr lang="en-US" sz="1460" dirty="0">
+              <a:t>Tool 48: AI Evaluation &amp; Outcomes Reporting (Template) - Use this tool to complete or strengthen the.</a:t>
+            </a:r>
+            <a:endParaRPr lang="en-US" sz="1850" dirty="0"/>
+          </a:p>
+          <a:p>
+            <a:r>
+              <a:rPr lang="en-US" sz="1850" dirty="0">
                 <a:solidFill>
                   <a:srgbClr val="17364A"/>
                 </a:solidFill>
@@ -11821,29 +12708,15 @@
                 <a:ea typeface="Aptos" pitchFamily="34" charset="-122"/>
                 <a:cs typeface="Aptos" pitchFamily="34" charset="-120"/>
               </a:rPr>
-              <a:t>Tool 1: AI Vision &amp; Principles Workshop (Workshop) - Use AI Vision &amp; Principles Workshop to translate this lesson into a documented.</a:t>
-            </a:r>
-            <a:endParaRPr lang="en-US" sz="1460" dirty="0"/>
-          </a:p>
-          <a:p>
-            <a:r>
-              <a:rPr lang="en-US" sz="1460" dirty="0">
-                <a:solidFill>
-                  <a:srgbClr val="17364A"/>
-                </a:solidFill>
-                <a:latin typeface="Aptos" pitchFamily="34" charset="0"/>
-                <a:ea typeface="Aptos" pitchFamily="34" charset="-122"/>
-                <a:cs typeface="Aptos" pitchFamily="34" charset="-120"/>
-              </a:rPr>
-              <a:t>Tool 3: Equity Impact Assessment Checklist (Checklist) - Use this tool to complete or strengthen the practical exercise for the.</a:t>
-            </a:r>
-            <a:endParaRPr lang="en-US" sz="1460" dirty="0"/>
-          </a:p>
-        </p:txBody>
-      </p:sp>
-      <p:sp>
-        <p:nvSpPr>
-          <p:cNvPr id="9" name="Shape 7"/>
+              <a:t>Tool 1: AI Vision &amp; Principles Workshop (Workshop) - Use AI Vision &amp; Principles Workshop to translate this.</a:t>
+            </a:r>
+            <a:endParaRPr lang="en-US" sz="1850" dirty="0"/>
+          </a:p>
+        </p:txBody>
+      </p:sp>
+      <p:sp>
+        <p:nvSpPr>
+          <p:cNvPr id="10" name="Shape 8"/>
           <p:cNvSpPr/>
           <p:nvPr/>
         </p:nvSpPr>
@@ -11870,14 +12743,14 @@
       </p:sp>
       <p:sp>
         <p:nvSpPr>
-          <p:cNvPr id="10" name="Text 8"/>
+          <p:cNvPr id="11" name="Text 9"/>
           <p:cNvSpPr/>
           <p:nvPr/>
         </p:nvSpPr>
         <p:spPr>
           <a:xfrm>
             <a:off x="8211312" y="1563624"/>
-            <a:ext cx="2734056" cy="201168"/>
+            <a:ext cx="2734056" cy="256032"/>
           </a:xfrm>
           <a:prstGeom prst="rect">
             <a:avLst/>
@@ -11893,7 +12766,7 @@
               <a:buNone/>
             </a:pPr>
             <a:r>
-              <a:rPr lang="en-US" sz="950" b="1" dirty="0">
+              <a:rPr lang="en-US" sz="1300" b="1" dirty="0">
                 <a:solidFill>
                   <a:srgbClr val="0068B7"/>
                 </a:solidFill>
@@ -11903,20 +12776,20 @@
               </a:rPr>
               <a:t>Use the tools</a:t>
             </a:r>
-            <a:endParaRPr lang="en-US" sz="950" dirty="0"/>
-          </a:p>
-        </p:txBody>
-      </p:sp>
-      <p:sp>
-        <p:nvSpPr>
-          <p:cNvPr id="11" name="Text 9"/>
-          <p:cNvSpPr/>
-          <p:nvPr/>
-        </p:nvSpPr>
-        <p:spPr>
-          <a:xfrm>
-            <a:off x="8211312" y="1856232"/>
-            <a:ext cx="2734056" cy="1536192"/>
+            <a:endParaRPr lang="en-US" sz="1300" dirty="0"/>
+          </a:p>
+        </p:txBody>
+      </p:sp>
+      <p:sp>
+        <p:nvSpPr>
+          <p:cNvPr id="12" name="Text 10"/>
+          <p:cNvSpPr/>
+          <p:nvPr/>
+        </p:nvSpPr>
+        <p:spPr>
+          <a:xfrm>
+            <a:off x="8211312" y="1920240"/>
+            <a:ext cx="2734056" cy="1463040"/>
           </a:xfrm>
           <a:prstGeom prst="rect">
             <a:avLst/>
@@ -11934,7 +12807,7 @@
               <a:buNone/>
             </a:pPr>
             <a:r>
-              <a:rPr lang="en-US" sz="1250" dirty="0">
+              <a:rPr lang="en-US" sz="1550" dirty="0">
                 <a:solidFill>
                   <a:srgbClr val="17364A"/>
                 </a:solidFill>
@@ -11944,32 +12817,32 @@
               </a:rPr>
               <a:t>Use linked tools when your department needs a structured worksheet, template, checklist, review process, or documentation artifact.</a:t>
             </a:r>
-            <a:endParaRPr lang="en-US" sz="1250" dirty="0"/>
-          </a:p>
-        </p:txBody>
-      </p:sp>
-      <p:sp>
-        <p:nvSpPr>
-          <p:cNvPr id="12" name="Shape 10"/>
-          <p:cNvSpPr/>
-          <p:nvPr/>
-        </p:nvSpPr>
-        <p:spPr>
-          <a:xfrm>
-            <a:off x="8046720" y="3794760"/>
-            <a:ext cx="3063240" cy="1508760"/>
+            <a:endParaRPr lang="en-US" sz="1550" dirty="0"/>
+          </a:p>
+        </p:txBody>
+      </p:sp>
+      <p:sp>
+        <p:nvSpPr>
+          <p:cNvPr id="13" name="Shape 11"/>
+          <p:cNvSpPr/>
+          <p:nvPr/>
+        </p:nvSpPr>
+        <p:spPr>
+          <a:xfrm>
+            <a:off x="7818120" y="3977640"/>
+            <a:ext cx="972312" cy="749808"/>
           </a:xfrm>
           <a:prstGeom prst="roundRect">
             <a:avLst>
-              <a:gd name="adj" fmla="val 7273"/>
+              <a:gd name="adj" fmla="val 14634"/>
             </a:avLst>
           </a:prstGeom>
           <a:solidFill>
-            <a:srgbClr val="EEF8ED"/>
+            <a:srgbClr val="0068B7"/>
           </a:solidFill>
           <a:ln w="12700">
             <a:solidFill>
-              <a:srgbClr val="B9D7E6"/>
+              <a:srgbClr val="0068B7"/>
             </a:solidFill>
             <a:prstDash val="solid"/>
           </a:ln>
@@ -11977,81 +12850,256 @@
       </p:sp>
       <p:sp>
         <p:nvSpPr>
-          <p:cNvPr id="13" name="Text 11"/>
-          <p:cNvSpPr/>
-          <p:nvPr/>
-        </p:nvSpPr>
-        <p:spPr>
-          <a:xfrm>
-            <a:off x="8211312" y="3941064"/>
-            <a:ext cx="2734056" cy="201168"/>
-          </a:xfrm>
-          <a:prstGeom prst="rect">
-            <a:avLst/>
-          </a:prstGeom>
-          <a:noFill/>
-          <a:ln/>
-        </p:spPr>
-        <p:txBody>
-          <a:bodyPr wrap="square" lIns="0" tIns="0" rIns="0" bIns="0" rtlCol="0" anchor="ctr"/>
-          <a:lstStyle/>
-          <a:p>
-            <a:pPr indent="0" marL="0">
-              <a:buNone/>
-            </a:pPr>
-            <a:r>
-              <a:rPr lang="en-US" sz="950" b="1" dirty="0">
-                <a:solidFill>
-                  <a:srgbClr val="0068B7"/>
-                </a:solidFill>
-                <a:latin typeface="Aptos" pitchFamily="34" charset="0"/>
-                <a:ea typeface="Aptos" pitchFamily="34" charset="-122"/>
-                <a:cs typeface="Aptos" pitchFamily="34" charset="-120"/>
-              </a:rPr>
-              <a:t>Avoid duplication</a:t>
-            </a:r>
-            <a:endParaRPr lang="en-US" sz="950" dirty="0"/>
-          </a:p>
-        </p:txBody>
-      </p:sp>
-      <p:sp>
-        <p:nvSpPr>
           <p:cNvPr id="14" name="Text 12"/>
           <p:cNvSpPr/>
           <p:nvPr/>
         </p:nvSpPr>
         <p:spPr>
           <a:xfrm>
-            <a:off x="8211312" y="4233672"/>
-            <a:ext cx="2734056" cy="941832"/>
-          </a:xfrm>
-          <a:prstGeom prst="rect">
-            <a:avLst/>
-          </a:prstGeom>
-          <a:noFill/>
-          <a:ln/>
-        </p:spPr>
-        <p:txBody>
-          <a:bodyPr wrap="square" lIns="0" tIns="0" rIns="0" bIns="0" rtlCol="0" anchor="t">
+            <a:off x="7891272" y="4169664"/>
+            <a:ext cx="826008" cy="310896"/>
+          </a:xfrm>
+          <a:prstGeom prst="rect">
+            <a:avLst/>
+          </a:prstGeom>
+          <a:noFill/>
+          <a:ln/>
+        </p:spPr>
+        <p:txBody>
+          <a:bodyPr wrap="square" lIns="0" tIns="0" rIns="0" bIns="0" rtlCol="0" anchor="ctr">
             <a:normAutofit/>
           </a:bodyPr>
           <a:lstStyle/>
           <a:p>
-            <a:pPr indent="0" marL="0">
-              <a:buNone/>
-            </a:pPr>
-            <a:r>
-              <a:rPr lang="en-US" sz="1250" dirty="0">
-                <a:solidFill>
-                  <a:srgbClr val="17364A"/>
-                </a:solidFill>
-                <a:latin typeface="Aptos" pitchFamily="34" charset="0"/>
-                <a:ea typeface="Aptos" pitchFamily="34" charset="-122"/>
-                <a:cs typeface="Aptos" pitchFamily="34" charset="-120"/>
-              </a:rPr>
-              <a:t>If your department already has a strong equivalent tool, adapt or use the existing process instead of recreating it.</a:t>
-            </a:r>
-            <a:endParaRPr lang="en-US" sz="1250" dirty="0"/>
+            <a:pPr algn="ctr" indent="0" marL="0">
+              <a:buNone/>
+            </a:pPr>
+            <a:r>
+              <a:rPr lang="en-US" sz="1500" b="1" dirty="0">
+                <a:solidFill>
+                  <a:srgbClr val="FFFFFF"/>
+                </a:solidFill>
+                <a:latin typeface="Aptos" pitchFamily="34" charset="0"/>
+                <a:ea typeface="Aptos" pitchFamily="34" charset="-122"/>
+                <a:cs typeface="Aptos" pitchFamily="34" charset="-120"/>
+              </a:rPr>
+              <a:t>Concept</a:t>
+            </a:r>
+            <a:endParaRPr lang="en-US" sz="1500" dirty="0"/>
+          </a:p>
+        </p:txBody>
+      </p:sp>
+      <p:sp>
+        <p:nvSpPr>
+          <p:cNvPr id="15" name="Text 13"/>
+          <p:cNvSpPr/>
+          <p:nvPr/>
+        </p:nvSpPr>
+        <p:spPr>
+          <a:xfrm>
+            <a:off x="8817864" y="4187952"/>
+            <a:ext cx="201168" cy="256032"/>
+          </a:xfrm>
+          <a:prstGeom prst="rect">
+            <a:avLst/>
+          </a:prstGeom>
+          <a:noFill/>
+          <a:ln/>
+        </p:spPr>
+        <p:txBody>
+          <a:bodyPr wrap="square" lIns="0" tIns="0" rIns="0" bIns="0" rtlCol="0" anchor="ctr"/>
+          <a:lstStyle/>
+          <a:p>
+            <a:pPr algn="ctr" indent="0" marL="0">
+              <a:buNone/>
+            </a:pPr>
+            <a:r>
+              <a:rPr lang="en-US" sz="1800" b="1" dirty="0">
+                <a:solidFill>
+                  <a:srgbClr val="0068B7"/>
+                </a:solidFill>
+                <a:latin typeface="Aptos" pitchFamily="34" charset="0"/>
+                <a:ea typeface="Aptos" pitchFamily="34" charset="-122"/>
+                <a:cs typeface="Aptos" pitchFamily="34" charset="-120"/>
+              </a:rPr>
+              <a:t>â†’</a:t>
+            </a:r>
+            <a:endParaRPr lang="en-US" sz="1800" dirty="0"/>
+          </a:p>
+        </p:txBody>
+      </p:sp>
+      <p:sp>
+        <p:nvSpPr>
+          <p:cNvPr id="16" name="Shape 14"/>
+          <p:cNvSpPr/>
+          <p:nvPr/>
+        </p:nvSpPr>
+        <p:spPr>
+          <a:xfrm>
+            <a:off x="9046464" y="3977640"/>
+            <a:ext cx="972312" cy="749808"/>
+          </a:xfrm>
+          <a:prstGeom prst="roundRect">
+            <a:avLst>
+              <a:gd name="adj" fmla="val 14634"/>
+            </a:avLst>
+          </a:prstGeom>
+          <a:solidFill>
+            <a:srgbClr val="2F8A28"/>
+          </a:solidFill>
+          <a:ln w="12700">
+            <a:solidFill>
+              <a:srgbClr val="2F8A28"/>
+            </a:solidFill>
+            <a:prstDash val="solid"/>
+          </a:ln>
+        </p:spPr>
+      </p:sp>
+      <p:sp>
+        <p:nvSpPr>
+          <p:cNvPr id="17" name="Text 15"/>
+          <p:cNvSpPr/>
+          <p:nvPr/>
+        </p:nvSpPr>
+        <p:spPr>
+          <a:xfrm>
+            <a:off x="9119616" y="4169664"/>
+            <a:ext cx="826008" cy="310896"/>
+          </a:xfrm>
+          <a:prstGeom prst="rect">
+            <a:avLst/>
+          </a:prstGeom>
+          <a:noFill/>
+          <a:ln/>
+        </p:spPr>
+        <p:txBody>
+          <a:bodyPr wrap="square" lIns="0" tIns="0" rIns="0" bIns="0" rtlCol="0" anchor="ctr">
+            <a:normAutofit/>
+          </a:bodyPr>
+          <a:lstStyle/>
+          <a:p>
+            <a:pPr algn="ctr" indent="0" marL="0">
+              <a:buNone/>
+            </a:pPr>
+            <a:r>
+              <a:rPr lang="en-US" sz="1500" b="1" dirty="0">
+                <a:solidFill>
+                  <a:srgbClr val="FFFFFF"/>
+                </a:solidFill>
+                <a:latin typeface="Aptos" pitchFamily="34" charset="0"/>
+                <a:ea typeface="Aptos" pitchFamily="34" charset="-122"/>
+                <a:cs typeface="Aptos" pitchFamily="34" charset="-120"/>
+              </a:rPr>
+              <a:t>Tool</a:t>
+            </a:r>
+            <a:endParaRPr lang="en-US" sz="1500" dirty="0"/>
+          </a:p>
+        </p:txBody>
+      </p:sp>
+      <p:sp>
+        <p:nvSpPr>
+          <p:cNvPr id="18" name="Text 16"/>
+          <p:cNvSpPr/>
+          <p:nvPr/>
+        </p:nvSpPr>
+        <p:spPr>
+          <a:xfrm>
+            <a:off x="10046208" y="4187952"/>
+            <a:ext cx="201168" cy="256032"/>
+          </a:xfrm>
+          <a:prstGeom prst="rect">
+            <a:avLst/>
+          </a:prstGeom>
+          <a:noFill/>
+          <a:ln/>
+        </p:spPr>
+        <p:txBody>
+          <a:bodyPr wrap="square" lIns="0" tIns="0" rIns="0" bIns="0" rtlCol="0" anchor="ctr"/>
+          <a:lstStyle/>
+          <a:p>
+            <a:pPr algn="ctr" indent="0" marL="0">
+              <a:buNone/>
+            </a:pPr>
+            <a:r>
+              <a:rPr lang="en-US" sz="1800" b="1" dirty="0">
+                <a:solidFill>
+                  <a:srgbClr val="0068B7"/>
+                </a:solidFill>
+                <a:latin typeface="Aptos" pitchFamily="34" charset="0"/>
+                <a:ea typeface="Aptos" pitchFamily="34" charset="-122"/>
+                <a:cs typeface="Aptos" pitchFamily="34" charset="-120"/>
+              </a:rPr>
+              <a:t>â†’</a:t>
+            </a:r>
+            <a:endParaRPr lang="en-US" sz="1800" dirty="0"/>
+          </a:p>
+        </p:txBody>
+      </p:sp>
+      <p:sp>
+        <p:nvSpPr>
+          <p:cNvPr id="19" name="Shape 17"/>
+          <p:cNvSpPr/>
+          <p:nvPr/>
+        </p:nvSpPr>
+        <p:spPr>
+          <a:xfrm>
+            <a:off x="10274808" y="3977640"/>
+            <a:ext cx="972312" cy="749808"/>
+          </a:xfrm>
+          <a:prstGeom prst="roundRect">
+            <a:avLst>
+              <a:gd name="adj" fmla="val 14634"/>
+            </a:avLst>
+          </a:prstGeom>
+          <a:solidFill>
+            <a:srgbClr val="D69A2D"/>
+          </a:solidFill>
+          <a:ln w="12700">
+            <a:solidFill>
+              <a:srgbClr val="D69A2D"/>
+            </a:solidFill>
+            <a:prstDash val="solid"/>
+          </a:ln>
+        </p:spPr>
+      </p:sp>
+      <p:sp>
+        <p:nvSpPr>
+          <p:cNvPr id="20" name="Text 18"/>
+          <p:cNvSpPr/>
+          <p:nvPr/>
+        </p:nvSpPr>
+        <p:spPr>
+          <a:xfrm>
+            <a:off x="10347960" y="4169664"/>
+            <a:ext cx="826008" cy="310896"/>
+          </a:xfrm>
+          <a:prstGeom prst="rect">
+            <a:avLst/>
+          </a:prstGeom>
+          <a:noFill/>
+          <a:ln/>
+        </p:spPr>
+        <p:txBody>
+          <a:bodyPr wrap="square" lIns="0" tIns="0" rIns="0" bIns="0" rtlCol="0" anchor="ctr">
+            <a:normAutofit/>
+          </a:bodyPr>
+          <a:lstStyle/>
+          <a:p>
+            <a:pPr algn="ctr" indent="0" marL="0">
+              <a:buNone/>
+            </a:pPr>
+            <a:r>
+              <a:rPr lang="en-US" sz="1500" b="1" dirty="0">
+                <a:solidFill>
+                  <a:srgbClr val="FFFFFF"/>
+                </a:solidFill>
+                <a:latin typeface="Aptos" pitchFamily="34" charset="0"/>
+                <a:ea typeface="Aptos" pitchFamily="34" charset="-122"/>
+                <a:cs typeface="Aptos" pitchFamily="34" charset="-120"/>
+              </a:rPr>
+              <a:t>Artifact</a:t>
+            </a:r>
+            <a:endParaRPr lang="en-US" sz="1500" dirty="0"/>
           </a:p>
         </p:txBody>
       </p:sp>
@@ -12248,7 +13296,7 @@
                 <a:ea typeface="Aptos" pitchFamily="34" charset="-122"/>
                 <a:cs typeface="Aptos" pitchFamily="34" charset="-120"/>
               </a:rPr>
-              <a:t>© Paula Soper</a:t>
+              <a:t>Â© Paula Soper</a:t>
             </a:r>
             <a:endParaRPr lang="en-US" sz="800" dirty="0"/>
           </a:p>
@@ -12256,7 +13304,46 @@
       </p:sp>
       <p:sp>
         <p:nvSpPr>
-          <p:cNvPr id="7" name="Shape 5"/>
+          <p:cNvPr id="7" name="Text 5"/>
+          <p:cNvSpPr/>
+          <p:nvPr/>
+        </p:nvSpPr>
+        <p:spPr>
+          <a:xfrm>
+            <a:off x="11137392" y="6510528"/>
+            <a:ext cx="411480" cy="201168"/>
+          </a:xfrm>
+          <a:prstGeom prst="rect">
+            <a:avLst/>
+          </a:prstGeom>
+          <a:noFill/>
+          <a:ln/>
+        </p:spPr>
+        <p:txBody>
+          <a:bodyPr wrap="square" lIns="0" tIns="0" rIns="0" bIns="0" rtlCol="0" anchor="ctr"/>
+          <a:lstStyle/>
+          <a:p>
+            <a:pPr algn="r" indent="0" marL="0">
+              <a:buNone/>
+            </a:pPr>
+            <a:r>
+              <a:rPr lang="en-US" sz="900" dirty="0">
+                <a:solidFill>
+                  <a:srgbClr val="5F7181"/>
+                </a:solidFill>
+                <a:latin typeface="Aptos" pitchFamily="34" charset="0"/>
+                <a:ea typeface="Aptos" pitchFamily="34" charset="-122"/>
+                <a:cs typeface="Aptos" pitchFamily="34" charset="-120"/>
+              </a:rPr>
+              <a:t>5</a:t>
+            </a:r>
+            <a:endParaRPr lang="en-US" sz="900" dirty="0"/>
+          </a:p>
+        </p:txBody>
+      </p:sp>
+      <p:sp>
+        <p:nvSpPr>
+          <p:cNvPr id="8" name="Shape 6"/>
           <p:cNvSpPr/>
           <p:nvPr/>
         </p:nvSpPr>
@@ -12281,7 +13368,7 @@
       </p:sp>
       <p:sp>
         <p:nvSpPr>
-          <p:cNvPr id="8" name="Text 6"/>
+          <p:cNvPr id="9" name="Text 7"/>
           <p:cNvSpPr/>
           <p:nvPr/>
         </p:nvSpPr>
@@ -12320,14 +13407,14 @@
       </p:sp>
       <p:sp>
         <p:nvSpPr>
-          <p:cNvPr id="9" name="Text 7"/>
+          <p:cNvPr id="10" name="Text 8"/>
           <p:cNvSpPr/>
           <p:nvPr/>
         </p:nvSpPr>
         <p:spPr>
           <a:xfrm>
             <a:off x="640080" y="621792"/>
-            <a:ext cx="10881360" cy="566928"/>
+            <a:ext cx="10881360" cy="713232"/>
           </a:xfrm>
           <a:prstGeom prst="rect">
             <a:avLst/>
@@ -12345,7 +13432,7 @@
               <a:buNone/>
             </a:pPr>
             <a:r>
-              <a:rPr lang="en-US" sz="2700" b="1" dirty="0">
+              <a:rPr lang="en-US" sz="3400" b="1" dirty="0">
                 <a:solidFill>
                   <a:srgbClr val="003A63"/>
                 </a:solidFill>
@@ -12355,20 +13442,20 @@
               </a:rPr>
               <a:t>Learning Objectives</a:t>
             </a:r>
-            <a:endParaRPr lang="en-US" sz="2700" dirty="0"/>
-          </a:p>
-        </p:txBody>
-      </p:sp>
-      <p:sp>
-        <p:nvSpPr>
-          <p:cNvPr id="10" name="Text 8"/>
-          <p:cNvSpPr/>
-          <p:nvPr/>
-        </p:nvSpPr>
-        <p:spPr>
-          <a:xfrm>
-            <a:off x="868680" y="1417320"/>
-            <a:ext cx="6675120" cy="4434840"/>
+            <a:endParaRPr lang="en-US" sz="3400" dirty="0"/>
+          </a:p>
+        </p:txBody>
+      </p:sp>
+      <p:sp>
+        <p:nvSpPr>
+          <p:cNvPr id="11" name="Text 9"/>
+          <p:cNvSpPr/>
+          <p:nvPr/>
+        </p:nvSpPr>
+        <p:spPr>
+          <a:xfrm>
+            <a:off x="868680" y="1508760"/>
+            <a:ext cx="6537960" cy="4160520"/>
           </a:xfrm>
           <a:prstGeom prst="rect">
             <a:avLst/>
@@ -12383,7 +13470,7 @@
           <a:lstStyle/>
           <a:p>
             <a:r>
-              <a:rPr lang="en-US" sz="1700" dirty="0">
+              <a:rPr lang="en-US" sz="2100" dirty="0">
                 <a:solidFill>
                   <a:srgbClr val="17364A"/>
                 </a:solidFill>
@@ -12393,11 +13480,11 @@
               </a:rPr>
               <a:t>Define predictive analytics and risk stratification in public health terms.</a:t>
             </a:r>
-            <a:endParaRPr lang="en-US" sz="1700" dirty="0"/>
-          </a:p>
-          <a:p>
-            <a:r>
-              <a:rPr lang="en-US" sz="1700" dirty="0">
+            <a:endParaRPr lang="en-US" sz="2100" dirty="0"/>
+          </a:p>
+          <a:p>
+            <a:r>
+              <a:rPr lang="en-US" sz="2100" dirty="0">
                 <a:solidFill>
                   <a:srgbClr val="17364A"/>
                 </a:solidFill>
@@ -12407,11 +13494,11 @@
               </a:rPr>
               <a:t>Distinguish prediction from causation, diagnosis, and eligibility determination.</a:t>
             </a:r>
-            <a:endParaRPr lang="en-US" sz="1700" dirty="0"/>
-          </a:p>
-          <a:p>
-            <a:r>
-              <a:rPr lang="en-US" sz="1700" dirty="0">
+            <a:endParaRPr lang="en-US" sz="2100" dirty="0"/>
+          </a:p>
+          <a:p>
+            <a:r>
+              <a:rPr lang="en-US" sz="2100" dirty="0">
                 <a:solidFill>
                   <a:srgbClr val="17364A"/>
                 </a:solidFill>
@@ -12421,27 +13508,13 @@
               </a:rPr>
               <a:t>Interpret basic risk categories, thresholds, calibration, and error tradeoffs.</a:t>
             </a:r>
-            <a:endParaRPr lang="en-US" sz="1700" dirty="0"/>
-          </a:p>
-          <a:p>
-            <a:r>
-              <a:rPr lang="en-US" sz="1700" dirty="0">
-                <a:solidFill>
-                  <a:srgbClr val="17364A"/>
-                </a:solidFill>
-                <a:latin typeface="Aptos" pitchFamily="34" charset="0"/>
-                <a:ea typeface="Aptos" pitchFamily="34" charset="-122"/>
-                <a:cs typeface="Aptos" pitchFamily="34" charset="-120"/>
-              </a:rPr>
-              <a:t>Identify equity and operational risks associated with risk scores.</a:t>
-            </a:r>
-            <a:endParaRPr lang="en-US" sz="1700" dirty="0"/>
-          </a:p>
-        </p:txBody>
-      </p:sp>
-      <p:sp>
-        <p:nvSpPr>
-          <p:cNvPr id="11" name="Shape 9"/>
+            <a:endParaRPr lang="en-US" sz="2100" dirty="0"/>
+          </a:p>
+        </p:txBody>
+      </p:sp>
+      <p:sp>
+        <p:nvSpPr>
+          <p:cNvPr id="12" name="Shape 10"/>
           <p:cNvSpPr/>
           <p:nvPr/>
         </p:nvSpPr>
@@ -12468,14 +13541,14 @@
       </p:sp>
       <p:sp>
         <p:nvSpPr>
-          <p:cNvPr id="12" name="Text 10"/>
+          <p:cNvPr id="13" name="Text 11"/>
           <p:cNvSpPr/>
           <p:nvPr/>
         </p:nvSpPr>
         <p:spPr>
           <a:xfrm>
             <a:off x="8074152" y="1563624"/>
-            <a:ext cx="2825496" cy="201168"/>
+            <a:ext cx="2825496" cy="256032"/>
           </a:xfrm>
           <a:prstGeom prst="rect">
             <a:avLst/>
@@ -12491,7 +13564,7 @@
               <a:buNone/>
             </a:pPr>
             <a:r>
-              <a:rPr lang="en-US" sz="950" b="1" dirty="0">
+              <a:rPr lang="en-US" sz="1300" b="1" dirty="0">
                 <a:solidFill>
                   <a:srgbClr val="0068B7"/>
                 </a:solidFill>
@@ -12501,20 +13574,20 @@
               </a:rPr>
               <a:t>Key idea</a:t>
             </a:r>
-            <a:endParaRPr lang="en-US" sz="950" dirty="0"/>
-          </a:p>
-        </p:txBody>
-      </p:sp>
-      <p:sp>
-        <p:nvSpPr>
-          <p:cNvPr id="13" name="Text 11"/>
-          <p:cNvSpPr/>
-          <p:nvPr/>
-        </p:nvSpPr>
-        <p:spPr>
-          <a:xfrm>
-            <a:off x="8074152" y="1856232"/>
-            <a:ext cx="2825496" cy="1261872"/>
+            <a:endParaRPr lang="en-US" sz="1300" dirty="0"/>
+          </a:p>
+        </p:txBody>
+      </p:sp>
+      <p:sp>
+        <p:nvSpPr>
+          <p:cNvPr id="14" name="Text 12"/>
+          <p:cNvSpPr/>
+          <p:nvPr/>
+        </p:nvSpPr>
+        <p:spPr>
+          <a:xfrm>
+            <a:off x="8074152" y="1920240"/>
+            <a:ext cx="2825496" cy="1188720"/>
           </a:xfrm>
           <a:prstGeom prst="rect">
             <a:avLst/>
@@ -12532,7 +13605,7 @@
               <a:buNone/>
             </a:pPr>
             <a:r>
-              <a:rPr lang="en-US" sz="1250" dirty="0">
+              <a:rPr lang="en-US" sz="1550" dirty="0">
                 <a:solidFill>
                   <a:srgbClr val="17364A"/>
                 </a:solidFill>
@@ -12542,13 +13615,13 @@
               </a:rPr>
               <a:t>Define predictive analytics and risk stratification in public health terms.</a:t>
             </a:r>
-            <a:endParaRPr lang="en-US" sz="1250" dirty="0"/>
-          </a:p>
-        </p:txBody>
-      </p:sp>
-      <p:sp>
-        <p:nvSpPr>
-          <p:cNvPr id="14" name="Shape 12"/>
+            <a:endParaRPr lang="en-US" sz="1550" dirty="0"/>
+          </a:p>
+        </p:txBody>
+      </p:sp>
+      <p:sp>
+        <p:nvSpPr>
+          <p:cNvPr id="15" name="Shape 13"/>
           <p:cNvSpPr/>
           <p:nvPr/>
         </p:nvSpPr>
@@ -12575,14 +13648,14 @@
       </p:sp>
       <p:sp>
         <p:nvSpPr>
-          <p:cNvPr id="15" name="Text 13"/>
+          <p:cNvPr id="16" name="Text 14"/>
           <p:cNvSpPr/>
           <p:nvPr/>
         </p:nvSpPr>
         <p:spPr>
           <a:xfrm>
             <a:off x="8074152" y="3666744"/>
-            <a:ext cx="2825496" cy="201168"/>
+            <a:ext cx="2825496" cy="256032"/>
           </a:xfrm>
           <a:prstGeom prst="rect">
             <a:avLst/>
@@ -12598,7 +13671,7 @@
               <a:buNone/>
             </a:pPr>
             <a:r>
-              <a:rPr lang="en-US" sz="950" b="1" dirty="0">
+              <a:rPr lang="en-US" sz="1300" b="1" dirty="0">
                 <a:solidFill>
                   <a:srgbClr val="0068B7"/>
                 </a:solidFill>
@@ -12608,20 +13681,20 @@
               </a:rPr>
               <a:t>Use this for</a:t>
             </a:r>
-            <a:endParaRPr lang="en-US" sz="950" dirty="0"/>
-          </a:p>
-        </p:txBody>
-      </p:sp>
-      <p:sp>
-        <p:nvSpPr>
-          <p:cNvPr id="16" name="Text 14"/>
-          <p:cNvSpPr/>
-          <p:nvPr/>
-        </p:nvSpPr>
-        <p:spPr>
-          <a:xfrm>
-            <a:off x="8074152" y="3959352"/>
-            <a:ext cx="2825496" cy="1170432"/>
+            <a:endParaRPr lang="en-US" sz="1300" dirty="0"/>
+          </a:p>
+        </p:txBody>
+      </p:sp>
+      <p:sp>
+        <p:nvSpPr>
+          <p:cNvPr id="17" name="Text 15"/>
+          <p:cNvSpPr/>
+          <p:nvPr/>
+        </p:nvSpPr>
+        <p:spPr>
+          <a:xfrm>
+            <a:off x="8074152" y="4023360"/>
+            <a:ext cx="2825496" cy="1097280"/>
           </a:xfrm>
           <a:prstGeom prst="rect">
             <a:avLst/>
@@ -12639,7 +13712,7 @@
               <a:buNone/>
             </a:pPr>
             <a:r>
-              <a:rPr lang="en-US" sz="1250" dirty="0">
+              <a:rPr lang="en-US" sz="1550" dirty="0">
                 <a:solidFill>
                   <a:srgbClr val="17364A"/>
                 </a:solidFill>
@@ -12649,7 +13722,7 @@
               </a:rPr>
               <a:t>Connect the concept to public health decisions, safeguards, documentation, or implementation work.</a:t>
             </a:r>
-            <a:endParaRPr lang="en-US" sz="1250" dirty="0"/>
+            <a:endParaRPr lang="en-US" sz="1550" dirty="0"/>
           </a:p>
         </p:txBody>
       </p:sp>
@@ -12846,7 +13919,7 @@
                 <a:ea typeface="Aptos" pitchFamily="34" charset="-122"/>
                 <a:cs typeface="Aptos" pitchFamily="34" charset="-120"/>
               </a:rPr>
-              <a:t>© Paula Soper</a:t>
+              <a:t>Â© Paula Soper</a:t>
             </a:r>
             <a:endParaRPr lang="en-US" sz="800" dirty="0"/>
           </a:p>
@@ -12860,8 +13933,47 @@
         </p:nvSpPr>
         <p:spPr>
           <a:xfrm>
+            <a:off x="11137392" y="6510528"/>
+            <a:ext cx="411480" cy="201168"/>
+          </a:xfrm>
+          <a:prstGeom prst="rect">
+            <a:avLst/>
+          </a:prstGeom>
+          <a:noFill/>
+          <a:ln/>
+        </p:spPr>
+        <p:txBody>
+          <a:bodyPr wrap="square" lIns="0" tIns="0" rIns="0" bIns="0" rtlCol="0" anchor="ctr"/>
+          <a:lstStyle/>
+          <a:p>
+            <a:pPr algn="r" indent="0" marL="0">
+              <a:buNone/>
+            </a:pPr>
+            <a:r>
+              <a:rPr lang="en-US" sz="900" dirty="0">
+                <a:solidFill>
+                  <a:srgbClr val="5F7181"/>
+                </a:solidFill>
+                <a:latin typeface="Aptos" pitchFamily="34" charset="0"/>
+                <a:ea typeface="Aptos" pitchFamily="34" charset="-122"/>
+                <a:cs typeface="Aptos" pitchFamily="34" charset="-120"/>
+              </a:rPr>
+              <a:t>6</a:t>
+            </a:r>
+            <a:endParaRPr lang="en-US" sz="900" dirty="0"/>
+          </a:p>
+        </p:txBody>
+      </p:sp>
+      <p:sp>
+        <p:nvSpPr>
+          <p:cNvPr id="8" name="Text 6"/>
+          <p:cNvSpPr/>
+          <p:nvPr/>
+        </p:nvSpPr>
+        <p:spPr>
+          <a:xfrm>
             <a:off x="640080" y="658368"/>
-            <a:ext cx="10881360" cy="566928"/>
+            <a:ext cx="10881360" cy="713232"/>
           </a:xfrm>
           <a:prstGeom prst="rect">
             <a:avLst/>
@@ -12879,7 +13991,7 @@
               <a:buNone/>
             </a:pPr>
             <a:r>
-              <a:rPr lang="en-US" sz="2700" b="1" dirty="0">
+              <a:rPr lang="en-US" sz="3400" b="1" dirty="0">
                 <a:solidFill>
                   <a:srgbClr val="003A63"/>
                 </a:solidFill>
@@ -12889,20 +14001,20 @@
               </a:rPr>
               <a:t>Learning Objectives Continued</a:t>
             </a:r>
-            <a:endParaRPr lang="en-US" sz="2700" dirty="0"/>
-          </a:p>
-        </p:txBody>
-      </p:sp>
-      <p:sp>
-        <p:nvSpPr>
-          <p:cNvPr id="8" name="Text 6"/>
-          <p:cNvSpPr/>
-          <p:nvPr/>
-        </p:nvSpPr>
-        <p:spPr>
-          <a:xfrm>
-            <a:off x="868680" y="1417320"/>
-            <a:ext cx="6675120" cy="4434840"/>
+            <a:endParaRPr lang="en-US" sz="3400" dirty="0"/>
+          </a:p>
+        </p:txBody>
+      </p:sp>
+      <p:sp>
+        <p:nvSpPr>
+          <p:cNvPr id="9" name="Text 7"/>
+          <p:cNvSpPr/>
+          <p:nvPr/>
+        </p:nvSpPr>
+        <p:spPr>
+          <a:xfrm>
+            <a:off x="868680" y="1508760"/>
+            <a:ext cx="6537960" cy="4160520"/>
           </a:xfrm>
           <a:prstGeom prst="rect">
             <a:avLst/>
@@ -12917,7 +14029,7 @@
           <a:lstStyle/>
           <a:p>
             <a:r>
-              <a:rPr lang="en-US" sz="1700" dirty="0">
+              <a:rPr lang="en-US" sz="2100" dirty="0">
                 <a:solidFill>
                   <a:srgbClr val="17364A"/>
                 </a:solidFill>
@@ -12927,13 +14039,13 @@
               </a:rPr>
               <a:t>Produce a predictive model review plan for a public health workflow.</a:t>
             </a:r>
-            <a:endParaRPr lang="en-US" sz="1700" dirty="0"/>
-          </a:p>
-        </p:txBody>
-      </p:sp>
-      <p:sp>
-        <p:nvSpPr>
-          <p:cNvPr id="9" name="Shape 7"/>
+            <a:endParaRPr lang="en-US" sz="2100" dirty="0"/>
+          </a:p>
+        </p:txBody>
+      </p:sp>
+      <p:sp>
+        <p:nvSpPr>
+          <p:cNvPr id="10" name="Shape 8"/>
           <p:cNvSpPr/>
           <p:nvPr/>
         </p:nvSpPr>
@@ -12960,14 +14072,14 @@
       </p:sp>
       <p:sp>
         <p:nvSpPr>
-          <p:cNvPr id="10" name="Text 8"/>
+          <p:cNvPr id="11" name="Text 9"/>
           <p:cNvSpPr/>
           <p:nvPr/>
         </p:nvSpPr>
         <p:spPr>
           <a:xfrm>
             <a:off x="8074152" y="1563624"/>
-            <a:ext cx="2825496" cy="201168"/>
+            <a:ext cx="2825496" cy="256032"/>
           </a:xfrm>
           <a:prstGeom prst="rect">
             <a:avLst/>
@@ -12983,7 +14095,7 @@
               <a:buNone/>
             </a:pPr>
             <a:r>
-              <a:rPr lang="en-US" sz="950" b="1" dirty="0">
+              <a:rPr lang="en-US" sz="1300" b="1" dirty="0">
                 <a:solidFill>
                   <a:srgbClr val="0068B7"/>
                 </a:solidFill>
@@ -12993,20 +14105,20 @@
               </a:rPr>
               <a:t>Key idea</a:t>
             </a:r>
-            <a:endParaRPr lang="en-US" sz="950" dirty="0"/>
-          </a:p>
-        </p:txBody>
-      </p:sp>
-      <p:sp>
-        <p:nvSpPr>
-          <p:cNvPr id="11" name="Text 9"/>
-          <p:cNvSpPr/>
-          <p:nvPr/>
-        </p:nvSpPr>
-        <p:spPr>
-          <a:xfrm>
-            <a:off x="8074152" y="1856232"/>
-            <a:ext cx="2825496" cy="1261872"/>
+            <a:endParaRPr lang="en-US" sz="1300" dirty="0"/>
+          </a:p>
+        </p:txBody>
+      </p:sp>
+      <p:sp>
+        <p:nvSpPr>
+          <p:cNvPr id="12" name="Text 10"/>
+          <p:cNvSpPr/>
+          <p:nvPr/>
+        </p:nvSpPr>
+        <p:spPr>
+          <a:xfrm>
+            <a:off x="8074152" y="1920240"/>
+            <a:ext cx="2825496" cy="1188720"/>
           </a:xfrm>
           <a:prstGeom prst="rect">
             <a:avLst/>
@@ -13024,7 +14136,7 @@
               <a:buNone/>
             </a:pPr>
             <a:r>
-              <a:rPr lang="en-US" sz="1250" dirty="0">
+              <a:rPr lang="en-US" sz="1550" dirty="0">
                 <a:solidFill>
                   <a:srgbClr val="17364A"/>
                 </a:solidFill>
@@ -13034,13 +14146,13 @@
               </a:rPr>
               <a:t>Produce a predictive model review plan for a public health workflow.</a:t>
             </a:r>
-            <a:endParaRPr lang="en-US" sz="1250" dirty="0"/>
-          </a:p>
-        </p:txBody>
-      </p:sp>
-      <p:sp>
-        <p:nvSpPr>
-          <p:cNvPr id="12" name="Shape 10"/>
+            <a:endParaRPr lang="en-US" sz="1550" dirty="0"/>
+          </a:p>
+        </p:txBody>
+      </p:sp>
+      <p:sp>
+        <p:nvSpPr>
+          <p:cNvPr id="13" name="Shape 11"/>
           <p:cNvSpPr/>
           <p:nvPr/>
         </p:nvSpPr>
@@ -13067,14 +14179,14 @@
       </p:sp>
       <p:sp>
         <p:nvSpPr>
-          <p:cNvPr id="13" name="Text 11"/>
+          <p:cNvPr id="14" name="Text 12"/>
           <p:cNvSpPr/>
           <p:nvPr/>
         </p:nvSpPr>
         <p:spPr>
           <a:xfrm>
             <a:off x="8074152" y="3666744"/>
-            <a:ext cx="2825496" cy="201168"/>
+            <a:ext cx="2825496" cy="256032"/>
           </a:xfrm>
           <a:prstGeom prst="rect">
             <a:avLst/>
@@ -13090,7 +14202,7 @@
               <a:buNone/>
             </a:pPr>
             <a:r>
-              <a:rPr lang="en-US" sz="950" b="1" dirty="0">
+              <a:rPr lang="en-US" sz="1300" b="1" dirty="0">
                 <a:solidFill>
                   <a:srgbClr val="0068B7"/>
                 </a:solidFill>
@@ -13100,20 +14212,20 @@
               </a:rPr>
               <a:t>Use this for</a:t>
             </a:r>
-            <a:endParaRPr lang="en-US" sz="950" dirty="0"/>
-          </a:p>
-        </p:txBody>
-      </p:sp>
-      <p:sp>
-        <p:nvSpPr>
-          <p:cNvPr id="14" name="Text 12"/>
-          <p:cNvSpPr/>
-          <p:nvPr/>
-        </p:nvSpPr>
-        <p:spPr>
-          <a:xfrm>
-            <a:off x="8074152" y="3959352"/>
-            <a:ext cx="2825496" cy="1170432"/>
+            <a:endParaRPr lang="en-US" sz="1300" dirty="0"/>
+          </a:p>
+        </p:txBody>
+      </p:sp>
+      <p:sp>
+        <p:nvSpPr>
+          <p:cNvPr id="15" name="Text 13"/>
+          <p:cNvSpPr/>
+          <p:nvPr/>
+        </p:nvSpPr>
+        <p:spPr>
+          <a:xfrm>
+            <a:off x="8074152" y="4023360"/>
+            <a:ext cx="2825496" cy="1097280"/>
           </a:xfrm>
           <a:prstGeom prst="rect">
             <a:avLst/>
@@ -13131,7 +14243,7 @@
               <a:buNone/>
             </a:pPr>
             <a:r>
-              <a:rPr lang="en-US" sz="1250" dirty="0">
+              <a:rPr lang="en-US" sz="1550" dirty="0">
                 <a:solidFill>
                   <a:srgbClr val="17364A"/>
                 </a:solidFill>
@@ -13141,7 +14253,7 @@
               </a:rPr>
               <a:t>Connect the concept to public health decisions, safeguards, documentation, or implementation work.</a:t>
             </a:r>
-            <a:endParaRPr lang="en-US" sz="1250" dirty="0"/>
+            <a:endParaRPr lang="en-US" sz="1550" dirty="0"/>
           </a:p>
         </p:txBody>
       </p:sp>
@@ -13338,7 +14450,7 @@
                 <a:ea typeface="Aptos" pitchFamily="34" charset="-122"/>
                 <a:cs typeface="Aptos" pitchFamily="34" charset="-120"/>
               </a:rPr>
-              <a:t>© Paula Soper</a:t>
+              <a:t>Â© Paula Soper</a:t>
             </a:r>
             <a:endParaRPr lang="en-US" sz="800" dirty="0"/>
           </a:p>
@@ -13346,7 +14458,46 @@
       </p:sp>
       <p:sp>
         <p:nvSpPr>
-          <p:cNvPr id="7" name="Shape 5"/>
+          <p:cNvPr id="7" name="Text 5"/>
+          <p:cNvSpPr/>
+          <p:nvPr/>
+        </p:nvSpPr>
+        <p:spPr>
+          <a:xfrm>
+            <a:off x="11137392" y="6510528"/>
+            <a:ext cx="411480" cy="201168"/>
+          </a:xfrm>
+          <a:prstGeom prst="rect">
+            <a:avLst/>
+          </a:prstGeom>
+          <a:noFill/>
+          <a:ln/>
+        </p:spPr>
+        <p:txBody>
+          <a:bodyPr wrap="square" lIns="0" tIns="0" rIns="0" bIns="0" rtlCol="0" anchor="ctr"/>
+          <a:lstStyle/>
+          <a:p>
+            <a:pPr algn="r" indent="0" marL="0">
+              <a:buNone/>
+            </a:pPr>
+            <a:r>
+              <a:rPr lang="en-US" sz="900" dirty="0">
+                <a:solidFill>
+                  <a:srgbClr val="5F7181"/>
+                </a:solidFill>
+                <a:latin typeface="Aptos" pitchFamily="34" charset="0"/>
+                <a:ea typeface="Aptos" pitchFamily="34" charset="-122"/>
+                <a:cs typeface="Aptos" pitchFamily="34" charset="-120"/>
+              </a:rPr>
+              <a:t>7</a:t>
+            </a:r>
+            <a:endParaRPr lang="en-US" sz="900" dirty="0"/>
+          </a:p>
+        </p:txBody>
+      </p:sp>
+      <p:sp>
+        <p:nvSpPr>
+          <p:cNvPr id="8" name="Shape 6"/>
           <p:cNvSpPr/>
           <p:nvPr/>
         </p:nvSpPr>
@@ -13371,7 +14522,7 @@
       </p:sp>
       <p:sp>
         <p:nvSpPr>
-          <p:cNvPr id="8" name="Text 6"/>
+          <p:cNvPr id="9" name="Text 7"/>
           <p:cNvSpPr/>
           <p:nvPr/>
         </p:nvSpPr>
@@ -13410,14 +14561,14 @@
       </p:sp>
       <p:sp>
         <p:nvSpPr>
-          <p:cNvPr id="9" name="Text 7"/>
+          <p:cNvPr id="10" name="Text 8"/>
           <p:cNvSpPr/>
           <p:nvPr/>
         </p:nvSpPr>
         <p:spPr>
           <a:xfrm>
             <a:off x="640080" y="621792"/>
-            <a:ext cx="10881360" cy="566928"/>
+            <a:ext cx="10881360" cy="713232"/>
           </a:xfrm>
           <a:prstGeom prst="rect">
             <a:avLst/>
@@ -13435,7 +14586,7 @@
               <a:buNone/>
             </a:pPr>
             <a:r>
-              <a:rPr lang="en-US" sz="2700" b="1" dirty="0">
+              <a:rPr lang="en-US" sz="3400" b="1" dirty="0">
                 <a:solidFill>
                   <a:srgbClr val="003A63"/>
                 </a:solidFill>
@@ -13445,20 +14596,20 @@
               </a:rPr>
               <a:t>Module Overview</a:t>
             </a:r>
-            <a:endParaRPr lang="en-US" sz="2700" dirty="0"/>
-          </a:p>
-        </p:txBody>
-      </p:sp>
-      <p:sp>
-        <p:nvSpPr>
-          <p:cNvPr id="10" name="Text 8"/>
-          <p:cNvSpPr/>
-          <p:nvPr/>
-        </p:nvSpPr>
-        <p:spPr>
-          <a:xfrm>
-            <a:off x="868680" y="1417320"/>
-            <a:ext cx="6675120" cy="4434840"/>
+            <a:endParaRPr lang="en-US" sz="3400" dirty="0"/>
+          </a:p>
+        </p:txBody>
+      </p:sp>
+      <p:sp>
+        <p:nvSpPr>
+          <p:cNvPr id="11" name="Text 9"/>
+          <p:cNvSpPr/>
+          <p:nvPr/>
+        </p:nvSpPr>
+        <p:spPr>
+          <a:xfrm>
+            <a:off x="868680" y="1508760"/>
+            <a:ext cx="6537960" cy="4160520"/>
           </a:xfrm>
           <a:prstGeom prst="rect">
             <a:avLst/>
@@ -13473,7 +14624,7 @@
           <a:lstStyle/>
           <a:p>
             <a:r>
-              <a:rPr lang="en-US" sz="1700" dirty="0">
+              <a:rPr lang="en-US" sz="2100" dirty="0">
                 <a:solidFill>
                   <a:srgbClr val="17364A"/>
                 </a:solidFill>
@@ -13483,11 +14634,11 @@
               </a:rPr>
               <a:t>Predictive analytics uses data to estimate the likelihood of future events or outcomes.</a:t>
             </a:r>
-            <a:endParaRPr lang="en-US" sz="1700" dirty="0"/>
-          </a:p>
-          <a:p>
-            <a:r>
-              <a:rPr lang="en-US" sz="1700" dirty="0">
+            <a:endParaRPr lang="en-US" sz="2100" dirty="0"/>
+          </a:p>
+          <a:p>
+            <a:r>
+              <a:rPr lang="en-US" sz="2100" dirty="0">
                 <a:solidFill>
                   <a:srgbClr val="17364A"/>
                 </a:solidFill>
@@ -13495,13 +14646,13 @@
                 <a:ea typeface="Aptos" pitchFamily="34" charset="-122"/>
                 <a:cs typeface="Aptos" pitchFamily="34" charset="-120"/>
               </a:rPr>
-              <a:t>In public health, predictive models may be used to anticipate disease burden, identify populations at higher risk,.</a:t>
-            </a:r>
-            <a:endParaRPr lang="en-US" sz="1700" dirty="0"/>
-          </a:p>
-          <a:p>
-            <a:r>
-              <a:rPr lang="en-US" sz="1700" dirty="0">
+              <a:t>In public health, predictive models may be used to anticipate disease burden, identify populations at.</a:t>
+            </a:r>
+            <a:endParaRPr lang="en-US" sz="2100" dirty="0"/>
+          </a:p>
+          <a:p>
+            <a:r>
+              <a:rPr lang="en-US" sz="2100" dirty="0">
                 <a:solidFill>
                   <a:srgbClr val="17364A"/>
                 </a:solidFill>
@@ -13509,29 +14660,15 @@
                 <a:ea typeface="Aptos" pitchFamily="34" charset="-122"/>
                 <a:cs typeface="Aptos" pitchFamily="34" charset="-120"/>
               </a:rPr>
-              <a:t>Risk stratification is the practice of grouping individuals, facilities, areas, events, or populations into categories.</a:t>
-            </a:r>
-            <a:endParaRPr lang="en-US" sz="1700" dirty="0"/>
-          </a:p>
-          <a:p>
-            <a:r>
-              <a:rPr lang="en-US" sz="1700" dirty="0">
-                <a:solidFill>
-                  <a:srgbClr val="17364A"/>
-                </a:solidFill>
-                <a:latin typeface="Aptos" pitchFamily="34" charset="0"/>
-                <a:ea typeface="Aptos" pitchFamily="34" charset="-122"/>
-                <a:cs typeface="Aptos" pitchFamily="34" charset="-120"/>
-              </a:rPr>
-              <a:t>This module helps learners distinguish prediction from diagnosis, causation, eligibility determination, and public health.</a:t>
-            </a:r>
-            <a:endParaRPr lang="en-US" sz="1700" dirty="0"/>
-          </a:p>
-        </p:txBody>
-      </p:sp>
-      <p:sp>
-        <p:nvSpPr>
-          <p:cNvPr id="11" name="Shape 9"/>
+              <a:t>Risk stratification is the practice of grouping individuals, facilities, areas, events, or populations.</a:t>
+            </a:r>
+            <a:endParaRPr lang="en-US" sz="2100" dirty="0"/>
+          </a:p>
+        </p:txBody>
+      </p:sp>
+      <p:sp>
+        <p:nvSpPr>
+          <p:cNvPr id="12" name="Shape 10"/>
           <p:cNvSpPr/>
           <p:nvPr/>
         </p:nvSpPr>
@@ -13558,14 +14695,14 @@
       </p:sp>
       <p:sp>
         <p:nvSpPr>
-          <p:cNvPr id="12" name="Text 10"/>
+          <p:cNvPr id="13" name="Text 11"/>
           <p:cNvSpPr/>
           <p:nvPr/>
         </p:nvSpPr>
         <p:spPr>
           <a:xfrm>
             <a:off x="8074152" y="1563624"/>
-            <a:ext cx="2825496" cy="201168"/>
+            <a:ext cx="2825496" cy="256032"/>
           </a:xfrm>
           <a:prstGeom prst="rect">
             <a:avLst/>
@@ -13581,7 +14718,7 @@
               <a:buNone/>
             </a:pPr>
             <a:r>
-              <a:rPr lang="en-US" sz="950" b="1" dirty="0">
+              <a:rPr lang="en-US" sz="1300" b="1" dirty="0">
                 <a:solidFill>
                   <a:srgbClr val="0068B7"/>
                 </a:solidFill>
@@ -13591,20 +14728,20 @@
               </a:rPr>
               <a:t>Key idea</a:t>
             </a:r>
-            <a:endParaRPr lang="en-US" sz="950" dirty="0"/>
-          </a:p>
-        </p:txBody>
-      </p:sp>
-      <p:sp>
-        <p:nvSpPr>
-          <p:cNvPr id="13" name="Text 11"/>
-          <p:cNvSpPr/>
-          <p:nvPr/>
-        </p:nvSpPr>
-        <p:spPr>
-          <a:xfrm>
-            <a:off x="8074152" y="1856232"/>
-            <a:ext cx="2825496" cy="1261872"/>
+            <a:endParaRPr lang="en-US" sz="1300" dirty="0"/>
+          </a:p>
+        </p:txBody>
+      </p:sp>
+      <p:sp>
+        <p:nvSpPr>
+          <p:cNvPr id="14" name="Text 12"/>
+          <p:cNvSpPr/>
+          <p:nvPr/>
+        </p:nvSpPr>
+        <p:spPr>
+          <a:xfrm>
+            <a:off x="8074152" y="1920240"/>
+            <a:ext cx="2825496" cy="1188720"/>
           </a:xfrm>
           <a:prstGeom prst="rect">
             <a:avLst/>
@@ -13622,7 +14759,7 @@
               <a:buNone/>
             </a:pPr>
             <a:r>
-              <a:rPr lang="en-US" sz="1250" dirty="0">
+              <a:rPr lang="en-US" sz="1550" dirty="0">
                 <a:solidFill>
                   <a:srgbClr val="17364A"/>
                 </a:solidFill>
@@ -13632,13 +14769,13 @@
               </a:rPr>
               <a:t>Predictive analytics uses data to estimate the likelihood of future events or outcomes.</a:t>
             </a:r>
-            <a:endParaRPr lang="en-US" sz="1250" dirty="0"/>
-          </a:p>
-        </p:txBody>
-      </p:sp>
-      <p:sp>
-        <p:nvSpPr>
-          <p:cNvPr id="14" name="Shape 12"/>
+            <a:endParaRPr lang="en-US" sz="1550" dirty="0"/>
+          </a:p>
+        </p:txBody>
+      </p:sp>
+      <p:sp>
+        <p:nvSpPr>
+          <p:cNvPr id="15" name="Shape 13"/>
           <p:cNvSpPr/>
           <p:nvPr/>
         </p:nvSpPr>
@@ -13665,14 +14802,14 @@
       </p:sp>
       <p:sp>
         <p:nvSpPr>
-          <p:cNvPr id="15" name="Text 13"/>
+          <p:cNvPr id="16" name="Text 14"/>
           <p:cNvSpPr/>
           <p:nvPr/>
         </p:nvSpPr>
         <p:spPr>
           <a:xfrm>
             <a:off x="8074152" y="3666744"/>
-            <a:ext cx="2825496" cy="201168"/>
+            <a:ext cx="2825496" cy="256032"/>
           </a:xfrm>
           <a:prstGeom prst="rect">
             <a:avLst/>
@@ -13688,7 +14825,7 @@
               <a:buNone/>
             </a:pPr>
             <a:r>
-              <a:rPr lang="en-US" sz="950" b="1" dirty="0">
+              <a:rPr lang="en-US" sz="1300" b="1" dirty="0">
                 <a:solidFill>
                   <a:srgbClr val="0068B7"/>
                 </a:solidFill>
@@ -13698,20 +14835,20 @@
               </a:rPr>
               <a:t>Use this for</a:t>
             </a:r>
-            <a:endParaRPr lang="en-US" sz="950" dirty="0"/>
-          </a:p>
-        </p:txBody>
-      </p:sp>
-      <p:sp>
-        <p:nvSpPr>
-          <p:cNvPr id="16" name="Text 14"/>
-          <p:cNvSpPr/>
-          <p:nvPr/>
-        </p:nvSpPr>
-        <p:spPr>
-          <a:xfrm>
-            <a:off x="8074152" y="3959352"/>
-            <a:ext cx="2825496" cy="1170432"/>
+            <a:endParaRPr lang="en-US" sz="1300" dirty="0"/>
+          </a:p>
+        </p:txBody>
+      </p:sp>
+      <p:sp>
+        <p:nvSpPr>
+          <p:cNvPr id="17" name="Text 15"/>
+          <p:cNvSpPr/>
+          <p:nvPr/>
+        </p:nvSpPr>
+        <p:spPr>
+          <a:xfrm>
+            <a:off x="8074152" y="4023360"/>
+            <a:ext cx="2825496" cy="1097280"/>
           </a:xfrm>
           <a:prstGeom prst="rect">
             <a:avLst/>
@@ -13729,7 +14866,7 @@
               <a:buNone/>
             </a:pPr>
             <a:r>
-              <a:rPr lang="en-US" sz="1250" dirty="0">
+              <a:rPr lang="en-US" sz="1550" dirty="0">
                 <a:solidFill>
                   <a:srgbClr val="17364A"/>
                 </a:solidFill>
@@ -13739,7 +14876,7 @@
               </a:rPr>
               <a:t>Connect the concept to public health decisions, safeguards, documentation, or implementation work.</a:t>
             </a:r>
-            <a:endParaRPr lang="en-US" sz="1250" dirty="0"/>
+            <a:endParaRPr lang="en-US" sz="1550" dirty="0"/>
           </a:p>
         </p:txBody>
       </p:sp>
@@ -13936,7 +15073,7 @@
                 <a:ea typeface="Aptos" pitchFamily="34" charset="-122"/>
                 <a:cs typeface="Aptos" pitchFamily="34" charset="-120"/>
               </a:rPr>
-              <a:t>© Paula Soper</a:t>
+              <a:t>Â© Paula Soper</a:t>
             </a:r>
             <a:endParaRPr lang="en-US" sz="800" dirty="0"/>
           </a:p>
@@ -13944,7 +15081,46 @@
       </p:sp>
       <p:sp>
         <p:nvSpPr>
-          <p:cNvPr id="7" name="Shape 5"/>
+          <p:cNvPr id="7" name="Text 5"/>
+          <p:cNvSpPr/>
+          <p:nvPr/>
+        </p:nvSpPr>
+        <p:spPr>
+          <a:xfrm>
+            <a:off x="11137392" y="6510528"/>
+            <a:ext cx="411480" cy="201168"/>
+          </a:xfrm>
+          <a:prstGeom prst="rect">
+            <a:avLst/>
+          </a:prstGeom>
+          <a:noFill/>
+          <a:ln/>
+        </p:spPr>
+        <p:txBody>
+          <a:bodyPr wrap="square" lIns="0" tIns="0" rIns="0" bIns="0" rtlCol="0" anchor="ctr"/>
+          <a:lstStyle/>
+          <a:p>
+            <a:pPr algn="r" indent="0" marL="0">
+              <a:buNone/>
+            </a:pPr>
+            <a:r>
+              <a:rPr lang="en-US" sz="900" dirty="0">
+                <a:solidFill>
+                  <a:srgbClr val="5F7181"/>
+                </a:solidFill>
+                <a:latin typeface="Aptos" pitchFamily="34" charset="0"/>
+                <a:ea typeface="Aptos" pitchFamily="34" charset="-122"/>
+                <a:cs typeface="Aptos" pitchFamily="34" charset="-120"/>
+              </a:rPr>
+              <a:t>8</a:t>
+            </a:r>
+            <a:endParaRPr lang="en-US" sz="900" dirty="0"/>
+          </a:p>
+        </p:txBody>
+      </p:sp>
+      <p:sp>
+        <p:nvSpPr>
+          <p:cNvPr id="8" name="Shape 6"/>
           <p:cNvSpPr/>
           <p:nvPr/>
         </p:nvSpPr>
@@ -13969,7 +15145,7 @@
       </p:sp>
       <p:sp>
         <p:nvSpPr>
-          <p:cNvPr id="8" name="Text 6"/>
+          <p:cNvPr id="9" name="Text 7"/>
           <p:cNvSpPr/>
           <p:nvPr/>
         </p:nvSpPr>
@@ -14008,14 +15184,14 @@
       </p:sp>
       <p:sp>
         <p:nvSpPr>
-          <p:cNvPr id="9" name="Text 7"/>
+          <p:cNvPr id="10" name="Text 8"/>
           <p:cNvSpPr/>
           <p:nvPr/>
         </p:nvSpPr>
         <p:spPr>
           <a:xfrm>
             <a:off x="640080" y="621792"/>
-            <a:ext cx="10881360" cy="566928"/>
+            <a:ext cx="10881360" cy="713232"/>
           </a:xfrm>
           <a:prstGeom prst="rect">
             <a:avLst/>
@@ -14033,7 +15209,7 @@
               <a:buNone/>
             </a:pPr>
             <a:r>
-              <a:rPr lang="en-US" sz="2700" b="1" dirty="0">
+              <a:rPr lang="en-US" sz="3400" b="1" dirty="0">
                 <a:solidFill>
                   <a:srgbClr val="003A63"/>
                 </a:solidFill>
@@ -14043,20 +15219,20 @@
               </a:rPr>
               <a:t>Why This Topic Matters for Public Health AI</a:t>
             </a:r>
-            <a:endParaRPr lang="en-US" sz="2700" dirty="0"/>
-          </a:p>
-        </p:txBody>
-      </p:sp>
-      <p:sp>
-        <p:nvSpPr>
-          <p:cNvPr id="10" name="Text 8"/>
-          <p:cNvSpPr/>
-          <p:nvPr/>
-        </p:nvSpPr>
-        <p:spPr>
-          <a:xfrm>
-            <a:off x="868680" y="1417320"/>
-            <a:ext cx="6675120" cy="4434840"/>
+            <a:endParaRPr lang="en-US" sz="3400" dirty="0"/>
+          </a:p>
+        </p:txBody>
+      </p:sp>
+      <p:sp>
+        <p:nvSpPr>
+          <p:cNvPr id="11" name="Text 9"/>
+          <p:cNvSpPr/>
+          <p:nvPr/>
+        </p:nvSpPr>
+        <p:spPr>
+          <a:xfrm>
+            <a:off x="868680" y="1508760"/>
+            <a:ext cx="6537960" cy="4160520"/>
           </a:xfrm>
           <a:prstGeom prst="rect">
             <a:avLst/>
@@ -14071,7 +15247,7 @@
           <a:lstStyle/>
           <a:p>
             <a:r>
-              <a:rPr lang="en-US" sz="1700" dirty="0">
+              <a:rPr lang="en-US" sz="2100" dirty="0">
                 <a:solidFill>
                   <a:srgbClr val="17364A"/>
                 </a:solidFill>
@@ -14079,13 +15255,13 @@
                 <a:ea typeface="Aptos" pitchFamily="34" charset="-122"/>
                 <a:cs typeface="Aptos" pitchFamily="34" charset="-120"/>
               </a:rPr>
-              <a:t>Predictive analytics matters because public health agencies often must act before all information is available.</a:t>
-            </a:r>
-            <a:endParaRPr lang="en-US" sz="1700" dirty="0"/>
-          </a:p>
-          <a:p>
-            <a:r>
-              <a:rPr lang="en-US" sz="1700" dirty="0">
+              <a:t>Predictive analytics matters because public health agencies often must act before all information is.</a:t>
+            </a:r>
+            <a:endParaRPr lang="en-US" sz="2100" dirty="0"/>
+          </a:p>
+          <a:p>
+            <a:r>
+              <a:rPr lang="en-US" sz="2100" dirty="0">
                 <a:solidFill>
                   <a:srgbClr val="17364A"/>
                 </a:solidFill>
@@ -14093,13 +15269,13 @@
                 <a:ea typeface="Aptos" pitchFamily="34" charset="-122"/>
                 <a:cs typeface="Aptos" pitchFamily="34" charset="-120"/>
               </a:rPr>
-              <a:t>During outbreaks, emergencies, or resource-constrained programs, agencies may need to decide where to send staff, which.</a:t>
-            </a:r>
-            <a:endParaRPr lang="en-US" sz="1700" dirty="0"/>
-          </a:p>
-          <a:p>
-            <a:r>
-              <a:rPr lang="en-US" sz="1700" dirty="0">
+              <a:t>During outbreaks, emergencies, or resource-constrained programs, agencies may need to decide where to.</a:t>
+            </a:r>
+            <a:endParaRPr lang="en-US" sz="2100" dirty="0"/>
+          </a:p>
+          <a:p>
+            <a:r>
+              <a:rPr lang="en-US" sz="2100" dirty="0">
                 <a:solidFill>
                   <a:srgbClr val="17364A"/>
                 </a:solidFill>
@@ -14109,27 +15285,13 @@
               </a:rPr>
               <a:t>Prediction can help organize uncertainty, but it cannot remove uncertainty.</a:t>
             </a:r>
-            <a:endParaRPr lang="en-US" sz="1700" dirty="0"/>
-          </a:p>
-          <a:p>
-            <a:r>
-              <a:rPr lang="en-US" sz="1700" dirty="0">
-                <a:solidFill>
-                  <a:srgbClr val="17364A"/>
-                </a:solidFill>
-                <a:latin typeface="Aptos" pitchFamily="34" charset="0"/>
-                <a:ea typeface="Aptos" pitchFamily="34" charset="-122"/>
-                <a:cs typeface="Aptos" pitchFamily="34" charset="-120"/>
-              </a:rPr>
-              <a:t>Risk stratification can also create harm if used carelessly.</a:t>
-            </a:r>
-            <a:endParaRPr lang="en-US" sz="1700" dirty="0"/>
-          </a:p>
-        </p:txBody>
-      </p:sp>
-      <p:sp>
-        <p:nvSpPr>
-          <p:cNvPr id="11" name="Shape 9"/>
+            <a:endParaRPr lang="en-US" sz="2100" dirty="0"/>
+          </a:p>
+        </p:txBody>
+      </p:sp>
+      <p:sp>
+        <p:nvSpPr>
+          <p:cNvPr id="12" name="Shape 10"/>
           <p:cNvSpPr/>
           <p:nvPr/>
         </p:nvSpPr>
@@ -14156,14 +15318,14 @@
       </p:sp>
       <p:sp>
         <p:nvSpPr>
-          <p:cNvPr id="12" name="Text 10"/>
+          <p:cNvPr id="13" name="Text 11"/>
           <p:cNvSpPr/>
           <p:nvPr/>
         </p:nvSpPr>
         <p:spPr>
           <a:xfrm>
             <a:off x="8074152" y="1563624"/>
-            <a:ext cx="2825496" cy="201168"/>
+            <a:ext cx="2825496" cy="256032"/>
           </a:xfrm>
           <a:prstGeom prst="rect">
             <a:avLst/>
@@ -14179,7 +15341,7 @@
               <a:buNone/>
             </a:pPr>
             <a:r>
-              <a:rPr lang="en-US" sz="950" b="1" dirty="0">
+              <a:rPr lang="en-US" sz="1300" b="1" dirty="0">
                 <a:solidFill>
                   <a:srgbClr val="0068B7"/>
                 </a:solidFill>
@@ -14189,20 +15351,20 @@
               </a:rPr>
               <a:t>Key idea</a:t>
             </a:r>
-            <a:endParaRPr lang="en-US" sz="950" dirty="0"/>
-          </a:p>
-        </p:txBody>
-      </p:sp>
-      <p:sp>
-        <p:nvSpPr>
-          <p:cNvPr id="13" name="Text 11"/>
-          <p:cNvSpPr/>
-          <p:nvPr/>
-        </p:nvSpPr>
-        <p:spPr>
-          <a:xfrm>
-            <a:off x="8074152" y="1856232"/>
-            <a:ext cx="2825496" cy="1261872"/>
+            <a:endParaRPr lang="en-US" sz="1300" dirty="0"/>
+          </a:p>
+        </p:txBody>
+      </p:sp>
+      <p:sp>
+        <p:nvSpPr>
+          <p:cNvPr id="14" name="Text 12"/>
+          <p:cNvSpPr/>
+          <p:nvPr/>
+        </p:nvSpPr>
+        <p:spPr>
+          <a:xfrm>
+            <a:off x="8074152" y="1920240"/>
+            <a:ext cx="2825496" cy="1188720"/>
           </a:xfrm>
           <a:prstGeom prst="rect">
             <a:avLst/>
@@ -14220,7 +15382,7 @@
               <a:buNone/>
             </a:pPr>
             <a:r>
-              <a:rPr lang="en-US" sz="1250" dirty="0">
+              <a:rPr lang="en-US" sz="1550" dirty="0">
                 <a:solidFill>
                   <a:srgbClr val="17364A"/>
                 </a:solidFill>
@@ -14228,15 +15390,15 @@
                 <a:ea typeface="Aptos" pitchFamily="34" charset="-122"/>
                 <a:cs typeface="Aptos" pitchFamily="34" charset="-120"/>
               </a:rPr>
-              <a:t>Predictive analytics matters because public health agencies often must act before all information is available.</a:t>
-            </a:r>
-            <a:endParaRPr lang="en-US" sz="1250" dirty="0"/>
-          </a:p>
-        </p:txBody>
-      </p:sp>
-      <p:sp>
-        <p:nvSpPr>
-          <p:cNvPr id="14" name="Shape 12"/>
+              <a:t>Predictive analytics matters because public health agencies often must act before all information is.</a:t>
+            </a:r>
+            <a:endParaRPr lang="en-US" sz="1550" dirty="0"/>
+          </a:p>
+        </p:txBody>
+      </p:sp>
+      <p:sp>
+        <p:nvSpPr>
+          <p:cNvPr id="15" name="Shape 13"/>
           <p:cNvSpPr/>
           <p:nvPr/>
         </p:nvSpPr>
@@ -14263,14 +15425,14 @@
       </p:sp>
       <p:sp>
         <p:nvSpPr>
-          <p:cNvPr id="15" name="Text 13"/>
+          <p:cNvPr id="16" name="Text 14"/>
           <p:cNvSpPr/>
           <p:nvPr/>
         </p:nvSpPr>
         <p:spPr>
           <a:xfrm>
             <a:off x="8074152" y="3666744"/>
-            <a:ext cx="2825496" cy="201168"/>
+            <a:ext cx="2825496" cy="256032"/>
           </a:xfrm>
           <a:prstGeom prst="rect">
             <a:avLst/>
@@ -14286,7 +15448,7 @@
               <a:buNone/>
             </a:pPr>
             <a:r>
-              <a:rPr lang="en-US" sz="950" b="1" dirty="0">
+              <a:rPr lang="en-US" sz="1300" b="1" dirty="0">
                 <a:solidFill>
                   <a:srgbClr val="0068B7"/>
                 </a:solidFill>
@@ -14296,20 +15458,20 @@
               </a:rPr>
               <a:t>Use this for</a:t>
             </a:r>
-            <a:endParaRPr lang="en-US" sz="950" dirty="0"/>
-          </a:p>
-        </p:txBody>
-      </p:sp>
-      <p:sp>
-        <p:nvSpPr>
-          <p:cNvPr id="16" name="Text 14"/>
-          <p:cNvSpPr/>
-          <p:nvPr/>
-        </p:nvSpPr>
-        <p:spPr>
-          <a:xfrm>
-            <a:off x="8074152" y="3959352"/>
-            <a:ext cx="2825496" cy="1170432"/>
+            <a:endParaRPr lang="en-US" sz="1300" dirty="0"/>
+          </a:p>
+        </p:txBody>
+      </p:sp>
+      <p:sp>
+        <p:nvSpPr>
+          <p:cNvPr id="17" name="Text 15"/>
+          <p:cNvSpPr/>
+          <p:nvPr/>
+        </p:nvSpPr>
+        <p:spPr>
+          <a:xfrm>
+            <a:off x="8074152" y="4023360"/>
+            <a:ext cx="2825496" cy="1097280"/>
           </a:xfrm>
           <a:prstGeom prst="rect">
             <a:avLst/>
@@ -14327,7 +15489,7 @@
               <a:buNone/>
             </a:pPr>
             <a:r>
-              <a:rPr lang="en-US" sz="1250" dirty="0">
+              <a:rPr lang="en-US" sz="1550" dirty="0">
                 <a:solidFill>
                   <a:srgbClr val="17364A"/>
                 </a:solidFill>
@@ -14337,7 +15499,7 @@
               </a:rPr>
               <a:t>Connect the concept to public health decisions, safeguards, documentation, or implementation work.</a:t>
             </a:r>
-            <a:endParaRPr lang="en-US" sz="1250" dirty="0"/>
+            <a:endParaRPr lang="en-US" sz="1550" dirty="0"/>
           </a:p>
         </p:txBody>
       </p:sp>
@@ -14534,7 +15696,7 @@
                 <a:ea typeface="Aptos" pitchFamily="34" charset="-122"/>
                 <a:cs typeface="Aptos" pitchFamily="34" charset="-120"/>
               </a:rPr>
-              <a:t>© Paula Soper</a:t>
+              <a:t>Â© Paula Soper</a:t>
             </a:r>
             <a:endParaRPr lang="en-US" sz="800" dirty="0"/>
           </a:p>
@@ -14542,7 +15704,46 @@
       </p:sp>
       <p:sp>
         <p:nvSpPr>
-          <p:cNvPr id="7" name="Shape 5"/>
+          <p:cNvPr id="7" name="Text 5"/>
+          <p:cNvSpPr/>
+          <p:nvPr/>
+        </p:nvSpPr>
+        <p:spPr>
+          <a:xfrm>
+            <a:off x="11137392" y="6510528"/>
+            <a:ext cx="411480" cy="201168"/>
+          </a:xfrm>
+          <a:prstGeom prst="rect">
+            <a:avLst/>
+          </a:prstGeom>
+          <a:noFill/>
+          <a:ln/>
+        </p:spPr>
+        <p:txBody>
+          <a:bodyPr wrap="square" lIns="0" tIns="0" rIns="0" bIns="0" rtlCol="0" anchor="ctr"/>
+          <a:lstStyle/>
+          <a:p>
+            <a:pPr algn="r" indent="0" marL="0">
+              <a:buNone/>
+            </a:pPr>
+            <a:r>
+              <a:rPr lang="en-US" sz="900" dirty="0">
+                <a:solidFill>
+                  <a:srgbClr val="5F7181"/>
+                </a:solidFill>
+                <a:latin typeface="Aptos" pitchFamily="34" charset="0"/>
+                <a:ea typeface="Aptos" pitchFamily="34" charset="-122"/>
+                <a:cs typeface="Aptos" pitchFamily="34" charset="-120"/>
+              </a:rPr>
+              <a:t>9</a:t>
+            </a:r>
+            <a:endParaRPr lang="en-US" sz="900" dirty="0"/>
+          </a:p>
+        </p:txBody>
+      </p:sp>
+      <p:sp>
+        <p:nvSpPr>
+          <p:cNvPr id="8" name="Shape 6"/>
           <p:cNvSpPr/>
           <p:nvPr/>
         </p:nvSpPr>
@@ -14567,7 +15768,7 @@
       </p:sp>
       <p:sp>
         <p:nvSpPr>
-          <p:cNvPr id="8" name="Text 6"/>
+          <p:cNvPr id="9" name="Text 7"/>
           <p:cNvSpPr/>
           <p:nvPr/>
         </p:nvSpPr>
@@ -14606,14 +15807,14 @@
       </p:sp>
       <p:sp>
         <p:nvSpPr>
-          <p:cNvPr id="9" name="Text 7"/>
+          <p:cNvPr id="10" name="Text 8"/>
           <p:cNvSpPr/>
           <p:nvPr/>
         </p:nvSpPr>
         <p:spPr>
           <a:xfrm>
             <a:off x="640080" y="621792"/>
-            <a:ext cx="10881360" cy="566928"/>
+            <a:ext cx="10881360" cy="713232"/>
           </a:xfrm>
           <a:prstGeom prst="rect">
             <a:avLst/>
@@ -14631,7 +15832,7 @@
               <a:buNone/>
             </a:pPr>
             <a:r>
-              <a:rPr lang="en-US" sz="2700" b="1" dirty="0">
+              <a:rPr lang="en-US" sz="3400" b="1" dirty="0">
                 <a:solidFill>
                   <a:srgbClr val="003A63"/>
                 </a:solidFill>
@@ -14641,20 +15842,20 @@
               </a:rPr>
               <a:t>Public Health Example</a:t>
             </a:r>
-            <a:endParaRPr lang="en-US" sz="2700" dirty="0"/>
-          </a:p>
-        </p:txBody>
-      </p:sp>
-      <p:sp>
-        <p:nvSpPr>
-          <p:cNvPr id="10" name="Text 8"/>
-          <p:cNvSpPr/>
-          <p:nvPr/>
-        </p:nvSpPr>
-        <p:spPr>
-          <a:xfrm>
-            <a:off x="868680" y="1417320"/>
-            <a:ext cx="6675120" cy="4434840"/>
+            <a:endParaRPr lang="en-US" sz="3400" dirty="0"/>
+          </a:p>
+        </p:txBody>
+      </p:sp>
+      <p:sp>
+        <p:nvSpPr>
+          <p:cNvPr id="11" name="Text 9"/>
+          <p:cNvSpPr/>
+          <p:nvPr/>
+        </p:nvSpPr>
+        <p:spPr>
+          <a:xfrm>
+            <a:off x="868680" y="1508760"/>
+            <a:ext cx="6537960" cy="4160520"/>
           </a:xfrm>
           <a:prstGeom prst="rect">
             <a:avLst/>
@@ -14669,7 +15870,7 @@
           <a:lstStyle/>
           <a:p>
             <a:r>
-              <a:rPr lang="en-US" sz="1700" dirty="0">
+              <a:rPr lang="en-US" sz="2100" dirty="0">
                 <a:solidFill>
                   <a:srgbClr val="17364A"/>
                 </a:solidFill>
@@ -14677,13 +15878,13 @@
                 <a:ea typeface="Aptos" pitchFamily="34" charset="-122"/>
                 <a:cs typeface="Aptos" pitchFamily="34" charset="-120"/>
               </a:rPr>
-              <a:t>A local health department may want to predict which neighborhoods are at increased risk of low vaccination coverage before.</a:t>
-            </a:r>
-            <a:endParaRPr lang="en-US" sz="1700" dirty="0"/>
-          </a:p>
-          <a:p>
-            <a:r>
-              <a:rPr lang="en-US" sz="1700" dirty="0">
+              <a:t>A local health department may want to predict which neighborhoods are at increased risk of low.</a:t>
+            </a:r>
+            <a:endParaRPr lang="en-US" sz="2100" dirty="0"/>
+          </a:p>
+          <a:p>
+            <a:r>
+              <a:rPr lang="en-US" sz="2100" dirty="0">
                 <a:solidFill>
                   <a:srgbClr val="17364A"/>
                 </a:solidFill>
@@ -14691,13 +15892,13 @@
                 <a:ea typeface="Aptos" pitchFamily="34" charset="-122"/>
                 <a:cs typeface="Aptos" pitchFamily="34" charset="-120"/>
               </a:rPr>
-              <a:t>The model could use prior immunization data, school enrollment patterns, appointment availability, language access.</a:t>
-            </a:r>
-            <a:endParaRPr lang="en-US" sz="1700" dirty="0"/>
-          </a:p>
-          <a:p>
-            <a:r>
-              <a:rPr lang="en-US" sz="1700" dirty="0">
+              <a:t>The model could use prior immunization data, school enrollment patterns, appointment availability,.</a:t>
+            </a:r>
+            <a:endParaRPr lang="en-US" sz="2100" dirty="0"/>
+          </a:p>
+          <a:p>
+            <a:r>
+              <a:rPr lang="en-US" sz="2100" dirty="0">
                 <a:solidFill>
                   <a:srgbClr val="17364A"/>
                 </a:solidFill>
@@ -14707,27 +15908,13 @@
               </a:rPr>
               <a:t>The output might help prioritize community outreach and mobile clinics.</a:t>
             </a:r>
-            <a:endParaRPr lang="en-US" sz="1700" dirty="0"/>
-          </a:p>
-          <a:p>
-            <a:r>
-              <a:rPr lang="en-US" sz="1700" dirty="0">
-                <a:solidFill>
-                  <a:srgbClr val="17364A"/>
-                </a:solidFill>
-                <a:latin typeface="Aptos" pitchFamily="34" charset="0"/>
-                <a:ea typeface="Aptos" pitchFamily="34" charset="-122"/>
-                <a:cs typeface="Aptos" pitchFamily="34" charset="-120"/>
-              </a:rPr>
-              <a:t>This use can support equity if it directs resources toward communities facing access barriers.</a:t>
-            </a:r>
-            <a:endParaRPr lang="en-US" sz="1700" dirty="0"/>
-          </a:p>
-        </p:txBody>
-      </p:sp>
-      <p:sp>
-        <p:nvSpPr>
-          <p:cNvPr id="11" name="Shape 9"/>
+            <a:endParaRPr lang="en-US" sz="2100" dirty="0"/>
+          </a:p>
+        </p:txBody>
+      </p:sp>
+      <p:sp>
+        <p:nvSpPr>
+          <p:cNvPr id="12" name="Shape 10"/>
           <p:cNvSpPr/>
           <p:nvPr/>
         </p:nvSpPr>
@@ -14754,14 +15941,14 @@
       </p:sp>
       <p:sp>
         <p:nvSpPr>
-          <p:cNvPr id="12" name="Text 10"/>
+          <p:cNvPr id="13" name="Text 11"/>
           <p:cNvSpPr/>
           <p:nvPr/>
         </p:nvSpPr>
         <p:spPr>
           <a:xfrm>
             <a:off x="8074152" y="1563624"/>
-            <a:ext cx="2825496" cy="201168"/>
+            <a:ext cx="2825496" cy="256032"/>
           </a:xfrm>
           <a:prstGeom prst="rect">
             <a:avLst/>
@@ -14777,7 +15964,7 @@
               <a:buNone/>
             </a:pPr>
             <a:r>
-              <a:rPr lang="en-US" sz="950" b="1" dirty="0">
+              <a:rPr lang="en-US" sz="1300" b="1" dirty="0">
                 <a:solidFill>
                   <a:srgbClr val="0068B7"/>
                 </a:solidFill>
@@ -14787,20 +15974,20 @@
               </a:rPr>
               <a:t>Key idea</a:t>
             </a:r>
-            <a:endParaRPr lang="en-US" sz="950" dirty="0"/>
-          </a:p>
-        </p:txBody>
-      </p:sp>
-      <p:sp>
-        <p:nvSpPr>
-          <p:cNvPr id="13" name="Text 11"/>
-          <p:cNvSpPr/>
-          <p:nvPr/>
-        </p:nvSpPr>
-        <p:spPr>
-          <a:xfrm>
-            <a:off x="8074152" y="1856232"/>
-            <a:ext cx="2825496" cy="1261872"/>
+            <a:endParaRPr lang="en-US" sz="1300" dirty="0"/>
+          </a:p>
+        </p:txBody>
+      </p:sp>
+      <p:sp>
+        <p:nvSpPr>
+          <p:cNvPr id="14" name="Text 12"/>
+          <p:cNvSpPr/>
+          <p:nvPr/>
+        </p:nvSpPr>
+        <p:spPr>
+          <a:xfrm>
+            <a:off x="8074152" y="1920240"/>
+            <a:ext cx="2825496" cy="1188720"/>
           </a:xfrm>
           <a:prstGeom prst="rect">
             <a:avLst/>
@@ -14818,7 +16005,7 @@
               <a:buNone/>
             </a:pPr>
             <a:r>
-              <a:rPr lang="en-US" sz="1250" dirty="0">
+              <a:rPr lang="en-US" sz="1550" dirty="0">
                 <a:solidFill>
                   <a:srgbClr val="17364A"/>
                 </a:solidFill>
@@ -14826,15 +16013,15 @@
                 <a:ea typeface="Aptos" pitchFamily="34" charset="-122"/>
                 <a:cs typeface="Aptos" pitchFamily="34" charset="-120"/>
               </a:rPr>
-              <a:t>A local health department may want to predict which neighborhoods are at increased risk of low vaccination coverage before.</a:t>
-            </a:r>
-            <a:endParaRPr lang="en-US" sz="1250" dirty="0"/>
-          </a:p>
-        </p:txBody>
-      </p:sp>
-      <p:sp>
-        <p:nvSpPr>
-          <p:cNvPr id="14" name="Shape 12"/>
+              <a:t>A local health department may want to predict which neighborhoods are at increased risk of low.</a:t>
+            </a:r>
+            <a:endParaRPr lang="en-US" sz="1550" dirty="0"/>
+          </a:p>
+        </p:txBody>
+      </p:sp>
+      <p:sp>
+        <p:nvSpPr>
+          <p:cNvPr id="15" name="Shape 13"/>
           <p:cNvSpPr/>
           <p:nvPr/>
         </p:nvSpPr>
@@ -14861,14 +16048,14 @@
       </p:sp>
       <p:sp>
         <p:nvSpPr>
-          <p:cNvPr id="15" name="Text 13"/>
+          <p:cNvPr id="16" name="Text 14"/>
           <p:cNvSpPr/>
           <p:nvPr/>
         </p:nvSpPr>
         <p:spPr>
           <a:xfrm>
             <a:off x="8074152" y="3666744"/>
-            <a:ext cx="2825496" cy="201168"/>
+            <a:ext cx="2825496" cy="256032"/>
           </a:xfrm>
           <a:prstGeom prst="rect">
             <a:avLst/>
@@ -14884,7 +16071,7 @@
               <a:buNone/>
             </a:pPr>
             <a:r>
-              <a:rPr lang="en-US" sz="950" b="1" dirty="0">
+              <a:rPr lang="en-US" sz="1300" b="1" dirty="0">
                 <a:solidFill>
                   <a:srgbClr val="0068B7"/>
                 </a:solidFill>
@@ -14894,20 +16081,20 @@
               </a:rPr>
               <a:t>Use this for</a:t>
             </a:r>
-            <a:endParaRPr lang="en-US" sz="950" dirty="0"/>
-          </a:p>
-        </p:txBody>
-      </p:sp>
-      <p:sp>
-        <p:nvSpPr>
-          <p:cNvPr id="16" name="Text 14"/>
-          <p:cNvSpPr/>
-          <p:nvPr/>
-        </p:nvSpPr>
-        <p:spPr>
-          <a:xfrm>
-            <a:off x="8074152" y="3959352"/>
-            <a:ext cx="2825496" cy="1170432"/>
+            <a:endParaRPr lang="en-US" sz="1300" dirty="0"/>
+          </a:p>
+        </p:txBody>
+      </p:sp>
+      <p:sp>
+        <p:nvSpPr>
+          <p:cNvPr id="17" name="Text 15"/>
+          <p:cNvSpPr/>
+          <p:nvPr/>
+        </p:nvSpPr>
+        <p:spPr>
+          <a:xfrm>
+            <a:off x="8074152" y="4023360"/>
+            <a:ext cx="2825496" cy="1097280"/>
           </a:xfrm>
           <a:prstGeom prst="rect">
             <a:avLst/>
@@ -14925,7 +16112,7 @@
               <a:buNone/>
             </a:pPr>
             <a:r>
-              <a:rPr lang="en-US" sz="1250" dirty="0">
+              <a:rPr lang="en-US" sz="1550" dirty="0">
                 <a:solidFill>
                   <a:srgbClr val="17364A"/>
                 </a:solidFill>
@@ -14935,7 +16122,7 @@
               </a:rPr>
               <a:t>Connect the concept to public health decisions, safeguards, documentation, or implementation work.</a:t>
             </a:r>
-            <a:endParaRPr lang="en-US" sz="1250" dirty="0"/>
+            <a:endParaRPr lang="en-US" sz="1550" dirty="0"/>
           </a:p>
         </p:txBody>
       </p:sp>
